--- a/decks/12-evaluating-agentic-systems.pptx
+++ b/decks/12-evaluating-agentic-systems.pptx
@@ -2,21 +2,21 @@
 <file path=ppt/presentation.xml><?xml version="1.0" encoding="utf-8"?>
 <p:presentation xmlns:p="http://schemas.openxmlformats.org/presentationml/2006/main">
   <p:sldMasterIdLst>
-    <p:sldMasterId xmlns:r="http://schemas.openxmlformats.org/officeDocument/2006/relationships" id="2147483648" r:id="Rc634d8a1465940d9"/>
+    <p:sldMasterId xmlns:r="http://schemas.openxmlformats.org/officeDocument/2006/relationships" id="2147483648" r:id="R59a76237e79d4563"/>
   </p:sldMasterIdLst>
   <p:notesMasterIdLst>
-    <p:notesMasterId xmlns:r="http://schemas.openxmlformats.org/officeDocument/2006/relationships" r:id="R6884eca8c3a54e6c"/>
+    <p:notesMasterId xmlns:r="http://schemas.openxmlformats.org/officeDocument/2006/relationships" r:id="Rdc09e47772704cd8"/>
   </p:notesMasterIdLst>
   <p:sldIdLst>
-    <p:sldId xmlns:r="http://schemas.openxmlformats.org/officeDocument/2006/relationships" id="256" r:id="R1b84239b5f154bba"/>
-    <p:sldId xmlns:r="http://schemas.openxmlformats.org/officeDocument/2006/relationships" id="257" r:id="Ra095a4c1bf234c05"/>
-    <p:sldId xmlns:r="http://schemas.openxmlformats.org/officeDocument/2006/relationships" id="258" r:id="R3cb3857268bc46b6"/>
-    <p:sldId xmlns:r="http://schemas.openxmlformats.org/officeDocument/2006/relationships" id="259" r:id="R6487e87bb27d437a"/>
-    <p:sldId xmlns:r="http://schemas.openxmlformats.org/officeDocument/2006/relationships" id="260" r:id="Rcadd20a45bf94bdf"/>
-    <p:sldId xmlns:r="http://schemas.openxmlformats.org/officeDocument/2006/relationships" id="261" r:id="R52633a79d86e4c73"/>
-    <p:sldId xmlns:r="http://schemas.openxmlformats.org/officeDocument/2006/relationships" id="262" r:id="R08418420aacd4a33"/>
-    <p:sldId xmlns:r="http://schemas.openxmlformats.org/officeDocument/2006/relationships" id="263" r:id="R7e13d98d30e345ed"/>
-    <p:sldId xmlns:r="http://schemas.openxmlformats.org/officeDocument/2006/relationships" id="264" r:id="R5ca61f53fbb8492e"/>
+    <p:sldId xmlns:r="http://schemas.openxmlformats.org/officeDocument/2006/relationships" id="256" r:id="Re22afbb562d74bf4"/>
+    <p:sldId xmlns:r="http://schemas.openxmlformats.org/officeDocument/2006/relationships" id="257" r:id="Rb10cc6cd271f4c40"/>
+    <p:sldId xmlns:r="http://schemas.openxmlformats.org/officeDocument/2006/relationships" id="258" r:id="R0cfbf952c62f40d3"/>
+    <p:sldId xmlns:r="http://schemas.openxmlformats.org/officeDocument/2006/relationships" id="259" r:id="R81cfa46cac804568"/>
+    <p:sldId xmlns:r="http://schemas.openxmlformats.org/officeDocument/2006/relationships" id="260" r:id="R99edcc5828a341c4"/>
+    <p:sldId xmlns:r="http://schemas.openxmlformats.org/officeDocument/2006/relationships" id="261" r:id="Re3c7d6a4ef7847c1"/>
+    <p:sldId xmlns:r="http://schemas.openxmlformats.org/officeDocument/2006/relationships" id="262" r:id="R7ab354306ae54043"/>
+    <p:sldId xmlns:r="http://schemas.openxmlformats.org/officeDocument/2006/relationships" id="263" r:id="R8af884050dba4547"/>
+    <p:sldId xmlns:r="http://schemas.openxmlformats.org/officeDocument/2006/relationships" id="264" r:id="Rdfbbda0e45414224"/>
   </p:sldIdLst>
   <p:sldSz cx="15240000" cy="8572500"/>
   <p:notesSz cx="6858000" cy="9144000"/>
@@ -1338,7 +1338,7 @@
   </p:cSld>
   <p:clrMap bg1="lt1" tx1="dk1" bg2="lt2" tx2="dk2" accent1="accent1" accent2="accent2" accent3="accent3" accent4="accent4" accent5="accent5" accent6="accent6" hlink="hlink" folHlink="folHlink"/>
   <p:sldLayoutIdLst>
-    <p:sldLayoutId xmlns:r="http://schemas.openxmlformats.org/officeDocument/2006/relationships" id="2147483649" r:id="R87ff9d1615e547ad"/>
+    <p:sldLayoutId xmlns:r="http://schemas.openxmlformats.org/officeDocument/2006/relationships" id="2147483649" r:id="Ree5c2b79982f4a36"/>
   </p:sldLayoutIdLst>
   <p:txStyles>
     <p:titleStyle>
@@ -3491,7 +3491,7 @@
             </a:avLst>
           </a:prstGeom>
           <a:solidFill xmlns:a="http://schemas.openxmlformats.org/drawingml/2006/main">
-            <a:srgbClr val="2E8B57"/>
+            <a:srgbClr val="F07D00"/>
           </a:solidFill>
           <a:ln xmlns:a="http://schemas.openxmlformats.org/drawingml/2006/main" w="9525">
             <a:solidFill>
@@ -3597,24 +3597,24 @@
           </a:bodyPr>
           <a:lstStyle xmlns:a="http://schemas.openxmlformats.org/drawingml/2006/main"/>
           <a:p xmlns:a="http://schemas.openxmlformats.org/drawingml/2006/main">
-            <a:pPr algn="r">
+            <a:pPr algn="ctr">
               <a:lnSpc>
                 <a:spcPct val="100000"/>
               </a:lnSpc>
               <a:buNone/>
               <a:defRPr sz="1350" b="1">
                 <a:solidFill>
-                  <a:srgbClr val="2E8B57"/>
-                </a:solidFill>
-                <a:latin typeface="Calibri"/>
-                <a:ea typeface="Calibri"/>
-                <a:cs typeface="Calibri"/>
-              </a:defRPr>
-            </a:pPr>
-            <a:r>
-              <a:rPr sz="1800" b="1">
-                <a:solidFill>
-                  <a:srgbClr val="2E8B57"/>
+                  <a:srgbClr val="F07D00"/>
+                </a:solidFill>
+                <a:latin typeface="Calibri"/>
+                <a:ea typeface="Calibri"/>
+                <a:cs typeface="Calibri"/>
+              </a:defRPr>
+            </a:pPr>
+            <a:r>
+              <a:rPr sz="1350" b="1">
+                <a:solidFill>
+                  <a:srgbClr val="F07D00"/>
                 </a:solidFill>
                 <a:latin typeface="Calibri"/>
                 <a:ea typeface="Calibri"/>
@@ -5078,7 +5078,7 @@
                 <a:ea typeface="Calibri"/>
                 <a:cs typeface="Calibri"/>
               </a:rPr>
-              <a:t>CASE ID</a:t>
+              <a:t>VERSION KEYS</a:t>
             </a:r>
           </a:p>
         </p:txBody>
@@ -6102,7 +6102,7 @@
                 <a:ea typeface="Calibri"/>
                 <a:cs typeface="Calibri"/>
               </a:rPr>
-              <a:t>max_tool_calls: 6</a:t>
+              <a:t>max_tool_calls: 5</a:t>
             </a:r>
           </a:p>
         </p:txBody>
@@ -6391,7 +6391,7 @@
                 <a:ea typeface="Calibri"/>
                 <a:cs typeface="Calibri"/>
               </a:rPr>
-              <a:t>Fix the mission, expected calls, evidence gate, and budget.</a:t>
+              <a:t>dataset_version: agent-cases-v1  |  case_id: reference_completed  |  max_tool_calls: 5</a:t>
             </a:r>
           </a:p>
         </p:txBody>
@@ -8374,57 +8374,22 @@
       </p:sp>
       <p:sp>
         <p:nvSpPr>
-          <p:cNvPr id="3" name="ingestion-1">
-            <a:extLst xmlns:a="http://schemas.openxmlformats.org/drawingml/2006/main">
-              <a:ext uri="{FF2B5EF4-FFF2-40B4-BE49-F238E27FC236}">
-                <a16:creationId xmlns:a16="http://schemas.microsoft.com/office/drawing/2014/main" id="{EF5CEA91-0836-4E99-95C1-43A271A11FFF}"/>
-              </a:ext>
-            </a:extLst>
-          </p:cNvPr>
-          <p:cNvSpPr>
-            <a:spLocks xmlns:a="http://schemas.openxmlformats.org/drawingml/2006/main" noGrp="1"/>
-          </p:cNvSpPr>
-          <p:nvPr/>
-        </p:nvSpPr>
-        <p:spPr>
-          <a:xfrm xmlns:a="http://schemas.openxmlformats.org/drawingml/2006/main">
-            <a:off x="990600" y="3086100"/>
-            <a:ext cx="2247900" cy="2266950"/>
-          </a:xfrm>
-          <a:prstGeom xmlns:a="http://schemas.openxmlformats.org/drawingml/2006/main" prst="roundRect">
-            <a:avLst>
-              <a:gd name="adj" fmla="val 5085"/>
-            </a:avLst>
-          </a:prstGeom>
-          <a:solidFill xmlns:a="http://schemas.openxmlformats.org/drawingml/2006/main">
-            <a:srgbClr val="FFFFFF"/>
-          </a:solidFill>
-          <a:ln xmlns:a="http://schemas.openxmlformats.org/drawingml/2006/main" w="9525">
-            <a:solidFill>
-              <a:srgbClr val="E4E7E9"/>
-            </a:solidFill>
-            <a:prstDash val="solid"/>
-          </a:ln>
-        </p:spPr>
-      </p:sp>
-      <p:sp>
-        <p:nvSpPr>
-          <p:cNvPr id="4" name="">
-            <a:extLst xmlns:a="http://schemas.openxmlformats.org/drawingml/2006/main">
-              <a:ext uri="{FF2B5EF4-FFF2-40B4-BE49-F238E27FC236}">
-                <a16:creationId xmlns:a16="http://schemas.microsoft.com/office/drawing/2014/main" id="{4A163ADC-FDBA-49AB-AB53-62FA29104479}"/>
-              </a:ext>
-            </a:extLst>
-          </p:cNvPr>
-          <p:cNvSpPr>
-            <a:spLocks xmlns:a="http://schemas.openxmlformats.org/drawingml/2006/main" noGrp="1"/>
-          </p:cNvSpPr>
-          <p:nvPr/>
-        </p:nvSpPr>
-        <p:spPr>
-          <a:xfrm xmlns:a="http://schemas.openxmlformats.org/drawingml/2006/main">
-            <a:off x="1181100" y="3295650"/>
-            <a:ext cx="514350" cy="285750"/>
+          <p:cNvPr id="27" name="">
+            <a:extLst xmlns:a="http://schemas.openxmlformats.org/drawingml/2006/main">
+              <a:ext uri="{FF2B5EF4-FFF2-40B4-BE49-F238E27FC236}">
+                <a16:creationId xmlns:a16="http://schemas.microsoft.com/office/drawing/2014/main" id="{79128475-820B-447C-A724-7D8A31328FFE}"/>
+              </a:ext>
+            </a:extLst>
+          </p:cNvPr>
+          <p:cNvSpPr>
+            <a:spLocks xmlns:a="http://schemas.openxmlformats.org/drawingml/2006/main" noGrp="1"/>
+          </p:cNvSpPr>
+          <p:nvPr/>
+        </p:nvSpPr>
+        <p:spPr>
+          <a:xfrm xmlns:a="http://schemas.openxmlformats.org/drawingml/2006/main">
+            <a:off x="2381250" y="6210300"/>
+            <a:ext cx="10477500" cy="457200"/>
           </a:xfrm>
           <a:prstGeom xmlns:a="http://schemas.openxmlformats.org/drawingml/2006/main" prst="rect">
             <a:avLst/>
@@ -8437,56 +8402,56 @@
         </p:spPr>
         <p:txBody>
           <a:bodyPr xmlns:a="http://schemas.openxmlformats.org/drawingml/2006/main" wrap="square" lIns="0" tIns="0" rIns="0" bIns="0" anchor="ctr">
-            <a:noAutofit/>
+            <a:normAutofit fontScale="100000"/>
           </a:bodyPr>
           <a:lstStyle xmlns:a="http://schemas.openxmlformats.org/drawingml/2006/main"/>
           <a:p xmlns:a="http://schemas.openxmlformats.org/drawingml/2006/main">
-            <a:pPr algn="l">
+            <a:pPr algn="ctr">
               <a:lnSpc>
                 <a:spcPct val="100000"/>
               </a:lnSpc>
               <a:buNone/>
-              <a:defRPr sz="1350" b="1">
-                <a:solidFill>
-                  <a:srgbClr val="00A2EB"/>
-                </a:solidFill>
-                <a:latin typeface="Calibri"/>
-                <a:ea typeface="Calibri"/>
-                <a:cs typeface="Calibri"/>
-              </a:defRPr>
-            </a:pPr>
-            <a:r>
-              <a:rPr sz="1800" b="1">
-                <a:solidFill>
-                  <a:srgbClr val="00A2EB"/>
-                </a:solidFill>
-                <a:latin typeface="Calibri"/>
-                <a:ea typeface="Calibri"/>
-                <a:cs typeface="Calibri"/>
-              </a:rPr>
-              <a:t>01</a:t>
-            </a:r>
-          </a:p>
-        </p:txBody>
-      </p:sp>
-      <p:sp>
-        <p:nvSpPr>
-          <p:cNvPr id="5" name="">
-            <a:extLst xmlns:a="http://schemas.openxmlformats.org/drawingml/2006/main">
-              <a:ext uri="{FF2B5EF4-FFF2-40B4-BE49-F238E27FC236}">
-                <a16:creationId xmlns:a16="http://schemas.microsoft.com/office/drawing/2014/main" id="{26D1AD73-F995-4369-A266-8FA41354CE3D}"/>
-              </a:ext>
-            </a:extLst>
-          </p:cNvPr>
-          <p:cNvSpPr>
-            <a:spLocks xmlns:a="http://schemas.openxmlformats.org/drawingml/2006/main" noGrp="1"/>
-          </p:cNvSpPr>
-          <p:nvPr/>
-        </p:nvSpPr>
-        <p:spPr>
-          <a:xfrm xmlns:a="http://schemas.openxmlformats.org/drawingml/2006/main">
-            <a:off x="1104900" y="3752850"/>
-            <a:ext cx="2019300" cy="685800"/>
+              <a:defRPr sz="2100" b="1">
+                <a:solidFill>
+                  <a:srgbClr val="051C2A"/>
+                </a:solidFill>
+                <a:latin typeface="Calibri"/>
+                <a:ea typeface="Calibri"/>
+                <a:cs typeface="Calibri"/>
+              </a:defRPr>
+            </a:pPr>
+            <a:r>
+              <a:rPr sz="2100" b="1">
+                <a:solidFill>
+                  <a:srgbClr val="051C2A"/>
+                </a:solidFill>
+                <a:latin typeface="Calibri"/>
+                <a:ea typeface="Calibri"/>
+                <a:cs typeface="Calibri"/>
+              </a:rPr>
+              <a:t>Post-error success must clear the evidence gate before report.</a:t>
+            </a:r>
+          </a:p>
+        </p:txBody>
+      </p:sp>
+      <p:sp>
+        <p:nvSpPr>
+          <p:cNvPr id="28" name="">
+            <a:extLst xmlns:a="http://schemas.openxmlformats.org/drawingml/2006/main">
+              <a:ext uri="{FF2B5EF4-FFF2-40B4-BE49-F238E27FC236}">
+                <a16:creationId xmlns:a16="http://schemas.microsoft.com/office/drawing/2014/main" id="{685F2AAD-81FC-436A-88F7-89F49C9F1671}"/>
+              </a:ext>
+            </a:extLst>
+          </p:cNvPr>
+          <p:cNvSpPr>
+            <a:spLocks xmlns:a="http://schemas.openxmlformats.org/drawingml/2006/main" noGrp="1"/>
+          </p:cNvSpPr>
+          <p:nvPr/>
+        </p:nvSpPr>
+        <p:spPr>
+          <a:xfrm xmlns:a="http://schemas.openxmlformats.org/drawingml/2006/main">
+            <a:off x="1885950" y="6838950"/>
+            <a:ext cx="4476750" cy="323850"/>
           </a:xfrm>
           <a:prstGeom xmlns:a="http://schemas.openxmlformats.org/drawingml/2006/main" prst="rect">
             <a:avLst/>
@@ -8503,52 +8468,180 @@
           </a:bodyPr>
           <a:lstStyle xmlns:a="http://schemas.openxmlformats.org/drawingml/2006/main"/>
           <a:p xmlns:a="http://schemas.openxmlformats.org/drawingml/2006/main">
-            <a:pPr algn="l">
+            <a:pPr algn="ctr">
               <a:lnSpc>
                 <a:spcPct val="100000"/>
               </a:lnSpc>
               <a:buNone/>
-              <a:defRPr sz="1950" b="1">
-                <a:solidFill>
-                  <a:srgbClr val="051C2A"/>
-                </a:solidFill>
-                <a:latin typeface="Calibri"/>
-                <a:ea typeface="Calibri"/>
-                <a:cs typeface="Calibri"/>
-              </a:defRPr>
-            </a:pPr>
-            <a:r>
-              <a:rPr sz="1950" b="1">
-                <a:solidFill>
-                  <a:srgbClr val="051C2A"/>
-                </a:solidFill>
-                <a:latin typeface="Calibri"/>
-                <a:ea typeface="Calibri"/>
-                <a:cs typeface="Calibri"/>
-              </a:rPr>
-              <a:t>PLAN</a:t>
-            </a:r>
-          </a:p>
-        </p:txBody>
-      </p:sp>
-      <p:sp>
-        <p:nvSpPr>
-          <p:cNvPr id="6" name="">
-            <a:extLst xmlns:a="http://schemas.openxmlformats.org/drawingml/2006/main">
-              <a:ext uri="{FF2B5EF4-FFF2-40B4-BE49-F238E27FC236}">
-                <a16:creationId xmlns:a16="http://schemas.microsoft.com/office/drawing/2014/main" id="{4CA7F72B-07B6-4BF4-A3F9-5860F8AC7245}"/>
-              </a:ext>
-            </a:extLst>
-          </p:cNvPr>
-          <p:cNvSpPr>
-            <a:spLocks xmlns:a="http://schemas.openxmlformats.org/drawingml/2006/main" noGrp="1"/>
-          </p:cNvSpPr>
-          <p:nvPr/>
-        </p:nvSpPr>
-        <p:spPr>
-          <a:xfrm xmlns:a="http://schemas.openxmlformats.org/drawingml/2006/main">
-            <a:off x="1181100" y="4610100"/>
-            <a:ext cx="1866900" cy="514350"/>
+              <a:defRPr sz="1500" b="0">
+                <a:solidFill>
+                  <a:srgbClr val="64748B"/>
+                </a:solidFill>
+                <a:latin typeface="Calibri"/>
+                <a:ea typeface="Calibri"/>
+                <a:cs typeface="Calibri"/>
+              </a:defRPr>
+            </a:pPr>
+            <a:r>
+              <a:rPr sz="1500" b="0">
+                <a:solidFill>
+                  <a:srgbClr val="64748B"/>
+                </a:solidFill>
+                <a:latin typeface="Calibri"/>
+                <a:ea typeface="Calibri"/>
+                <a:cs typeface="Calibri"/>
+              </a:rPr>
+              <a:t>typed error retained</a:t>
+            </a:r>
+          </a:p>
+        </p:txBody>
+      </p:sp>
+      <p:sp>
+        <p:nvSpPr>
+          <p:cNvPr id="29" name="">
+            <a:extLst xmlns:a="http://schemas.openxmlformats.org/drawingml/2006/main">
+              <a:ext uri="{FF2B5EF4-FFF2-40B4-BE49-F238E27FC236}">
+                <a16:creationId xmlns:a16="http://schemas.microsoft.com/office/drawing/2014/main" id="{CDE04AD7-6CBE-4792-B549-765578FB3E1E}"/>
+              </a:ext>
+            </a:extLst>
+          </p:cNvPr>
+          <p:cNvSpPr>
+            <a:spLocks xmlns:a="http://schemas.openxmlformats.org/drawingml/2006/main" noGrp="1"/>
+          </p:cNvSpPr>
+          <p:nvPr/>
+        </p:nvSpPr>
+        <p:spPr>
+          <a:xfrm xmlns:a="http://schemas.openxmlformats.org/drawingml/2006/main">
+            <a:off x="8801100" y="6838950"/>
+            <a:ext cx="4762500" cy="323850"/>
+          </a:xfrm>
+          <a:prstGeom xmlns:a="http://schemas.openxmlformats.org/drawingml/2006/main" prst="rect">
+            <a:avLst/>
+          </a:prstGeom>
+          <a:noFill xmlns:a="http://schemas.openxmlformats.org/drawingml/2006/main"/>
+          <a:ln xmlns:a="http://schemas.openxmlformats.org/drawingml/2006/main" w="0">
+            <a:noFill/>
+            <a:prstDash val="solid"/>
+          </a:ln>
+        </p:spPr>
+        <p:txBody>
+          <a:bodyPr xmlns:a="http://schemas.openxmlformats.org/drawingml/2006/main" wrap="square" lIns="0" tIns="0" rIns="0" bIns="0" anchor="ctr">
+            <a:normAutofit fontScale="100000"/>
+          </a:bodyPr>
+          <a:lstStyle xmlns:a="http://schemas.openxmlformats.org/drawingml/2006/main"/>
+          <a:p xmlns:a="http://schemas.openxmlformats.org/drawingml/2006/main">
+            <a:pPr algn="ctr">
+              <a:lnSpc>
+                <a:spcPct val="100000"/>
+              </a:lnSpc>
+              <a:buNone/>
+              <a:defRPr sz="1500" b="0">
+                <a:solidFill>
+                  <a:srgbClr val="64748B"/>
+                </a:solidFill>
+                <a:latin typeface="Calibri"/>
+                <a:ea typeface="Calibri"/>
+                <a:cs typeface="Calibri"/>
+              </a:defRPr>
+            </a:pPr>
+            <a:r>
+              <a:rPr sz="1500" b="0">
+                <a:solidFill>
+                  <a:srgbClr val="64748B"/>
+                </a:solidFill>
+                <a:latin typeface="Calibri"/>
+                <a:ea typeface="Calibri"/>
+                <a:cs typeface="Calibri"/>
+              </a:rPr>
+              <a:t>bounded recovery succeeds</a:t>
+            </a:r>
+          </a:p>
+        </p:txBody>
+      </p:sp>
+      <p:sp>
+        <p:nvSpPr>
+          <p:cNvPr id="30" name="">
+            <a:extLst xmlns:a="http://schemas.openxmlformats.org/drawingml/2006/main">
+              <a:ext uri="{FF2B5EF4-FFF2-40B4-BE49-F238E27FC236}">
+                <a16:creationId xmlns:a16="http://schemas.microsoft.com/office/drawing/2014/main" id="{28CBA7AE-993C-4F84-A696-8D1323AC4E80}"/>
+              </a:ext>
+            </a:extLst>
+          </p:cNvPr>
+          <p:cNvSpPr>
+            <a:spLocks xmlns:a="http://schemas.openxmlformats.org/drawingml/2006/main" noGrp="1"/>
+          </p:cNvSpPr>
+          <p:nvPr/>
+        </p:nvSpPr>
+        <p:spPr>
+          <a:xfrm xmlns:a="http://schemas.openxmlformats.org/drawingml/2006/main">
+            <a:off x="857250" y="7896225"/>
+            <a:ext cx="13525500" cy="28575"/>
+          </a:xfrm>
+          <a:prstGeom xmlns:a="http://schemas.openxmlformats.org/drawingml/2006/main" prst="rect">
+            <a:avLst/>
+          </a:prstGeom>
+          <a:solidFill xmlns:a="http://schemas.openxmlformats.org/drawingml/2006/main">
+            <a:srgbClr val="E4E7E9"/>
+          </a:solidFill>
+          <a:ln xmlns:a="http://schemas.openxmlformats.org/drawingml/2006/main" w="0">
+            <a:solidFill>
+              <a:srgbClr val="E4E7E9"/>
+            </a:solidFill>
+            <a:prstDash val="solid"/>
+          </a:ln>
+        </p:spPr>
+      </p:sp>
+      <p:sp>
+        <p:nvSpPr>
+          <p:cNvPr id="31" name="">
+            <a:extLst xmlns:a="http://schemas.openxmlformats.org/drawingml/2006/main">
+              <a:ext uri="{FF2B5EF4-FFF2-40B4-BE49-F238E27FC236}">
+                <a16:creationId xmlns:a16="http://schemas.microsoft.com/office/drawing/2014/main" id="{DE97BF4D-EDBC-4480-A82B-512A72221950}"/>
+              </a:ext>
+            </a:extLst>
+          </p:cNvPr>
+          <p:cNvSpPr>
+            <a:spLocks xmlns:a="http://schemas.openxmlformats.org/drawingml/2006/main" noGrp="1"/>
+          </p:cNvSpPr>
+          <p:nvPr/>
+        </p:nvSpPr>
+        <p:spPr>
+          <a:xfrm xmlns:a="http://schemas.openxmlformats.org/drawingml/2006/main">
+            <a:off x="857250" y="7896225"/>
+            <a:ext cx="8001000" cy="38100"/>
+          </a:xfrm>
+          <a:prstGeom xmlns:a="http://schemas.openxmlformats.org/drawingml/2006/main" prst="rect">
+            <a:avLst/>
+          </a:prstGeom>
+          <a:solidFill xmlns:a="http://schemas.openxmlformats.org/drawingml/2006/main">
+            <a:srgbClr val="00A2EB"/>
+          </a:solidFill>
+          <a:ln xmlns:a="http://schemas.openxmlformats.org/drawingml/2006/main" w="0">
+            <a:solidFill>
+              <a:srgbClr val="00A2EB"/>
+            </a:solidFill>
+            <a:prstDash val="solid"/>
+          </a:ln>
+        </p:spPr>
+      </p:sp>
+      <p:sp>
+        <p:nvSpPr>
+          <p:cNvPr id="32" name="">
+            <a:extLst xmlns:a="http://schemas.openxmlformats.org/drawingml/2006/main">
+              <a:ext uri="{FF2B5EF4-FFF2-40B4-BE49-F238E27FC236}">
+                <a16:creationId xmlns:a16="http://schemas.microsoft.com/office/drawing/2014/main" id="{49281B64-2F0F-4357-A085-C65451F28236}"/>
+              </a:ext>
+            </a:extLst>
+          </p:cNvPr>
+          <p:cNvSpPr>
+            <a:spLocks xmlns:a="http://schemas.openxmlformats.org/drawingml/2006/main" noGrp="1"/>
+          </p:cNvSpPr>
+          <p:nvPr/>
+        </p:nvSpPr>
+        <p:spPr>
+          <a:xfrm xmlns:a="http://schemas.openxmlformats.org/drawingml/2006/main">
+            <a:off x="971550" y="8058150"/>
+            <a:ext cx="3714750" cy="323850"/>
           </a:xfrm>
           <a:prstGeom xmlns:a="http://schemas.openxmlformats.org/drawingml/2006/main" prst="rect">
             <a:avLst/>
@@ -8572,1308 +8665,6 @@
               <a:buNone/>
               <a:defRPr sz="1200" b="0">
                 <a:solidFill>
-                  <a:srgbClr val="1F40CB"/>
-                </a:solidFill>
-                <a:latin typeface="Calibri"/>
-                <a:ea typeface="Calibri"/>
-                <a:cs typeface="Calibri"/>
-              </a:defRPr>
-            </a:pPr>
-            <a:r>
-              <a:rPr sz="1200" b="0">
-                <a:solidFill>
-                  <a:srgbClr val="1F40CB"/>
-                </a:solidFill>
-                <a:latin typeface="Calibri"/>
-                <a:ea typeface="Calibri"/>
-                <a:cs typeface="Calibri"/>
-              </a:rPr>
-              <a:t>mission + typed steps</a:t>
-            </a:r>
-          </a:p>
-        </p:txBody>
-      </p:sp>
-      <p:sp>
-        <p:nvSpPr>
-          <p:cNvPr id="7" name="ingestion-2">
-            <a:extLst xmlns:a="http://schemas.openxmlformats.org/drawingml/2006/main">
-              <a:ext uri="{FF2B5EF4-FFF2-40B4-BE49-F238E27FC236}">
-                <a16:creationId xmlns:a16="http://schemas.microsoft.com/office/drawing/2014/main" id="{B39DEECB-E0D1-415A-8F2A-C8075A6D97BA}"/>
-              </a:ext>
-            </a:extLst>
-          </p:cNvPr>
-          <p:cNvSpPr>
-            <a:spLocks xmlns:a="http://schemas.openxmlformats.org/drawingml/2006/main" noGrp="1"/>
-          </p:cNvSpPr>
-          <p:nvPr/>
-        </p:nvSpPr>
-        <p:spPr>
-          <a:xfrm xmlns:a="http://schemas.openxmlformats.org/drawingml/2006/main">
-            <a:off x="3810000" y="3086100"/>
-            <a:ext cx="2247900" cy="2266950"/>
-          </a:xfrm>
-          <a:prstGeom xmlns:a="http://schemas.openxmlformats.org/drawingml/2006/main" prst="roundRect">
-            <a:avLst>
-              <a:gd name="adj" fmla="val 5085"/>
-            </a:avLst>
-          </a:prstGeom>
-          <a:solidFill xmlns:a="http://schemas.openxmlformats.org/drawingml/2006/main">
-            <a:srgbClr val="FFFFFF"/>
-          </a:solidFill>
-          <a:ln xmlns:a="http://schemas.openxmlformats.org/drawingml/2006/main" w="9525">
-            <a:solidFill>
-              <a:srgbClr val="E4E7E9"/>
-            </a:solidFill>
-            <a:prstDash val="solid"/>
-          </a:ln>
-        </p:spPr>
-      </p:sp>
-      <p:sp>
-        <p:nvSpPr>
-          <p:cNvPr id="8" name="">
-            <a:extLst xmlns:a="http://schemas.openxmlformats.org/drawingml/2006/main">
-              <a:ext uri="{FF2B5EF4-FFF2-40B4-BE49-F238E27FC236}">
-                <a16:creationId xmlns:a16="http://schemas.microsoft.com/office/drawing/2014/main" id="{18679081-8A68-4B7E-9199-340CF95714DE}"/>
-              </a:ext>
-            </a:extLst>
-          </p:cNvPr>
-          <p:cNvSpPr>
-            <a:spLocks xmlns:a="http://schemas.openxmlformats.org/drawingml/2006/main" noGrp="1"/>
-          </p:cNvSpPr>
-          <p:nvPr/>
-        </p:nvSpPr>
-        <p:spPr>
-          <a:xfrm xmlns:a="http://schemas.openxmlformats.org/drawingml/2006/main">
-            <a:off x="4000500" y="3295650"/>
-            <a:ext cx="514350" cy="285750"/>
-          </a:xfrm>
-          <a:prstGeom xmlns:a="http://schemas.openxmlformats.org/drawingml/2006/main" prst="rect">
-            <a:avLst/>
-          </a:prstGeom>
-          <a:noFill xmlns:a="http://schemas.openxmlformats.org/drawingml/2006/main"/>
-          <a:ln xmlns:a="http://schemas.openxmlformats.org/drawingml/2006/main" w="0">
-            <a:noFill/>
-            <a:prstDash val="solid"/>
-          </a:ln>
-        </p:spPr>
-        <p:txBody>
-          <a:bodyPr xmlns:a="http://schemas.openxmlformats.org/drawingml/2006/main" wrap="square" lIns="0" tIns="0" rIns="0" bIns="0" anchor="ctr">
-            <a:noAutofit/>
-          </a:bodyPr>
-          <a:lstStyle xmlns:a="http://schemas.openxmlformats.org/drawingml/2006/main"/>
-          <a:p xmlns:a="http://schemas.openxmlformats.org/drawingml/2006/main">
-            <a:pPr algn="l">
-              <a:lnSpc>
-                <a:spcPct val="100000"/>
-              </a:lnSpc>
-              <a:buNone/>
-              <a:defRPr sz="1350" b="1">
-                <a:solidFill>
-                  <a:srgbClr val="00A2EB"/>
-                </a:solidFill>
-                <a:latin typeface="Calibri"/>
-                <a:ea typeface="Calibri"/>
-                <a:cs typeface="Calibri"/>
-              </a:defRPr>
-            </a:pPr>
-            <a:r>
-              <a:rPr sz="1800" b="1">
-                <a:solidFill>
-                  <a:srgbClr val="00A2EB"/>
-                </a:solidFill>
-                <a:latin typeface="Calibri"/>
-                <a:ea typeface="Calibri"/>
-                <a:cs typeface="Calibri"/>
-              </a:rPr>
-              <a:t>02</a:t>
-            </a:r>
-          </a:p>
-        </p:txBody>
-      </p:sp>
-      <p:sp>
-        <p:nvSpPr>
-          <p:cNvPr id="9" name="">
-            <a:extLst xmlns:a="http://schemas.openxmlformats.org/drawingml/2006/main">
-              <a:ext uri="{FF2B5EF4-FFF2-40B4-BE49-F238E27FC236}">
-                <a16:creationId xmlns:a16="http://schemas.microsoft.com/office/drawing/2014/main" id="{ED095E54-44DC-4092-9EB7-0C81E4B47710}"/>
-              </a:ext>
-            </a:extLst>
-          </p:cNvPr>
-          <p:cNvSpPr>
-            <a:spLocks xmlns:a="http://schemas.openxmlformats.org/drawingml/2006/main" noGrp="1"/>
-          </p:cNvSpPr>
-          <p:nvPr/>
-        </p:nvSpPr>
-        <p:spPr>
-          <a:xfrm xmlns:a="http://schemas.openxmlformats.org/drawingml/2006/main">
-            <a:off x="3924300" y="3752850"/>
-            <a:ext cx="2019300" cy="685800"/>
-          </a:xfrm>
-          <a:prstGeom xmlns:a="http://schemas.openxmlformats.org/drawingml/2006/main" prst="rect">
-            <a:avLst/>
-          </a:prstGeom>
-          <a:noFill xmlns:a="http://schemas.openxmlformats.org/drawingml/2006/main"/>
-          <a:ln xmlns:a="http://schemas.openxmlformats.org/drawingml/2006/main" w="0">
-            <a:noFill/>
-            <a:prstDash val="solid"/>
-          </a:ln>
-        </p:spPr>
-        <p:txBody>
-          <a:bodyPr xmlns:a="http://schemas.openxmlformats.org/drawingml/2006/main" wrap="square" lIns="0" tIns="0" rIns="0" bIns="0" anchor="ctr">
-            <a:normAutofit fontScale="100000"/>
-          </a:bodyPr>
-          <a:lstStyle xmlns:a="http://schemas.openxmlformats.org/drawingml/2006/main"/>
-          <a:p xmlns:a="http://schemas.openxmlformats.org/drawingml/2006/main">
-            <a:pPr algn="l">
-              <a:lnSpc>
-                <a:spcPct val="100000"/>
-              </a:lnSpc>
-              <a:buNone/>
-              <a:defRPr sz="1950" b="1">
-                <a:solidFill>
-                  <a:srgbClr val="051C2A"/>
-                </a:solidFill>
-                <a:latin typeface="Calibri"/>
-                <a:ea typeface="Calibri"/>
-                <a:cs typeface="Calibri"/>
-              </a:defRPr>
-            </a:pPr>
-            <a:r>
-              <a:rPr sz="1950" b="1">
-                <a:solidFill>
-                  <a:srgbClr val="051C2A"/>
-                </a:solidFill>
-                <a:latin typeface="Calibri"/>
-                <a:ea typeface="Calibri"/>
-                <a:cs typeface="Calibri"/>
-              </a:rPr>
-              <a:t>PLAN GATE</a:t>
-            </a:r>
-          </a:p>
-        </p:txBody>
-      </p:sp>
-      <p:sp>
-        <p:nvSpPr>
-          <p:cNvPr id="10" name="">
-            <a:extLst xmlns:a="http://schemas.openxmlformats.org/drawingml/2006/main">
-              <a:ext uri="{FF2B5EF4-FFF2-40B4-BE49-F238E27FC236}">
-                <a16:creationId xmlns:a16="http://schemas.microsoft.com/office/drawing/2014/main" id="{4DB65E8E-6BA9-40DB-99F9-46D3397B13A3}"/>
-              </a:ext>
-            </a:extLst>
-          </p:cNvPr>
-          <p:cNvSpPr>
-            <a:spLocks xmlns:a="http://schemas.openxmlformats.org/drawingml/2006/main" noGrp="1"/>
-          </p:cNvSpPr>
-          <p:nvPr/>
-        </p:nvSpPr>
-        <p:spPr>
-          <a:xfrm xmlns:a="http://schemas.openxmlformats.org/drawingml/2006/main">
-            <a:off x="4000500" y="4610100"/>
-            <a:ext cx="1866900" cy="514350"/>
-          </a:xfrm>
-          <a:prstGeom xmlns:a="http://schemas.openxmlformats.org/drawingml/2006/main" prst="rect">
-            <a:avLst/>
-          </a:prstGeom>
-          <a:noFill xmlns:a="http://schemas.openxmlformats.org/drawingml/2006/main"/>
-          <a:ln xmlns:a="http://schemas.openxmlformats.org/drawingml/2006/main" w="0">
-            <a:noFill/>
-            <a:prstDash val="solid"/>
-          </a:ln>
-        </p:spPr>
-        <p:txBody>
-          <a:bodyPr xmlns:a="http://schemas.openxmlformats.org/drawingml/2006/main" wrap="square" lIns="0" tIns="0" rIns="0" bIns="0" anchor="ctr">
-            <a:normAutofit fontScale="100000"/>
-          </a:bodyPr>
-          <a:lstStyle xmlns:a="http://schemas.openxmlformats.org/drawingml/2006/main"/>
-          <a:p xmlns:a="http://schemas.openxmlformats.org/drawingml/2006/main">
-            <a:pPr algn="l">
-              <a:lnSpc>
-                <a:spcPct val="100000"/>
-              </a:lnSpc>
-              <a:buNone/>
-              <a:defRPr sz="1200" b="0">
-                <a:solidFill>
-                  <a:srgbClr val="1F40CB"/>
-                </a:solidFill>
-                <a:latin typeface="Calibri"/>
-                <a:ea typeface="Calibri"/>
-                <a:cs typeface="Calibri"/>
-              </a:defRPr>
-            </a:pPr>
-            <a:r>
-              <a:rPr sz="1200" b="0">
-                <a:solidFill>
-                  <a:srgbClr val="1F40CB"/>
-                </a:solidFill>
-                <a:latin typeface="Calibri"/>
-                <a:ea typeface="Calibri"/>
-                <a:cs typeface="Calibri"/>
-              </a:rPr>
-              <a:t>schema + budget</a:t>
-            </a:r>
-          </a:p>
-        </p:txBody>
-      </p:sp>
-      <p:sp>
-        <p:nvSpPr>
-          <p:cNvPr id="11" name="ingestion-3">
-            <a:extLst xmlns:a="http://schemas.openxmlformats.org/drawingml/2006/main">
-              <a:ext uri="{FF2B5EF4-FFF2-40B4-BE49-F238E27FC236}">
-                <a16:creationId xmlns:a16="http://schemas.microsoft.com/office/drawing/2014/main" id="{D4342A97-3791-461F-A305-9671DA4948CE}"/>
-              </a:ext>
-            </a:extLst>
-          </p:cNvPr>
-          <p:cNvSpPr>
-            <a:spLocks xmlns:a="http://schemas.openxmlformats.org/drawingml/2006/main" noGrp="1"/>
-          </p:cNvSpPr>
-          <p:nvPr/>
-        </p:nvSpPr>
-        <p:spPr>
-          <a:xfrm xmlns:a="http://schemas.openxmlformats.org/drawingml/2006/main">
-            <a:off x="6629400" y="3086100"/>
-            <a:ext cx="2247900" cy="2266950"/>
-          </a:xfrm>
-          <a:prstGeom xmlns:a="http://schemas.openxmlformats.org/drawingml/2006/main" prst="roundRect">
-            <a:avLst>
-              <a:gd name="adj" fmla="val 5085"/>
-            </a:avLst>
-          </a:prstGeom>
-          <a:solidFill xmlns:a="http://schemas.openxmlformats.org/drawingml/2006/main">
-            <a:srgbClr val="062433"/>
-          </a:solidFill>
-          <a:ln xmlns:a="http://schemas.openxmlformats.org/drawingml/2006/main" w="9525">
-            <a:solidFill>
-              <a:srgbClr val="062433"/>
-            </a:solidFill>
-            <a:prstDash val="solid"/>
-          </a:ln>
-        </p:spPr>
-      </p:sp>
-      <p:sp>
-        <p:nvSpPr>
-          <p:cNvPr id="12" name="">
-            <a:extLst xmlns:a="http://schemas.openxmlformats.org/drawingml/2006/main">
-              <a:ext uri="{FF2B5EF4-FFF2-40B4-BE49-F238E27FC236}">
-                <a16:creationId xmlns:a16="http://schemas.microsoft.com/office/drawing/2014/main" id="{64E49A95-2D88-4387-8BD5-FA749ABD0960}"/>
-              </a:ext>
-            </a:extLst>
-          </p:cNvPr>
-          <p:cNvSpPr>
-            <a:spLocks xmlns:a="http://schemas.openxmlformats.org/drawingml/2006/main" noGrp="1"/>
-          </p:cNvSpPr>
-          <p:nvPr/>
-        </p:nvSpPr>
-        <p:spPr>
-          <a:xfrm xmlns:a="http://schemas.openxmlformats.org/drawingml/2006/main">
-            <a:off x="6819900" y="3295650"/>
-            <a:ext cx="514350" cy="285750"/>
-          </a:xfrm>
-          <a:prstGeom xmlns:a="http://schemas.openxmlformats.org/drawingml/2006/main" prst="rect">
-            <a:avLst/>
-          </a:prstGeom>
-          <a:noFill xmlns:a="http://schemas.openxmlformats.org/drawingml/2006/main"/>
-          <a:ln xmlns:a="http://schemas.openxmlformats.org/drawingml/2006/main" w="0">
-            <a:noFill/>
-            <a:prstDash val="solid"/>
-          </a:ln>
-        </p:spPr>
-        <p:txBody>
-          <a:bodyPr xmlns:a="http://schemas.openxmlformats.org/drawingml/2006/main" wrap="square" lIns="0" tIns="0" rIns="0" bIns="0" anchor="ctr">
-            <a:noAutofit/>
-          </a:bodyPr>
-          <a:lstStyle xmlns:a="http://schemas.openxmlformats.org/drawingml/2006/main"/>
-          <a:p xmlns:a="http://schemas.openxmlformats.org/drawingml/2006/main">
-            <a:pPr algn="l">
-              <a:lnSpc>
-                <a:spcPct val="100000"/>
-              </a:lnSpc>
-              <a:buNone/>
-              <a:defRPr sz="1350" b="1">
-                <a:solidFill>
-                  <a:srgbClr val="00A2EB"/>
-                </a:solidFill>
-                <a:latin typeface="Calibri"/>
-                <a:ea typeface="Calibri"/>
-                <a:cs typeface="Calibri"/>
-              </a:defRPr>
-            </a:pPr>
-            <a:r>
-              <a:rPr sz="1800" b="1">
-                <a:solidFill>
-                  <a:srgbClr val="00A2EB"/>
-                </a:solidFill>
-                <a:latin typeface="Calibri"/>
-                <a:ea typeface="Calibri"/>
-                <a:cs typeface="Calibri"/>
-              </a:rPr>
-              <a:t>03</a:t>
-            </a:r>
-          </a:p>
-        </p:txBody>
-      </p:sp>
-      <p:sp>
-        <p:nvSpPr>
-          <p:cNvPr id="13" name="">
-            <a:extLst xmlns:a="http://schemas.openxmlformats.org/drawingml/2006/main">
-              <a:ext uri="{FF2B5EF4-FFF2-40B4-BE49-F238E27FC236}">
-                <a16:creationId xmlns:a16="http://schemas.microsoft.com/office/drawing/2014/main" id="{572D3874-F985-4CD0-BBFF-D59F5B7B32BE}"/>
-              </a:ext>
-            </a:extLst>
-          </p:cNvPr>
-          <p:cNvSpPr>
-            <a:spLocks xmlns:a="http://schemas.openxmlformats.org/drawingml/2006/main" noGrp="1"/>
-          </p:cNvSpPr>
-          <p:nvPr/>
-        </p:nvSpPr>
-        <p:spPr>
-          <a:xfrm xmlns:a="http://schemas.openxmlformats.org/drawingml/2006/main">
-            <a:off x="6743700" y="3752850"/>
-            <a:ext cx="2019300" cy="685800"/>
-          </a:xfrm>
-          <a:prstGeom xmlns:a="http://schemas.openxmlformats.org/drawingml/2006/main" prst="rect">
-            <a:avLst/>
-          </a:prstGeom>
-          <a:noFill xmlns:a="http://schemas.openxmlformats.org/drawingml/2006/main"/>
-          <a:ln xmlns:a="http://schemas.openxmlformats.org/drawingml/2006/main" w="0">
-            <a:noFill/>
-            <a:prstDash val="solid"/>
-          </a:ln>
-        </p:spPr>
-        <p:txBody>
-          <a:bodyPr xmlns:a="http://schemas.openxmlformats.org/drawingml/2006/main" wrap="square" lIns="0" tIns="0" rIns="0" bIns="0" anchor="ctr">
-            <a:noAutofit/>
-          </a:bodyPr>
-          <a:lstStyle xmlns:a="http://schemas.openxmlformats.org/drawingml/2006/main"/>
-          <a:p xmlns:a="http://schemas.openxmlformats.org/drawingml/2006/main">
-            <a:pPr algn="l">
-              <a:lnSpc>
-                <a:spcPct val="100000"/>
-              </a:lnSpc>
-              <a:buNone/>
-              <a:defRPr sz="1650" b="1">
-                <a:solidFill>
-                  <a:srgbClr val="FFFFFF"/>
-                </a:solidFill>
-                <a:latin typeface="Calibri"/>
-                <a:ea typeface="Calibri"/>
-                <a:cs typeface="Calibri"/>
-              </a:defRPr>
-            </a:pPr>
-            <a:r>
-              <a:rPr sz="1800" b="1">
-                <a:solidFill>
-                  <a:srgbClr val="FFFFFF"/>
-                </a:solidFill>
-                <a:latin typeface="Calibri"/>
-                <a:ea typeface="Calibri"/>
-                <a:cs typeface="Calibri"/>
-              </a:rPr>
-              <a:t>TOOL</a:t>
-            </a:r>
-          </a:p>
-        </p:txBody>
-      </p:sp>
-      <p:sp>
-        <p:nvSpPr>
-          <p:cNvPr id="14" name="">
-            <a:extLst xmlns:a="http://schemas.openxmlformats.org/drawingml/2006/main">
-              <a:ext uri="{FF2B5EF4-FFF2-40B4-BE49-F238E27FC236}">
-                <a16:creationId xmlns:a16="http://schemas.microsoft.com/office/drawing/2014/main" id="{9599AF29-91DE-47C0-8189-B0778BB52724}"/>
-              </a:ext>
-            </a:extLst>
-          </p:cNvPr>
-          <p:cNvSpPr>
-            <a:spLocks xmlns:a="http://schemas.openxmlformats.org/drawingml/2006/main" noGrp="1"/>
-          </p:cNvSpPr>
-          <p:nvPr/>
-        </p:nvSpPr>
-        <p:spPr>
-          <a:xfrm xmlns:a="http://schemas.openxmlformats.org/drawingml/2006/main">
-            <a:off x="6819900" y="4610100"/>
-            <a:ext cx="1866900" cy="514350"/>
-          </a:xfrm>
-          <a:prstGeom xmlns:a="http://schemas.openxmlformats.org/drawingml/2006/main" prst="rect">
-            <a:avLst/>
-          </a:prstGeom>
-          <a:noFill xmlns:a="http://schemas.openxmlformats.org/drawingml/2006/main"/>
-          <a:ln xmlns:a="http://schemas.openxmlformats.org/drawingml/2006/main" w="0">
-            <a:noFill/>
-            <a:prstDash val="solid"/>
-          </a:ln>
-        </p:spPr>
-        <p:txBody>
-          <a:bodyPr xmlns:a="http://schemas.openxmlformats.org/drawingml/2006/main" wrap="square" lIns="0" tIns="0" rIns="0" bIns="0" anchor="ctr">
-            <a:normAutofit fontScale="100000"/>
-          </a:bodyPr>
-          <a:lstStyle xmlns:a="http://schemas.openxmlformats.org/drawingml/2006/main"/>
-          <a:p xmlns:a="http://schemas.openxmlformats.org/drawingml/2006/main">
-            <a:pPr algn="l">
-              <a:lnSpc>
-                <a:spcPct val="100000"/>
-              </a:lnSpc>
-              <a:buNone/>
-              <a:defRPr sz="1200" b="0">
-                <a:solidFill>
-                  <a:srgbClr val="00A2EB"/>
-                </a:solidFill>
-                <a:latin typeface="Calibri"/>
-                <a:ea typeface="Calibri"/>
-                <a:cs typeface="Calibri"/>
-              </a:defRPr>
-            </a:pPr>
-            <a:r>
-              <a:rPr sz="1200" b="0">
-                <a:solidFill>
-                  <a:srgbClr val="00A2EB"/>
-                </a:solidFill>
-                <a:latin typeface="Calibri"/>
-                <a:ea typeface="Calibri"/>
-                <a:cs typeface="Calibri"/>
-              </a:rPr>
-              <a:t>unsupported_metric</a:t>
-            </a:r>
-          </a:p>
-        </p:txBody>
-      </p:sp>
-      <p:sp>
-        <p:nvSpPr>
-          <p:cNvPr id="15" name="ingestion-4">
-            <a:extLst xmlns:a="http://schemas.openxmlformats.org/drawingml/2006/main">
-              <a:ext uri="{FF2B5EF4-FFF2-40B4-BE49-F238E27FC236}">
-                <a16:creationId xmlns:a16="http://schemas.microsoft.com/office/drawing/2014/main" id="{7952DE37-BD86-481C-A575-8709971DD74E}"/>
-              </a:ext>
-            </a:extLst>
-          </p:cNvPr>
-          <p:cNvSpPr>
-            <a:spLocks xmlns:a="http://schemas.openxmlformats.org/drawingml/2006/main" noGrp="1"/>
-          </p:cNvSpPr>
-          <p:nvPr/>
-        </p:nvSpPr>
-        <p:spPr>
-          <a:xfrm xmlns:a="http://schemas.openxmlformats.org/drawingml/2006/main">
-            <a:off x="9448800" y="3086100"/>
-            <a:ext cx="2247900" cy="2266950"/>
-          </a:xfrm>
-          <a:prstGeom xmlns:a="http://schemas.openxmlformats.org/drawingml/2006/main" prst="roundRect">
-            <a:avLst>
-              <a:gd name="adj" fmla="val 5085"/>
-            </a:avLst>
-          </a:prstGeom>
-          <a:solidFill xmlns:a="http://schemas.openxmlformats.org/drawingml/2006/main">
-            <a:srgbClr val="FFFFFF"/>
-          </a:solidFill>
-          <a:ln xmlns:a="http://schemas.openxmlformats.org/drawingml/2006/main" w="9525">
-            <a:solidFill>
-              <a:srgbClr val="E4E7E9"/>
-            </a:solidFill>
-            <a:prstDash val="solid"/>
-          </a:ln>
-        </p:spPr>
-      </p:sp>
-      <p:sp>
-        <p:nvSpPr>
-          <p:cNvPr id="16" name="">
-            <a:extLst xmlns:a="http://schemas.openxmlformats.org/drawingml/2006/main">
-              <a:ext uri="{FF2B5EF4-FFF2-40B4-BE49-F238E27FC236}">
-                <a16:creationId xmlns:a16="http://schemas.microsoft.com/office/drawing/2014/main" id="{62EC2EC9-18A1-4F72-A64D-AF536DDC8F61}"/>
-              </a:ext>
-            </a:extLst>
-          </p:cNvPr>
-          <p:cNvSpPr>
-            <a:spLocks xmlns:a="http://schemas.openxmlformats.org/drawingml/2006/main" noGrp="1"/>
-          </p:cNvSpPr>
-          <p:nvPr/>
-        </p:nvSpPr>
-        <p:spPr>
-          <a:xfrm xmlns:a="http://schemas.openxmlformats.org/drawingml/2006/main">
-            <a:off x="9639300" y="3295650"/>
-            <a:ext cx="514350" cy="285750"/>
-          </a:xfrm>
-          <a:prstGeom xmlns:a="http://schemas.openxmlformats.org/drawingml/2006/main" prst="rect">
-            <a:avLst/>
-          </a:prstGeom>
-          <a:noFill xmlns:a="http://schemas.openxmlformats.org/drawingml/2006/main"/>
-          <a:ln xmlns:a="http://schemas.openxmlformats.org/drawingml/2006/main" w="0">
-            <a:noFill/>
-            <a:prstDash val="solid"/>
-          </a:ln>
-        </p:spPr>
-        <p:txBody>
-          <a:bodyPr xmlns:a="http://schemas.openxmlformats.org/drawingml/2006/main" wrap="square" lIns="0" tIns="0" rIns="0" bIns="0" anchor="ctr">
-            <a:noAutofit/>
-          </a:bodyPr>
-          <a:lstStyle xmlns:a="http://schemas.openxmlformats.org/drawingml/2006/main"/>
-          <a:p xmlns:a="http://schemas.openxmlformats.org/drawingml/2006/main">
-            <a:pPr algn="l">
-              <a:lnSpc>
-                <a:spcPct val="100000"/>
-              </a:lnSpc>
-              <a:buNone/>
-              <a:defRPr sz="1350" b="1">
-                <a:solidFill>
-                  <a:srgbClr val="00A2EB"/>
-                </a:solidFill>
-                <a:latin typeface="Calibri"/>
-                <a:ea typeface="Calibri"/>
-                <a:cs typeface="Calibri"/>
-              </a:defRPr>
-            </a:pPr>
-            <a:r>
-              <a:rPr sz="1800" b="1">
-                <a:solidFill>
-                  <a:srgbClr val="00A2EB"/>
-                </a:solidFill>
-                <a:latin typeface="Calibri"/>
-                <a:ea typeface="Calibri"/>
-                <a:cs typeface="Calibri"/>
-              </a:rPr>
-              <a:t>04</a:t>
-            </a:r>
-          </a:p>
-        </p:txBody>
-      </p:sp>
-      <p:sp>
-        <p:nvSpPr>
-          <p:cNvPr id="17" name="">
-            <a:extLst xmlns:a="http://schemas.openxmlformats.org/drawingml/2006/main">
-              <a:ext uri="{FF2B5EF4-FFF2-40B4-BE49-F238E27FC236}">
-                <a16:creationId xmlns:a16="http://schemas.microsoft.com/office/drawing/2014/main" id="{8540FD5A-1C0F-4BE1-B862-685F20D0F43C}"/>
-              </a:ext>
-            </a:extLst>
-          </p:cNvPr>
-          <p:cNvSpPr>
-            <a:spLocks xmlns:a="http://schemas.openxmlformats.org/drawingml/2006/main" noGrp="1"/>
-          </p:cNvSpPr>
-          <p:nvPr/>
-        </p:nvSpPr>
-        <p:spPr>
-          <a:xfrm xmlns:a="http://schemas.openxmlformats.org/drawingml/2006/main">
-            <a:off x="9563100" y="3752850"/>
-            <a:ext cx="2019300" cy="685800"/>
-          </a:xfrm>
-          <a:prstGeom xmlns:a="http://schemas.openxmlformats.org/drawingml/2006/main" prst="rect">
-            <a:avLst/>
-          </a:prstGeom>
-          <a:noFill xmlns:a="http://schemas.openxmlformats.org/drawingml/2006/main"/>
-          <a:ln xmlns:a="http://schemas.openxmlformats.org/drawingml/2006/main" w="0">
-            <a:noFill/>
-            <a:prstDash val="solid"/>
-          </a:ln>
-        </p:spPr>
-        <p:txBody>
-          <a:bodyPr xmlns:a="http://schemas.openxmlformats.org/drawingml/2006/main" wrap="square" lIns="0" tIns="0" rIns="0" bIns="0" anchor="ctr">
-            <a:normAutofit fontScale="100000"/>
-          </a:bodyPr>
-          <a:lstStyle xmlns:a="http://schemas.openxmlformats.org/drawingml/2006/main"/>
-          <a:p xmlns:a="http://schemas.openxmlformats.org/drawingml/2006/main">
-            <a:pPr algn="l">
-              <a:lnSpc>
-                <a:spcPct val="100000"/>
-              </a:lnSpc>
-              <a:buNone/>
-              <a:defRPr sz="1950" b="1">
-                <a:solidFill>
-                  <a:srgbClr val="051C2A"/>
-                </a:solidFill>
-                <a:latin typeface="Calibri"/>
-                <a:ea typeface="Calibri"/>
-                <a:cs typeface="Calibri"/>
-              </a:defRPr>
-            </a:pPr>
-            <a:r>
-              <a:rPr sz="1950" b="1">
-                <a:solidFill>
-                  <a:srgbClr val="051C2A"/>
-                </a:solidFill>
-                <a:latin typeface="Calibri"/>
-                <a:ea typeface="Calibri"/>
-                <a:cs typeface="Calibri"/>
-              </a:rPr>
-              <a:t>REPLAN + GATE</a:t>
-            </a:r>
-          </a:p>
-        </p:txBody>
-      </p:sp>
-      <p:sp>
-        <p:nvSpPr>
-          <p:cNvPr id="18" name="">
-            <a:extLst xmlns:a="http://schemas.openxmlformats.org/drawingml/2006/main">
-              <a:ext uri="{FF2B5EF4-FFF2-40B4-BE49-F238E27FC236}">
-                <a16:creationId xmlns:a16="http://schemas.microsoft.com/office/drawing/2014/main" id="{67E52B70-645C-40F7-B0DE-1D1D177875CC}"/>
-              </a:ext>
-            </a:extLst>
-          </p:cNvPr>
-          <p:cNvSpPr>
-            <a:spLocks xmlns:a="http://schemas.openxmlformats.org/drawingml/2006/main" noGrp="1"/>
-          </p:cNvSpPr>
-          <p:nvPr/>
-        </p:nvSpPr>
-        <p:spPr>
-          <a:xfrm xmlns:a="http://schemas.openxmlformats.org/drawingml/2006/main">
-            <a:off x="9639300" y="4610100"/>
-            <a:ext cx="1866900" cy="514350"/>
-          </a:xfrm>
-          <a:prstGeom xmlns:a="http://schemas.openxmlformats.org/drawingml/2006/main" prst="rect">
-            <a:avLst/>
-          </a:prstGeom>
-          <a:noFill xmlns:a="http://schemas.openxmlformats.org/drawingml/2006/main"/>
-          <a:ln xmlns:a="http://schemas.openxmlformats.org/drawingml/2006/main" w="0">
-            <a:noFill/>
-            <a:prstDash val="solid"/>
-          </a:ln>
-        </p:spPr>
-        <p:txBody>
-          <a:bodyPr xmlns:a="http://schemas.openxmlformats.org/drawingml/2006/main" wrap="square" lIns="0" tIns="0" rIns="0" bIns="0" anchor="ctr">
-            <a:normAutofit fontScale="100000"/>
-          </a:bodyPr>
-          <a:lstStyle xmlns:a="http://schemas.openxmlformats.org/drawingml/2006/main"/>
-          <a:p xmlns:a="http://schemas.openxmlformats.org/drawingml/2006/main">
-            <a:pPr algn="l">
-              <a:lnSpc>
-                <a:spcPct val="100000"/>
-              </a:lnSpc>
-              <a:buNone/>
-              <a:defRPr sz="1200" b="0">
-                <a:solidFill>
-                  <a:srgbClr val="1F40CB"/>
-                </a:solidFill>
-                <a:latin typeface="Calibri"/>
-                <a:ea typeface="Calibri"/>
-                <a:cs typeface="Calibri"/>
-              </a:defRPr>
-            </a:pPr>
-            <a:r>
-              <a:rPr sz="1200" b="0">
-                <a:solidFill>
-                  <a:srgbClr val="1F40CB"/>
-                </a:solidFill>
-                <a:latin typeface="Calibri"/>
-                <a:ea typeface="Calibri"/>
-                <a:cs typeface="Calibri"/>
-              </a:rPr>
-              <a:t>tail + evidence</a:t>
-            </a:r>
-          </a:p>
-        </p:txBody>
-      </p:sp>
-      <p:sp>
-        <p:nvSpPr>
-          <p:cNvPr id="19" name="ingestion-5">
-            <a:extLst xmlns:a="http://schemas.openxmlformats.org/drawingml/2006/main">
-              <a:ext uri="{FF2B5EF4-FFF2-40B4-BE49-F238E27FC236}">
-                <a16:creationId xmlns:a16="http://schemas.microsoft.com/office/drawing/2014/main" id="{43F7E1B1-E237-4A79-B0C4-38965CF32D74}"/>
-              </a:ext>
-            </a:extLst>
-          </p:cNvPr>
-          <p:cNvSpPr>
-            <a:spLocks xmlns:a="http://schemas.openxmlformats.org/drawingml/2006/main" noGrp="1"/>
-          </p:cNvSpPr>
-          <p:nvPr/>
-        </p:nvSpPr>
-        <p:spPr>
-          <a:xfrm xmlns:a="http://schemas.openxmlformats.org/drawingml/2006/main">
-            <a:off x="12268200" y="3086100"/>
-            <a:ext cx="2247900" cy="2266950"/>
-          </a:xfrm>
-          <a:prstGeom xmlns:a="http://schemas.openxmlformats.org/drawingml/2006/main" prst="roundRect">
-            <a:avLst>
-              <a:gd name="adj" fmla="val 5085"/>
-            </a:avLst>
-          </a:prstGeom>
-          <a:solidFill xmlns:a="http://schemas.openxmlformats.org/drawingml/2006/main">
-            <a:srgbClr val="FFFFFF"/>
-          </a:solidFill>
-          <a:ln xmlns:a="http://schemas.openxmlformats.org/drawingml/2006/main" w="19050">
-            <a:solidFill>
-              <a:srgbClr val="F07D00"/>
-            </a:solidFill>
-            <a:prstDash val="solid"/>
-          </a:ln>
-        </p:spPr>
-      </p:sp>
-      <p:sp>
-        <p:nvSpPr>
-          <p:cNvPr id="20" name="">
-            <a:extLst xmlns:a="http://schemas.openxmlformats.org/drawingml/2006/main">
-              <a:ext uri="{FF2B5EF4-FFF2-40B4-BE49-F238E27FC236}">
-                <a16:creationId xmlns:a16="http://schemas.microsoft.com/office/drawing/2014/main" id="{51764D39-05B0-4F08-BC2B-2221BE2F38D6}"/>
-              </a:ext>
-            </a:extLst>
-          </p:cNvPr>
-          <p:cNvSpPr>
-            <a:spLocks xmlns:a="http://schemas.openxmlformats.org/drawingml/2006/main" noGrp="1"/>
-          </p:cNvSpPr>
-          <p:nvPr/>
-        </p:nvSpPr>
-        <p:spPr>
-          <a:xfrm xmlns:a="http://schemas.openxmlformats.org/drawingml/2006/main">
-            <a:off x="12458700" y="3295650"/>
-            <a:ext cx="514350" cy="285750"/>
-          </a:xfrm>
-          <a:prstGeom xmlns:a="http://schemas.openxmlformats.org/drawingml/2006/main" prst="rect">
-            <a:avLst/>
-          </a:prstGeom>
-          <a:noFill xmlns:a="http://schemas.openxmlformats.org/drawingml/2006/main"/>
-          <a:ln xmlns:a="http://schemas.openxmlformats.org/drawingml/2006/main" w="0">
-            <a:noFill/>
-            <a:prstDash val="solid"/>
-          </a:ln>
-        </p:spPr>
-        <p:txBody>
-          <a:bodyPr xmlns:a="http://schemas.openxmlformats.org/drawingml/2006/main" wrap="square" lIns="0" tIns="0" rIns="0" bIns="0" anchor="ctr">
-            <a:noAutofit/>
-          </a:bodyPr>
-          <a:lstStyle xmlns:a="http://schemas.openxmlformats.org/drawingml/2006/main"/>
-          <a:p xmlns:a="http://schemas.openxmlformats.org/drawingml/2006/main">
-            <a:pPr algn="l">
-              <a:lnSpc>
-                <a:spcPct val="100000"/>
-              </a:lnSpc>
-              <a:buNone/>
-              <a:defRPr sz="1350" b="1">
-                <a:solidFill>
-                  <a:srgbClr val="00A2EB"/>
-                </a:solidFill>
-                <a:latin typeface="Calibri"/>
-                <a:ea typeface="Calibri"/>
-                <a:cs typeface="Calibri"/>
-              </a:defRPr>
-            </a:pPr>
-            <a:r>
-              <a:rPr sz="1800" b="1">
-                <a:solidFill>
-                  <a:srgbClr val="00A2EB"/>
-                </a:solidFill>
-                <a:latin typeface="Calibri"/>
-                <a:ea typeface="Calibri"/>
-                <a:cs typeface="Calibri"/>
-              </a:rPr>
-              <a:t>05</a:t>
-            </a:r>
-          </a:p>
-        </p:txBody>
-      </p:sp>
-      <p:sp>
-        <p:nvSpPr>
-          <p:cNvPr id="21" name="">
-            <a:extLst xmlns:a="http://schemas.openxmlformats.org/drawingml/2006/main">
-              <a:ext uri="{FF2B5EF4-FFF2-40B4-BE49-F238E27FC236}">
-                <a16:creationId xmlns:a16="http://schemas.microsoft.com/office/drawing/2014/main" id="{C0F4CBB5-9FF7-4C7B-8D8C-5AA3541DD5E4}"/>
-              </a:ext>
-            </a:extLst>
-          </p:cNvPr>
-          <p:cNvSpPr>
-            <a:spLocks xmlns:a="http://schemas.openxmlformats.org/drawingml/2006/main" noGrp="1"/>
-          </p:cNvSpPr>
-          <p:nvPr/>
-        </p:nvSpPr>
-        <p:spPr>
-          <a:xfrm xmlns:a="http://schemas.openxmlformats.org/drawingml/2006/main">
-            <a:off x="12382500" y="3752850"/>
-            <a:ext cx="2019300" cy="685800"/>
-          </a:xfrm>
-          <a:prstGeom xmlns:a="http://schemas.openxmlformats.org/drawingml/2006/main" prst="rect">
-            <a:avLst/>
-          </a:prstGeom>
-          <a:noFill xmlns:a="http://schemas.openxmlformats.org/drawingml/2006/main"/>
-          <a:ln xmlns:a="http://schemas.openxmlformats.org/drawingml/2006/main" w="0">
-            <a:noFill/>
-            <a:prstDash val="solid"/>
-          </a:ln>
-        </p:spPr>
-        <p:txBody>
-          <a:bodyPr xmlns:a="http://schemas.openxmlformats.org/drawingml/2006/main" wrap="square" lIns="0" tIns="0" rIns="0" bIns="0" anchor="ctr">
-            <a:normAutofit fontScale="100000"/>
-          </a:bodyPr>
-          <a:lstStyle xmlns:a="http://schemas.openxmlformats.org/drawingml/2006/main"/>
-          <a:p xmlns:a="http://schemas.openxmlformats.org/drawingml/2006/main">
-            <a:pPr algn="l">
-              <a:lnSpc>
-                <a:spcPct val="100000"/>
-              </a:lnSpc>
-              <a:buNone/>
-              <a:defRPr sz="1950" b="1">
-                <a:solidFill>
-                  <a:srgbClr val="051C2A"/>
-                </a:solidFill>
-                <a:latin typeface="Calibri"/>
-                <a:ea typeface="Calibri"/>
-                <a:cs typeface="Calibri"/>
-              </a:defRPr>
-            </a:pPr>
-            <a:r>
-              <a:rPr sz="1950" b="1">
-                <a:solidFill>
-                  <a:srgbClr val="051C2A"/>
-                </a:solidFill>
-                <a:latin typeface="Calibri"/>
-                <a:ea typeface="Calibri"/>
-                <a:cs typeface="Calibri"/>
-              </a:rPr>
-              <a:t>REPORT</a:t>
-            </a:r>
-          </a:p>
-        </p:txBody>
-      </p:sp>
-      <p:sp>
-        <p:nvSpPr>
-          <p:cNvPr id="22" name="">
-            <a:extLst xmlns:a="http://schemas.openxmlformats.org/drawingml/2006/main">
-              <a:ext uri="{FF2B5EF4-FFF2-40B4-BE49-F238E27FC236}">
-                <a16:creationId xmlns:a16="http://schemas.microsoft.com/office/drawing/2014/main" id="{8856B515-B8BF-4B9C-8D6B-EC909D2B3B4E}"/>
-              </a:ext>
-            </a:extLst>
-          </p:cNvPr>
-          <p:cNvSpPr>
-            <a:spLocks xmlns:a="http://schemas.openxmlformats.org/drawingml/2006/main" noGrp="1"/>
-          </p:cNvSpPr>
-          <p:nvPr/>
-        </p:nvSpPr>
-        <p:spPr>
-          <a:xfrm xmlns:a="http://schemas.openxmlformats.org/drawingml/2006/main">
-            <a:off x="12458700" y="4610100"/>
-            <a:ext cx="1866900" cy="514350"/>
-          </a:xfrm>
-          <a:prstGeom xmlns:a="http://schemas.openxmlformats.org/drawingml/2006/main" prst="rect">
-            <a:avLst/>
-          </a:prstGeom>
-          <a:noFill xmlns:a="http://schemas.openxmlformats.org/drawingml/2006/main"/>
-          <a:ln xmlns:a="http://schemas.openxmlformats.org/drawingml/2006/main" w="0">
-            <a:noFill/>
-            <a:prstDash val="solid"/>
-          </a:ln>
-        </p:spPr>
-        <p:txBody>
-          <a:bodyPr xmlns:a="http://schemas.openxmlformats.org/drawingml/2006/main" wrap="square" lIns="0" tIns="0" rIns="0" bIns="0" anchor="ctr">
-            <a:normAutofit fontScale="100000"/>
-          </a:bodyPr>
-          <a:lstStyle xmlns:a="http://schemas.openxmlformats.org/drawingml/2006/main"/>
-          <a:p xmlns:a="http://schemas.openxmlformats.org/drawingml/2006/main">
-            <a:pPr algn="l">
-              <a:lnSpc>
-                <a:spcPct val="100000"/>
-              </a:lnSpc>
-              <a:buNone/>
-              <a:defRPr sz="1200" b="0">
-                <a:solidFill>
-                  <a:srgbClr val="1F40CB"/>
-                </a:solidFill>
-                <a:latin typeface="Calibri"/>
-                <a:ea typeface="Calibri"/>
-                <a:cs typeface="Calibri"/>
-              </a:defRPr>
-            </a:pPr>
-            <a:r>
-              <a:rPr sz="1200" b="0">
-                <a:solidFill>
-                  <a:srgbClr val="1F40CB"/>
-                </a:solidFill>
-                <a:latin typeface="Calibri"/>
-                <a:ea typeface="Calibri"/>
-                <a:cs typeface="Calibri"/>
-              </a:rPr>
-              <a:t>briefing + citations</a:t>
-            </a:r>
-          </a:p>
-        </p:txBody>
-      </p:sp>
-      <p:cxnSp>
-        <p:nvCxnSpPr>
-          <p:cNvPr id="681" name=""/>
-          <p:cNvCxnSpPr>
-            <a:stCxn xmlns:a="http://schemas.openxmlformats.org/drawingml/2006/main" id="3" idx="3"/>
-            <a:endCxn xmlns:a="http://schemas.openxmlformats.org/drawingml/2006/main" id="7" idx="1"/>
-          </p:cNvCxnSpPr>
-          <p:nvPr/>
-        </p:nvCxnSpPr>
-        <p:spPr>
-          <a:xfrm xmlns:a="http://schemas.openxmlformats.org/drawingml/2006/main">
-            <a:off x="3238500" y="4219575"/>
-            <a:ext cx="571500" cy="0"/>
-          </a:xfrm>
-          <a:prstGeom xmlns:a="http://schemas.openxmlformats.org/drawingml/2006/main" prst="straightConnector1">
-            <a:avLst/>
-          </a:prstGeom>
-          <a:ln xmlns:a="http://schemas.openxmlformats.org/drawingml/2006/main" w="28575">
-            <a:solidFill>
-              <a:srgbClr val="9A9A9F"/>
-            </a:solidFill>
-            <a:prstDash val="solid"/>
-            <a:tailEnd type="triangle" w="med" len="med"/>
-          </a:ln>
-        </p:spPr>
-      </p:cxnSp>
-      <p:cxnSp>
-        <p:nvCxnSpPr>
-          <p:cNvPr id="682" name=""/>
-          <p:cNvCxnSpPr>
-            <a:stCxn xmlns:a="http://schemas.openxmlformats.org/drawingml/2006/main" id="7" idx="3"/>
-            <a:endCxn xmlns:a="http://schemas.openxmlformats.org/drawingml/2006/main" id="11" idx="1"/>
-          </p:cNvCxnSpPr>
-          <p:nvPr/>
-        </p:nvCxnSpPr>
-        <p:spPr>
-          <a:xfrm xmlns:a="http://schemas.openxmlformats.org/drawingml/2006/main">
-            <a:off x="6057900" y="4219575"/>
-            <a:ext cx="571500" cy="0"/>
-          </a:xfrm>
-          <a:prstGeom xmlns:a="http://schemas.openxmlformats.org/drawingml/2006/main" prst="straightConnector1">
-            <a:avLst/>
-          </a:prstGeom>
-          <a:ln xmlns:a="http://schemas.openxmlformats.org/drawingml/2006/main" w="28575">
-            <a:solidFill>
-              <a:srgbClr val="9A9A9F"/>
-            </a:solidFill>
-            <a:prstDash val="solid"/>
-            <a:tailEnd type="triangle" w="med" len="med"/>
-          </a:ln>
-        </p:spPr>
-      </p:cxnSp>
-      <p:cxnSp>
-        <p:nvCxnSpPr>
-          <p:cNvPr id="683" name=""/>
-          <p:cNvCxnSpPr>
-            <a:stCxn xmlns:a="http://schemas.openxmlformats.org/drawingml/2006/main" id="11" idx="3"/>
-            <a:endCxn xmlns:a="http://schemas.openxmlformats.org/drawingml/2006/main" id="15" idx="1"/>
-          </p:cNvCxnSpPr>
-          <p:nvPr/>
-        </p:nvCxnSpPr>
-        <p:spPr>
-          <a:xfrm xmlns:a="http://schemas.openxmlformats.org/drawingml/2006/main">
-            <a:off x="8877300" y="4219575"/>
-            <a:ext cx="571500" cy="0"/>
-          </a:xfrm>
-          <a:prstGeom xmlns:a="http://schemas.openxmlformats.org/drawingml/2006/main" prst="straightConnector1">
-            <a:avLst/>
-          </a:prstGeom>
-          <a:ln xmlns:a="http://schemas.openxmlformats.org/drawingml/2006/main" w="28575">
-            <a:solidFill>
-              <a:srgbClr val="9A9A9F"/>
-            </a:solidFill>
-            <a:prstDash val="solid"/>
-            <a:tailEnd type="triangle" w="med" len="med"/>
-          </a:ln>
-        </p:spPr>
-      </p:cxnSp>
-      <p:cxnSp>
-        <p:nvCxnSpPr>
-          <p:cNvPr id="684" name=""/>
-          <p:cNvCxnSpPr>
-            <a:stCxn xmlns:a="http://schemas.openxmlformats.org/drawingml/2006/main" id="15" idx="3"/>
-            <a:endCxn xmlns:a="http://schemas.openxmlformats.org/drawingml/2006/main" id="19" idx="1"/>
-          </p:cNvCxnSpPr>
-          <p:nvPr/>
-        </p:nvCxnSpPr>
-        <p:spPr>
-          <a:xfrm xmlns:a="http://schemas.openxmlformats.org/drawingml/2006/main">
-            <a:off x="11696700" y="4219575"/>
-            <a:ext cx="571500" cy="0"/>
-          </a:xfrm>
-          <a:prstGeom xmlns:a="http://schemas.openxmlformats.org/drawingml/2006/main" prst="straightConnector1">
-            <a:avLst/>
-          </a:prstGeom>
-          <a:ln xmlns:a="http://schemas.openxmlformats.org/drawingml/2006/main" w="28575">
-            <a:solidFill>
-              <a:srgbClr val="9A9A9F"/>
-            </a:solidFill>
-            <a:prstDash val="solid"/>
-            <a:tailEnd type="triangle" w="med" len="med"/>
-          </a:ln>
-        </p:spPr>
-      </p:cxnSp>
-      <p:sp>
-        <p:nvSpPr>
-          <p:cNvPr id="27" name="">
-            <a:extLst xmlns:a="http://schemas.openxmlformats.org/drawingml/2006/main">
-              <a:ext uri="{FF2B5EF4-FFF2-40B4-BE49-F238E27FC236}">
-                <a16:creationId xmlns:a16="http://schemas.microsoft.com/office/drawing/2014/main" id="{79128475-820B-447C-A724-7D8A31328FFE}"/>
-              </a:ext>
-            </a:extLst>
-          </p:cNvPr>
-          <p:cNvSpPr>
-            <a:spLocks xmlns:a="http://schemas.openxmlformats.org/drawingml/2006/main" noGrp="1"/>
-          </p:cNvSpPr>
-          <p:nvPr/>
-        </p:nvSpPr>
-        <p:spPr>
-          <a:xfrm xmlns:a="http://schemas.openxmlformats.org/drawingml/2006/main">
-            <a:off x="2381250" y="6210300"/>
-            <a:ext cx="10477500" cy="457200"/>
-          </a:xfrm>
-          <a:prstGeom xmlns:a="http://schemas.openxmlformats.org/drawingml/2006/main" prst="rect">
-            <a:avLst/>
-          </a:prstGeom>
-          <a:noFill xmlns:a="http://schemas.openxmlformats.org/drawingml/2006/main"/>
-          <a:ln xmlns:a="http://schemas.openxmlformats.org/drawingml/2006/main" w="0">
-            <a:noFill/>
-            <a:prstDash val="solid"/>
-          </a:ln>
-        </p:spPr>
-        <p:txBody>
-          <a:bodyPr xmlns:a="http://schemas.openxmlformats.org/drawingml/2006/main" wrap="square" lIns="0" tIns="0" rIns="0" bIns="0" anchor="ctr">
-            <a:normAutofit fontScale="100000"/>
-          </a:bodyPr>
-          <a:lstStyle xmlns:a="http://schemas.openxmlformats.org/drawingml/2006/main"/>
-          <a:p xmlns:a="http://schemas.openxmlformats.org/drawingml/2006/main">
-            <a:pPr algn="ctr">
-              <a:lnSpc>
-                <a:spcPct val="100000"/>
-              </a:lnSpc>
-              <a:buNone/>
-              <a:defRPr sz="2100" b="1">
-                <a:solidFill>
-                  <a:srgbClr val="051C2A"/>
-                </a:solidFill>
-                <a:latin typeface="Calibri"/>
-                <a:ea typeface="Calibri"/>
-                <a:cs typeface="Calibri"/>
-              </a:defRPr>
-            </a:pPr>
-            <a:r>
-              <a:rPr sz="2100" b="1">
-                <a:solidFill>
-                  <a:srgbClr val="051C2A"/>
-                </a:solidFill>
-                <a:latin typeface="Calibri"/>
-                <a:ea typeface="Calibri"/>
-                <a:cs typeface="Calibri"/>
-              </a:rPr>
-              <a:t>The typed error stays visible between TOOL and replan.</a:t>
-            </a:r>
-          </a:p>
-        </p:txBody>
-      </p:sp>
-      <p:sp>
-        <p:nvSpPr>
-          <p:cNvPr id="28" name="">
-            <a:extLst xmlns:a="http://schemas.openxmlformats.org/drawingml/2006/main">
-              <a:ext uri="{FF2B5EF4-FFF2-40B4-BE49-F238E27FC236}">
-                <a16:creationId xmlns:a16="http://schemas.microsoft.com/office/drawing/2014/main" id="{685F2AAD-81FC-436A-88F7-89F49C9F1671}"/>
-              </a:ext>
-            </a:extLst>
-          </p:cNvPr>
-          <p:cNvSpPr>
-            <a:spLocks xmlns:a="http://schemas.openxmlformats.org/drawingml/2006/main" noGrp="1"/>
-          </p:cNvSpPr>
-          <p:nvPr/>
-        </p:nvSpPr>
-        <p:spPr>
-          <a:xfrm xmlns:a="http://schemas.openxmlformats.org/drawingml/2006/main">
-            <a:off x="1885950" y="6838950"/>
-            <a:ext cx="4476750" cy="323850"/>
-          </a:xfrm>
-          <a:prstGeom xmlns:a="http://schemas.openxmlformats.org/drawingml/2006/main" prst="rect">
-            <a:avLst/>
-          </a:prstGeom>
-          <a:noFill xmlns:a="http://schemas.openxmlformats.org/drawingml/2006/main"/>
-          <a:ln xmlns:a="http://schemas.openxmlformats.org/drawingml/2006/main" w="0">
-            <a:noFill/>
-            <a:prstDash val="solid"/>
-          </a:ln>
-        </p:spPr>
-        <p:txBody>
-          <a:bodyPr xmlns:a="http://schemas.openxmlformats.org/drawingml/2006/main" wrap="square" lIns="0" tIns="0" rIns="0" bIns="0" anchor="ctr">
-            <a:normAutofit fontScale="100000"/>
-          </a:bodyPr>
-          <a:lstStyle xmlns:a="http://schemas.openxmlformats.org/drawingml/2006/main"/>
-          <a:p xmlns:a="http://schemas.openxmlformats.org/drawingml/2006/main">
-            <a:pPr algn="ctr">
-              <a:lnSpc>
-                <a:spcPct val="100000"/>
-              </a:lnSpc>
-              <a:buNone/>
-              <a:defRPr sz="1500" b="0">
-                <a:solidFill>
-                  <a:srgbClr val="64748B"/>
-                </a:solidFill>
-                <a:latin typeface="Calibri"/>
-                <a:ea typeface="Calibri"/>
-                <a:cs typeface="Calibri"/>
-              </a:defRPr>
-            </a:pPr>
-            <a:r>
-              <a:rPr sz="1500" b="0">
-                <a:solidFill>
-                  <a:srgbClr val="64748B"/>
-                </a:solidFill>
-                <a:latin typeface="Calibri"/>
-                <a:ea typeface="Calibri"/>
-                <a:cs typeface="Calibri"/>
-              </a:rPr>
-              <a:t>public state</a:t>
-            </a:r>
-          </a:p>
-        </p:txBody>
-      </p:sp>
-      <p:sp>
-        <p:nvSpPr>
-          <p:cNvPr id="29" name="">
-            <a:extLst xmlns:a="http://schemas.openxmlformats.org/drawingml/2006/main">
-              <a:ext uri="{FF2B5EF4-FFF2-40B4-BE49-F238E27FC236}">
-                <a16:creationId xmlns:a16="http://schemas.microsoft.com/office/drawing/2014/main" id="{CDE04AD7-6CBE-4792-B549-765578FB3E1E}"/>
-              </a:ext>
-            </a:extLst>
-          </p:cNvPr>
-          <p:cNvSpPr>
-            <a:spLocks xmlns:a="http://schemas.openxmlformats.org/drawingml/2006/main" noGrp="1"/>
-          </p:cNvSpPr>
-          <p:nvPr/>
-        </p:nvSpPr>
-        <p:spPr>
-          <a:xfrm xmlns:a="http://schemas.openxmlformats.org/drawingml/2006/main">
-            <a:off x="8801100" y="6838950"/>
-            <a:ext cx="4762500" cy="323850"/>
-          </a:xfrm>
-          <a:prstGeom xmlns:a="http://schemas.openxmlformats.org/drawingml/2006/main" prst="rect">
-            <a:avLst/>
-          </a:prstGeom>
-          <a:noFill xmlns:a="http://schemas.openxmlformats.org/drawingml/2006/main"/>
-          <a:ln xmlns:a="http://schemas.openxmlformats.org/drawingml/2006/main" w="0">
-            <a:noFill/>
-            <a:prstDash val="solid"/>
-          </a:ln>
-        </p:spPr>
-        <p:txBody>
-          <a:bodyPr xmlns:a="http://schemas.openxmlformats.org/drawingml/2006/main" wrap="square" lIns="0" tIns="0" rIns="0" bIns="0" anchor="ctr">
-            <a:normAutofit fontScale="100000"/>
-          </a:bodyPr>
-          <a:lstStyle xmlns:a="http://schemas.openxmlformats.org/drawingml/2006/main"/>
-          <a:p xmlns:a="http://schemas.openxmlformats.org/drawingml/2006/main">
-            <a:pPr algn="ctr">
-              <a:lnSpc>
-                <a:spcPct val="100000"/>
-              </a:lnSpc>
-              <a:buNone/>
-              <a:defRPr sz="1500" b="0">
-                <a:solidFill>
-                  <a:srgbClr val="64748B"/>
-                </a:solidFill>
-                <a:latin typeface="Calibri"/>
-                <a:ea typeface="Calibri"/>
-                <a:cs typeface="Calibri"/>
-              </a:defRPr>
-            </a:pPr>
-            <a:r>
-              <a:rPr sz="1500" b="0">
-                <a:solidFill>
-                  <a:srgbClr val="64748B"/>
-                </a:solidFill>
-                <a:latin typeface="Calibri"/>
-                <a:ea typeface="Calibri"/>
-                <a:cs typeface="Calibri"/>
-              </a:rPr>
-              <a:t>one typed error</a:t>
-            </a:r>
-          </a:p>
-        </p:txBody>
-      </p:sp>
-      <p:sp>
-        <p:nvSpPr>
-          <p:cNvPr id="30" name="">
-            <a:extLst xmlns:a="http://schemas.openxmlformats.org/drawingml/2006/main">
-              <a:ext uri="{FF2B5EF4-FFF2-40B4-BE49-F238E27FC236}">
-                <a16:creationId xmlns:a16="http://schemas.microsoft.com/office/drawing/2014/main" id="{28CBA7AE-993C-4F84-A696-8D1323AC4E80}"/>
-              </a:ext>
-            </a:extLst>
-          </p:cNvPr>
-          <p:cNvSpPr>
-            <a:spLocks xmlns:a="http://schemas.openxmlformats.org/drawingml/2006/main" noGrp="1"/>
-          </p:cNvSpPr>
-          <p:nvPr/>
-        </p:nvSpPr>
-        <p:spPr>
-          <a:xfrm xmlns:a="http://schemas.openxmlformats.org/drawingml/2006/main">
-            <a:off x="857250" y="7896225"/>
-            <a:ext cx="13525500" cy="28575"/>
-          </a:xfrm>
-          <a:prstGeom xmlns:a="http://schemas.openxmlformats.org/drawingml/2006/main" prst="rect">
-            <a:avLst/>
-          </a:prstGeom>
-          <a:solidFill xmlns:a="http://schemas.openxmlformats.org/drawingml/2006/main">
-            <a:srgbClr val="E4E7E9"/>
-          </a:solidFill>
-          <a:ln xmlns:a="http://schemas.openxmlformats.org/drawingml/2006/main" w="0">
-            <a:solidFill>
-              <a:srgbClr val="E4E7E9"/>
-            </a:solidFill>
-            <a:prstDash val="solid"/>
-          </a:ln>
-        </p:spPr>
-      </p:sp>
-      <p:sp>
-        <p:nvSpPr>
-          <p:cNvPr id="31" name="">
-            <a:extLst xmlns:a="http://schemas.openxmlformats.org/drawingml/2006/main">
-              <a:ext uri="{FF2B5EF4-FFF2-40B4-BE49-F238E27FC236}">
-                <a16:creationId xmlns:a16="http://schemas.microsoft.com/office/drawing/2014/main" id="{DE97BF4D-EDBC-4480-A82B-512A72221950}"/>
-              </a:ext>
-            </a:extLst>
-          </p:cNvPr>
-          <p:cNvSpPr>
-            <a:spLocks xmlns:a="http://schemas.openxmlformats.org/drawingml/2006/main" noGrp="1"/>
-          </p:cNvSpPr>
-          <p:nvPr/>
-        </p:nvSpPr>
-        <p:spPr>
-          <a:xfrm xmlns:a="http://schemas.openxmlformats.org/drawingml/2006/main">
-            <a:off x="857250" y="7896225"/>
-            <a:ext cx="8001000" cy="38100"/>
-          </a:xfrm>
-          <a:prstGeom xmlns:a="http://schemas.openxmlformats.org/drawingml/2006/main" prst="rect">
-            <a:avLst/>
-          </a:prstGeom>
-          <a:solidFill xmlns:a="http://schemas.openxmlformats.org/drawingml/2006/main">
-            <a:srgbClr val="00A2EB"/>
-          </a:solidFill>
-          <a:ln xmlns:a="http://schemas.openxmlformats.org/drawingml/2006/main" w="0">
-            <a:solidFill>
-              <a:srgbClr val="00A2EB"/>
-            </a:solidFill>
-            <a:prstDash val="solid"/>
-          </a:ln>
-        </p:spPr>
-      </p:sp>
-      <p:sp>
-        <p:nvSpPr>
-          <p:cNvPr id="32" name="">
-            <a:extLst xmlns:a="http://schemas.openxmlformats.org/drawingml/2006/main">
-              <a:ext uri="{FF2B5EF4-FFF2-40B4-BE49-F238E27FC236}">
-                <a16:creationId xmlns:a16="http://schemas.microsoft.com/office/drawing/2014/main" id="{49281B64-2F0F-4357-A085-C65451F28236}"/>
-              </a:ext>
-            </a:extLst>
-          </p:cNvPr>
-          <p:cNvSpPr>
-            <a:spLocks xmlns:a="http://schemas.openxmlformats.org/drawingml/2006/main" noGrp="1"/>
-          </p:cNvSpPr>
-          <p:nvPr/>
-        </p:nvSpPr>
-        <p:spPr>
-          <a:xfrm xmlns:a="http://schemas.openxmlformats.org/drawingml/2006/main">
-            <a:off x="971550" y="8058150"/>
-            <a:ext cx="3714750" cy="323850"/>
-          </a:xfrm>
-          <a:prstGeom xmlns:a="http://schemas.openxmlformats.org/drawingml/2006/main" prst="rect">
-            <a:avLst/>
-          </a:prstGeom>
-          <a:noFill xmlns:a="http://schemas.openxmlformats.org/drawingml/2006/main"/>
-          <a:ln xmlns:a="http://schemas.openxmlformats.org/drawingml/2006/main" w="0">
-            <a:noFill/>
-            <a:prstDash val="solid"/>
-          </a:ln>
-        </p:spPr>
-        <p:txBody>
-          <a:bodyPr xmlns:a="http://schemas.openxmlformats.org/drawingml/2006/main" wrap="square" lIns="0" tIns="0" rIns="0" bIns="0" anchor="ctr">
-            <a:normAutofit fontScale="100000"/>
-          </a:bodyPr>
-          <a:lstStyle xmlns:a="http://schemas.openxmlformats.org/drawingml/2006/main"/>
-          <a:p xmlns:a="http://schemas.openxmlformats.org/drawingml/2006/main">
-            <a:pPr algn="l">
-              <a:lnSpc>
-                <a:spcPct val="100000"/>
-              </a:lnSpc>
-              <a:buNone/>
-              <a:defRPr sz="1200" b="0">
-                <a:solidFill>
                   <a:srgbClr val="9A9A9F"/>
                 </a:solidFill>
                 <a:latin typeface="Calibri"/>
@@ -10019,6 +8810,1613 @@
           </a:p>
         </p:txBody>
       </p:sp>
+      <p:sp>
+        <p:nvSpPr>
+          <p:cNvPr id="36" name="trace-stage-1">
+            <a:extLst xmlns:a="http://schemas.openxmlformats.org/drawingml/2006/main">
+              <a:ext uri="{FF2B5EF4-FFF2-40B4-BE49-F238E27FC236}">
+                <a16:creationId xmlns:a16="http://schemas.microsoft.com/office/drawing/2014/main" id="{EA7513CE-170F-4519-B383-AF1A0926F87F}"/>
+              </a:ext>
+            </a:extLst>
+          </p:cNvPr>
+          <p:cNvSpPr>
+            <a:spLocks xmlns:a="http://schemas.openxmlformats.org/drawingml/2006/main" noGrp="1"/>
+          </p:cNvSpPr>
+          <p:nvPr/>
+        </p:nvSpPr>
+        <p:spPr>
+          <a:xfrm xmlns:a="http://schemas.openxmlformats.org/drawingml/2006/main">
+            <a:off x="990600" y="3048000"/>
+            <a:ext cx="1771650" cy="2286000"/>
+          </a:xfrm>
+          <a:prstGeom xmlns:a="http://schemas.openxmlformats.org/drawingml/2006/main" prst="roundRect">
+            <a:avLst>
+              <a:gd name="adj" fmla="val 6452"/>
+            </a:avLst>
+          </a:prstGeom>
+          <a:noFill xmlns:a="http://schemas.openxmlformats.org/drawingml/2006/main"/>
+          <a:ln xmlns:a="http://schemas.openxmlformats.org/drawingml/2006/main" w="9525">
+            <a:solidFill>
+              <a:srgbClr val="E4E7E9"/>
+            </a:solidFill>
+            <a:prstDash val="solid"/>
+          </a:ln>
+        </p:spPr>
+      </p:sp>
+      <p:sp>
+        <p:nvSpPr>
+          <p:cNvPr id="37" name="trace-stage-1-step">
+            <a:extLst xmlns:a="http://schemas.openxmlformats.org/drawingml/2006/main">
+              <a:ext uri="{FF2B5EF4-FFF2-40B4-BE49-F238E27FC236}">
+                <a16:creationId xmlns:a16="http://schemas.microsoft.com/office/drawing/2014/main" id="{67D7FEA0-BD75-4BAE-803A-210231C3B54C}"/>
+              </a:ext>
+            </a:extLst>
+          </p:cNvPr>
+          <p:cNvSpPr>
+            <a:spLocks xmlns:a="http://schemas.openxmlformats.org/drawingml/2006/main" noGrp="1"/>
+          </p:cNvSpPr>
+          <p:nvPr/>
+        </p:nvSpPr>
+        <p:spPr>
+          <a:xfrm xmlns:a="http://schemas.openxmlformats.org/drawingml/2006/main">
+            <a:off x="1162050" y="3238500"/>
+            <a:ext cx="533400" cy="285750"/>
+          </a:xfrm>
+          <a:prstGeom xmlns:a="http://schemas.openxmlformats.org/drawingml/2006/main" prst="rect">
+            <a:avLst/>
+          </a:prstGeom>
+          <a:noFill xmlns:a="http://schemas.openxmlformats.org/drawingml/2006/main"/>
+          <a:ln xmlns:a="http://schemas.openxmlformats.org/drawingml/2006/main" w="0">
+            <a:noFill/>
+            <a:prstDash val="solid"/>
+          </a:ln>
+        </p:spPr>
+        <p:txBody>
+          <a:bodyPr xmlns:a="http://schemas.openxmlformats.org/drawingml/2006/main"/>
+          <a:lstStyle xmlns:a="http://schemas.openxmlformats.org/drawingml/2006/main"/>
+          <a:p xmlns:a="http://schemas.openxmlformats.org/drawingml/2006/main">
+            <a:pPr>
+              <a:defRPr sz="1500" b="1">
+                <a:solidFill>
+                  <a:srgbClr val="00A2EB"/>
+                </a:solidFill>
+              </a:defRPr>
+            </a:pPr>
+            <a:r>
+              <a:rPr sz="1500" b="1">
+                <a:solidFill>
+                  <a:srgbClr val="00A2EB"/>
+                </a:solidFill>
+              </a:rPr>
+              <a:t>01</a:t>
+            </a:r>
+          </a:p>
+        </p:txBody>
+      </p:sp>
+      <p:sp>
+        <p:nvSpPr>
+          <p:cNvPr id="38" name="trace-stage-1-title">
+            <a:extLst xmlns:a="http://schemas.openxmlformats.org/drawingml/2006/main">
+              <a:ext uri="{FF2B5EF4-FFF2-40B4-BE49-F238E27FC236}">
+                <a16:creationId xmlns:a16="http://schemas.microsoft.com/office/drawing/2014/main" id="{F46221E3-E20E-4ED8-B523-2716C9BAD7E0}"/>
+              </a:ext>
+            </a:extLst>
+          </p:cNvPr>
+          <p:cNvSpPr>
+            <a:spLocks xmlns:a="http://schemas.openxmlformats.org/drawingml/2006/main" noGrp="1"/>
+          </p:cNvSpPr>
+          <p:nvPr/>
+        </p:nvSpPr>
+        <p:spPr>
+          <a:xfrm xmlns:a="http://schemas.openxmlformats.org/drawingml/2006/main">
+            <a:off x="1104900" y="3733800"/>
+            <a:ext cx="1543050" cy="590550"/>
+          </a:xfrm>
+          <a:prstGeom xmlns:a="http://schemas.openxmlformats.org/drawingml/2006/main" prst="rect">
+            <a:avLst/>
+          </a:prstGeom>
+          <a:noFill xmlns:a="http://schemas.openxmlformats.org/drawingml/2006/main"/>
+          <a:ln xmlns:a="http://schemas.openxmlformats.org/drawingml/2006/main" w="0">
+            <a:noFill/>
+            <a:prstDash val="solid"/>
+          </a:ln>
+        </p:spPr>
+        <p:txBody>
+          <a:bodyPr xmlns:a="http://schemas.openxmlformats.org/drawingml/2006/main"/>
+          <a:lstStyle xmlns:a="http://schemas.openxmlformats.org/drawingml/2006/main"/>
+          <a:p xmlns:a="http://schemas.openxmlformats.org/drawingml/2006/main">
+            <a:pPr algn="ctr">
+              <a:defRPr sz="1575" b="1">
+                <a:solidFill>
+                  <a:srgbClr val="0A2030"/>
+                </a:solidFill>
+              </a:defRPr>
+            </a:pPr>
+            <a:r>
+              <a:rPr sz="1575" b="1">
+                <a:solidFill>
+                  <a:srgbClr val="0A2030"/>
+                </a:solidFill>
+              </a:rPr>
+              <a:t>PLAN</a:t>
+            </a:r>
+          </a:p>
+        </p:txBody>
+      </p:sp>
+      <p:sp>
+        <p:nvSpPr>
+          <p:cNvPr id="39" name="trace-stage-1-body">
+            <a:extLst xmlns:a="http://schemas.openxmlformats.org/drawingml/2006/main">
+              <a:ext uri="{FF2B5EF4-FFF2-40B4-BE49-F238E27FC236}">
+                <a16:creationId xmlns:a16="http://schemas.microsoft.com/office/drawing/2014/main" id="{D1B29EEE-C8B0-4827-BFFE-35C898FB7054}"/>
+              </a:ext>
+            </a:extLst>
+          </p:cNvPr>
+          <p:cNvSpPr>
+            <a:spLocks xmlns:a="http://schemas.openxmlformats.org/drawingml/2006/main" noGrp="1"/>
+          </p:cNvSpPr>
+          <p:nvPr/>
+        </p:nvSpPr>
+        <p:spPr>
+          <a:xfrm xmlns:a="http://schemas.openxmlformats.org/drawingml/2006/main">
+            <a:off x="1028700" y="4533900"/>
+            <a:ext cx="1695450" cy="552450"/>
+          </a:xfrm>
+          <a:prstGeom xmlns:a="http://schemas.openxmlformats.org/drawingml/2006/main" prst="rect">
+            <a:avLst/>
+          </a:prstGeom>
+          <a:noFill xmlns:a="http://schemas.openxmlformats.org/drawingml/2006/main"/>
+          <a:ln xmlns:a="http://schemas.openxmlformats.org/drawingml/2006/main" w="0">
+            <a:noFill/>
+            <a:prstDash val="solid"/>
+          </a:ln>
+        </p:spPr>
+        <p:txBody>
+          <a:bodyPr xmlns:a="http://schemas.openxmlformats.org/drawingml/2006/main"/>
+          <a:lstStyle xmlns:a="http://schemas.openxmlformats.org/drawingml/2006/main"/>
+          <a:p xmlns:a="http://schemas.openxmlformats.org/drawingml/2006/main">
+            <a:pPr algn="ctr">
+              <a:defRPr sz="1200" b="0">
+                <a:solidFill>
+                  <a:srgbClr val="1F40CB"/>
+                </a:solidFill>
+              </a:defRPr>
+            </a:pPr>
+            <a:r>
+              <a:rPr sz="1200" b="0">
+                <a:solidFill>
+                  <a:srgbClr val="1F40CB"/>
+                </a:solidFill>
+              </a:rPr>
+              <a:t>mission +</a:t>
+            </a:r>
+          </a:p>
+          <a:p xmlns:a="http://schemas.openxmlformats.org/drawingml/2006/main">
+            <a:pPr algn="ctr">
+              <a:defRPr sz="1200" b="0">
+                <a:solidFill>
+                  <a:srgbClr val="1F40CB"/>
+                </a:solidFill>
+              </a:defRPr>
+            </a:pPr>
+            <a:r>
+              <a:rPr sz="1200" b="0">
+                <a:solidFill>
+                  <a:srgbClr val="1F40CB"/>
+                </a:solidFill>
+              </a:rPr>
+              <a:t>typed steps</a:t>
+            </a:r>
+          </a:p>
+        </p:txBody>
+      </p:sp>
+      <p:sp>
+        <p:nvSpPr>
+          <p:cNvPr id="40" name="trace-stage-2">
+            <a:extLst xmlns:a="http://schemas.openxmlformats.org/drawingml/2006/main">
+              <a:ext uri="{FF2B5EF4-FFF2-40B4-BE49-F238E27FC236}">
+                <a16:creationId xmlns:a16="http://schemas.microsoft.com/office/drawing/2014/main" id="{65B12F75-F768-4BE1-9084-C180190E3827}"/>
+              </a:ext>
+            </a:extLst>
+          </p:cNvPr>
+          <p:cNvSpPr>
+            <a:spLocks xmlns:a="http://schemas.openxmlformats.org/drawingml/2006/main" noGrp="1"/>
+          </p:cNvSpPr>
+          <p:nvPr/>
+        </p:nvSpPr>
+        <p:spPr>
+          <a:xfrm xmlns:a="http://schemas.openxmlformats.org/drawingml/2006/main">
+            <a:off x="2943225" y="3048000"/>
+            <a:ext cx="1771650" cy="2286000"/>
+          </a:xfrm>
+          <a:prstGeom xmlns:a="http://schemas.openxmlformats.org/drawingml/2006/main" prst="roundRect">
+            <a:avLst>
+              <a:gd name="adj" fmla="val 6452"/>
+            </a:avLst>
+          </a:prstGeom>
+          <a:noFill xmlns:a="http://schemas.openxmlformats.org/drawingml/2006/main"/>
+          <a:ln xmlns:a="http://schemas.openxmlformats.org/drawingml/2006/main" w="9525">
+            <a:solidFill>
+              <a:srgbClr val="E4E7E9"/>
+            </a:solidFill>
+            <a:prstDash val="solid"/>
+          </a:ln>
+        </p:spPr>
+      </p:sp>
+      <p:sp>
+        <p:nvSpPr>
+          <p:cNvPr id="41" name="trace-stage-2-step">
+            <a:extLst xmlns:a="http://schemas.openxmlformats.org/drawingml/2006/main">
+              <a:ext uri="{FF2B5EF4-FFF2-40B4-BE49-F238E27FC236}">
+                <a16:creationId xmlns:a16="http://schemas.microsoft.com/office/drawing/2014/main" id="{63D6C81A-FC0E-4E18-B82B-7DC9F9B4A594}"/>
+              </a:ext>
+            </a:extLst>
+          </p:cNvPr>
+          <p:cNvSpPr>
+            <a:spLocks xmlns:a="http://schemas.openxmlformats.org/drawingml/2006/main" noGrp="1"/>
+          </p:cNvSpPr>
+          <p:nvPr/>
+        </p:nvSpPr>
+        <p:spPr>
+          <a:xfrm xmlns:a="http://schemas.openxmlformats.org/drawingml/2006/main">
+            <a:off x="3114675" y="3238500"/>
+            <a:ext cx="533400" cy="285750"/>
+          </a:xfrm>
+          <a:prstGeom xmlns:a="http://schemas.openxmlformats.org/drawingml/2006/main" prst="rect">
+            <a:avLst/>
+          </a:prstGeom>
+          <a:noFill xmlns:a="http://schemas.openxmlformats.org/drawingml/2006/main"/>
+          <a:ln xmlns:a="http://schemas.openxmlformats.org/drawingml/2006/main" w="0">
+            <a:noFill/>
+            <a:prstDash val="solid"/>
+          </a:ln>
+        </p:spPr>
+        <p:txBody>
+          <a:bodyPr xmlns:a="http://schemas.openxmlformats.org/drawingml/2006/main"/>
+          <a:lstStyle xmlns:a="http://schemas.openxmlformats.org/drawingml/2006/main"/>
+          <a:p xmlns:a="http://schemas.openxmlformats.org/drawingml/2006/main">
+            <a:pPr>
+              <a:defRPr sz="1500" b="1">
+                <a:solidFill>
+                  <a:srgbClr val="00A2EB"/>
+                </a:solidFill>
+              </a:defRPr>
+            </a:pPr>
+            <a:r>
+              <a:rPr sz="1500" b="1">
+                <a:solidFill>
+                  <a:srgbClr val="00A2EB"/>
+                </a:solidFill>
+              </a:rPr>
+              <a:t>02</a:t>
+            </a:r>
+          </a:p>
+        </p:txBody>
+      </p:sp>
+      <p:sp>
+        <p:nvSpPr>
+          <p:cNvPr id="42" name="trace-stage-2-title">
+            <a:extLst xmlns:a="http://schemas.openxmlformats.org/drawingml/2006/main">
+              <a:ext uri="{FF2B5EF4-FFF2-40B4-BE49-F238E27FC236}">
+                <a16:creationId xmlns:a16="http://schemas.microsoft.com/office/drawing/2014/main" id="{07FF58E4-B114-4034-B0EF-B2F909BB2F23}"/>
+              </a:ext>
+            </a:extLst>
+          </p:cNvPr>
+          <p:cNvSpPr>
+            <a:spLocks xmlns:a="http://schemas.openxmlformats.org/drawingml/2006/main" noGrp="1"/>
+          </p:cNvSpPr>
+          <p:nvPr/>
+        </p:nvSpPr>
+        <p:spPr>
+          <a:xfrm xmlns:a="http://schemas.openxmlformats.org/drawingml/2006/main">
+            <a:off x="3057525" y="3733800"/>
+            <a:ext cx="1543050" cy="590550"/>
+          </a:xfrm>
+          <a:prstGeom xmlns:a="http://schemas.openxmlformats.org/drawingml/2006/main" prst="rect">
+            <a:avLst/>
+          </a:prstGeom>
+          <a:noFill xmlns:a="http://schemas.openxmlformats.org/drawingml/2006/main"/>
+          <a:ln xmlns:a="http://schemas.openxmlformats.org/drawingml/2006/main" w="0">
+            <a:noFill/>
+            <a:prstDash val="solid"/>
+          </a:ln>
+        </p:spPr>
+        <p:txBody>
+          <a:bodyPr xmlns:a="http://schemas.openxmlformats.org/drawingml/2006/main"/>
+          <a:lstStyle xmlns:a="http://schemas.openxmlformats.org/drawingml/2006/main"/>
+          <a:p xmlns:a="http://schemas.openxmlformats.org/drawingml/2006/main">
+            <a:pPr algn="ctr">
+              <a:defRPr sz="1575" b="1">
+                <a:solidFill>
+                  <a:srgbClr val="0A2030"/>
+                </a:solidFill>
+              </a:defRPr>
+            </a:pPr>
+            <a:r>
+              <a:rPr sz="1575" b="1">
+                <a:solidFill>
+                  <a:srgbClr val="0A2030"/>
+                </a:solidFill>
+              </a:rPr>
+              <a:t>PLAN GATE</a:t>
+            </a:r>
+          </a:p>
+        </p:txBody>
+      </p:sp>
+      <p:sp>
+        <p:nvSpPr>
+          <p:cNvPr id="43" name="trace-stage-2-body">
+            <a:extLst xmlns:a="http://schemas.openxmlformats.org/drawingml/2006/main">
+              <a:ext uri="{FF2B5EF4-FFF2-40B4-BE49-F238E27FC236}">
+                <a16:creationId xmlns:a16="http://schemas.microsoft.com/office/drawing/2014/main" id="{F8D56BB3-49F3-4446-BF77-B669E57FBBCA}"/>
+              </a:ext>
+            </a:extLst>
+          </p:cNvPr>
+          <p:cNvSpPr>
+            <a:spLocks xmlns:a="http://schemas.openxmlformats.org/drawingml/2006/main" noGrp="1"/>
+          </p:cNvSpPr>
+          <p:nvPr/>
+        </p:nvSpPr>
+        <p:spPr>
+          <a:xfrm xmlns:a="http://schemas.openxmlformats.org/drawingml/2006/main">
+            <a:off x="2981325" y="4533900"/>
+            <a:ext cx="1695450" cy="552450"/>
+          </a:xfrm>
+          <a:prstGeom xmlns:a="http://schemas.openxmlformats.org/drawingml/2006/main" prst="rect">
+            <a:avLst/>
+          </a:prstGeom>
+          <a:noFill xmlns:a="http://schemas.openxmlformats.org/drawingml/2006/main"/>
+          <a:ln xmlns:a="http://schemas.openxmlformats.org/drawingml/2006/main" w="0">
+            <a:noFill/>
+            <a:prstDash val="solid"/>
+          </a:ln>
+        </p:spPr>
+        <p:txBody>
+          <a:bodyPr xmlns:a="http://schemas.openxmlformats.org/drawingml/2006/main"/>
+          <a:lstStyle xmlns:a="http://schemas.openxmlformats.org/drawingml/2006/main"/>
+          <a:p xmlns:a="http://schemas.openxmlformats.org/drawingml/2006/main">
+            <a:pPr algn="ctr">
+              <a:defRPr sz="1200" b="0">
+                <a:solidFill>
+                  <a:srgbClr val="1F40CB"/>
+                </a:solidFill>
+              </a:defRPr>
+            </a:pPr>
+            <a:r>
+              <a:rPr sz="1200" b="0">
+                <a:solidFill>
+                  <a:srgbClr val="1F40CB"/>
+                </a:solidFill>
+              </a:rPr>
+              <a:t>schema +</a:t>
+            </a:r>
+          </a:p>
+          <a:p xmlns:a="http://schemas.openxmlformats.org/drawingml/2006/main">
+            <a:pPr algn="ctr">
+              <a:defRPr sz="1200" b="0">
+                <a:solidFill>
+                  <a:srgbClr val="1F40CB"/>
+                </a:solidFill>
+              </a:defRPr>
+            </a:pPr>
+            <a:r>
+              <a:rPr sz="1200" b="0">
+                <a:solidFill>
+                  <a:srgbClr val="1F40CB"/>
+                </a:solidFill>
+              </a:rPr>
+              <a:t>budget</a:t>
+            </a:r>
+          </a:p>
+        </p:txBody>
+      </p:sp>
+      <p:sp>
+        <p:nvSpPr>
+          <p:cNvPr id="44" name="trace-stage-3">
+            <a:extLst xmlns:a="http://schemas.openxmlformats.org/drawingml/2006/main">
+              <a:ext uri="{FF2B5EF4-FFF2-40B4-BE49-F238E27FC236}">
+                <a16:creationId xmlns:a16="http://schemas.microsoft.com/office/drawing/2014/main" id="{338B1008-D419-4DB3-9570-40EC9F703C4E}"/>
+              </a:ext>
+            </a:extLst>
+          </p:cNvPr>
+          <p:cNvSpPr>
+            <a:spLocks xmlns:a="http://schemas.openxmlformats.org/drawingml/2006/main" noGrp="1"/>
+          </p:cNvSpPr>
+          <p:nvPr/>
+        </p:nvSpPr>
+        <p:spPr>
+          <a:xfrm xmlns:a="http://schemas.openxmlformats.org/drawingml/2006/main">
+            <a:off x="4895850" y="3048000"/>
+            <a:ext cx="1771650" cy="2286000"/>
+          </a:xfrm>
+          <a:prstGeom xmlns:a="http://schemas.openxmlformats.org/drawingml/2006/main" prst="roundRect">
+            <a:avLst>
+              <a:gd name="adj" fmla="val 6452"/>
+            </a:avLst>
+          </a:prstGeom>
+          <a:noFill xmlns:a="http://schemas.openxmlformats.org/drawingml/2006/main"/>
+          <a:ln xmlns:a="http://schemas.openxmlformats.org/drawingml/2006/main" w="19050">
+            <a:solidFill>
+              <a:srgbClr val="051C2A"/>
+            </a:solidFill>
+            <a:prstDash val="solid"/>
+          </a:ln>
+        </p:spPr>
+      </p:sp>
+      <p:sp>
+        <p:nvSpPr>
+          <p:cNvPr id="45" name="trace-stage-3-step">
+            <a:extLst xmlns:a="http://schemas.openxmlformats.org/drawingml/2006/main">
+              <a:ext uri="{FF2B5EF4-FFF2-40B4-BE49-F238E27FC236}">
+                <a16:creationId xmlns:a16="http://schemas.microsoft.com/office/drawing/2014/main" id="{900A3379-3E75-4D8E-A6DE-9540E7365D2F}"/>
+              </a:ext>
+            </a:extLst>
+          </p:cNvPr>
+          <p:cNvSpPr>
+            <a:spLocks xmlns:a="http://schemas.openxmlformats.org/drawingml/2006/main" noGrp="1"/>
+          </p:cNvSpPr>
+          <p:nvPr/>
+        </p:nvSpPr>
+        <p:spPr>
+          <a:xfrm xmlns:a="http://schemas.openxmlformats.org/drawingml/2006/main">
+            <a:off x="5067300" y="3238500"/>
+            <a:ext cx="533400" cy="285750"/>
+          </a:xfrm>
+          <a:prstGeom xmlns:a="http://schemas.openxmlformats.org/drawingml/2006/main" prst="rect">
+            <a:avLst/>
+          </a:prstGeom>
+          <a:noFill xmlns:a="http://schemas.openxmlformats.org/drawingml/2006/main"/>
+          <a:ln xmlns:a="http://schemas.openxmlformats.org/drawingml/2006/main" w="0">
+            <a:noFill/>
+            <a:prstDash val="solid"/>
+          </a:ln>
+        </p:spPr>
+        <p:txBody>
+          <a:bodyPr xmlns:a="http://schemas.openxmlformats.org/drawingml/2006/main"/>
+          <a:lstStyle xmlns:a="http://schemas.openxmlformats.org/drawingml/2006/main"/>
+          <a:p xmlns:a="http://schemas.openxmlformats.org/drawingml/2006/main">
+            <a:pPr>
+              <a:defRPr sz="1500" b="1">
+                <a:solidFill>
+                  <a:srgbClr val="00A2EB"/>
+                </a:solidFill>
+              </a:defRPr>
+            </a:pPr>
+            <a:r>
+              <a:rPr sz="1500" b="1">
+                <a:solidFill>
+                  <a:srgbClr val="00A2EB"/>
+                </a:solidFill>
+              </a:rPr>
+              <a:t>03</a:t>
+            </a:r>
+          </a:p>
+        </p:txBody>
+      </p:sp>
+      <p:sp>
+        <p:nvSpPr>
+          <p:cNvPr id="46" name="trace-stage-3-title">
+            <a:extLst xmlns:a="http://schemas.openxmlformats.org/drawingml/2006/main">
+              <a:ext uri="{FF2B5EF4-FFF2-40B4-BE49-F238E27FC236}">
+                <a16:creationId xmlns:a16="http://schemas.microsoft.com/office/drawing/2014/main" id="{E9F01598-46EE-4682-BBA2-2356503767C7}"/>
+              </a:ext>
+            </a:extLst>
+          </p:cNvPr>
+          <p:cNvSpPr>
+            <a:spLocks xmlns:a="http://schemas.openxmlformats.org/drawingml/2006/main" noGrp="1"/>
+          </p:cNvSpPr>
+          <p:nvPr/>
+        </p:nvSpPr>
+        <p:spPr>
+          <a:xfrm xmlns:a="http://schemas.openxmlformats.org/drawingml/2006/main">
+            <a:off x="5010150" y="3733800"/>
+            <a:ext cx="1543050" cy="590550"/>
+          </a:xfrm>
+          <a:prstGeom xmlns:a="http://schemas.openxmlformats.org/drawingml/2006/main" prst="rect">
+            <a:avLst/>
+          </a:prstGeom>
+          <a:noFill xmlns:a="http://schemas.openxmlformats.org/drawingml/2006/main"/>
+          <a:ln xmlns:a="http://schemas.openxmlformats.org/drawingml/2006/main" w="0">
+            <a:noFill/>
+            <a:prstDash val="solid"/>
+          </a:ln>
+        </p:spPr>
+        <p:txBody>
+          <a:bodyPr xmlns:a="http://schemas.openxmlformats.org/drawingml/2006/main"/>
+          <a:lstStyle xmlns:a="http://schemas.openxmlformats.org/drawingml/2006/main"/>
+          <a:p xmlns:a="http://schemas.openxmlformats.org/drawingml/2006/main">
+            <a:pPr algn="ctr">
+              <a:defRPr sz="1575" b="1">
+                <a:solidFill>
+                  <a:srgbClr val="0A2030"/>
+                </a:solidFill>
+              </a:defRPr>
+            </a:pPr>
+            <a:r>
+              <a:rPr sz="1575" b="1">
+                <a:solidFill>
+                  <a:srgbClr val="0A2030"/>
+                </a:solidFill>
+              </a:rPr>
+              <a:t>TOOL</a:t>
+            </a:r>
+          </a:p>
+          <a:p xmlns:a="http://schemas.openxmlformats.org/drawingml/2006/main">
+            <a:pPr algn="ctr">
+              <a:defRPr sz="1575" b="1">
+                <a:solidFill>
+                  <a:srgbClr val="0A2030"/>
+                </a:solidFill>
+              </a:defRPr>
+            </a:pPr>
+            <a:r>
+              <a:rPr sz="1575" b="1">
+                <a:solidFill>
+                  <a:srgbClr val="0A2030"/>
+                </a:solidFill>
+              </a:rPr>
+              <a:t>ATTEMPTS</a:t>
+            </a:r>
+          </a:p>
+        </p:txBody>
+      </p:sp>
+      <p:sp>
+        <p:nvSpPr>
+          <p:cNvPr id="47" name="trace-stage-3-body">
+            <a:extLst xmlns:a="http://schemas.openxmlformats.org/drawingml/2006/main">
+              <a:ext uri="{FF2B5EF4-FFF2-40B4-BE49-F238E27FC236}">
+                <a16:creationId xmlns:a16="http://schemas.microsoft.com/office/drawing/2014/main" id="{0563448A-43C5-4965-BC67-DFCE3D58FA23}"/>
+              </a:ext>
+            </a:extLst>
+          </p:cNvPr>
+          <p:cNvSpPr>
+            <a:spLocks xmlns:a="http://schemas.openxmlformats.org/drawingml/2006/main" noGrp="1"/>
+          </p:cNvSpPr>
+          <p:nvPr/>
+        </p:nvSpPr>
+        <p:spPr>
+          <a:xfrm xmlns:a="http://schemas.openxmlformats.org/drawingml/2006/main">
+            <a:off x="4933950" y="4533900"/>
+            <a:ext cx="1695450" cy="552450"/>
+          </a:xfrm>
+          <a:prstGeom xmlns:a="http://schemas.openxmlformats.org/drawingml/2006/main" prst="rect">
+            <a:avLst/>
+          </a:prstGeom>
+          <a:noFill xmlns:a="http://schemas.openxmlformats.org/drawingml/2006/main"/>
+          <a:ln xmlns:a="http://schemas.openxmlformats.org/drawingml/2006/main" w="0">
+            <a:noFill/>
+            <a:prstDash val="solid"/>
+          </a:ln>
+        </p:spPr>
+        <p:txBody>
+          <a:bodyPr xmlns:a="http://schemas.openxmlformats.org/drawingml/2006/main"/>
+          <a:lstStyle xmlns:a="http://schemas.openxmlformats.org/drawingml/2006/main"/>
+          <a:p xmlns:a="http://schemas.openxmlformats.org/drawingml/2006/main">
+            <a:pPr algn="ctr">
+              <a:defRPr sz="1200" b="0">
+                <a:solidFill>
+                  <a:srgbClr val="F07D00"/>
+                </a:solidFill>
+              </a:defRPr>
+            </a:pPr>
+            <a:r>
+              <a:rPr sz="1200" b="0">
+                <a:solidFill>
+                  <a:srgbClr val="F07D00"/>
+                </a:solidFill>
+              </a:rPr>
+              <a:t>attempts 1-3</a:t>
+            </a:r>
+          </a:p>
+          <a:p xmlns:a="http://schemas.openxmlformats.org/drawingml/2006/main">
+            <a:pPr algn="ctr">
+              <a:defRPr sz="1200" b="0">
+                <a:solidFill>
+                  <a:srgbClr val="F07D00"/>
+                </a:solidFill>
+              </a:defRPr>
+            </a:pPr>
+            <a:r>
+              <a:rPr sz="1200" b="0">
+                <a:solidFill>
+                  <a:srgbClr val="F07D00"/>
+                </a:solidFill>
+              </a:rPr>
+              <a:t>unsupported_metric</a:t>
+            </a:r>
+          </a:p>
+        </p:txBody>
+      </p:sp>
+      <p:sp>
+        <p:nvSpPr>
+          <p:cNvPr id="48" name="trace-stage-4">
+            <a:extLst xmlns:a="http://schemas.openxmlformats.org/drawingml/2006/main">
+              <a:ext uri="{FF2B5EF4-FFF2-40B4-BE49-F238E27FC236}">
+                <a16:creationId xmlns:a16="http://schemas.microsoft.com/office/drawing/2014/main" id="{C3B10C6A-E59F-4187-A6D6-6A05FE851838}"/>
+              </a:ext>
+            </a:extLst>
+          </p:cNvPr>
+          <p:cNvSpPr>
+            <a:spLocks xmlns:a="http://schemas.openxmlformats.org/drawingml/2006/main" noGrp="1"/>
+          </p:cNvSpPr>
+          <p:nvPr/>
+        </p:nvSpPr>
+        <p:spPr>
+          <a:xfrm xmlns:a="http://schemas.openxmlformats.org/drawingml/2006/main">
+            <a:off x="6848475" y="3048000"/>
+            <a:ext cx="1771650" cy="2286000"/>
+          </a:xfrm>
+          <a:prstGeom xmlns:a="http://schemas.openxmlformats.org/drawingml/2006/main" prst="roundRect">
+            <a:avLst>
+              <a:gd name="adj" fmla="val 6452"/>
+            </a:avLst>
+          </a:prstGeom>
+          <a:noFill xmlns:a="http://schemas.openxmlformats.org/drawingml/2006/main"/>
+          <a:ln xmlns:a="http://schemas.openxmlformats.org/drawingml/2006/main" w="19050">
+            <a:solidFill>
+              <a:srgbClr val="F07D00"/>
+            </a:solidFill>
+            <a:prstDash val="solid"/>
+          </a:ln>
+        </p:spPr>
+      </p:sp>
+      <p:sp>
+        <p:nvSpPr>
+          <p:cNvPr id="49" name="trace-stage-4-step">
+            <a:extLst xmlns:a="http://schemas.openxmlformats.org/drawingml/2006/main">
+              <a:ext uri="{FF2B5EF4-FFF2-40B4-BE49-F238E27FC236}">
+                <a16:creationId xmlns:a16="http://schemas.microsoft.com/office/drawing/2014/main" id="{8BF90EA8-2443-4E4C-B53A-B022E697EBFE}"/>
+              </a:ext>
+            </a:extLst>
+          </p:cNvPr>
+          <p:cNvSpPr>
+            <a:spLocks xmlns:a="http://schemas.openxmlformats.org/drawingml/2006/main" noGrp="1"/>
+          </p:cNvSpPr>
+          <p:nvPr/>
+        </p:nvSpPr>
+        <p:spPr>
+          <a:xfrm xmlns:a="http://schemas.openxmlformats.org/drawingml/2006/main">
+            <a:off x="7019925" y="3238500"/>
+            <a:ext cx="533400" cy="285750"/>
+          </a:xfrm>
+          <a:prstGeom xmlns:a="http://schemas.openxmlformats.org/drawingml/2006/main" prst="rect">
+            <a:avLst/>
+          </a:prstGeom>
+          <a:noFill xmlns:a="http://schemas.openxmlformats.org/drawingml/2006/main"/>
+          <a:ln xmlns:a="http://schemas.openxmlformats.org/drawingml/2006/main" w="0">
+            <a:noFill/>
+            <a:prstDash val="solid"/>
+          </a:ln>
+        </p:spPr>
+        <p:txBody>
+          <a:bodyPr xmlns:a="http://schemas.openxmlformats.org/drawingml/2006/main"/>
+          <a:lstStyle xmlns:a="http://schemas.openxmlformats.org/drawingml/2006/main"/>
+          <a:p xmlns:a="http://schemas.openxmlformats.org/drawingml/2006/main">
+            <a:pPr>
+              <a:defRPr sz="1500" b="1">
+                <a:solidFill>
+                  <a:srgbClr val="00A2EB"/>
+                </a:solidFill>
+              </a:defRPr>
+            </a:pPr>
+            <a:r>
+              <a:rPr sz="1500" b="1">
+                <a:solidFill>
+                  <a:srgbClr val="00A2EB"/>
+                </a:solidFill>
+              </a:rPr>
+              <a:t>04</a:t>
+            </a:r>
+          </a:p>
+        </p:txBody>
+      </p:sp>
+      <p:sp>
+        <p:nvSpPr>
+          <p:cNvPr id="50" name="trace-stage-4-title">
+            <a:extLst xmlns:a="http://schemas.openxmlformats.org/drawingml/2006/main">
+              <a:ext uri="{FF2B5EF4-FFF2-40B4-BE49-F238E27FC236}">
+                <a16:creationId xmlns:a16="http://schemas.microsoft.com/office/drawing/2014/main" id="{20E81F41-414E-46F1-9017-282A4CDFF8DF}"/>
+              </a:ext>
+            </a:extLst>
+          </p:cNvPr>
+          <p:cNvSpPr>
+            <a:spLocks xmlns:a="http://schemas.openxmlformats.org/drawingml/2006/main" noGrp="1"/>
+          </p:cNvSpPr>
+          <p:nvPr/>
+        </p:nvSpPr>
+        <p:spPr>
+          <a:xfrm xmlns:a="http://schemas.openxmlformats.org/drawingml/2006/main">
+            <a:off x="6962775" y="3733800"/>
+            <a:ext cx="1543050" cy="590550"/>
+          </a:xfrm>
+          <a:prstGeom xmlns:a="http://schemas.openxmlformats.org/drawingml/2006/main" prst="rect">
+            <a:avLst/>
+          </a:prstGeom>
+          <a:noFill xmlns:a="http://schemas.openxmlformats.org/drawingml/2006/main"/>
+          <a:ln xmlns:a="http://schemas.openxmlformats.org/drawingml/2006/main" w="0">
+            <a:noFill/>
+            <a:prstDash val="solid"/>
+          </a:ln>
+        </p:spPr>
+        <p:txBody>
+          <a:bodyPr xmlns:a="http://schemas.openxmlformats.org/drawingml/2006/main"/>
+          <a:lstStyle xmlns:a="http://schemas.openxmlformats.org/drawingml/2006/main"/>
+          <a:p xmlns:a="http://schemas.openxmlformats.org/drawingml/2006/main">
+            <a:pPr algn="ctr">
+              <a:defRPr sz="1575" b="1">
+                <a:solidFill>
+                  <a:srgbClr val="F07D00"/>
+                </a:solidFill>
+              </a:defRPr>
+            </a:pPr>
+            <a:r>
+              <a:rPr sz="1575" b="1">
+                <a:solidFill>
+                  <a:srgbClr val="F07D00"/>
+                </a:solidFill>
+              </a:rPr>
+              <a:t>REPLAN</a:t>
+            </a:r>
+          </a:p>
+        </p:txBody>
+      </p:sp>
+      <p:sp>
+        <p:nvSpPr>
+          <p:cNvPr id="51" name="trace-stage-4-body">
+            <a:extLst xmlns:a="http://schemas.openxmlformats.org/drawingml/2006/main">
+              <a:ext uri="{FF2B5EF4-FFF2-40B4-BE49-F238E27FC236}">
+                <a16:creationId xmlns:a16="http://schemas.microsoft.com/office/drawing/2014/main" id="{531F0166-3794-4A33-BF4C-0500EE6B1413}"/>
+              </a:ext>
+            </a:extLst>
+          </p:cNvPr>
+          <p:cNvSpPr>
+            <a:spLocks xmlns:a="http://schemas.openxmlformats.org/drawingml/2006/main" noGrp="1"/>
+          </p:cNvSpPr>
+          <p:nvPr/>
+        </p:nvSpPr>
+        <p:spPr>
+          <a:xfrm xmlns:a="http://schemas.openxmlformats.org/drawingml/2006/main">
+            <a:off x="6886575" y="4533900"/>
+            <a:ext cx="1695450" cy="552450"/>
+          </a:xfrm>
+          <a:prstGeom xmlns:a="http://schemas.openxmlformats.org/drawingml/2006/main" prst="rect">
+            <a:avLst/>
+          </a:prstGeom>
+          <a:noFill xmlns:a="http://schemas.openxmlformats.org/drawingml/2006/main"/>
+          <a:ln xmlns:a="http://schemas.openxmlformats.org/drawingml/2006/main" w="0">
+            <a:noFill/>
+            <a:prstDash val="solid"/>
+          </a:ln>
+        </p:spPr>
+        <p:txBody>
+          <a:bodyPr xmlns:a="http://schemas.openxmlformats.org/drawingml/2006/main"/>
+          <a:lstStyle xmlns:a="http://schemas.openxmlformats.org/drawingml/2006/main"/>
+          <a:p xmlns:a="http://schemas.openxmlformats.org/drawingml/2006/main">
+            <a:pPr algn="ctr">
+              <a:defRPr sz="1200" b="0">
+                <a:solidFill>
+                  <a:srgbClr val="F07D00"/>
+                </a:solidFill>
+              </a:defRPr>
+            </a:pPr>
+            <a:r>
+              <a:rPr sz="1200" b="0">
+                <a:solidFill>
+                  <a:srgbClr val="F07D00"/>
+                </a:solidFill>
+              </a:rPr>
+              <a:t>revision 1</a:t>
+            </a:r>
+          </a:p>
+          <a:p xmlns:a="http://schemas.openxmlformats.org/drawingml/2006/main">
+            <a:pPr algn="ctr">
+              <a:defRPr sz="1200" b="0">
+                <a:solidFill>
+                  <a:srgbClr val="F07D00"/>
+                </a:solidFill>
+              </a:defRPr>
+            </a:pPr>
+            <a:r>
+              <a:rPr sz="1200" b="0">
+                <a:solidFill>
+                  <a:srgbClr val="F07D00"/>
+                </a:solidFill>
+              </a:rPr>
+              <a:t>bounded recovery</a:t>
+            </a:r>
+          </a:p>
+        </p:txBody>
+      </p:sp>
+      <p:sp>
+        <p:nvSpPr>
+          <p:cNvPr id="52" name="trace-stage-5">
+            <a:extLst xmlns:a="http://schemas.openxmlformats.org/drawingml/2006/main">
+              <a:ext uri="{FF2B5EF4-FFF2-40B4-BE49-F238E27FC236}">
+                <a16:creationId xmlns:a16="http://schemas.microsoft.com/office/drawing/2014/main" id="{A66F224A-79FC-4433-8EE4-B0B6F50595F9}"/>
+              </a:ext>
+            </a:extLst>
+          </p:cNvPr>
+          <p:cNvSpPr>
+            <a:spLocks xmlns:a="http://schemas.openxmlformats.org/drawingml/2006/main" noGrp="1"/>
+          </p:cNvSpPr>
+          <p:nvPr/>
+        </p:nvSpPr>
+        <p:spPr>
+          <a:xfrm xmlns:a="http://schemas.openxmlformats.org/drawingml/2006/main">
+            <a:off x="8801100" y="3048000"/>
+            <a:ext cx="1771650" cy="2286000"/>
+          </a:xfrm>
+          <a:prstGeom xmlns:a="http://schemas.openxmlformats.org/drawingml/2006/main" prst="roundRect">
+            <a:avLst>
+              <a:gd name="adj" fmla="val 6452"/>
+            </a:avLst>
+          </a:prstGeom>
+          <a:noFill xmlns:a="http://schemas.openxmlformats.org/drawingml/2006/main"/>
+          <a:ln xmlns:a="http://schemas.openxmlformats.org/drawingml/2006/main" w="19050">
+            <a:solidFill>
+              <a:srgbClr val="2E8B57"/>
+            </a:solidFill>
+            <a:prstDash val="solid"/>
+          </a:ln>
+        </p:spPr>
+      </p:sp>
+      <p:sp>
+        <p:nvSpPr>
+          <p:cNvPr id="53" name="trace-stage-5-step">
+            <a:extLst xmlns:a="http://schemas.openxmlformats.org/drawingml/2006/main">
+              <a:ext uri="{FF2B5EF4-FFF2-40B4-BE49-F238E27FC236}">
+                <a16:creationId xmlns:a16="http://schemas.microsoft.com/office/drawing/2014/main" id="{4DA94BE3-B8A6-4A10-A2F0-A3EBFAD6D738}"/>
+              </a:ext>
+            </a:extLst>
+          </p:cNvPr>
+          <p:cNvSpPr>
+            <a:spLocks xmlns:a="http://schemas.openxmlformats.org/drawingml/2006/main" noGrp="1"/>
+          </p:cNvSpPr>
+          <p:nvPr/>
+        </p:nvSpPr>
+        <p:spPr>
+          <a:xfrm xmlns:a="http://schemas.openxmlformats.org/drawingml/2006/main">
+            <a:off x="8972550" y="3238500"/>
+            <a:ext cx="533400" cy="285750"/>
+          </a:xfrm>
+          <a:prstGeom xmlns:a="http://schemas.openxmlformats.org/drawingml/2006/main" prst="rect">
+            <a:avLst/>
+          </a:prstGeom>
+          <a:noFill xmlns:a="http://schemas.openxmlformats.org/drawingml/2006/main"/>
+          <a:ln xmlns:a="http://schemas.openxmlformats.org/drawingml/2006/main" w="0">
+            <a:noFill/>
+            <a:prstDash val="solid"/>
+          </a:ln>
+        </p:spPr>
+        <p:txBody>
+          <a:bodyPr xmlns:a="http://schemas.openxmlformats.org/drawingml/2006/main"/>
+          <a:lstStyle xmlns:a="http://schemas.openxmlformats.org/drawingml/2006/main"/>
+          <a:p xmlns:a="http://schemas.openxmlformats.org/drawingml/2006/main">
+            <a:pPr>
+              <a:defRPr sz="1500" b="1">
+                <a:solidFill>
+                  <a:srgbClr val="00A2EB"/>
+                </a:solidFill>
+              </a:defRPr>
+            </a:pPr>
+            <a:r>
+              <a:rPr sz="1500" b="1">
+                <a:solidFill>
+                  <a:srgbClr val="00A2EB"/>
+                </a:solidFill>
+              </a:rPr>
+              <a:t>05</a:t>
+            </a:r>
+          </a:p>
+        </p:txBody>
+      </p:sp>
+      <p:sp>
+        <p:nvSpPr>
+          <p:cNvPr id="54" name="trace-stage-5-title">
+            <a:extLst xmlns:a="http://schemas.openxmlformats.org/drawingml/2006/main">
+              <a:ext uri="{FF2B5EF4-FFF2-40B4-BE49-F238E27FC236}">
+                <a16:creationId xmlns:a16="http://schemas.microsoft.com/office/drawing/2014/main" id="{3EAA3FDE-42E0-4587-80FC-4DC6EE8A6310}"/>
+              </a:ext>
+            </a:extLst>
+          </p:cNvPr>
+          <p:cNvSpPr>
+            <a:spLocks xmlns:a="http://schemas.openxmlformats.org/drawingml/2006/main" noGrp="1"/>
+          </p:cNvSpPr>
+          <p:nvPr/>
+        </p:nvSpPr>
+        <p:spPr>
+          <a:xfrm xmlns:a="http://schemas.openxmlformats.org/drawingml/2006/main">
+            <a:off x="8915400" y="3733800"/>
+            <a:ext cx="1543050" cy="590550"/>
+          </a:xfrm>
+          <a:prstGeom xmlns:a="http://schemas.openxmlformats.org/drawingml/2006/main" prst="rect">
+            <a:avLst/>
+          </a:prstGeom>
+          <a:noFill xmlns:a="http://schemas.openxmlformats.org/drawingml/2006/main"/>
+          <a:ln xmlns:a="http://schemas.openxmlformats.org/drawingml/2006/main" w="0">
+            <a:noFill/>
+            <a:prstDash val="solid"/>
+          </a:ln>
+        </p:spPr>
+        <p:txBody>
+          <a:bodyPr xmlns:a="http://schemas.openxmlformats.org/drawingml/2006/main"/>
+          <a:lstStyle xmlns:a="http://schemas.openxmlformats.org/drawingml/2006/main"/>
+          <a:p xmlns:a="http://schemas.openxmlformats.org/drawingml/2006/main">
+            <a:pPr algn="ctr">
+              <a:defRPr sz="1575" b="1">
+                <a:solidFill>
+                  <a:srgbClr val="2E8B57"/>
+                </a:solidFill>
+              </a:defRPr>
+            </a:pPr>
+            <a:r>
+              <a:rPr sz="1575" b="1">
+                <a:solidFill>
+                  <a:srgbClr val="2E8B57"/>
+                </a:solidFill>
+              </a:rPr>
+              <a:t>TOOL</a:t>
+            </a:r>
+          </a:p>
+          <a:p xmlns:a="http://schemas.openxmlformats.org/drawingml/2006/main">
+            <a:pPr algn="ctr">
+              <a:defRPr sz="1575" b="1">
+                <a:solidFill>
+                  <a:srgbClr val="2E8B57"/>
+                </a:solidFill>
+              </a:defRPr>
+            </a:pPr>
+            <a:r>
+              <a:rPr sz="1575" b="1">
+                <a:solidFill>
+                  <a:srgbClr val="2E8B57"/>
+                </a:solidFill>
+              </a:rPr>
+              <a:t>ATTEMPTS</a:t>
+            </a:r>
+          </a:p>
+        </p:txBody>
+      </p:sp>
+      <p:sp>
+        <p:nvSpPr>
+          <p:cNvPr id="55" name="trace-stage-5-body">
+            <a:extLst xmlns:a="http://schemas.openxmlformats.org/drawingml/2006/main">
+              <a:ext uri="{FF2B5EF4-FFF2-40B4-BE49-F238E27FC236}">
+                <a16:creationId xmlns:a16="http://schemas.microsoft.com/office/drawing/2014/main" id="{39A5C400-4A30-4B6E-AF84-568ECB1189D0}"/>
+              </a:ext>
+            </a:extLst>
+          </p:cNvPr>
+          <p:cNvSpPr>
+            <a:spLocks xmlns:a="http://schemas.openxmlformats.org/drawingml/2006/main" noGrp="1"/>
+          </p:cNvSpPr>
+          <p:nvPr/>
+        </p:nvSpPr>
+        <p:spPr>
+          <a:xfrm xmlns:a="http://schemas.openxmlformats.org/drawingml/2006/main">
+            <a:off x="8839200" y="4533900"/>
+            <a:ext cx="1695450" cy="552450"/>
+          </a:xfrm>
+          <a:prstGeom xmlns:a="http://schemas.openxmlformats.org/drawingml/2006/main" prst="rect">
+            <a:avLst/>
+          </a:prstGeom>
+          <a:noFill xmlns:a="http://schemas.openxmlformats.org/drawingml/2006/main"/>
+          <a:ln xmlns:a="http://schemas.openxmlformats.org/drawingml/2006/main" w="0">
+            <a:noFill/>
+            <a:prstDash val="solid"/>
+          </a:ln>
+        </p:spPr>
+        <p:txBody>
+          <a:bodyPr xmlns:a="http://schemas.openxmlformats.org/drawingml/2006/main"/>
+          <a:lstStyle xmlns:a="http://schemas.openxmlformats.org/drawingml/2006/main"/>
+          <a:p xmlns:a="http://schemas.openxmlformats.org/drawingml/2006/main">
+            <a:pPr algn="ctr">
+              <a:defRPr sz="1200" b="0">
+                <a:solidFill>
+                  <a:srgbClr val="2E8B57"/>
+                </a:solidFill>
+              </a:defRPr>
+            </a:pPr>
+            <a:r>
+              <a:rPr sz="1200" b="0">
+                <a:solidFill>
+                  <a:srgbClr val="2E8B57"/>
+                </a:solidFill>
+              </a:rPr>
+              <a:t>attempts 4-5</a:t>
+            </a:r>
+          </a:p>
+          <a:p xmlns:a="http://schemas.openxmlformats.org/drawingml/2006/main">
+            <a:pPr algn="ctr">
+              <a:defRPr sz="1200" b="0">
+                <a:solidFill>
+                  <a:srgbClr val="2E8B57"/>
+                </a:solidFill>
+              </a:defRPr>
+            </a:pPr>
+            <a:r>
+              <a:rPr sz="1200" b="0">
+                <a:solidFill>
+                  <a:srgbClr val="2E8B57"/>
+                </a:solidFill>
+              </a:rPr>
+              <a:t>post-error success</a:t>
+            </a:r>
+          </a:p>
+        </p:txBody>
+      </p:sp>
+      <p:sp>
+        <p:nvSpPr>
+          <p:cNvPr id="56" name="trace-stage-6">
+            <a:extLst xmlns:a="http://schemas.openxmlformats.org/drawingml/2006/main">
+              <a:ext uri="{FF2B5EF4-FFF2-40B4-BE49-F238E27FC236}">
+                <a16:creationId xmlns:a16="http://schemas.microsoft.com/office/drawing/2014/main" id="{B297F765-A263-4428-8584-AF2E5E9D86C2}"/>
+              </a:ext>
+            </a:extLst>
+          </p:cNvPr>
+          <p:cNvSpPr>
+            <a:spLocks xmlns:a="http://schemas.openxmlformats.org/drawingml/2006/main" noGrp="1"/>
+          </p:cNvSpPr>
+          <p:nvPr/>
+        </p:nvSpPr>
+        <p:spPr>
+          <a:xfrm xmlns:a="http://schemas.openxmlformats.org/drawingml/2006/main">
+            <a:off x="10753725" y="3048000"/>
+            <a:ext cx="1771650" cy="2286000"/>
+          </a:xfrm>
+          <a:prstGeom xmlns:a="http://schemas.openxmlformats.org/drawingml/2006/main" prst="roundRect">
+            <a:avLst>
+              <a:gd name="adj" fmla="val 6452"/>
+            </a:avLst>
+          </a:prstGeom>
+          <a:noFill xmlns:a="http://schemas.openxmlformats.org/drawingml/2006/main"/>
+          <a:ln xmlns:a="http://schemas.openxmlformats.org/drawingml/2006/main" w="19050">
+            <a:solidFill>
+              <a:srgbClr val="00A2EB"/>
+            </a:solidFill>
+            <a:prstDash val="solid"/>
+          </a:ln>
+        </p:spPr>
+      </p:sp>
+      <p:sp>
+        <p:nvSpPr>
+          <p:cNvPr id="57" name="trace-stage-6-step">
+            <a:extLst xmlns:a="http://schemas.openxmlformats.org/drawingml/2006/main">
+              <a:ext uri="{FF2B5EF4-FFF2-40B4-BE49-F238E27FC236}">
+                <a16:creationId xmlns:a16="http://schemas.microsoft.com/office/drawing/2014/main" id="{65F3307D-E778-4B53-B738-B05D39356852}"/>
+              </a:ext>
+            </a:extLst>
+          </p:cNvPr>
+          <p:cNvSpPr>
+            <a:spLocks xmlns:a="http://schemas.openxmlformats.org/drawingml/2006/main" noGrp="1"/>
+          </p:cNvSpPr>
+          <p:nvPr/>
+        </p:nvSpPr>
+        <p:spPr>
+          <a:xfrm xmlns:a="http://schemas.openxmlformats.org/drawingml/2006/main">
+            <a:off x="10925175" y="3238500"/>
+            <a:ext cx="533400" cy="285750"/>
+          </a:xfrm>
+          <a:prstGeom xmlns:a="http://schemas.openxmlformats.org/drawingml/2006/main" prst="rect">
+            <a:avLst/>
+          </a:prstGeom>
+          <a:noFill xmlns:a="http://schemas.openxmlformats.org/drawingml/2006/main"/>
+          <a:ln xmlns:a="http://schemas.openxmlformats.org/drawingml/2006/main" w="0">
+            <a:noFill/>
+            <a:prstDash val="solid"/>
+          </a:ln>
+        </p:spPr>
+        <p:txBody>
+          <a:bodyPr xmlns:a="http://schemas.openxmlformats.org/drawingml/2006/main"/>
+          <a:lstStyle xmlns:a="http://schemas.openxmlformats.org/drawingml/2006/main"/>
+          <a:p xmlns:a="http://schemas.openxmlformats.org/drawingml/2006/main">
+            <a:pPr>
+              <a:defRPr sz="1500" b="1">
+                <a:solidFill>
+                  <a:srgbClr val="00A2EB"/>
+                </a:solidFill>
+              </a:defRPr>
+            </a:pPr>
+            <a:r>
+              <a:rPr sz="1500" b="1">
+                <a:solidFill>
+                  <a:srgbClr val="00A2EB"/>
+                </a:solidFill>
+              </a:rPr>
+              <a:t>06</a:t>
+            </a:r>
+          </a:p>
+        </p:txBody>
+      </p:sp>
+      <p:sp>
+        <p:nvSpPr>
+          <p:cNvPr id="58" name="trace-stage-6-title">
+            <a:extLst xmlns:a="http://schemas.openxmlformats.org/drawingml/2006/main">
+              <a:ext uri="{FF2B5EF4-FFF2-40B4-BE49-F238E27FC236}">
+                <a16:creationId xmlns:a16="http://schemas.microsoft.com/office/drawing/2014/main" id="{3BF74CAD-5A15-45AB-841B-C80336555CEB}"/>
+              </a:ext>
+            </a:extLst>
+          </p:cNvPr>
+          <p:cNvSpPr>
+            <a:spLocks xmlns:a="http://schemas.openxmlformats.org/drawingml/2006/main" noGrp="1"/>
+          </p:cNvSpPr>
+          <p:nvPr/>
+        </p:nvSpPr>
+        <p:spPr>
+          <a:xfrm xmlns:a="http://schemas.openxmlformats.org/drawingml/2006/main">
+            <a:off x="10868025" y="3733800"/>
+            <a:ext cx="1543050" cy="590550"/>
+          </a:xfrm>
+          <a:prstGeom xmlns:a="http://schemas.openxmlformats.org/drawingml/2006/main" prst="rect">
+            <a:avLst/>
+          </a:prstGeom>
+          <a:noFill xmlns:a="http://schemas.openxmlformats.org/drawingml/2006/main"/>
+          <a:ln xmlns:a="http://schemas.openxmlformats.org/drawingml/2006/main" w="0">
+            <a:noFill/>
+            <a:prstDash val="solid"/>
+          </a:ln>
+        </p:spPr>
+        <p:txBody>
+          <a:bodyPr xmlns:a="http://schemas.openxmlformats.org/drawingml/2006/main"/>
+          <a:lstStyle xmlns:a="http://schemas.openxmlformats.org/drawingml/2006/main"/>
+          <a:p xmlns:a="http://schemas.openxmlformats.org/drawingml/2006/main">
+            <a:pPr algn="ctr">
+              <a:defRPr sz="1575" b="1">
+                <a:solidFill>
+                  <a:srgbClr val="0A2030"/>
+                </a:solidFill>
+              </a:defRPr>
+            </a:pPr>
+            <a:r>
+              <a:rPr sz="1575" b="1">
+                <a:solidFill>
+                  <a:srgbClr val="0A2030"/>
+                </a:solidFill>
+              </a:rPr>
+              <a:t>EVIDENCE</a:t>
+            </a:r>
+          </a:p>
+          <a:p xmlns:a="http://schemas.openxmlformats.org/drawingml/2006/main">
+            <a:pPr algn="ctr">
+              <a:defRPr sz="1575" b="1">
+                <a:solidFill>
+                  <a:srgbClr val="0A2030"/>
+                </a:solidFill>
+              </a:defRPr>
+            </a:pPr>
+            <a:r>
+              <a:rPr sz="1575" b="1">
+                <a:solidFill>
+                  <a:srgbClr val="0A2030"/>
+                </a:solidFill>
+              </a:rPr>
+              <a:t>GATE</a:t>
+            </a:r>
+          </a:p>
+        </p:txBody>
+      </p:sp>
+      <p:sp>
+        <p:nvSpPr>
+          <p:cNvPr id="59" name="trace-stage-6-body">
+            <a:extLst xmlns:a="http://schemas.openxmlformats.org/drawingml/2006/main">
+              <a:ext uri="{FF2B5EF4-FFF2-40B4-BE49-F238E27FC236}">
+                <a16:creationId xmlns:a16="http://schemas.microsoft.com/office/drawing/2014/main" id="{412B9B49-9498-4CE7-8DBE-3D133DD25CA8}"/>
+              </a:ext>
+            </a:extLst>
+          </p:cNvPr>
+          <p:cNvSpPr>
+            <a:spLocks xmlns:a="http://schemas.openxmlformats.org/drawingml/2006/main" noGrp="1"/>
+          </p:cNvSpPr>
+          <p:nvPr/>
+        </p:nvSpPr>
+        <p:spPr>
+          <a:xfrm xmlns:a="http://schemas.openxmlformats.org/drawingml/2006/main">
+            <a:off x="10791825" y="4533900"/>
+            <a:ext cx="1695450" cy="552450"/>
+          </a:xfrm>
+          <a:prstGeom xmlns:a="http://schemas.openxmlformats.org/drawingml/2006/main" prst="rect">
+            <a:avLst/>
+          </a:prstGeom>
+          <a:noFill xmlns:a="http://schemas.openxmlformats.org/drawingml/2006/main"/>
+          <a:ln xmlns:a="http://schemas.openxmlformats.org/drawingml/2006/main" w="0">
+            <a:noFill/>
+            <a:prstDash val="solid"/>
+          </a:ln>
+        </p:spPr>
+        <p:txBody>
+          <a:bodyPr xmlns:a="http://schemas.openxmlformats.org/drawingml/2006/main"/>
+          <a:lstStyle xmlns:a="http://schemas.openxmlformats.org/drawingml/2006/main"/>
+          <a:p xmlns:a="http://schemas.openxmlformats.org/drawingml/2006/main">
+            <a:pPr algn="ctr">
+              <a:defRPr sz="1200" b="0">
+                <a:solidFill>
+                  <a:srgbClr val="1F40CB"/>
+                </a:solidFill>
+              </a:defRPr>
+            </a:pPr>
+            <a:r>
+              <a:rPr sz="1200" b="0">
+                <a:solidFill>
+                  <a:srgbClr val="1F40CB"/>
+                </a:solidFill>
+              </a:rPr>
+              <a:t>source +</a:t>
+            </a:r>
+          </a:p>
+          <a:p xmlns:a="http://schemas.openxmlformats.org/drawingml/2006/main">
+            <a:pPr algn="ctr">
+              <a:defRPr sz="1200" b="0">
+                <a:solidFill>
+                  <a:srgbClr val="1F40CB"/>
+                </a:solidFill>
+              </a:defRPr>
+            </a:pPr>
+            <a:r>
+              <a:rPr sz="1200" b="0">
+                <a:solidFill>
+                  <a:srgbClr val="1F40CB"/>
+                </a:solidFill>
+              </a:rPr>
+              <a:t>evidence pairs</a:t>
+            </a:r>
+          </a:p>
+        </p:txBody>
+      </p:sp>
+      <p:sp>
+        <p:nvSpPr>
+          <p:cNvPr id="60" name="trace-stage-7">
+            <a:extLst xmlns:a="http://schemas.openxmlformats.org/drawingml/2006/main">
+              <a:ext uri="{FF2B5EF4-FFF2-40B4-BE49-F238E27FC236}">
+                <a16:creationId xmlns:a16="http://schemas.microsoft.com/office/drawing/2014/main" id="{487E1049-C402-43E7-8FAA-D5C8D8652380}"/>
+              </a:ext>
+            </a:extLst>
+          </p:cNvPr>
+          <p:cNvSpPr>
+            <a:spLocks xmlns:a="http://schemas.openxmlformats.org/drawingml/2006/main" noGrp="1"/>
+          </p:cNvSpPr>
+          <p:nvPr/>
+        </p:nvSpPr>
+        <p:spPr>
+          <a:xfrm xmlns:a="http://schemas.openxmlformats.org/drawingml/2006/main">
+            <a:off x="12706350" y="3048000"/>
+            <a:ext cx="1771650" cy="2286000"/>
+          </a:xfrm>
+          <a:prstGeom xmlns:a="http://schemas.openxmlformats.org/drawingml/2006/main" prst="roundRect">
+            <a:avLst>
+              <a:gd name="adj" fmla="val 6452"/>
+            </a:avLst>
+          </a:prstGeom>
+          <a:noFill xmlns:a="http://schemas.openxmlformats.org/drawingml/2006/main"/>
+          <a:ln xmlns:a="http://schemas.openxmlformats.org/drawingml/2006/main" w="19050">
+            <a:solidFill>
+              <a:srgbClr val="F07D00"/>
+            </a:solidFill>
+            <a:prstDash val="solid"/>
+          </a:ln>
+        </p:spPr>
+      </p:sp>
+      <p:sp>
+        <p:nvSpPr>
+          <p:cNvPr id="61" name="trace-stage-7-step">
+            <a:extLst xmlns:a="http://schemas.openxmlformats.org/drawingml/2006/main">
+              <a:ext uri="{FF2B5EF4-FFF2-40B4-BE49-F238E27FC236}">
+                <a16:creationId xmlns:a16="http://schemas.microsoft.com/office/drawing/2014/main" id="{D99BA43C-AC15-45F4-B8C4-2287BBF4ECAA}"/>
+              </a:ext>
+            </a:extLst>
+          </p:cNvPr>
+          <p:cNvSpPr>
+            <a:spLocks xmlns:a="http://schemas.openxmlformats.org/drawingml/2006/main" noGrp="1"/>
+          </p:cNvSpPr>
+          <p:nvPr/>
+        </p:nvSpPr>
+        <p:spPr>
+          <a:xfrm xmlns:a="http://schemas.openxmlformats.org/drawingml/2006/main">
+            <a:off x="12877800" y="3238500"/>
+            <a:ext cx="533400" cy="285750"/>
+          </a:xfrm>
+          <a:prstGeom xmlns:a="http://schemas.openxmlformats.org/drawingml/2006/main" prst="rect">
+            <a:avLst/>
+          </a:prstGeom>
+          <a:noFill xmlns:a="http://schemas.openxmlformats.org/drawingml/2006/main"/>
+          <a:ln xmlns:a="http://schemas.openxmlformats.org/drawingml/2006/main" w="0">
+            <a:noFill/>
+            <a:prstDash val="solid"/>
+          </a:ln>
+        </p:spPr>
+        <p:txBody>
+          <a:bodyPr xmlns:a="http://schemas.openxmlformats.org/drawingml/2006/main"/>
+          <a:lstStyle xmlns:a="http://schemas.openxmlformats.org/drawingml/2006/main"/>
+          <a:p xmlns:a="http://schemas.openxmlformats.org/drawingml/2006/main">
+            <a:pPr>
+              <a:defRPr sz="1500" b="1">
+                <a:solidFill>
+                  <a:srgbClr val="00A2EB"/>
+                </a:solidFill>
+              </a:defRPr>
+            </a:pPr>
+            <a:r>
+              <a:rPr sz="1500" b="1">
+                <a:solidFill>
+                  <a:srgbClr val="00A2EB"/>
+                </a:solidFill>
+              </a:rPr>
+              <a:t>07</a:t>
+            </a:r>
+          </a:p>
+        </p:txBody>
+      </p:sp>
+      <p:sp>
+        <p:nvSpPr>
+          <p:cNvPr id="62" name="trace-stage-7-title">
+            <a:extLst xmlns:a="http://schemas.openxmlformats.org/drawingml/2006/main">
+              <a:ext uri="{FF2B5EF4-FFF2-40B4-BE49-F238E27FC236}">
+                <a16:creationId xmlns:a16="http://schemas.microsoft.com/office/drawing/2014/main" id="{8BC7260B-022A-40C5-8C21-61EB65C48DC6}"/>
+              </a:ext>
+            </a:extLst>
+          </p:cNvPr>
+          <p:cNvSpPr>
+            <a:spLocks xmlns:a="http://schemas.openxmlformats.org/drawingml/2006/main" noGrp="1"/>
+          </p:cNvSpPr>
+          <p:nvPr/>
+        </p:nvSpPr>
+        <p:spPr>
+          <a:xfrm xmlns:a="http://schemas.openxmlformats.org/drawingml/2006/main">
+            <a:off x="12820650" y="3733800"/>
+            <a:ext cx="1543050" cy="590550"/>
+          </a:xfrm>
+          <a:prstGeom xmlns:a="http://schemas.openxmlformats.org/drawingml/2006/main" prst="rect">
+            <a:avLst/>
+          </a:prstGeom>
+          <a:noFill xmlns:a="http://schemas.openxmlformats.org/drawingml/2006/main"/>
+          <a:ln xmlns:a="http://schemas.openxmlformats.org/drawingml/2006/main" w="0">
+            <a:noFill/>
+            <a:prstDash val="solid"/>
+          </a:ln>
+        </p:spPr>
+        <p:txBody>
+          <a:bodyPr xmlns:a="http://schemas.openxmlformats.org/drawingml/2006/main"/>
+          <a:lstStyle xmlns:a="http://schemas.openxmlformats.org/drawingml/2006/main"/>
+          <a:p xmlns:a="http://schemas.openxmlformats.org/drawingml/2006/main">
+            <a:pPr algn="ctr">
+              <a:defRPr sz="1575" b="1">
+                <a:solidFill>
+                  <a:srgbClr val="0A2030"/>
+                </a:solidFill>
+              </a:defRPr>
+            </a:pPr>
+            <a:r>
+              <a:rPr sz="1575" b="1">
+                <a:solidFill>
+                  <a:srgbClr val="0A2030"/>
+                </a:solidFill>
+              </a:rPr>
+              <a:t>REPORT</a:t>
+            </a:r>
+          </a:p>
+        </p:txBody>
+      </p:sp>
+      <p:sp>
+        <p:nvSpPr>
+          <p:cNvPr id="63" name="trace-stage-7-body">
+            <a:extLst xmlns:a="http://schemas.openxmlformats.org/drawingml/2006/main">
+              <a:ext uri="{FF2B5EF4-FFF2-40B4-BE49-F238E27FC236}">
+                <a16:creationId xmlns:a16="http://schemas.microsoft.com/office/drawing/2014/main" id="{68E3277F-1E35-4D00-AB85-4AC545C9F5AD}"/>
+              </a:ext>
+            </a:extLst>
+          </p:cNvPr>
+          <p:cNvSpPr>
+            <a:spLocks xmlns:a="http://schemas.openxmlformats.org/drawingml/2006/main" noGrp="1"/>
+          </p:cNvSpPr>
+          <p:nvPr/>
+        </p:nvSpPr>
+        <p:spPr>
+          <a:xfrm xmlns:a="http://schemas.openxmlformats.org/drawingml/2006/main">
+            <a:off x="12744450" y="4533900"/>
+            <a:ext cx="1695450" cy="552450"/>
+          </a:xfrm>
+          <a:prstGeom xmlns:a="http://schemas.openxmlformats.org/drawingml/2006/main" prst="rect">
+            <a:avLst/>
+          </a:prstGeom>
+          <a:noFill xmlns:a="http://schemas.openxmlformats.org/drawingml/2006/main"/>
+          <a:ln xmlns:a="http://schemas.openxmlformats.org/drawingml/2006/main" w="0">
+            <a:noFill/>
+            <a:prstDash val="solid"/>
+          </a:ln>
+        </p:spPr>
+        <p:txBody>
+          <a:bodyPr xmlns:a="http://schemas.openxmlformats.org/drawingml/2006/main"/>
+          <a:lstStyle xmlns:a="http://schemas.openxmlformats.org/drawingml/2006/main"/>
+          <a:p xmlns:a="http://schemas.openxmlformats.org/drawingml/2006/main">
+            <a:pPr algn="ctr">
+              <a:defRPr sz="1200" b="0">
+                <a:solidFill>
+                  <a:srgbClr val="1F40CB"/>
+                </a:solidFill>
+              </a:defRPr>
+            </a:pPr>
+            <a:r>
+              <a:rPr sz="1200" b="0">
+                <a:solidFill>
+                  <a:srgbClr val="1F40CB"/>
+                </a:solidFill>
+              </a:rPr>
+              <a:t>briefing +</a:t>
+            </a:r>
+          </a:p>
+          <a:p xmlns:a="http://schemas.openxmlformats.org/drawingml/2006/main">
+            <a:pPr algn="ctr">
+              <a:defRPr sz="1200" b="0">
+                <a:solidFill>
+                  <a:srgbClr val="1F40CB"/>
+                </a:solidFill>
+              </a:defRPr>
+            </a:pPr>
+            <a:r>
+              <a:rPr sz="1200" b="0">
+                <a:solidFill>
+                  <a:srgbClr val="1F40CB"/>
+                </a:solidFill>
+              </a:rPr>
+              <a:t>citations</a:t>
+            </a:r>
+          </a:p>
+        </p:txBody>
+      </p:sp>
+      <p:cxnSp>
+        <p:nvCxnSpPr>
+          <p:cNvPr id="108" name=""/>
+          <p:cNvCxnSpPr>
+            <a:stCxn xmlns:a="http://schemas.openxmlformats.org/drawingml/2006/main" id="36" idx="3"/>
+            <a:endCxn xmlns:a="http://schemas.openxmlformats.org/drawingml/2006/main" id="40" idx="1"/>
+          </p:cNvCxnSpPr>
+          <p:nvPr/>
+        </p:nvCxnSpPr>
+        <p:spPr>
+          <a:xfrm xmlns:a="http://schemas.openxmlformats.org/drawingml/2006/main">
+            <a:off x="2762250" y="4191000"/>
+            <a:ext cx="180975" cy="0"/>
+          </a:xfrm>
+          <a:prstGeom xmlns:a="http://schemas.openxmlformats.org/drawingml/2006/main" prst="straightConnector1">
+            <a:avLst/>
+          </a:prstGeom>
+          <a:ln xmlns:a="http://schemas.openxmlformats.org/drawingml/2006/main" w="19050">
+            <a:solidFill>
+              <a:srgbClr val="9A9A9F"/>
+            </a:solidFill>
+            <a:prstDash val="solid"/>
+            <a:tailEnd type="triangle" w="sm" len="sm"/>
+          </a:ln>
+        </p:spPr>
+      </p:cxnSp>
+      <p:cxnSp>
+        <p:nvCxnSpPr>
+          <p:cNvPr id="109" name=""/>
+          <p:cNvCxnSpPr>
+            <a:stCxn xmlns:a="http://schemas.openxmlformats.org/drawingml/2006/main" id="40" idx="3"/>
+            <a:endCxn xmlns:a="http://schemas.openxmlformats.org/drawingml/2006/main" id="44" idx="1"/>
+          </p:cNvCxnSpPr>
+          <p:nvPr/>
+        </p:nvCxnSpPr>
+        <p:spPr>
+          <a:xfrm xmlns:a="http://schemas.openxmlformats.org/drawingml/2006/main">
+            <a:off x="4714875" y="4191000"/>
+            <a:ext cx="180975" cy="0"/>
+          </a:xfrm>
+          <a:prstGeom xmlns:a="http://schemas.openxmlformats.org/drawingml/2006/main" prst="straightConnector1">
+            <a:avLst/>
+          </a:prstGeom>
+          <a:ln xmlns:a="http://schemas.openxmlformats.org/drawingml/2006/main" w="19050">
+            <a:solidFill>
+              <a:srgbClr val="9A9A9F"/>
+            </a:solidFill>
+            <a:prstDash val="solid"/>
+            <a:tailEnd type="triangle" w="sm" len="sm"/>
+          </a:ln>
+        </p:spPr>
+      </p:cxnSp>
+      <p:cxnSp>
+        <p:nvCxnSpPr>
+          <p:cNvPr id="110" name=""/>
+          <p:cNvCxnSpPr>
+            <a:stCxn xmlns:a="http://schemas.openxmlformats.org/drawingml/2006/main" id="44" idx="3"/>
+            <a:endCxn xmlns:a="http://schemas.openxmlformats.org/drawingml/2006/main" id="48" idx="1"/>
+          </p:cNvCxnSpPr>
+          <p:nvPr/>
+        </p:nvCxnSpPr>
+        <p:spPr>
+          <a:xfrm xmlns:a="http://schemas.openxmlformats.org/drawingml/2006/main">
+            <a:off x="6667500" y="4191000"/>
+            <a:ext cx="180975" cy="0"/>
+          </a:xfrm>
+          <a:prstGeom xmlns:a="http://schemas.openxmlformats.org/drawingml/2006/main" prst="straightConnector1">
+            <a:avLst/>
+          </a:prstGeom>
+          <a:ln xmlns:a="http://schemas.openxmlformats.org/drawingml/2006/main" w="19050">
+            <a:solidFill>
+              <a:srgbClr val="9A9A9F"/>
+            </a:solidFill>
+            <a:prstDash val="solid"/>
+            <a:tailEnd type="triangle" w="sm" len="sm"/>
+          </a:ln>
+        </p:spPr>
+      </p:cxnSp>
+      <p:cxnSp>
+        <p:nvCxnSpPr>
+          <p:cNvPr id="111" name=""/>
+          <p:cNvCxnSpPr>
+            <a:stCxn xmlns:a="http://schemas.openxmlformats.org/drawingml/2006/main" id="48" idx="3"/>
+            <a:endCxn xmlns:a="http://schemas.openxmlformats.org/drawingml/2006/main" id="52" idx="1"/>
+          </p:cNvCxnSpPr>
+          <p:nvPr/>
+        </p:nvCxnSpPr>
+        <p:spPr>
+          <a:xfrm xmlns:a="http://schemas.openxmlformats.org/drawingml/2006/main">
+            <a:off x="8620125" y="4191000"/>
+            <a:ext cx="180975" cy="0"/>
+          </a:xfrm>
+          <a:prstGeom xmlns:a="http://schemas.openxmlformats.org/drawingml/2006/main" prst="straightConnector1">
+            <a:avLst/>
+          </a:prstGeom>
+          <a:ln xmlns:a="http://schemas.openxmlformats.org/drawingml/2006/main" w="19050">
+            <a:solidFill>
+              <a:srgbClr val="9A9A9F"/>
+            </a:solidFill>
+            <a:prstDash val="solid"/>
+            <a:tailEnd type="triangle" w="sm" len="sm"/>
+          </a:ln>
+        </p:spPr>
+      </p:cxnSp>
+      <p:cxnSp>
+        <p:nvCxnSpPr>
+          <p:cNvPr id="112" name=""/>
+          <p:cNvCxnSpPr>
+            <a:stCxn xmlns:a="http://schemas.openxmlformats.org/drawingml/2006/main" id="52" idx="3"/>
+            <a:endCxn xmlns:a="http://schemas.openxmlformats.org/drawingml/2006/main" id="56" idx="1"/>
+          </p:cNvCxnSpPr>
+          <p:nvPr/>
+        </p:nvCxnSpPr>
+        <p:spPr>
+          <a:xfrm xmlns:a="http://schemas.openxmlformats.org/drawingml/2006/main">
+            <a:off x="10572750" y="4191000"/>
+            <a:ext cx="180975" cy="0"/>
+          </a:xfrm>
+          <a:prstGeom xmlns:a="http://schemas.openxmlformats.org/drawingml/2006/main" prst="straightConnector1">
+            <a:avLst/>
+          </a:prstGeom>
+          <a:ln xmlns:a="http://schemas.openxmlformats.org/drawingml/2006/main" w="19050">
+            <a:solidFill>
+              <a:srgbClr val="9A9A9F"/>
+            </a:solidFill>
+            <a:prstDash val="solid"/>
+            <a:tailEnd type="triangle" w="sm" len="sm"/>
+          </a:ln>
+        </p:spPr>
+      </p:cxnSp>
+      <p:cxnSp>
+        <p:nvCxnSpPr>
+          <p:cNvPr id="113" name=""/>
+          <p:cNvCxnSpPr>
+            <a:stCxn xmlns:a="http://schemas.openxmlformats.org/drawingml/2006/main" id="56" idx="3"/>
+            <a:endCxn xmlns:a="http://schemas.openxmlformats.org/drawingml/2006/main" id="60" idx="1"/>
+          </p:cNvCxnSpPr>
+          <p:nvPr/>
+        </p:nvCxnSpPr>
+        <p:spPr>
+          <a:xfrm xmlns:a="http://schemas.openxmlformats.org/drawingml/2006/main">
+            <a:off x="12525375" y="4191000"/>
+            <a:ext cx="180975" cy="0"/>
+          </a:xfrm>
+          <a:prstGeom xmlns:a="http://schemas.openxmlformats.org/drawingml/2006/main" prst="straightConnector1">
+            <a:avLst/>
+          </a:prstGeom>
+          <a:ln xmlns:a="http://schemas.openxmlformats.org/drawingml/2006/main" w="19050">
+            <a:solidFill>
+              <a:srgbClr val="9A9A9F"/>
+            </a:solidFill>
+            <a:prstDash val="solid"/>
+            <a:tailEnd type="triangle" w="sm" len="sm"/>
+          </a:ln>
+        </p:spPr>
+      </p:cxnSp>
     </p:spTree>
     <p:extLst>
       <p:ext uri="{BB962C8B-B14F-4D97-AF65-F5344CB8AC3E}">

--- a/decks/12-evaluating-agentic-systems.pptx
+++ b/decks/12-evaluating-agentic-systems.pptx
@@ -2,21 +2,23 @@
 <file path=ppt/presentation.xml><?xml version="1.0" encoding="utf-8"?>
 <p:presentation xmlns:p="http://schemas.openxmlformats.org/presentationml/2006/main">
   <p:sldMasterIdLst>
-    <p:sldMasterId xmlns:r="http://schemas.openxmlformats.org/officeDocument/2006/relationships" id="2147483648" r:id="R59a76237e79d4563"/>
+    <p:sldMasterId xmlns:r="http://schemas.openxmlformats.org/officeDocument/2006/relationships" id="2147483648" r:id="R8fb68e2787f44e75"/>
   </p:sldMasterIdLst>
   <p:notesMasterIdLst>
-    <p:notesMasterId xmlns:r="http://schemas.openxmlformats.org/officeDocument/2006/relationships" r:id="Rdc09e47772704cd8"/>
+    <p:notesMasterId xmlns:r="http://schemas.openxmlformats.org/officeDocument/2006/relationships" r:id="R3c0ef103c639447d"/>
   </p:notesMasterIdLst>
   <p:sldIdLst>
-    <p:sldId xmlns:r="http://schemas.openxmlformats.org/officeDocument/2006/relationships" id="256" r:id="Re22afbb562d74bf4"/>
-    <p:sldId xmlns:r="http://schemas.openxmlformats.org/officeDocument/2006/relationships" id="257" r:id="Rb10cc6cd271f4c40"/>
-    <p:sldId xmlns:r="http://schemas.openxmlformats.org/officeDocument/2006/relationships" id="258" r:id="R0cfbf952c62f40d3"/>
-    <p:sldId xmlns:r="http://schemas.openxmlformats.org/officeDocument/2006/relationships" id="259" r:id="R81cfa46cac804568"/>
-    <p:sldId xmlns:r="http://schemas.openxmlformats.org/officeDocument/2006/relationships" id="260" r:id="R99edcc5828a341c4"/>
-    <p:sldId xmlns:r="http://schemas.openxmlformats.org/officeDocument/2006/relationships" id="261" r:id="Re3c7d6a4ef7847c1"/>
-    <p:sldId xmlns:r="http://schemas.openxmlformats.org/officeDocument/2006/relationships" id="262" r:id="R7ab354306ae54043"/>
-    <p:sldId xmlns:r="http://schemas.openxmlformats.org/officeDocument/2006/relationships" id="263" r:id="R8af884050dba4547"/>
-    <p:sldId xmlns:r="http://schemas.openxmlformats.org/officeDocument/2006/relationships" id="264" r:id="Rdfbbda0e45414224"/>
+    <p:sldId xmlns:r="http://schemas.openxmlformats.org/officeDocument/2006/relationships" id="256" r:id="R4939f749eb6b4b99"/>
+    <p:sldId xmlns:r="http://schemas.openxmlformats.org/officeDocument/2006/relationships" id="257" r:id="R8a9ce4ffef1b495b"/>
+    <p:sldId xmlns:r="http://schemas.openxmlformats.org/officeDocument/2006/relationships" id="258" r:id="R147bb70bcf3344d9"/>
+    <p:sldId xmlns:r="http://schemas.openxmlformats.org/officeDocument/2006/relationships" id="259" r:id="R7d39e81fc12f4ca6"/>
+    <p:sldId xmlns:r="http://schemas.openxmlformats.org/officeDocument/2006/relationships" id="260" r:id="R183a3ab8e74a403c"/>
+    <p:sldId xmlns:r="http://schemas.openxmlformats.org/officeDocument/2006/relationships" id="261" r:id="Rbc2d1fc2d2574139"/>
+    <p:sldId xmlns:r="http://schemas.openxmlformats.org/officeDocument/2006/relationships" id="262" r:id="R64fd8d371b1342e3"/>
+    <p:sldId xmlns:r="http://schemas.openxmlformats.org/officeDocument/2006/relationships" id="263" r:id="R4925c574e1034bff"/>
+    <p:sldId xmlns:r="http://schemas.openxmlformats.org/officeDocument/2006/relationships" id="264" r:id="Rc36cb4c9b64e4b49"/>
+    <p:sldId xmlns:r="http://schemas.openxmlformats.org/officeDocument/2006/relationships" id="265" r:id="Rd69b6b2356674aa3"/>
+    <p:sldId xmlns:r="http://schemas.openxmlformats.org/officeDocument/2006/relationships" id="266" r:id="R78f8eddd4b8a48b0"/>
   </p:sldIdLst>
   <p:sldSz cx="15240000" cy="8572500"/>
   <p:notesSz cx="6858000" cy="9144000"/>
@@ -505,6 +507,196 @@
 </p:notes>
 </file>
 
+<file path=ppt/notesSlides/notesSlide10.xml><?xml version="1.0" encoding="utf-8"?>
+<p:notes xmlns:p="http://schemas.openxmlformats.org/presentationml/2006/main">
+  <p:cSld>
+    <p:spTree>
+      <p:nvGrpSpPr>
+        <p:cNvPr id="1" name=""/>
+        <p:cNvGrpSpPr/>
+        <p:nvPr/>
+      </p:nvGrpSpPr>
+      <p:grpSpPr>
+        <a:xfrm xmlns:a="http://schemas.openxmlformats.org/drawingml/2006/main"/>
+      </p:grpSpPr>
+      <p:sp>
+        <p:nvSpPr>
+          <p:cNvPr id="2" name="Slide Image Placeholder 1"/>
+          <p:cNvSpPr>
+            <a:spLocks xmlns:a="http://schemas.openxmlformats.org/drawingml/2006/main" noGrp="1"/>
+          </p:cNvSpPr>
+          <p:nvPr>
+            <p:ph type="sldImg" idx="0"/>
+          </p:nvPr>
+        </p:nvSpPr>
+        <p:spPr/>
+      </p:sp>
+      <p:sp>
+        <p:nvSpPr>
+          <p:cNvPr id="3" name="Notes Placeholder 2"/>
+          <p:cNvSpPr>
+            <a:spLocks xmlns:a="http://schemas.openxmlformats.org/drawingml/2006/main" noGrp="1"/>
+          </p:cNvSpPr>
+          <p:nvPr>
+            <p:ph type="body" idx="1"/>
+          </p:nvPr>
+        </p:nvSpPr>
+        <p:spPr/>
+        <p:txBody>
+          <a:bodyPr xmlns:a="http://schemas.openxmlformats.org/drawingml/2006/main"/>
+          <a:lstStyle xmlns:a="http://schemas.openxmlformats.org/drawingml/2006/main"/>
+          <a:p xmlns:a="http://schemas.openxmlformats.org/drawingml/2006/main">
+            <a:r>
+              <a:t>Instructor purpose: Check the three core decisions before the lesson closes.</a:t>
+            </a:r>
+          </a:p>
+          <a:p xmlns:a="http://schemas.openxmlformats.org/drawingml/2006/main">
+            <a:r>
+              <a:t>Planned timing: 3 minutes.</a:t>
+            </a:r>
+          </a:p>
+          <a:p xmlns:a="http://schemas.openxmlformats.org/drawingml/2006/main">
+            <a:r>
+              <a:t>Facilitation: ask for one letter per question.</a:t>
+            </a:r>
+          </a:p>
+          <a:p xmlns:a="http://schemas.openxmlformats.org/drawingml/2006/main">
+            <a:r>
+              <a:t>[Sources]</a:t>
+            </a:r>
+          </a:p>
+          <a:p xmlns:a="http://schemas.openxmlformats.org/drawingml/2006/main">
+            <a:r>
+              <a:t>- chapters/12-evaluating-agentic-systems.md</a:t>
+            </a:r>
+          </a:p>
+          <a:p xmlns:a="http://schemas.openxmlformats.org/drawingml/2006/main">
+            <a:r>
+              <a:t>[/Sources]</a:t>
+            </a:r>
+          </a:p>
+        </p:txBody>
+      </p:sp>
+      <p:sp>
+        <p:nvSpPr>
+          <p:cNvPr id="4" name="Slide Number Placeholder 3"/>
+          <p:cNvSpPr>
+            <a:spLocks xmlns:a="http://schemas.openxmlformats.org/drawingml/2006/main" noGrp="1"/>
+          </p:cNvSpPr>
+          <p:nvPr>
+            <p:ph type="sldNum" idx="5"/>
+          </p:nvPr>
+        </p:nvSpPr>
+        <p:spPr/>
+        <p:txBody>
+          <a:bodyPr xmlns:a="http://schemas.openxmlformats.org/drawingml/2006/main"/>
+          <a:lstStyle xmlns:a="http://schemas.openxmlformats.org/drawingml/2006/main"/>
+          <a:p xmlns:a="http://schemas.openxmlformats.org/drawingml/2006/main"/>
+        </p:txBody>
+      </p:sp>
+    </p:spTree>
+  </p:cSld>
+  <p:clrMapOvr>
+    <a:masterClrMapping xmlns:a="http://schemas.openxmlformats.org/drawingml/2006/main"/>
+  </p:clrMapOvr>
+</p:notes>
+</file>
+
+<file path=ppt/notesSlides/notesSlide11.xml><?xml version="1.0" encoding="utf-8"?>
+<p:notes xmlns:p="http://schemas.openxmlformats.org/presentationml/2006/main">
+  <p:cSld>
+    <p:spTree>
+      <p:nvGrpSpPr>
+        <p:cNvPr id="1" name=""/>
+        <p:cNvGrpSpPr/>
+        <p:nvPr/>
+      </p:nvGrpSpPr>
+      <p:grpSpPr>
+        <a:xfrm xmlns:a="http://schemas.openxmlformats.org/drawingml/2006/main"/>
+      </p:grpSpPr>
+      <p:sp>
+        <p:nvSpPr>
+          <p:cNvPr id="2" name="Slide Image Placeholder 1"/>
+          <p:cNvSpPr>
+            <a:spLocks xmlns:a="http://schemas.openxmlformats.org/drawingml/2006/main" noGrp="1"/>
+          </p:cNvSpPr>
+          <p:nvPr>
+            <p:ph type="sldImg" idx="0"/>
+          </p:nvPr>
+        </p:nvSpPr>
+        <p:spPr/>
+      </p:sp>
+      <p:sp>
+        <p:nvSpPr>
+          <p:cNvPr id="3" name="Notes Placeholder 2"/>
+          <p:cNvSpPr>
+            <a:spLocks xmlns:a="http://schemas.openxmlformats.org/drawingml/2006/main" noGrp="1"/>
+          </p:cNvSpPr>
+          <p:nvPr>
+            <p:ph type="body" idx="1"/>
+          </p:nvPr>
+        </p:nvSpPr>
+        <p:spPr/>
+        <p:txBody>
+          <a:bodyPr xmlns:a="http://schemas.openxmlformats.org/drawingml/2006/main"/>
+          <a:lstStyle xmlns:a="http://schemas.openxmlformats.org/drawingml/2006/main"/>
+          <a:p xmlns:a="http://schemas.openxmlformats.org/drawingml/2006/main">
+            <a:r>
+              <a:t>Instructor purpose: Correct the quiz and restate the practical rule behind each answer.</a:t>
+            </a:r>
+          </a:p>
+          <a:p xmlns:a="http://schemas.openxmlformats.org/drawingml/2006/main">
+            <a:r>
+              <a:t>Planned timing: 3 minutes.</a:t>
+            </a:r>
+          </a:p>
+          <a:p xmlns:a="http://schemas.openxmlformats.org/drawingml/2006/main">
+            <a:r>
+              <a:t>Facilitation: ask learners to explain each rule in their own words.</a:t>
+            </a:r>
+          </a:p>
+          <a:p xmlns:a="http://schemas.openxmlformats.org/drawingml/2006/main">
+            <a:r>
+              <a:t>[Sources]</a:t>
+            </a:r>
+          </a:p>
+          <a:p xmlns:a="http://schemas.openxmlformats.org/drawingml/2006/main">
+            <a:r>
+              <a:t>- chapters/12-evaluating-agentic-systems.md</a:t>
+            </a:r>
+          </a:p>
+          <a:p xmlns:a="http://schemas.openxmlformats.org/drawingml/2006/main">
+            <a:r>
+              <a:t>[/Sources]</a:t>
+            </a:r>
+          </a:p>
+        </p:txBody>
+      </p:sp>
+      <p:sp>
+        <p:nvSpPr>
+          <p:cNvPr id="4" name="Slide Number Placeholder 3"/>
+          <p:cNvSpPr>
+            <a:spLocks xmlns:a="http://schemas.openxmlformats.org/drawingml/2006/main" noGrp="1"/>
+          </p:cNvSpPr>
+          <p:nvPr>
+            <p:ph type="sldNum" idx="5"/>
+          </p:nvPr>
+        </p:nvSpPr>
+        <p:spPr/>
+        <p:txBody>
+          <a:bodyPr xmlns:a="http://schemas.openxmlformats.org/drawingml/2006/main"/>
+          <a:lstStyle xmlns:a="http://schemas.openxmlformats.org/drawingml/2006/main"/>
+          <a:p xmlns:a="http://schemas.openxmlformats.org/drawingml/2006/main"/>
+        </p:txBody>
+      </p:sp>
+    </p:spTree>
+  </p:cSld>
+  <p:clrMapOvr>
+    <a:masterClrMapping xmlns:a="http://schemas.openxmlformats.org/drawingml/2006/main"/>
+  </p:clrMapOvr>
+</p:notes>
+</file>
+
 <file path=ppt/notesSlides/notesSlide2.xml><?xml version="1.0" encoding="utf-8"?>
 <p:notes xmlns:p="http://schemas.openxmlformats.org/presentationml/2006/main">
   <p:cSld>
@@ -1338,7 +1530,7 @@
   </p:cSld>
   <p:clrMap bg1="lt1" tx1="dk1" bg2="lt2" tx2="dk2" accent1="accent1" accent2="accent2" accent3="accent3" accent4="accent4" accent5="accent5" accent6="accent6" hlink="hlink" folHlink="folHlink"/>
   <p:sldLayoutIdLst>
-    <p:sldLayoutId xmlns:r="http://schemas.openxmlformats.org/officeDocument/2006/relationships" id="2147483649" r:id="Ree5c2b79982f4a36"/>
+    <p:sldLayoutId xmlns:r="http://schemas.openxmlformats.org/officeDocument/2006/relationships" id="2147483649" r:id="Rc3b9a5f5a27543f3"/>
   </p:sldLayoutIdLst>
   <p:txStyles>
     <p:titleStyle>
@@ -2237,6 +2429,1350 @@
 </p:sld>
 </file>
 
+<file path=ppt/slides/slide10.xml><?xml version="1.0" encoding="utf-8"?>
+<p:sld xmlns:p="http://schemas.openxmlformats.org/presentationml/2006/main">
+  <p:cSld>
+    <p:bg>
+      <p:bgPr>
+        <a:solidFill xmlns:a="http://schemas.openxmlformats.org/drawingml/2006/main">
+          <a:srgbClr val="F5F5F5"/>
+        </a:solidFill>
+      </p:bgPr>
+    </p:bg>
+    <p:spTree>
+      <p:nvGrpSpPr>
+        <p:cNvPr id="1" name=""/>
+        <p:cNvGrpSpPr/>
+        <p:nvPr/>
+      </p:nvGrpSpPr>
+      <p:grpSpPr>
+        <a:xfrm xmlns:a="http://schemas.openxmlformats.org/drawingml/2006/main"/>
+      </p:grpSpPr>
+      <p:sp>
+        <p:nvSpPr>
+          <p:cNvPr id="7" name="">
+            <a:extLst xmlns:a="http://schemas.openxmlformats.org/drawingml/2006/main">
+              <a:ext uri="{FF2B5EF4-FFF2-40B4-BE49-F238E27FC236}">
+                <a16:creationId xmlns:a16="http://schemas.microsoft.com/office/drawing/2014/main" id="{2E1E88F9-4976-411E-8732-D45BE311BBD2}"/>
+              </a:ext>
+            </a:extLst>
+          </p:cNvPr>
+          <p:cNvSpPr>
+            <a:spLocks xmlns:a="http://schemas.openxmlformats.org/drawingml/2006/main" noGrp="1"/>
+          </p:cNvSpPr>
+          <p:nvPr/>
+        </p:nvSpPr>
+        <p:spPr>
+          <a:xfrm xmlns:a="http://schemas.openxmlformats.org/drawingml/2006/main">
+            <a:off x="971550" y="781050"/>
+            <a:ext cx="1257300" cy="76200"/>
+          </a:xfrm>
+          <a:prstGeom xmlns:a="http://schemas.openxmlformats.org/drawingml/2006/main" prst="rect">
+            <a:avLst/>
+          </a:prstGeom>
+          <a:solidFill xmlns:a="http://schemas.openxmlformats.org/drawingml/2006/main">
+            <a:srgbClr val="00A2EB"/>
+          </a:solidFill>
+          <a:ln xmlns:a="http://schemas.openxmlformats.org/drawingml/2006/main" w="0">
+            <a:solidFill>
+              <a:srgbClr val="00A2EB"/>
+            </a:solidFill>
+            <a:prstDash val="solid"/>
+          </a:ln>
+        </p:spPr>
+      </p:sp>
+      <p:sp>
+        <p:nvSpPr>
+          <p:cNvPr id="2" name="">
+            <a:extLst xmlns:a="http://schemas.openxmlformats.org/drawingml/2006/main">
+              <a:ext uri="{FF2B5EF4-FFF2-40B4-BE49-F238E27FC236}">
+                <a16:creationId xmlns:a16="http://schemas.microsoft.com/office/drawing/2014/main" id="{35C43047-00B1-4B7A-BB36-D272D2C9B6CA}"/>
+              </a:ext>
+            </a:extLst>
+          </p:cNvPr>
+          <p:cNvSpPr>
+            <a:spLocks xmlns:a="http://schemas.openxmlformats.org/drawingml/2006/main" noGrp="1"/>
+          </p:cNvSpPr>
+          <p:nvPr/>
+        </p:nvSpPr>
+        <p:spPr>
+          <a:xfrm xmlns:a="http://schemas.openxmlformats.org/drawingml/2006/main">
+            <a:off x="971550" y="1066800"/>
+            <a:ext cx="2857500" cy="419100"/>
+          </a:xfrm>
+          <a:prstGeom xmlns:a="http://schemas.openxmlformats.org/drawingml/2006/main" prst="rect">
+            <a:avLst/>
+          </a:prstGeom>
+          <a:noFill xmlns:a="http://schemas.openxmlformats.org/drawingml/2006/main"/>
+          <a:ln xmlns:a="http://schemas.openxmlformats.org/drawingml/2006/main" w="0">
+            <a:noFill/>
+            <a:prstDash val="solid"/>
+          </a:ln>
+        </p:spPr>
+        <p:txBody>
+          <a:bodyPr xmlns:a="http://schemas.openxmlformats.org/drawingml/2006/main" wrap="square" lIns="0" tIns="0" rIns="0" bIns="0" anchor="ctr">
+            <a:normAutofit fontScale="100000"/>
+          </a:bodyPr>
+          <a:lstStyle xmlns:a="http://schemas.openxmlformats.org/drawingml/2006/main"/>
+          <a:p xmlns:a="http://schemas.openxmlformats.org/drawingml/2006/main">
+            <a:pPr algn="l">
+              <a:lnSpc>
+                <a:spcPct val="100000"/>
+              </a:lnSpc>
+              <a:buNone/>
+              <a:defRPr sz="1575" b="1">
+                <a:solidFill>
+                  <a:srgbClr val="1F40CB"/>
+                </a:solidFill>
+                <a:latin typeface="Calibri"/>
+                <a:ea typeface="Calibri"/>
+                <a:cs typeface="Calibri"/>
+              </a:defRPr>
+            </a:pPr>
+            <a:r>
+              <a:rPr sz="1575" b="1">
+                <a:solidFill>
+                  <a:srgbClr val="1F40CB"/>
+                </a:solidFill>
+                <a:latin typeface="Calibri"/>
+                <a:ea typeface="Calibri"/>
+                <a:cs typeface="Calibri"/>
+              </a:rPr>
+              <a:t>FIRST FINANCE</a:t>
+            </a:r>
+          </a:p>
+        </p:txBody>
+      </p:sp>
+      <p:sp>
+        <p:nvSpPr>
+          <p:cNvPr id="3" name="">
+            <a:extLst xmlns:a="http://schemas.openxmlformats.org/drawingml/2006/main">
+              <a:ext uri="{FF2B5EF4-FFF2-40B4-BE49-F238E27FC236}">
+                <a16:creationId xmlns:a16="http://schemas.microsoft.com/office/drawing/2014/main" id="{2EBB9B00-5773-4D90-9774-8BB7FE35221F}"/>
+              </a:ext>
+            </a:extLst>
+          </p:cNvPr>
+          <p:cNvSpPr>
+            <a:spLocks xmlns:a="http://schemas.openxmlformats.org/drawingml/2006/main" noGrp="1"/>
+          </p:cNvSpPr>
+          <p:nvPr/>
+        </p:nvSpPr>
+        <p:spPr>
+          <a:xfrm xmlns:a="http://schemas.openxmlformats.org/drawingml/2006/main">
+            <a:off x="971550" y="2362200"/>
+            <a:ext cx="13296900" cy="895350"/>
+          </a:xfrm>
+          <a:prstGeom xmlns:a="http://schemas.openxmlformats.org/drawingml/2006/main" prst="rect">
+            <a:avLst/>
+          </a:prstGeom>
+          <a:noFill xmlns:a="http://schemas.openxmlformats.org/drawingml/2006/main"/>
+          <a:ln xmlns:a="http://schemas.openxmlformats.org/drawingml/2006/main" w="0">
+            <a:noFill/>
+            <a:prstDash val="solid"/>
+          </a:ln>
+        </p:spPr>
+        <p:txBody>
+          <a:bodyPr xmlns:a="http://schemas.openxmlformats.org/drawingml/2006/main" wrap="none" lIns="0" tIns="0" rIns="0" bIns="0" anchor="ctr">
+            <a:normAutofit fontScale="100000"/>
+          </a:bodyPr>
+          <a:lstStyle xmlns:a="http://schemas.openxmlformats.org/drawingml/2006/main"/>
+          <a:p xmlns:a="http://schemas.openxmlformats.org/drawingml/2006/main">
+            <a:pPr algn="l">
+              <a:lnSpc>
+                <a:spcPct val="100000"/>
+              </a:lnSpc>
+              <a:buNone/>
+              <a:defRPr sz="4800" b="1">
+                <a:solidFill>
+                  <a:srgbClr val="051C2A"/>
+                </a:solidFill>
+                <a:latin typeface="Calibri"/>
+                <a:ea typeface="Calibri"/>
+                <a:cs typeface="Calibri"/>
+              </a:defRPr>
+            </a:pPr>
+            <a:r>
+              <a:rPr sz="4800" b="1">
+                <a:solidFill>
+                  <a:srgbClr val="051C2A"/>
+                </a:solidFill>
+                <a:latin typeface="Calibri"/>
+                <a:ea typeface="Calibri"/>
+                <a:cs typeface="Calibri"/>
+              </a:rPr>
+              <a:t>Quick quiz</a:t>
+            </a:r>
+          </a:p>
+        </p:txBody>
+      </p:sp>
+      <p:sp>
+        <p:nvSpPr>
+          <p:cNvPr id="4" name="">
+            <a:extLst xmlns:a="http://schemas.openxmlformats.org/drawingml/2006/main">
+              <a:ext uri="{FF2B5EF4-FFF2-40B4-BE49-F238E27FC236}">
+                <a16:creationId xmlns:a16="http://schemas.microsoft.com/office/drawing/2014/main" id="{601F96F8-8EA3-4B69-A3AF-EBD5CBCD09C1}"/>
+              </a:ext>
+            </a:extLst>
+          </p:cNvPr>
+          <p:cNvSpPr>
+            <a:spLocks xmlns:a="http://schemas.openxmlformats.org/drawingml/2006/main" noGrp="1"/>
+          </p:cNvSpPr>
+          <p:nvPr/>
+        </p:nvSpPr>
+        <p:spPr>
+          <a:xfrm xmlns:a="http://schemas.openxmlformats.org/drawingml/2006/main">
+            <a:off x="971550" y="3562350"/>
+            <a:ext cx="11239500" cy="514350"/>
+          </a:xfrm>
+          <a:prstGeom xmlns:a="http://schemas.openxmlformats.org/drawingml/2006/main" prst="rect">
+            <a:avLst/>
+          </a:prstGeom>
+          <a:noFill xmlns:a="http://schemas.openxmlformats.org/drawingml/2006/main"/>
+          <a:ln xmlns:a="http://schemas.openxmlformats.org/drawingml/2006/main" w="0">
+            <a:noFill/>
+            <a:prstDash val="solid"/>
+          </a:ln>
+        </p:spPr>
+        <p:txBody>
+          <a:bodyPr xmlns:a="http://schemas.openxmlformats.org/drawingml/2006/main" wrap="square" lIns="0" tIns="0" rIns="0" bIns="0" anchor="ctr">
+            <a:normAutofit fontScale="100000"/>
+          </a:bodyPr>
+          <a:lstStyle xmlns:a="http://schemas.openxmlformats.org/drawingml/2006/main"/>
+          <a:p xmlns:a="http://schemas.openxmlformats.org/drawingml/2006/main">
+            <a:pPr algn="l">
+              <a:lnSpc>
+                <a:spcPct val="100000"/>
+              </a:lnSpc>
+              <a:buNone/>
+              <a:defRPr sz="2400" b="0">
+                <a:solidFill>
+                  <a:srgbClr val="3F3F42"/>
+                </a:solidFill>
+                <a:latin typeface="Calibri"/>
+                <a:ea typeface="Calibri"/>
+                <a:cs typeface="Calibri"/>
+              </a:defRPr>
+            </a:pPr>
+            <a:r>
+              <a:rPr sz="2400" b="0">
+                <a:solidFill>
+                  <a:srgbClr val="3F3F42"/>
+                </a:solidFill>
+                <a:latin typeface="Calibri"/>
+                <a:ea typeface="Calibri"/>
+                <a:cs typeface="Calibri"/>
+              </a:rPr>
+              <a:t>Choose one answer for each question.</a:t>
+            </a:r>
+          </a:p>
+        </p:txBody>
+      </p:sp>
+      <p:sp>
+        <p:nvSpPr>
+          <p:cNvPr id="5" name="">
+            <a:extLst xmlns:a="http://schemas.openxmlformats.org/drawingml/2006/main">
+              <a:ext uri="{FF2B5EF4-FFF2-40B4-BE49-F238E27FC236}">
+                <a16:creationId xmlns:a16="http://schemas.microsoft.com/office/drawing/2014/main" id="{D4A6E89B-2708-4600-B820-727EF660DE6B}"/>
+              </a:ext>
+            </a:extLst>
+          </p:cNvPr>
+          <p:cNvSpPr>
+            <a:spLocks xmlns:a="http://schemas.openxmlformats.org/drawingml/2006/main" noGrp="1"/>
+          </p:cNvSpPr>
+          <p:nvPr/>
+        </p:nvSpPr>
+        <p:spPr>
+          <a:xfrm xmlns:a="http://schemas.openxmlformats.org/drawingml/2006/main">
+            <a:off x="971550" y="6477000"/>
+            <a:ext cx="9525000" cy="400050"/>
+          </a:xfrm>
+          <a:prstGeom xmlns:a="http://schemas.openxmlformats.org/drawingml/2006/main" prst="rect">
+            <a:avLst/>
+          </a:prstGeom>
+          <a:noFill xmlns:a="http://schemas.openxmlformats.org/drawingml/2006/main"/>
+          <a:ln xmlns:a="http://schemas.openxmlformats.org/drawingml/2006/main" w="0">
+            <a:noFill/>
+            <a:prstDash val="solid"/>
+          </a:ln>
+        </p:spPr>
+        <p:txBody>
+          <a:bodyPr xmlns:a="http://schemas.openxmlformats.org/drawingml/2006/main" wrap="square" lIns="0" tIns="0" rIns="0" bIns="0" anchor="ctr">
+            <a:normAutofit fontScale="100000"/>
+          </a:bodyPr>
+          <a:lstStyle xmlns:a="http://schemas.openxmlformats.org/drawingml/2006/main"/>
+          <a:p xmlns:a="http://schemas.openxmlformats.org/drawingml/2006/main">
+            <a:pPr algn="l">
+              <a:lnSpc>
+                <a:spcPct val="100000"/>
+              </a:lnSpc>
+              <a:buNone/>
+              <a:defRPr sz="1350" b="1">
+                <a:solidFill>
+                  <a:srgbClr val="1F40CB"/>
+                </a:solidFill>
+                <a:latin typeface="Calibri"/>
+                <a:ea typeface="Calibri"/>
+                <a:cs typeface="Calibri"/>
+              </a:defRPr>
+            </a:pPr>
+            <a:r>
+              <a:rPr sz="1350" b="1">
+                <a:solidFill>
+                  <a:srgbClr val="1F40CB"/>
+                </a:solidFill>
+                <a:latin typeface="Calibri"/>
+                <a:ea typeface="Calibri"/>
+                <a:cs typeface="Calibri"/>
+              </a:rPr>
+              <a:t>LESSON 12  ·  3 QUESTIONS  ·  3 MINUTES</a:t>
+            </a:r>
+          </a:p>
+        </p:txBody>
+      </p:sp>
+      <p:sp>
+        <p:nvSpPr>
+          <p:cNvPr id="6" name="">
+            <a:extLst xmlns:a="http://schemas.openxmlformats.org/drawingml/2006/main">
+              <a:ext uri="{FF2B5EF4-FFF2-40B4-BE49-F238E27FC236}">
+                <a16:creationId xmlns:a16="http://schemas.microsoft.com/office/drawing/2014/main" id="{053831D6-7D46-4F1A-929F-D2CAD97F1627}"/>
+              </a:ext>
+            </a:extLst>
+          </p:cNvPr>
+          <p:cNvSpPr>
+            <a:spLocks xmlns:a="http://schemas.openxmlformats.org/drawingml/2006/main" noGrp="1"/>
+          </p:cNvSpPr>
+          <p:nvPr/>
+        </p:nvSpPr>
+        <p:spPr>
+          <a:xfrm xmlns:a="http://schemas.openxmlformats.org/drawingml/2006/main">
+            <a:off x="971550" y="7067550"/>
+            <a:ext cx="4762500" cy="381000"/>
+          </a:xfrm>
+          <a:prstGeom xmlns:a="http://schemas.openxmlformats.org/drawingml/2006/main" prst="rect">
+            <a:avLst/>
+          </a:prstGeom>
+          <a:noFill xmlns:a="http://schemas.openxmlformats.org/drawingml/2006/main"/>
+          <a:ln xmlns:a="http://schemas.openxmlformats.org/drawingml/2006/main" w="0">
+            <a:noFill/>
+            <a:prstDash val="solid"/>
+          </a:ln>
+        </p:spPr>
+        <p:txBody>
+          <a:bodyPr xmlns:a="http://schemas.openxmlformats.org/drawingml/2006/main" wrap="square" lIns="0" tIns="0" rIns="0" bIns="0" anchor="ctr">
+            <a:normAutofit fontScale="100000"/>
+          </a:bodyPr>
+          <a:lstStyle xmlns:a="http://schemas.openxmlformats.org/drawingml/2006/main"/>
+          <a:p xmlns:a="http://schemas.openxmlformats.org/drawingml/2006/main">
+            <a:pPr algn="l">
+              <a:lnSpc>
+                <a:spcPct val="100000"/>
+              </a:lnSpc>
+              <a:buNone/>
+              <a:defRPr sz="1725" b="0">
+                <a:solidFill>
+                  <a:srgbClr val="051C2A"/>
+                </a:solidFill>
+                <a:latin typeface="Calibri"/>
+                <a:ea typeface="Calibri"/>
+                <a:cs typeface="Calibri"/>
+              </a:defRPr>
+            </a:pPr>
+            <a:r>
+              <a:rPr sz="1725" b="0">
+                <a:solidFill>
+                  <a:srgbClr val="051C2A"/>
+                </a:solidFill>
+                <a:latin typeface="Calibri"/>
+                <a:ea typeface="Calibri"/>
+                <a:cs typeface="Calibri"/>
+              </a:rPr>
+              <a:t>First Finance - Arnaud Demes</a:t>
+            </a:r>
+          </a:p>
+        </p:txBody>
+      </p:sp>
+      <p:sp>
+        <p:nvSpPr>
+          <p:cNvPr id="8" name="quiz-question-1">
+            <a:extLst xmlns:a="http://schemas.openxmlformats.org/drawingml/2006/main">
+              <a:ext uri="{FF2B5EF4-FFF2-40B4-BE49-F238E27FC236}">
+                <a16:creationId xmlns:a16="http://schemas.microsoft.com/office/drawing/2014/main" id="{B8C12B95-0AEF-4DAC-ACED-9105A1119C81}"/>
+              </a:ext>
+            </a:extLst>
+          </p:cNvPr>
+          <p:cNvSpPr>
+            <a:spLocks xmlns:a="http://schemas.openxmlformats.org/drawingml/2006/main" noGrp="1"/>
+          </p:cNvSpPr>
+          <p:nvPr/>
+        </p:nvSpPr>
+        <p:spPr>
+          <a:xfrm xmlns:a="http://schemas.openxmlformats.org/drawingml/2006/main">
+            <a:off x="971550" y="4400550"/>
+            <a:ext cx="13296900" cy="285750"/>
+          </a:xfrm>
+          <a:prstGeom xmlns:a="http://schemas.openxmlformats.org/drawingml/2006/main" prst="rect">
+            <a:avLst/>
+          </a:prstGeom>
+          <a:noFill xmlns:a="http://schemas.openxmlformats.org/drawingml/2006/main"/>
+          <a:ln xmlns:a="http://schemas.openxmlformats.org/drawingml/2006/main" w="0">
+            <a:noFill/>
+            <a:prstDash val="solid"/>
+          </a:ln>
+        </p:spPr>
+        <p:txBody>
+          <a:bodyPr xmlns:a="http://schemas.openxmlformats.org/drawingml/2006/main"/>
+          <a:lstStyle xmlns:a="http://schemas.openxmlformats.org/drawingml/2006/main"/>
+          <a:p xmlns:a="http://schemas.openxmlformats.org/drawingml/2006/main">
+            <a:pPr>
+              <a:defRPr sz="1500" b="1">
+                <a:solidFill>
+                  <a:srgbClr val="001B2E"/>
+                </a:solidFill>
+              </a:defRPr>
+            </a:pPr>
+            <a:r>
+              <a:rPr sz="1500" b="1">
+                <a:solidFill>
+                  <a:srgbClr val="001B2E"/>
+                </a:solidFill>
+              </a:rPr>
+              <a:t>1. Should path quality and answer quality be scored separately?</a:t>
+            </a:r>
+          </a:p>
+        </p:txBody>
+      </p:sp>
+      <p:sp>
+        <p:nvSpPr>
+          <p:cNvPr id="9" name="quiz-options-1">
+            <a:extLst xmlns:a="http://schemas.openxmlformats.org/drawingml/2006/main">
+              <a:ext uri="{FF2B5EF4-FFF2-40B4-BE49-F238E27FC236}">
+                <a16:creationId xmlns:a16="http://schemas.microsoft.com/office/drawing/2014/main" id="{1B915C0D-67DA-42DC-8D1E-5A38B61422C4}"/>
+              </a:ext>
+            </a:extLst>
+          </p:cNvPr>
+          <p:cNvSpPr>
+            <a:spLocks xmlns:a="http://schemas.openxmlformats.org/drawingml/2006/main" noGrp="1"/>
+          </p:cNvSpPr>
+          <p:nvPr/>
+        </p:nvSpPr>
+        <p:spPr>
+          <a:xfrm xmlns:a="http://schemas.openxmlformats.org/drawingml/2006/main">
+            <a:off x="1257300" y="4705350"/>
+            <a:ext cx="13011150" cy="247650"/>
+          </a:xfrm>
+          <a:prstGeom xmlns:a="http://schemas.openxmlformats.org/drawingml/2006/main" prst="rect">
+            <a:avLst/>
+          </a:prstGeom>
+          <a:noFill xmlns:a="http://schemas.openxmlformats.org/drawingml/2006/main"/>
+          <a:ln xmlns:a="http://schemas.openxmlformats.org/drawingml/2006/main" w="0">
+            <a:noFill/>
+            <a:prstDash val="solid"/>
+          </a:ln>
+        </p:spPr>
+        <p:txBody>
+          <a:bodyPr xmlns:a="http://schemas.openxmlformats.org/drawingml/2006/main"/>
+          <a:lstStyle xmlns:a="http://schemas.openxmlformats.org/drawingml/2006/main"/>
+          <a:p xmlns:a="http://schemas.openxmlformats.org/drawingml/2006/main">
+            <a:pPr>
+              <a:defRPr sz="1200" b="0">
+                <a:solidFill>
+                  <a:srgbClr val="334155"/>
+                </a:solidFill>
+              </a:defRPr>
+            </a:pPr>
+            <a:r>
+              <a:rPr sz="1200" b="0">
+                <a:solidFill>
+                  <a:srgbClr val="334155"/>
+                </a:solidFill>
+              </a:rPr>
+              <a:t>A  Yes     |     B  No     |     C  Only with OpenAI</a:t>
+            </a:r>
+          </a:p>
+        </p:txBody>
+      </p:sp>
+      <p:sp>
+        <p:nvSpPr>
+          <p:cNvPr id="10" name="quiz-question-2">
+            <a:extLst xmlns:a="http://schemas.openxmlformats.org/drawingml/2006/main">
+              <a:ext uri="{FF2B5EF4-FFF2-40B4-BE49-F238E27FC236}">
+                <a16:creationId xmlns:a16="http://schemas.microsoft.com/office/drawing/2014/main" id="{3B700542-40A3-4259-B07F-956D5C940162}"/>
+              </a:ext>
+            </a:extLst>
+          </p:cNvPr>
+          <p:cNvSpPr>
+            <a:spLocks xmlns:a="http://schemas.openxmlformats.org/drawingml/2006/main" noGrp="1"/>
+          </p:cNvSpPr>
+          <p:nvPr/>
+        </p:nvSpPr>
+        <p:spPr>
+          <a:xfrm xmlns:a="http://schemas.openxmlformats.org/drawingml/2006/main">
+            <a:off x="971550" y="5086350"/>
+            <a:ext cx="13296900" cy="285750"/>
+          </a:xfrm>
+          <a:prstGeom xmlns:a="http://schemas.openxmlformats.org/drawingml/2006/main" prst="rect">
+            <a:avLst/>
+          </a:prstGeom>
+          <a:noFill xmlns:a="http://schemas.openxmlformats.org/drawingml/2006/main"/>
+          <a:ln xmlns:a="http://schemas.openxmlformats.org/drawingml/2006/main" w="0">
+            <a:noFill/>
+            <a:prstDash val="solid"/>
+          </a:ln>
+        </p:spPr>
+        <p:txBody>
+          <a:bodyPr xmlns:a="http://schemas.openxmlformats.org/drawingml/2006/main"/>
+          <a:lstStyle xmlns:a="http://schemas.openxmlformats.org/drawingml/2006/main"/>
+          <a:p xmlns:a="http://schemas.openxmlformats.org/drawingml/2006/main">
+            <a:pPr>
+              <a:defRPr sz="1500" b="1">
+                <a:solidFill>
+                  <a:srgbClr val="001B2E"/>
+                </a:solidFill>
+              </a:defRPr>
+            </a:pPr>
+            <a:r>
+              <a:rPr sz="1500" b="1">
+                <a:solidFill>
+                  <a:srgbClr val="001B2E"/>
+                </a:solidFill>
+              </a:rPr>
+              <a:t>2. Which gate must run for every release case?</a:t>
+            </a:r>
+          </a:p>
+        </p:txBody>
+      </p:sp>
+      <p:sp>
+        <p:nvSpPr>
+          <p:cNvPr id="11" name="quiz-options-2">
+            <a:extLst xmlns:a="http://schemas.openxmlformats.org/drawingml/2006/main">
+              <a:ext uri="{FF2B5EF4-FFF2-40B4-BE49-F238E27FC236}">
+                <a16:creationId xmlns:a16="http://schemas.microsoft.com/office/drawing/2014/main" id="{14C4B184-C4E9-4FD8-B0B1-975A979ECF26}"/>
+              </a:ext>
+            </a:extLst>
+          </p:cNvPr>
+          <p:cNvSpPr>
+            <a:spLocks xmlns:a="http://schemas.openxmlformats.org/drawingml/2006/main" noGrp="1"/>
+          </p:cNvSpPr>
+          <p:nvPr/>
+        </p:nvSpPr>
+        <p:spPr>
+          <a:xfrm xmlns:a="http://schemas.openxmlformats.org/drawingml/2006/main">
+            <a:off x="1257300" y="5391150"/>
+            <a:ext cx="13011150" cy="247650"/>
+          </a:xfrm>
+          <a:prstGeom xmlns:a="http://schemas.openxmlformats.org/drawingml/2006/main" prst="rect">
+            <a:avLst/>
+          </a:prstGeom>
+          <a:noFill xmlns:a="http://schemas.openxmlformats.org/drawingml/2006/main"/>
+          <a:ln xmlns:a="http://schemas.openxmlformats.org/drawingml/2006/main" w="0">
+            <a:noFill/>
+            <a:prstDash val="solid"/>
+          </a:ln>
+        </p:spPr>
+        <p:txBody>
+          <a:bodyPr xmlns:a="http://schemas.openxmlformats.org/drawingml/2006/main"/>
+          <a:lstStyle xmlns:a="http://schemas.openxmlformats.org/drawingml/2006/main"/>
+          <a:p xmlns:a="http://schemas.openxmlformats.org/drawingml/2006/main">
+            <a:pPr>
+              <a:defRPr sz="1200" b="0">
+                <a:solidFill>
+                  <a:srgbClr val="334155"/>
+                </a:solidFill>
+              </a:defRPr>
+            </a:pPr>
+            <a:r>
+              <a:rPr sz="1200" b="0">
+                <a:solidFill>
+                  <a:srgbClr val="334155"/>
+                </a:solidFill>
+              </a:rPr>
+              <a:t>A  Deterministic gate     |     B  Optional LLM judge     |     C  Manual demo</a:t>
+            </a:r>
+          </a:p>
+        </p:txBody>
+      </p:sp>
+      <p:sp>
+        <p:nvSpPr>
+          <p:cNvPr id="12" name="quiz-question-3">
+            <a:extLst xmlns:a="http://schemas.openxmlformats.org/drawingml/2006/main">
+              <a:ext uri="{FF2B5EF4-FFF2-40B4-BE49-F238E27FC236}">
+                <a16:creationId xmlns:a16="http://schemas.microsoft.com/office/drawing/2014/main" id="{27EAEA27-5D19-47C2-976D-ECEE08DD10FE}"/>
+              </a:ext>
+            </a:extLst>
+          </p:cNvPr>
+          <p:cNvSpPr>
+            <a:spLocks xmlns:a="http://schemas.openxmlformats.org/drawingml/2006/main" noGrp="1"/>
+          </p:cNvSpPr>
+          <p:nvPr/>
+        </p:nvSpPr>
+        <p:spPr>
+          <a:xfrm xmlns:a="http://schemas.openxmlformats.org/drawingml/2006/main">
+            <a:off x="971550" y="5772150"/>
+            <a:ext cx="13296900" cy="285750"/>
+          </a:xfrm>
+          <a:prstGeom xmlns:a="http://schemas.openxmlformats.org/drawingml/2006/main" prst="rect">
+            <a:avLst/>
+          </a:prstGeom>
+          <a:noFill xmlns:a="http://schemas.openxmlformats.org/drawingml/2006/main"/>
+          <a:ln xmlns:a="http://schemas.openxmlformats.org/drawingml/2006/main" w="0">
+            <a:noFill/>
+            <a:prstDash val="solid"/>
+          </a:ln>
+        </p:spPr>
+        <p:txBody>
+          <a:bodyPr xmlns:a="http://schemas.openxmlformats.org/drawingml/2006/main"/>
+          <a:lstStyle xmlns:a="http://schemas.openxmlformats.org/drawingml/2006/main"/>
+          <a:p xmlns:a="http://schemas.openxmlformats.org/drawingml/2006/main">
+            <a:pPr>
+              <a:defRPr sz="1500" b="1">
+                <a:solidFill>
+                  <a:srgbClr val="001B2E"/>
+                </a:solidFill>
+              </a:defRPr>
+            </a:pPr>
+            <a:r>
+              <a:rPr sz="1500" b="1">
+                <a:solidFill>
+                  <a:srgbClr val="001B2E"/>
+                </a:solidFill>
+              </a:rPr>
+              <a:t>3. How should an unavailable optional judge be recorded?</a:t>
+            </a:r>
+          </a:p>
+        </p:txBody>
+      </p:sp>
+      <p:sp>
+        <p:nvSpPr>
+          <p:cNvPr id="13" name="quiz-options-3">
+            <a:extLst xmlns:a="http://schemas.openxmlformats.org/drawingml/2006/main">
+              <a:ext uri="{FF2B5EF4-FFF2-40B4-BE49-F238E27FC236}">
+                <a16:creationId xmlns:a16="http://schemas.microsoft.com/office/drawing/2014/main" id="{8757DE33-3F4E-4485-8596-1A39EDB435E8}"/>
+              </a:ext>
+            </a:extLst>
+          </p:cNvPr>
+          <p:cNvSpPr>
+            <a:spLocks xmlns:a="http://schemas.openxmlformats.org/drawingml/2006/main" noGrp="1"/>
+          </p:cNvSpPr>
+          <p:nvPr/>
+        </p:nvSpPr>
+        <p:spPr>
+          <a:xfrm xmlns:a="http://schemas.openxmlformats.org/drawingml/2006/main">
+            <a:off x="1257300" y="6076950"/>
+            <a:ext cx="13011150" cy="247650"/>
+          </a:xfrm>
+          <a:prstGeom xmlns:a="http://schemas.openxmlformats.org/drawingml/2006/main" prst="rect">
+            <a:avLst/>
+          </a:prstGeom>
+          <a:noFill xmlns:a="http://schemas.openxmlformats.org/drawingml/2006/main"/>
+          <a:ln xmlns:a="http://schemas.openxmlformats.org/drawingml/2006/main" w="0">
+            <a:noFill/>
+            <a:prstDash val="solid"/>
+          </a:ln>
+        </p:spPr>
+        <p:txBody>
+          <a:bodyPr xmlns:a="http://schemas.openxmlformats.org/drawingml/2006/main"/>
+          <a:lstStyle xmlns:a="http://schemas.openxmlformats.org/drawingml/2006/main"/>
+          <a:p xmlns:a="http://schemas.openxmlformats.org/drawingml/2006/main">
+            <a:pPr>
+              <a:defRPr sz="1200" b="0">
+                <a:solidFill>
+                  <a:srgbClr val="334155"/>
+                </a:solidFill>
+              </a:defRPr>
+            </a:pPr>
+            <a:r>
+              <a:rPr sz="1200" b="0">
+                <a:solidFill>
+                  <a:srgbClr val="334155"/>
+                </a:solidFill>
+              </a:rPr>
+              <a:t>A  NOT RUN     |     B  PASS     |     C  Zero cost</a:t>
+            </a:r>
+          </a:p>
+        </p:txBody>
+      </p:sp>
+    </p:spTree>
+    <p:extLst>
+      <p:ext uri="{BB962C8B-B14F-4D97-AF65-F5344CB8AC3E}">
+        <p14:creationId xmlns:p14="http://schemas.microsoft.com/office/powerpoint/2010/main" val="1316229138"/>
+      </p:ext>
+    </p:extLst>
+  </p:cSld>
+</p:sld>
+</file>
+
+<file path=ppt/slides/slide11.xml><?xml version="1.0" encoding="utf-8"?>
+<p:sld xmlns:p="http://schemas.openxmlformats.org/presentationml/2006/main">
+  <p:cSld>
+    <p:bg>
+      <p:bgPr>
+        <a:solidFill xmlns:a="http://schemas.openxmlformats.org/drawingml/2006/main">
+          <a:srgbClr val="F5F5F5"/>
+        </a:solidFill>
+      </p:bgPr>
+    </p:bg>
+    <p:spTree>
+      <p:nvGrpSpPr>
+        <p:cNvPr id="1" name=""/>
+        <p:cNvGrpSpPr/>
+        <p:nvPr/>
+      </p:nvGrpSpPr>
+      <p:grpSpPr>
+        <a:xfrm xmlns:a="http://schemas.openxmlformats.org/drawingml/2006/main"/>
+      </p:grpSpPr>
+      <p:sp>
+        <p:nvSpPr>
+          <p:cNvPr id="7" name="">
+            <a:extLst xmlns:a="http://schemas.openxmlformats.org/drawingml/2006/main">
+              <a:ext uri="{FF2B5EF4-FFF2-40B4-BE49-F238E27FC236}">
+                <a16:creationId xmlns:a16="http://schemas.microsoft.com/office/drawing/2014/main" id="{2E1E88F9-4976-411E-8732-D45BE311BBD2}"/>
+              </a:ext>
+            </a:extLst>
+          </p:cNvPr>
+          <p:cNvSpPr>
+            <a:spLocks xmlns:a="http://schemas.openxmlformats.org/drawingml/2006/main" noGrp="1"/>
+          </p:cNvSpPr>
+          <p:nvPr/>
+        </p:nvSpPr>
+        <p:spPr>
+          <a:xfrm xmlns:a="http://schemas.openxmlformats.org/drawingml/2006/main">
+            <a:off x="971550" y="781050"/>
+            <a:ext cx="1257300" cy="76200"/>
+          </a:xfrm>
+          <a:prstGeom xmlns:a="http://schemas.openxmlformats.org/drawingml/2006/main" prst="rect">
+            <a:avLst/>
+          </a:prstGeom>
+          <a:solidFill xmlns:a="http://schemas.openxmlformats.org/drawingml/2006/main">
+            <a:srgbClr val="00A2EB"/>
+          </a:solidFill>
+          <a:ln xmlns:a="http://schemas.openxmlformats.org/drawingml/2006/main" w="0">
+            <a:solidFill>
+              <a:srgbClr val="00A2EB"/>
+            </a:solidFill>
+            <a:prstDash val="solid"/>
+          </a:ln>
+        </p:spPr>
+      </p:sp>
+      <p:sp>
+        <p:nvSpPr>
+          <p:cNvPr id="2" name="">
+            <a:extLst xmlns:a="http://schemas.openxmlformats.org/drawingml/2006/main">
+              <a:ext uri="{FF2B5EF4-FFF2-40B4-BE49-F238E27FC236}">
+                <a16:creationId xmlns:a16="http://schemas.microsoft.com/office/drawing/2014/main" id="{35C43047-00B1-4B7A-BB36-D272D2C9B6CA}"/>
+              </a:ext>
+            </a:extLst>
+          </p:cNvPr>
+          <p:cNvSpPr>
+            <a:spLocks xmlns:a="http://schemas.openxmlformats.org/drawingml/2006/main" noGrp="1"/>
+          </p:cNvSpPr>
+          <p:nvPr/>
+        </p:nvSpPr>
+        <p:spPr>
+          <a:xfrm xmlns:a="http://schemas.openxmlformats.org/drawingml/2006/main">
+            <a:off x="971550" y="1066800"/>
+            <a:ext cx="2857500" cy="419100"/>
+          </a:xfrm>
+          <a:prstGeom xmlns:a="http://schemas.openxmlformats.org/drawingml/2006/main" prst="rect">
+            <a:avLst/>
+          </a:prstGeom>
+          <a:noFill xmlns:a="http://schemas.openxmlformats.org/drawingml/2006/main"/>
+          <a:ln xmlns:a="http://schemas.openxmlformats.org/drawingml/2006/main" w="0">
+            <a:noFill/>
+            <a:prstDash val="solid"/>
+          </a:ln>
+        </p:spPr>
+        <p:txBody>
+          <a:bodyPr xmlns:a="http://schemas.openxmlformats.org/drawingml/2006/main" wrap="square" lIns="0" tIns="0" rIns="0" bIns="0" anchor="ctr">
+            <a:normAutofit fontScale="100000"/>
+          </a:bodyPr>
+          <a:lstStyle xmlns:a="http://schemas.openxmlformats.org/drawingml/2006/main"/>
+          <a:p xmlns:a="http://schemas.openxmlformats.org/drawingml/2006/main">
+            <a:pPr algn="l">
+              <a:lnSpc>
+                <a:spcPct val="100000"/>
+              </a:lnSpc>
+              <a:buNone/>
+              <a:defRPr sz="1575" b="1">
+                <a:solidFill>
+                  <a:srgbClr val="1F40CB"/>
+                </a:solidFill>
+                <a:latin typeface="Calibri"/>
+                <a:ea typeface="Calibri"/>
+                <a:cs typeface="Calibri"/>
+              </a:defRPr>
+            </a:pPr>
+            <a:r>
+              <a:rPr sz="1575" b="1">
+                <a:solidFill>
+                  <a:srgbClr val="1F40CB"/>
+                </a:solidFill>
+                <a:latin typeface="Calibri"/>
+                <a:ea typeface="Calibri"/>
+                <a:cs typeface="Calibri"/>
+              </a:rPr>
+              <a:t>FIRST FINANCE</a:t>
+            </a:r>
+          </a:p>
+        </p:txBody>
+      </p:sp>
+      <p:sp>
+        <p:nvSpPr>
+          <p:cNvPr id="3" name="">
+            <a:extLst xmlns:a="http://schemas.openxmlformats.org/drawingml/2006/main">
+              <a:ext uri="{FF2B5EF4-FFF2-40B4-BE49-F238E27FC236}">
+                <a16:creationId xmlns:a16="http://schemas.microsoft.com/office/drawing/2014/main" id="{2EBB9B00-5773-4D90-9774-8BB7FE35221F}"/>
+              </a:ext>
+            </a:extLst>
+          </p:cNvPr>
+          <p:cNvSpPr>
+            <a:spLocks xmlns:a="http://schemas.openxmlformats.org/drawingml/2006/main" noGrp="1"/>
+          </p:cNvSpPr>
+          <p:nvPr/>
+        </p:nvSpPr>
+        <p:spPr>
+          <a:xfrm xmlns:a="http://schemas.openxmlformats.org/drawingml/2006/main">
+            <a:off x="971550" y="2362200"/>
+            <a:ext cx="13296900" cy="895350"/>
+          </a:xfrm>
+          <a:prstGeom xmlns:a="http://schemas.openxmlformats.org/drawingml/2006/main" prst="rect">
+            <a:avLst/>
+          </a:prstGeom>
+          <a:noFill xmlns:a="http://schemas.openxmlformats.org/drawingml/2006/main"/>
+          <a:ln xmlns:a="http://schemas.openxmlformats.org/drawingml/2006/main" w="0">
+            <a:noFill/>
+            <a:prstDash val="solid"/>
+          </a:ln>
+        </p:spPr>
+        <p:txBody>
+          <a:bodyPr xmlns:a="http://schemas.openxmlformats.org/drawingml/2006/main" wrap="none" lIns="0" tIns="0" rIns="0" bIns="0" anchor="ctr">
+            <a:normAutofit fontScale="100000"/>
+          </a:bodyPr>
+          <a:lstStyle xmlns:a="http://schemas.openxmlformats.org/drawingml/2006/main"/>
+          <a:p xmlns:a="http://schemas.openxmlformats.org/drawingml/2006/main">
+            <a:pPr algn="l">
+              <a:lnSpc>
+                <a:spcPct val="100000"/>
+              </a:lnSpc>
+              <a:buNone/>
+              <a:defRPr sz="4800" b="1">
+                <a:solidFill>
+                  <a:srgbClr val="051C2A"/>
+                </a:solidFill>
+                <a:latin typeface="Calibri"/>
+                <a:ea typeface="Calibri"/>
+                <a:cs typeface="Calibri"/>
+              </a:defRPr>
+            </a:pPr>
+            <a:r>
+              <a:rPr sz="4800" b="1">
+                <a:solidFill>
+                  <a:srgbClr val="051C2A"/>
+                </a:solidFill>
+                <a:latin typeface="Calibri"/>
+                <a:ea typeface="Calibri"/>
+                <a:cs typeface="Calibri"/>
+              </a:rPr>
+              <a:t>Answers</a:t>
+            </a:r>
+          </a:p>
+        </p:txBody>
+      </p:sp>
+      <p:sp>
+        <p:nvSpPr>
+          <p:cNvPr id="4" name="">
+            <a:extLst xmlns:a="http://schemas.openxmlformats.org/drawingml/2006/main">
+              <a:ext uri="{FF2B5EF4-FFF2-40B4-BE49-F238E27FC236}">
+                <a16:creationId xmlns:a16="http://schemas.microsoft.com/office/drawing/2014/main" id="{601F96F8-8EA3-4B69-A3AF-EBD5CBCD09C1}"/>
+              </a:ext>
+            </a:extLst>
+          </p:cNvPr>
+          <p:cNvSpPr>
+            <a:spLocks xmlns:a="http://schemas.openxmlformats.org/drawingml/2006/main" noGrp="1"/>
+          </p:cNvSpPr>
+          <p:nvPr/>
+        </p:nvSpPr>
+        <p:spPr>
+          <a:xfrm xmlns:a="http://schemas.openxmlformats.org/drawingml/2006/main">
+            <a:off x="971550" y="3562350"/>
+            <a:ext cx="11239500" cy="514350"/>
+          </a:xfrm>
+          <a:prstGeom xmlns:a="http://schemas.openxmlformats.org/drawingml/2006/main" prst="rect">
+            <a:avLst/>
+          </a:prstGeom>
+          <a:noFill xmlns:a="http://schemas.openxmlformats.org/drawingml/2006/main"/>
+          <a:ln xmlns:a="http://schemas.openxmlformats.org/drawingml/2006/main" w="0">
+            <a:noFill/>
+            <a:prstDash val="solid"/>
+          </a:ln>
+        </p:spPr>
+        <p:txBody>
+          <a:bodyPr xmlns:a="http://schemas.openxmlformats.org/drawingml/2006/main" wrap="square" lIns="0" tIns="0" rIns="0" bIns="0" anchor="ctr">
+            <a:normAutofit fontScale="100000"/>
+          </a:bodyPr>
+          <a:lstStyle xmlns:a="http://schemas.openxmlformats.org/drawingml/2006/main"/>
+          <a:p xmlns:a="http://schemas.openxmlformats.org/drawingml/2006/main">
+            <a:pPr algn="l">
+              <a:lnSpc>
+                <a:spcPct val="100000"/>
+              </a:lnSpc>
+              <a:buNone/>
+              <a:defRPr sz="2400" b="0">
+                <a:solidFill>
+                  <a:srgbClr val="3F3F42"/>
+                </a:solidFill>
+                <a:latin typeface="Calibri"/>
+                <a:ea typeface="Calibri"/>
+                <a:cs typeface="Calibri"/>
+              </a:defRPr>
+            </a:pPr>
+            <a:r>
+              <a:rPr sz="2400" b="0">
+                <a:solidFill>
+                  <a:srgbClr val="3F3F42"/>
+                </a:solidFill>
+                <a:latin typeface="Calibri"/>
+                <a:ea typeface="Calibri"/>
+                <a:cs typeface="Calibri"/>
+              </a:rPr>
+              <a:t>Check the idea, not only the letter.</a:t>
+            </a:r>
+          </a:p>
+        </p:txBody>
+      </p:sp>
+      <p:sp>
+        <p:nvSpPr>
+          <p:cNvPr id="5" name="">
+            <a:extLst xmlns:a="http://schemas.openxmlformats.org/drawingml/2006/main">
+              <a:ext uri="{FF2B5EF4-FFF2-40B4-BE49-F238E27FC236}">
+                <a16:creationId xmlns:a16="http://schemas.microsoft.com/office/drawing/2014/main" id="{D4A6E89B-2708-4600-B820-727EF660DE6B}"/>
+              </a:ext>
+            </a:extLst>
+          </p:cNvPr>
+          <p:cNvSpPr>
+            <a:spLocks xmlns:a="http://schemas.openxmlformats.org/drawingml/2006/main" noGrp="1"/>
+          </p:cNvSpPr>
+          <p:nvPr/>
+        </p:nvSpPr>
+        <p:spPr>
+          <a:xfrm xmlns:a="http://schemas.openxmlformats.org/drawingml/2006/main">
+            <a:off x="971550" y="6477000"/>
+            <a:ext cx="9525000" cy="400050"/>
+          </a:xfrm>
+          <a:prstGeom xmlns:a="http://schemas.openxmlformats.org/drawingml/2006/main" prst="rect">
+            <a:avLst/>
+          </a:prstGeom>
+          <a:noFill xmlns:a="http://schemas.openxmlformats.org/drawingml/2006/main"/>
+          <a:ln xmlns:a="http://schemas.openxmlformats.org/drawingml/2006/main" w="0">
+            <a:noFill/>
+            <a:prstDash val="solid"/>
+          </a:ln>
+        </p:spPr>
+        <p:txBody>
+          <a:bodyPr xmlns:a="http://schemas.openxmlformats.org/drawingml/2006/main" wrap="square" lIns="0" tIns="0" rIns="0" bIns="0" anchor="ctr">
+            <a:normAutofit fontScale="100000"/>
+          </a:bodyPr>
+          <a:lstStyle xmlns:a="http://schemas.openxmlformats.org/drawingml/2006/main"/>
+          <a:p xmlns:a="http://schemas.openxmlformats.org/drawingml/2006/main">
+            <a:pPr algn="l">
+              <a:lnSpc>
+                <a:spcPct val="100000"/>
+              </a:lnSpc>
+              <a:buNone/>
+              <a:defRPr sz="1350" b="1">
+                <a:solidFill>
+                  <a:srgbClr val="1F40CB"/>
+                </a:solidFill>
+                <a:latin typeface="Calibri"/>
+                <a:ea typeface="Calibri"/>
+                <a:cs typeface="Calibri"/>
+              </a:defRPr>
+            </a:pPr>
+            <a:r>
+              <a:rPr sz="1350" b="1">
+                <a:solidFill>
+                  <a:srgbClr val="1F40CB"/>
+                </a:solidFill>
+                <a:latin typeface="Calibri"/>
+                <a:ea typeface="Calibri"/>
+                <a:cs typeface="Calibri"/>
+              </a:rPr>
+              <a:t>LESSON 12  ·  CORRECTION</a:t>
+            </a:r>
+          </a:p>
+        </p:txBody>
+      </p:sp>
+      <p:sp>
+        <p:nvSpPr>
+          <p:cNvPr id="6" name="">
+            <a:extLst xmlns:a="http://schemas.openxmlformats.org/drawingml/2006/main">
+              <a:ext uri="{FF2B5EF4-FFF2-40B4-BE49-F238E27FC236}">
+                <a16:creationId xmlns:a16="http://schemas.microsoft.com/office/drawing/2014/main" id="{053831D6-7D46-4F1A-929F-D2CAD97F1627}"/>
+              </a:ext>
+            </a:extLst>
+          </p:cNvPr>
+          <p:cNvSpPr>
+            <a:spLocks xmlns:a="http://schemas.openxmlformats.org/drawingml/2006/main" noGrp="1"/>
+          </p:cNvSpPr>
+          <p:nvPr/>
+        </p:nvSpPr>
+        <p:spPr>
+          <a:xfrm xmlns:a="http://schemas.openxmlformats.org/drawingml/2006/main">
+            <a:off x="971550" y="7067550"/>
+            <a:ext cx="4762500" cy="381000"/>
+          </a:xfrm>
+          <a:prstGeom xmlns:a="http://schemas.openxmlformats.org/drawingml/2006/main" prst="rect">
+            <a:avLst/>
+          </a:prstGeom>
+          <a:noFill xmlns:a="http://schemas.openxmlformats.org/drawingml/2006/main"/>
+          <a:ln xmlns:a="http://schemas.openxmlformats.org/drawingml/2006/main" w="0">
+            <a:noFill/>
+            <a:prstDash val="solid"/>
+          </a:ln>
+        </p:spPr>
+        <p:txBody>
+          <a:bodyPr xmlns:a="http://schemas.openxmlformats.org/drawingml/2006/main" wrap="square" lIns="0" tIns="0" rIns="0" bIns="0" anchor="ctr">
+            <a:normAutofit fontScale="100000"/>
+          </a:bodyPr>
+          <a:lstStyle xmlns:a="http://schemas.openxmlformats.org/drawingml/2006/main"/>
+          <a:p xmlns:a="http://schemas.openxmlformats.org/drawingml/2006/main">
+            <a:pPr algn="l">
+              <a:lnSpc>
+                <a:spcPct val="100000"/>
+              </a:lnSpc>
+              <a:buNone/>
+              <a:defRPr sz="1725" b="0">
+                <a:solidFill>
+                  <a:srgbClr val="051C2A"/>
+                </a:solidFill>
+                <a:latin typeface="Calibri"/>
+                <a:ea typeface="Calibri"/>
+                <a:cs typeface="Calibri"/>
+              </a:defRPr>
+            </a:pPr>
+            <a:r>
+              <a:rPr sz="1725" b="0">
+                <a:solidFill>
+                  <a:srgbClr val="051C2A"/>
+                </a:solidFill>
+                <a:latin typeface="Calibri"/>
+                <a:ea typeface="Calibri"/>
+                <a:cs typeface="Calibri"/>
+              </a:rPr>
+              <a:t>First Finance - Arnaud Demes</a:t>
+            </a:r>
+          </a:p>
+        </p:txBody>
+      </p:sp>
+      <p:sp>
+        <p:nvSpPr>
+          <p:cNvPr id="8" name="quiz-answer-1">
+            <a:extLst xmlns:a="http://schemas.openxmlformats.org/drawingml/2006/main">
+              <a:ext uri="{FF2B5EF4-FFF2-40B4-BE49-F238E27FC236}">
+                <a16:creationId xmlns:a16="http://schemas.microsoft.com/office/drawing/2014/main" id="{E601880F-E87A-40E7-881C-A4E36B3A5BA3}"/>
+              </a:ext>
+            </a:extLst>
+          </p:cNvPr>
+          <p:cNvSpPr>
+            <a:spLocks xmlns:a="http://schemas.openxmlformats.org/drawingml/2006/main" noGrp="1"/>
+          </p:cNvSpPr>
+          <p:nvPr/>
+        </p:nvSpPr>
+        <p:spPr>
+          <a:xfrm xmlns:a="http://schemas.openxmlformats.org/drawingml/2006/main">
+            <a:off x="971550" y="4400550"/>
+            <a:ext cx="13296900" cy="285750"/>
+          </a:xfrm>
+          <a:prstGeom xmlns:a="http://schemas.openxmlformats.org/drawingml/2006/main" prst="rect">
+            <a:avLst/>
+          </a:prstGeom>
+          <a:noFill xmlns:a="http://schemas.openxmlformats.org/drawingml/2006/main"/>
+          <a:ln xmlns:a="http://schemas.openxmlformats.org/drawingml/2006/main" w="0">
+            <a:noFill/>
+            <a:prstDash val="solid"/>
+          </a:ln>
+        </p:spPr>
+        <p:txBody>
+          <a:bodyPr xmlns:a="http://schemas.openxmlformats.org/drawingml/2006/main"/>
+          <a:lstStyle xmlns:a="http://schemas.openxmlformats.org/drawingml/2006/main"/>
+          <a:p xmlns:a="http://schemas.openxmlformats.org/drawingml/2006/main">
+            <a:pPr>
+              <a:defRPr sz="1500" b="1">
+                <a:solidFill>
+                  <a:srgbClr val="1F40CB"/>
+                </a:solidFill>
+              </a:defRPr>
+            </a:pPr>
+            <a:r>
+              <a:rPr sz="1500" b="1">
+                <a:solidFill>
+                  <a:srgbClr val="1F40CB"/>
+                </a:solidFill>
+              </a:rPr>
+              <a:t>1. A. Yes</a:t>
+            </a:r>
+          </a:p>
+        </p:txBody>
+      </p:sp>
+      <p:sp>
+        <p:nvSpPr>
+          <p:cNvPr id="9" name="quiz-explanation-1">
+            <a:extLst xmlns:a="http://schemas.openxmlformats.org/drawingml/2006/main">
+              <a:ext uri="{FF2B5EF4-FFF2-40B4-BE49-F238E27FC236}">
+                <a16:creationId xmlns:a16="http://schemas.microsoft.com/office/drawing/2014/main" id="{2BF96AB7-A48E-42F5-A5B5-227758496E24}"/>
+              </a:ext>
+            </a:extLst>
+          </p:cNvPr>
+          <p:cNvSpPr>
+            <a:spLocks xmlns:a="http://schemas.openxmlformats.org/drawingml/2006/main" noGrp="1"/>
+          </p:cNvSpPr>
+          <p:nvPr/>
+        </p:nvSpPr>
+        <p:spPr>
+          <a:xfrm xmlns:a="http://schemas.openxmlformats.org/drawingml/2006/main">
+            <a:off x="1257300" y="4705350"/>
+            <a:ext cx="13011150" cy="247650"/>
+          </a:xfrm>
+          <a:prstGeom xmlns:a="http://schemas.openxmlformats.org/drawingml/2006/main" prst="rect">
+            <a:avLst/>
+          </a:prstGeom>
+          <a:noFill xmlns:a="http://schemas.openxmlformats.org/drawingml/2006/main"/>
+          <a:ln xmlns:a="http://schemas.openxmlformats.org/drawingml/2006/main" w="0">
+            <a:noFill/>
+            <a:prstDash val="solid"/>
+          </a:ln>
+        </p:spPr>
+        <p:txBody>
+          <a:bodyPr xmlns:a="http://schemas.openxmlformats.org/drawingml/2006/main"/>
+          <a:lstStyle xmlns:a="http://schemas.openxmlformats.org/drawingml/2006/main"/>
+          <a:p xmlns:a="http://schemas.openxmlformats.org/drawingml/2006/main">
+            <a:pPr>
+              <a:defRPr sz="1200" b="0">
+                <a:solidFill>
+                  <a:srgbClr val="334155"/>
+                </a:solidFill>
+              </a:defRPr>
+            </a:pPr>
+            <a:r>
+              <a:rPr sz="1200" b="0">
+                <a:solidFill>
+                  <a:srgbClr val="334155"/>
+                </a:solidFill>
+              </a:rPr>
+              <a:t>A plausible answer can still come from an inefficient or unsafe path.</a:t>
+            </a:r>
+          </a:p>
+        </p:txBody>
+      </p:sp>
+      <p:sp>
+        <p:nvSpPr>
+          <p:cNvPr id="10" name="quiz-answer-2">
+            <a:extLst xmlns:a="http://schemas.openxmlformats.org/drawingml/2006/main">
+              <a:ext uri="{FF2B5EF4-FFF2-40B4-BE49-F238E27FC236}">
+                <a16:creationId xmlns:a16="http://schemas.microsoft.com/office/drawing/2014/main" id="{73C926EC-584A-497B-9A16-63C8B67085EA}"/>
+              </a:ext>
+            </a:extLst>
+          </p:cNvPr>
+          <p:cNvSpPr>
+            <a:spLocks xmlns:a="http://schemas.openxmlformats.org/drawingml/2006/main" noGrp="1"/>
+          </p:cNvSpPr>
+          <p:nvPr/>
+        </p:nvSpPr>
+        <p:spPr>
+          <a:xfrm xmlns:a="http://schemas.openxmlformats.org/drawingml/2006/main">
+            <a:off x="971550" y="5086350"/>
+            <a:ext cx="13296900" cy="285750"/>
+          </a:xfrm>
+          <a:prstGeom xmlns:a="http://schemas.openxmlformats.org/drawingml/2006/main" prst="rect">
+            <a:avLst/>
+          </a:prstGeom>
+          <a:noFill xmlns:a="http://schemas.openxmlformats.org/drawingml/2006/main"/>
+          <a:ln xmlns:a="http://schemas.openxmlformats.org/drawingml/2006/main" w="0">
+            <a:noFill/>
+            <a:prstDash val="solid"/>
+          </a:ln>
+        </p:spPr>
+        <p:txBody>
+          <a:bodyPr xmlns:a="http://schemas.openxmlformats.org/drawingml/2006/main"/>
+          <a:lstStyle xmlns:a="http://schemas.openxmlformats.org/drawingml/2006/main"/>
+          <a:p xmlns:a="http://schemas.openxmlformats.org/drawingml/2006/main">
+            <a:pPr>
+              <a:defRPr sz="1500" b="1">
+                <a:solidFill>
+                  <a:srgbClr val="1F40CB"/>
+                </a:solidFill>
+              </a:defRPr>
+            </a:pPr>
+            <a:r>
+              <a:rPr sz="1500" b="1">
+                <a:solidFill>
+                  <a:srgbClr val="1F40CB"/>
+                </a:solidFill>
+              </a:rPr>
+              <a:t>2. A. Deterministic gate</a:t>
+            </a:r>
+          </a:p>
+        </p:txBody>
+      </p:sp>
+      <p:sp>
+        <p:nvSpPr>
+          <p:cNvPr id="11" name="quiz-explanation-2">
+            <a:extLst xmlns:a="http://schemas.openxmlformats.org/drawingml/2006/main">
+              <a:ext uri="{FF2B5EF4-FFF2-40B4-BE49-F238E27FC236}">
+                <a16:creationId xmlns:a16="http://schemas.microsoft.com/office/drawing/2014/main" id="{B8BE2CD4-56B0-437D-B244-96AB7053206A}"/>
+              </a:ext>
+            </a:extLst>
+          </p:cNvPr>
+          <p:cNvSpPr>
+            <a:spLocks xmlns:a="http://schemas.openxmlformats.org/drawingml/2006/main" noGrp="1"/>
+          </p:cNvSpPr>
+          <p:nvPr/>
+        </p:nvSpPr>
+        <p:spPr>
+          <a:xfrm xmlns:a="http://schemas.openxmlformats.org/drawingml/2006/main">
+            <a:off x="1257300" y="5391150"/>
+            <a:ext cx="13011150" cy="247650"/>
+          </a:xfrm>
+          <a:prstGeom xmlns:a="http://schemas.openxmlformats.org/drawingml/2006/main" prst="rect">
+            <a:avLst/>
+          </a:prstGeom>
+          <a:noFill xmlns:a="http://schemas.openxmlformats.org/drawingml/2006/main"/>
+          <a:ln xmlns:a="http://schemas.openxmlformats.org/drawingml/2006/main" w="0">
+            <a:noFill/>
+            <a:prstDash val="solid"/>
+          </a:ln>
+        </p:spPr>
+        <p:txBody>
+          <a:bodyPr xmlns:a="http://schemas.openxmlformats.org/drawingml/2006/main"/>
+          <a:lstStyle xmlns:a="http://schemas.openxmlformats.org/drawingml/2006/main"/>
+          <a:p xmlns:a="http://schemas.openxmlformats.org/drawingml/2006/main">
+            <a:pPr>
+              <a:defRPr sz="1200" b="0">
+                <a:solidFill>
+                  <a:srgbClr val="334155"/>
+                </a:solidFill>
+              </a:defRPr>
+            </a:pPr>
+            <a:r>
+              <a:rPr sz="1200" b="0">
+                <a:solidFill>
+                  <a:srgbClr val="334155"/>
+                </a:solidFill>
+              </a:rPr>
+              <a:t>Stable rules make release decisions reproducible and inspectable.</a:t>
+            </a:r>
+          </a:p>
+        </p:txBody>
+      </p:sp>
+      <p:sp>
+        <p:nvSpPr>
+          <p:cNvPr id="12" name="quiz-answer-3">
+            <a:extLst xmlns:a="http://schemas.openxmlformats.org/drawingml/2006/main">
+              <a:ext uri="{FF2B5EF4-FFF2-40B4-BE49-F238E27FC236}">
+                <a16:creationId xmlns:a16="http://schemas.microsoft.com/office/drawing/2014/main" id="{95355199-8447-44A5-95AA-958508F912B3}"/>
+              </a:ext>
+            </a:extLst>
+          </p:cNvPr>
+          <p:cNvSpPr>
+            <a:spLocks xmlns:a="http://schemas.openxmlformats.org/drawingml/2006/main" noGrp="1"/>
+          </p:cNvSpPr>
+          <p:nvPr/>
+        </p:nvSpPr>
+        <p:spPr>
+          <a:xfrm xmlns:a="http://schemas.openxmlformats.org/drawingml/2006/main">
+            <a:off x="971550" y="5772150"/>
+            <a:ext cx="13296900" cy="285750"/>
+          </a:xfrm>
+          <a:prstGeom xmlns:a="http://schemas.openxmlformats.org/drawingml/2006/main" prst="rect">
+            <a:avLst/>
+          </a:prstGeom>
+          <a:noFill xmlns:a="http://schemas.openxmlformats.org/drawingml/2006/main"/>
+          <a:ln xmlns:a="http://schemas.openxmlformats.org/drawingml/2006/main" w="0">
+            <a:noFill/>
+            <a:prstDash val="solid"/>
+          </a:ln>
+        </p:spPr>
+        <p:txBody>
+          <a:bodyPr xmlns:a="http://schemas.openxmlformats.org/drawingml/2006/main"/>
+          <a:lstStyle xmlns:a="http://schemas.openxmlformats.org/drawingml/2006/main"/>
+          <a:p xmlns:a="http://schemas.openxmlformats.org/drawingml/2006/main">
+            <a:pPr>
+              <a:defRPr sz="1500" b="1">
+                <a:solidFill>
+                  <a:srgbClr val="1F40CB"/>
+                </a:solidFill>
+              </a:defRPr>
+            </a:pPr>
+            <a:r>
+              <a:rPr sz="1500" b="1">
+                <a:solidFill>
+                  <a:srgbClr val="1F40CB"/>
+                </a:solidFill>
+              </a:rPr>
+              <a:t>3. A. NOT RUN</a:t>
+            </a:r>
+          </a:p>
+        </p:txBody>
+      </p:sp>
+      <p:sp>
+        <p:nvSpPr>
+          <p:cNvPr id="13" name="quiz-explanation-3">
+            <a:extLst xmlns:a="http://schemas.openxmlformats.org/drawingml/2006/main">
+              <a:ext uri="{FF2B5EF4-FFF2-40B4-BE49-F238E27FC236}">
+                <a16:creationId xmlns:a16="http://schemas.microsoft.com/office/drawing/2014/main" id="{99CA71E6-E40C-4FB9-AABE-00279279E9DA}"/>
+              </a:ext>
+            </a:extLst>
+          </p:cNvPr>
+          <p:cNvSpPr>
+            <a:spLocks xmlns:a="http://schemas.openxmlformats.org/drawingml/2006/main" noGrp="1"/>
+          </p:cNvSpPr>
+          <p:nvPr/>
+        </p:nvSpPr>
+        <p:spPr>
+          <a:xfrm xmlns:a="http://schemas.openxmlformats.org/drawingml/2006/main">
+            <a:off x="1257300" y="6076950"/>
+            <a:ext cx="13011150" cy="247650"/>
+          </a:xfrm>
+          <a:prstGeom xmlns:a="http://schemas.openxmlformats.org/drawingml/2006/main" prst="rect">
+            <a:avLst/>
+          </a:prstGeom>
+          <a:noFill xmlns:a="http://schemas.openxmlformats.org/drawingml/2006/main"/>
+          <a:ln xmlns:a="http://schemas.openxmlformats.org/drawingml/2006/main" w="0">
+            <a:noFill/>
+            <a:prstDash val="solid"/>
+          </a:ln>
+        </p:spPr>
+        <p:txBody>
+          <a:bodyPr xmlns:a="http://schemas.openxmlformats.org/drawingml/2006/main"/>
+          <a:lstStyle xmlns:a="http://schemas.openxmlformats.org/drawingml/2006/main"/>
+          <a:p xmlns:a="http://schemas.openxmlformats.org/drawingml/2006/main">
+            <a:pPr>
+              <a:defRPr sz="1200" b="0">
+                <a:solidFill>
+                  <a:srgbClr val="334155"/>
+                </a:solidFill>
+              </a:defRPr>
+            </a:pPr>
+            <a:r>
+              <a:rPr sz="1200" b="0">
+                <a:solidFill>
+                  <a:srgbClr val="334155"/>
+                </a:solidFill>
+              </a:rPr>
+              <a:t>An optional judge must never be silently replaced or reported as executed.</a:t>
+            </a:r>
+          </a:p>
+        </p:txBody>
+      </p:sp>
+    </p:spTree>
+    <p:extLst>
+      <p:ext uri="{BB962C8B-B14F-4D97-AF65-F5344CB8AC3E}">
+        <p14:creationId xmlns:p14="http://schemas.microsoft.com/office/powerpoint/2010/main" val="1316229138"/>
+      </p:ext>
+    </p:extLst>
+  </p:cSld>
+</p:sld>
+</file>
+
 <file path=ppt/slides/slide2.xml><?xml version="1.0" encoding="utf-8"?>
 <p:sld xmlns:p="http://schemas.openxmlformats.org/presentationml/2006/main">
   <p:cSld>
@@ -4534,7 +6070,9 @@
                     <a:bodyPr/>
                     <a:lstStyle/>
                     <a:p>
-                      <a:pPr algn="l"/>
+                      <a:pPr algn="l">
+                        <a:buNone/>
+                      </a:pPr>
                       <a:r>
                         <a:rPr sz="1425" b="1">
                           <a:solidFill>
@@ -4559,7 +6097,9 @@
                     <a:bodyPr/>
                     <a:lstStyle/>
                     <a:p>
-                      <a:pPr algn="l"/>
+                      <a:pPr algn="l">
+                        <a:buNone/>
+                      </a:pPr>
                       <a:r>
                         <a:rPr sz="1425" b="1">
                           <a:solidFill>
@@ -4584,7 +6124,9 @@
                     <a:bodyPr/>
                     <a:lstStyle/>
                     <a:p>
-                      <a:pPr algn="l"/>
+                      <a:pPr algn="l">
+                        <a:buNone/>
+                      </a:pPr>
                       <a:r>
                         <a:rPr sz="1425" b="1">
                           <a:solidFill>
@@ -4611,7 +6153,9 @@
                     <a:bodyPr/>
                     <a:lstStyle/>
                     <a:p>
-                      <a:pPr algn="l"/>
+                      <a:pPr algn="l">
+                        <a:buNone/>
+                      </a:pPr>
                       <a:r>
                         <a:rPr sz="1500" b="1">
                           <a:solidFill>
@@ -4636,7 +6180,9 @@
                     <a:bodyPr/>
                     <a:lstStyle/>
                     <a:p>
-                      <a:pPr algn="l"/>
+                      <a:pPr algn="l">
+                        <a:buNone/>
+                      </a:pPr>
                       <a:r>
                         <a:rPr sz="1500" b="0">
                           <a:solidFill>
@@ -4650,7 +6196,9 @@
                       </a:r>
                     </a:p>
                     <a:p>
-                      <a:pPr algn="l"/>
+                      <a:pPr algn="l">
+                        <a:buNone/>
+                      </a:pPr>
                       <a:r>
                         <a:rPr sz="1500" b="0">
                           <a:solidFill>
@@ -4675,7 +6223,9 @@
                     <a:bodyPr/>
                     <a:lstStyle/>
                     <a:p>
-                      <a:pPr algn="l"/>
+                      <a:pPr algn="l">
+                        <a:buNone/>
+                      </a:pPr>
                       <a:r>
                         <a:rPr sz="1500" b="0">
                           <a:solidFill>
@@ -4702,7 +6252,9 @@
                     <a:bodyPr/>
                     <a:lstStyle/>
                     <a:p>
-                      <a:pPr algn="l"/>
+                      <a:pPr algn="l">
+                        <a:buNone/>
+                      </a:pPr>
                       <a:r>
                         <a:rPr sz="1500" b="1">
                           <a:solidFill>
@@ -4727,7 +6279,9 @@
                     <a:bodyPr/>
                     <a:lstStyle/>
                     <a:p>
-                      <a:pPr algn="l"/>
+                      <a:pPr algn="l">
+                        <a:buNone/>
+                      </a:pPr>
                       <a:r>
                         <a:rPr sz="1500" b="0">
                           <a:solidFill>
@@ -4741,7 +6295,9 @@
                       </a:r>
                     </a:p>
                     <a:p>
-                      <a:pPr algn="l"/>
+                      <a:pPr algn="l">
+                        <a:buNone/>
+                      </a:pPr>
                       <a:r>
                         <a:rPr sz="1500" b="0">
                           <a:solidFill>
@@ -4766,7 +6322,9 @@
                     <a:bodyPr/>
                     <a:lstStyle/>
                     <a:p>
-                      <a:pPr algn="l"/>
+                      <a:pPr algn="l">
+                        <a:buNone/>
+                      </a:pPr>
                       <a:r>
                         <a:rPr sz="1500" b="0">
                           <a:solidFill>
@@ -4793,7 +6351,9 @@
                     <a:bodyPr/>
                     <a:lstStyle/>
                     <a:p>
-                      <a:pPr algn="l"/>
+                      <a:pPr algn="l">
+                        <a:buNone/>
+                      </a:pPr>
                       <a:r>
                         <a:rPr sz="1500" b="1">
                           <a:solidFill>
@@ -4818,7 +6378,9 @@
                     <a:bodyPr/>
                     <a:lstStyle/>
                     <a:p>
-                      <a:pPr algn="l"/>
+                      <a:pPr algn="l">
+                        <a:buNone/>
+                      </a:pPr>
                       <a:r>
                         <a:rPr sz="1500" b="0">
                           <a:solidFill>
@@ -4843,7 +6405,9 @@
                     <a:bodyPr/>
                     <a:lstStyle/>
                     <a:p>
-                      <a:pPr algn="l"/>
+                      <a:pPr algn="l">
+                        <a:buNone/>
+                      </a:pPr>
                       <a:r>
                         <a:rPr sz="1500" b="0">
                           <a:solidFill>
@@ -7477,7 +9041,7 @@
       </p:sp>
       <p:cxnSp>
         <p:nvCxnSpPr>
-          <p:cNvPr id="376" name=""/>
+          <p:cNvPr id="404" name=""/>
           <p:cNvCxnSpPr>
             <a:stCxn xmlns:a="http://schemas.openxmlformats.org/drawingml/2006/main" id="3" idx="3"/>
             <a:endCxn xmlns:a="http://schemas.openxmlformats.org/drawingml/2006/main" id="6" idx="1"/>
@@ -7503,7 +9067,7 @@
       </p:cxnSp>
       <p:cxnSp>
         <p:nvCxnSpPr>
-          <p:cNvPr id="377" name=""/>
+          <p:cNvPr id="405" name=""/>
           <p:cNvCxnSpPr>
             <a:stCxn xmlns:a="http://schemas.openxmlformats.org/drawingml/2006/main" id="6" idx="3"/>
             <a:endCxn xmlns:a="http://schemas.openxmlformats.org/drawingml/2006/main" id="10" idx="1"/>
@@ -8876,6 +10440,7 @@
           <a:lstStyle xmlns:a="http://schemas.openxmlformats.org/drawingml/2006/main"/>
           <a:p xmlns:a="http://schemas.openxmlformats.org/drawingml/2006/main">
             <a:pPr>
+              <a:buNone/>
               <a:defRPr sz="1500" b="1">
                 <a:solidFill>
                   <a:srgbClr val="00A2EB"/>
@@ -8926,6 +10491,7 @@
           <a:lstStyle xmlns:a="http://schemas.openxmlformats.org/drawingml/2006/main"/>
           <a:p xmlns:a="http://schemas.openxmlformats.org/drawingml/2006/main">
             <a:pPr algn="ctr">
+              <a:buNone/>
               <a:defRPr sz="1575" b="1">
                 <a:solidFill>
                   <a:srgbClr val="0A2030"/>
@@ -8976,6 +10542,7 @@
           <a:lstStyle xmlns:a="http://schemas.openxmlformats.org/drawingml/2006/main"/>
           <a:p xmlns:a="http://schemas.openxmlformats.org/drawingml/2006/main">
             <a:pPr algn="ctr">
+              <a:buNone/>
               <a:defRPr sz="1200" b="0">
                 <a:solidFill>
                   <a:srgbClr val="1F40CB"/>
@@ -8993,6 +10560,7 @@
           </a:p>
           <a:p xmlns:a="http://schemas.openxmlformats.org/drawingml/2006/main">
             <a:pPr algn="ctr">
+              <a:buNone/>
               <a:defRPr sz="1200" b="0">
                 <a:solidFill>
                   <a:srgbClr val="1F40CB"/>
@@ -9076,6 +10644,7 @@
           <a:lstStyle xmlns:a="http://schemas.openxmlformats.org/drawingml/2006/main"/>
           <a:p xmlns:a="http://schemas.openxmlformats.org/drawingml/2006/main">
             <a:pPr>
+              <a:buNone/>
               <a:defRPr sz="1500" b="1">
                 <a:solidFill>
                   <a:srgbClr val="00A2EB"/>
@@ -9126,6 +10695,7 @@
           <a:lstStyle xmlns:a="http://schemas.openxmlformats.org/drawingml/2006/main"/>
           <a:p xmlns:a="http://schemas.openxmlformats.org/drawingml/2006/main">
             <a:pPr algn="ctr">
+              <a:buNone/>
               <a:defRPr sz="1575" b="1">
                 <a:solidFill>
                   <a:srgbClr val="0A2030"/>
@@ -9176,6 +10746,7 @@
           <a:lstStyle xmlns:a="http://schemas.openxmlformats.org/drawingml/2006/main"/>
           <a:p xmlns:a="http://schemas.openxmlformats.org/drawingml/2006/main">
             <a:pPr algn="ctr">
+              <a:buNone/>
               <a:defRPr sz="1200" b="0">
                 <a:solidFill>
                   <a:srgbClr val="1F40CB"/>
@@ -9193,6 +10764,7 @@
           </a:p>
           <a:p xmlns:a="http://schemas.openxmlformats.org/drawingml/2006/main">
             <a:pPr algn="ctr">
+              <a:buNone/>
               <a:defRPr sz="1200" b="0">
                 <a:solidFill>
                   <a:srgbClr val="1F40CB"/>
@@ -9276,6 +10848,7 @@
           <a:lstStyle xmlns:a="http://schemas.openxmlformats.org/drawingml/2006/main"/>
           <a:p xmlns:a="http://schemas.openxmlformats.org/drawingml/2006/main">
             <a:pPr>
+              <a:buNone/>
               <a:defRPr sz="1500" b="1">
                 <a:solidFill>
                   <a:srgbClr val="00A2EB"/>
@@ -9326,6 +10899,7 @@
           <a:lstStyle xmlns:a="http://schemas.openxmlformats.org/drawingml/2006/main"/>
           <a:p xmlns:a="http://schemas.openxmlformats.org/drawingml/2006/main">
             <a:pPr algn="ctr">
+              <a:buNone/>
               <a:defRPr sz="1575" b="1">
                 <a:solidFill>
                   <a:srgbClr val="0A2030"/>
@@ -9343,6 +10917,7 @@
           </a:p>
           <a:p xmlns:a="http://schemas.openxmlformats.org/drawingml/2006/main">
             <a:pPr algn="ctr">
+              <a:buNone/>
               <a:defRPr sz="1575" b="1">
                 <a:solidFill>
                   <a:srgbClr val="0A2030"/>
@@ -9393,6 +10968,7 @@
           <a:lstStyle xmlns:a="http://schemas.openxmlformats.org/drawingml/2006/main"/>
           <a:p xmlns:a="http://schemas.openxmlformats.org/drawingml/2006/main">
             <a:pPr algn="ctr">
+              <a:buNone/>
               <a:defRPr sz="1200" b="0">
                 <a:solidFill>
                   <a:srgbClr val="F07D00"/>
@@ -9410,6 +10986,7 @@
           </a:p>
           <a:p xmlns:a="http://schemas.openxmlformats.org/drawingml/2006/main">
             <a:pPr algn="ctr">
+              <a:buNone/>
               <a:defRPr sz="1200" b="0">
                 <a:solidFill>
                   <a:srgbClr val="F07D00"/>
@@ -9493,6 +11070,7 @@
           <a:lstStyle xmlns:a="http://schemas.openxmlformats.org/drawingml/2006/main"/>
           <a:p xmlns:a="http://schemas.openxmlformats.org/drawingml/2006/main">
             <a:pPr>
+              <a:buNone/>
               <a:defRPr sz="1500" b="1">
                 <a:solidFill>
                   <a:srgbClr val="00A2EB"/>
@@ -9543,6 +11121,7 @@
           <a:lstStyle xmlns:a="http://schemas.openxmlformats.org/drawingml/2006/main"/>
           <a:p xmlns:a="http://schemas.openxmlformats.org/drawingml/2006/main">
             <a:pPr algn="ctr">
+              <a:buNone/>
               <a:defRPr sz="1575" b="1">
                 <a:solidFill>
                   <a:srgbClr val="F07D00"/>
@@ -9593,6 +11172,7 @@
           <a:lstStyle xmlns:a="http://schemas.openxmlformats.org/drawingml/2006/main"/>
           <a:p xmlns:a="http://schemas.openxmlformats.org/drawingml/2006/main">
             <a:pPr algn="ctr">
+              <a:buNone/>
               <a:defRPr sz="1200" b="0">
                 <a:solidFill>
                   <a:srgbClr val="F07D00"/>
@@ -9610,6 +11190,7 @@
           </a:p>
           <a:p xmlns:a="http://schemas.openxmlformats.org/drawingml/2006/main">
             <a:pPr algn="ctr">
+              <a:buNone/>
               <a:defRPr sz="1200" b="0">
                 <a:solidFill>
                   <a:srgbClr val="F07D00"/>
@@ -9693,6 +11274,7 @@
           <a:lstStyle xmlns:a="http://schemas.openxmlformats.org/drawingml/2006/main"/>
           <a:p xmlns:a="http://schemas.openxmlformats.org/drawingml/2006/main">
             <a:pPr>
+              <a:buNone/>
               <a:defRPr sz="1500" b="1">
                 <a:solidFill>
                   <a:srgbClr val="00A2EB"/>
@@ -9743,6 +11325,7 @@
           <a:lstStyle xmlns:a="http://schemas.openxmlformats.org/drawingml/2006/main"/>
           <a:p xmlns:a="http://schemas.openxmlformats.org/drawingml/2006/main">
             <a:pPr algn="ctr">
+              <a:buNone/>
               <a:defRPr sz="1575" b="1">
                 <a:solidFill>
                   <a:srgbClr val="2E8B57"/>
@@ -9760,6 +11343,7 @@
           </a:p>
           <a:p xmlns:a="http://schemas.openxmlformats.org/drawingml/2006/main">
             <a:pPr algn="ctr">
+              <a:buNone/>
               <a:defRPr sz="1575" b="1">
                 <a:solidFill>
                   <a:srgbClr val="2E8B57"/>
@@ -9810,6 +11394,7 @@
           <a:lstStyle xmlns:a="http://schemas.openxmlformats.org/drawingml/2006/main"/>
           <a:p xmlns:a="http://schemas.openxmlformats.org/drawingml/2006/main">
             <a:pPr algn="ctr">
+              <a:buNone/>
               <a:defRPr sz="1200" b="0">
                 <a:solidFill>
                   <a:srgbClr val="2E8B57"/>
@@ -9827,6 +11412,7 @@
           </a:p>
           <a:p xmlns:a="http://schemas.openxmlformats.org/drawingml/2006/main">
             <a:pPr algn="ctr">
+              <a:buNone/>
               <a:defRPr sz="1200" b="0">
                 <a:solidFill>
                   <a:srgbClr val="2E8B57"/>
@@ -9910,6 +11496,7 @@
           <a:lstStyle xmlns:a="http://schemas.openxmlformats.org/drawingml/2006/main"/>
           <a:p xmlns:a="http://schemas.openxmlformats.org/drawingml/2006/main">
             <a:pPr>
+              <a:buNone/>
               <a:defRPr sz="1500" b="1">
                 <a:solidFill>
                   <a:srgbClr val="00A2EB"/>
@@ -9960,6 +11547,7 @@
           <a:lstStyle xmlns:a="http://schemas.openxmlformats.org/drawingml/2006/main"/>
           <a:p xmlns:a="http://schemas.openxmlformats.org/drawingml/2006/main">
             <a:pPr algn="ctr">
+              <a:buNone/>
               <a:defRPr sz="1575" b="1">
                 <a:solidFill>
                   <a:srgbClr val="0A2030"/>
@@ -9977,6 +11565,7 @@
           </a:p>
           <a:p xmlns:a="http://schemas.openxmlformats.org/drawingml/2006/main">
             <a:pPr algn="ctr">
+              <a:buNone/>
               <a:defRPr sz="1575" b="1">
                 <a:solidFill>
                   <a:srgbClr val="0A2030"/>
@@ -10027,6 +11616,7 @@
           <a:lstStyle xmlns:a="http://schemas.openxmlformats.org/drawingml/2006/main"/>
           <a:p xmlns:a="http://schemas.openxmlformats.org/drawingml/2006/main">
             <a:pPr algn="ctr">
+              <a:buNone/>
               <a:defRPr sz="1200" b="0">
                 <a:solidFill>
                   <a:srgbClr val="1F40CB"/>
@@ -10044,6 +11634,7 @@
           </a:p>
           <a:p xmlns:a="http://schemas.openxmlformats.org/drawingml/2006/main">
             <a:pPr algn="ctr">
+              <a:buNone/>
               <a:defRPr sz="1200" b="0">
                 <a:solidFill>
                   <a:srgbClr val="1F40CB"/>
@@ -10127,6 +11718,7 @@
           <a:lstStyle xmlns:a="http://schemas.openxmlformats.org/drawingml/2006/main"/>
           <a:p xmlns:a="http://schemas.openxmlformats.org/drawingml/2006/main">
             <a:pPr>
+              <a:buNone/>
               <a:defRPr sz="1500" b="1">
                 <a:solidFill>
                   <a:srgbClr val="00A2EB"/>
@@ -10177,6 +11769,7 @@
           <a:lstStyle xmlns:a="http://schemas.openxmlformats.org/drawingml/2006/main"/>
           <a:p xmlns:a="http://schemas.openxmlformats.org/drawingml/2006/main">
             <a:pPr algn="ctr">
+              <a:buNone/>
               <a:defRPr sz="1575" b="1">
                 <a:solidFill>
                   <a:srgbClr val="0A2030"/>
@@ -10227,6 +11820,7 @@
           <a:lstStyle xmlns:a="http://schemas.openxmlformats.org/drawingml/2006/main"/>
           <a:p xmlns:a="http://schemas.openxmlformats.org/drawingml/2006/main">
             <a:pPr algn="ctr">
+              <a:buNone/>
               <a:defRPr sz="1200" b="0">
                 <a:solidFill>
                   <a:srgbClr val="1F40CB"/>
@@ -10244,6 +11838,7 @@
           </a:p>
           <a:p xmlns:a="http://schemas.openxmlformats.org/drawingml/2006/main">
             <a:pPr algn="ctr">
+              <a:buNone/>
               <a:defRPr sz="1200" b="0">
                 <a:solidFill>
                   <a:srgbClr val="1F40CB"/>
@@ -10263,7 +11858,7 @@
       </p:sp>
       <p:cxnSp>
         <p:nvCxnSpPr>
-          <p:cNvPr id="108" name=""/>
+          <p:cNvPr id="196" name=""/>
           <p:cNvCxnSpPr>
             <a:stCxn xmlns:a="http://schemas.openxmlformats.org/drawingml/2006/main" id="36" idx="3"/>
             <a:endCxn xmlns:a="http://schemas.openxmlformats.org/drawingml/2006/main" id="40" idx="1"/>
@@ -10289,7 +11884,7 @@
       </p:cxnSp>
       <p:cxnSp>
         <p:nvCxnSpPr>
-          <p:cNvPr id="109" name=""/>
+          <p:cNvPr id="197" name=""/>
           <p:cNvCxnSpPr>
             <a:stCxn xmlns:a="http://schemas.openxmlformats.org/drawingml/2006/main" id="40" idx="3"/>
             <a:endCxn xmlns:a="http://schemas.openxmlformats.org/drawingml/2006/main" id="44" idx="1"/>
@@ -10315,7 +11910,7 @@
       </p:cxnSp>
       <p:cxnSp>
         <p:nvCxnSpPr>
-          <p:cNvPr id="110" name=""/>
+          <p:cNvPr id="198" name=""/>
           <p:cNvCxnSpPr>
             <a:stCxn xmlns:a="http://schemas.openxmlformats.org/drawingml/2006/main" id="44" idx="3"/>
             <a:endCxn xmlns:a="http://schemas.openxmlformats.org/drawingml/2006/main" id="48" idx="1"/>
@@ -10341,7 +11936,7 @@
       </p:cxnSp>
       <p:cxnSp>
         <p:nvCxnSpPr>
-          <p:cNvPr id="111" name=""/>
+          <p:cNvPr id="199" name=""/>
           <p:cNvCxnSpPr>
             <a:stCxn xmlns:a="http://schemas.openxmlformats.org/drawingml/2006/main" id="48" idx="3"/>
             <a:endCxn xmlns:a="http://schemas.openxmlformats.org/drawingml/2006/main" id="52" idx="1"/>
@@ -10367,7 +11962,7 @@
       </p:cxnSp>
       <p:cxnSp>
         <p:nvCxnSpPr>
-          <p:cNvPr id="112" name=""/>
+          <p:cNvPr id="200" name=""/>
           <p:cNvCxnSpPr>
             <a:stCxn xmlns:a="http://schemas.openxmlformats.org/drawingml/2006/main" id="52" idx="3"/>
             <a:endCxn xmlns:a="http://schemas.openxmlformats.org/drawingml/2006/main" id="56" idx="1"/>
@@ -10393,7 +11988,7 @@
       </p:cxnSp>
       <p:cxnSp>
         <p:nvCxnSpPr>
-          <p:cNvPr id="113" name=""/>
+          <p:cNvPr id="201" name=""/>
           <p:cNvCxnSpPr>
             <a:stCxn xmlns:a="http://schemas.openxmlformats.org/drawingml/2006/main" id="56" idx="3"/>
             <a:endCxn xmlns:a="http://schemas.openxmlformats.org/drawingml/2006/main" id="60" idx="1"/>
@@ -10944,7 +12539,9 @@
                     <a:bodyPr/>
                     <a:lstStyle/>
                     <a:p>
-                      <a:pPr algn="l"/>
+                      <a:pPr algn="l">
+                        <a:buNone/>
+                      </a:pPr>
                       <a:r>
                         <a:rPr sz="1425" b="1">
                           <a:solidFill>
@@ -10969,7 +12566,9 @@
                     <a:bodyPr/>
                     <a:lstStyle/>
                     <a:p>
-                      <a:pPr algn="l"/>
+                      <a:pPr algn="l">
+                        <a:buNone/>
+                      </a:pPr>
                       <a:r>
                         <a:rPr sz="1425" b="1">
                           <a:solidFill>
@@ -10994,7 +12593,9 @@
                     <a:bodyPr/>
                     <a:lstStyle/>
                     <a:p>
-                      <a:pPr algn="l"/>
+                      <a:pPr algn="l">
+                        <a:buNone/>
+                      </a:pPr>
                       <a:r>
                         <a:rPr sz="1425" b="1">
                           <a:solidFill>
@@ -11021,7 +12622,9 @@
                     <a:bodyPr/>
                     <a:lstStyle/>
                     <a:p>
-                      <a:pPr algn="l"/>
+                      <a:pPr algn="l">
+                        <a:buNone/>
+                      </a:pPr>
                       <a:r>
                         <a:rPr sz="1500" b="1">
                           <a:solidFill>
@@ -11046,7 +12649,9 @@
                     <a:bodyPr/>
                     <a:lstStyle/>
                     <a:p>
-                      <a:pPr algn="l"/>
+                      <a:pPr algn="l">
+                        <a:buNone/>
+                      </a:pPr>
                       <a:r>
                         <a:rPr sz="1500" b="0">
                           <a:solidFill>
@@ -11071,7 +12676,9 @@
                     <a:bodyPr/>
                     <a:lstStyle/>
                     <a:p>
-                      <a:pPr algn="l"/>
+                      <a:pPr algn="l">
+                        <a:buNone/>
+                      </a:pPr>
                       <a:r>
                         <a:rPr sz="1500" b="0">
                           <a:solidFill>
@@ -11098,7 +12705,9 @@
                     <a:bodyPr/>
                     <a:lstStyle/>
                     <a:p>
-                      <a:pPr algn="l"/>
+                      <a:pPr algn="l">
+                        <a:buNone/>
+                      </a:pPr>
                       <a:r>
                         <a:rPr sz="1500" b="1">
                           <a:solidFill>
@@ -11123,7 +12732,9 @@
                     <a:bodyPr/>
                     <a:lstStyle/>
                     <a:p>
-                      <a:pPr algn="l"/>
+                      <a:pPr algn="l">
+                        <a:buNone/>
+                      </a:pPr>
                       <a:r>
                         <a:rPr sz="1500" b="0">
                           <a:solidFill>
@@ -11148,7 +12759,9 @@
                     <a:bodyPr/>
                     <a:lstStyle/>
                     <a:p>
-                      <a:pPr algn="l"/>
+                      <a:pPr algn="l">
+                        <a:buNone/>
+                      </a:pPr>
                       <a:r>
                         <a:rPr sz="1500" b="0">
                           <a:solidFill>
@@ -11175,7 +12788,9 @@
                     <a:bodyPr/>
                     <a:lstStyle/>
                     <a:p>
-                      <a:pPr algn="l"/>
+                      <a:pPr algn="l">
+                        <a:buNone/>
+                      </a:pPr>
                       <a:r>
                         <a:rPr sz="1500" b="1">
                           <a:solidFill>
@@ -11200,7 +12815,9 @@
                     <a:bodyPr/>
                     <a:lstStyle/>
                     <a:p>
-                      <a:pPr algn="l"/>
+                      <a:pPr algn="l">
+                        <a:buNone/>
+                      </a:pPr>
                       <a:r>
                         <a:rPr sz="1500" b="0">
                           <a:solidFill>
@@ -11225,7 +12842,9 @@
                     <a:bodyPr/>
                     <a:lstStyle/>
                     <a:p>
-                      <a:pPr algn="l"/>
+                      <a:pPr algn="l">
+                        <a:buNone/>
+                      </a:pPr>
                       <a:r>
                         <a:rPr sz="1500" b="0">
                           <a:solidFill>
@@ -11252,7 +12871,9 @@
                     <a:bodyPr/>
                     <a:lstStyle/>
                     <a:p>
-                      <a:pPr algn="l"/>
+                      <a:pPr algn="l">
+                        <a:buNone/>
+                      </a:pPr>
                       <a:r>
                         <a:rPr sz="1500" b="1">
                           <a:solidFill>
@@ -11277,7 +12898,9 @@
                     <a:bodyPr/>
                     <a:lstStyle/>
                     <a:p>
-                      <a:pPr algn="l"/>
+                      <a:pPr algn="l">
+                        <a:buNone/>
+                      </a:pPr>
                       <a:r>
                         <a:rPr sz="1500" b="0">
                           <a:solidFill>
@@ -11302,7 +12925,9 @@
                     <a:bodyPr/>
                     <a:lstStyle/>
                     <a:p>
-                      <a:pPr algn="l"/>
+                      <a:pPr algn="l">
+                        <a:buNone/>
+                      </a:pPr>
                       <a:r>
                         <a:rPr sz="1500" b="0">
                           <a:solidFill>
@@ -11854,7 +13479,9 @@
                     <a:bodyPr/>
                     <a:lstStyle/>
                     <a:p>
-                      <a:pPr algn="l"/>
+                      <a:pPr algn="l">
+                        <a:buNone/>
+                      </a:pPr>
                       <a:r>
                         <a:rPr sz="1425" b="1">
                           <a:solidFill>
@@ -11879,7 +13506,9 @@
                     <a:bodyPr/>
                     <a:lstStyle/>
                     <a:p>
-                      <a:pPr algn="l"/>
+                      <a:pPr algn="l">
+                        <a:buNone/>
+                      </a:pPr>
                       <a:r>
                         <a:rPr sz="1425" b="1">
                           <a:solidFill>
@@ -11904,7 +13533,9 @@
                     <a:bodyPr/>
                     <a:lstStyle/>
                     <a:p>
-                      <a:pPr algn="l"/>
+                      <a:pPr algn="l">
+                        <a:buNone/>
+                      </a:pPr>
                       <a:r>
                         <a:rPr sz="1425" b="1">
                           <a:solidFill>
@@ -11931,7 +13562,9 @@
                     <a:bodyPr/>
                     <a:lstStyle/>
                     <a:p>
-                      <a:pPr algn="l"/>
+                      <a:pPr algn="l">
+                        <a:buNone/>
+                      </a:pPr>
                       <a:r>
                         <a:rPr sz="1500" b="1">
                           <a:solidFill>
@@ -11956,7 +13589,9 @@
                     <a:bodyPr/>
                     <a:lstStyle/>
                     <a:p>
-                      <a:pPr algn="l"/>
+                      <a:pPr algn="l">
+                        <a:buNone/>
+                      </a:pPr>
                       <a:r>
                         <a:rPr sz="1500" b="0">
                           <a:solidFill>
@@ -11981,7 +13616,9 @@
                     <a:bodyPr/>
                     <a:lstStyle/>
                     <a:p>
-                      <a:pPr algn="l"/>
+                      <a:pPr algn="l">
+                        <a:buNone/>
+                      </a:pPr>
                       <a:r>
                         <a:rPr sz="1500" b="1">
                           <a:solidFill>
@@ -12008,7 +13645,9 @@
                     <a:bodyPr/>
                     <a:lstStyle/>
                     <a:p>
-                      <a:pPr algn="l"/>
+                      <a:pPr algn="l">
+                        <a:buNone/>
+                      </a:pPr>
                       <a:r>
                         <a:rPr sz="1500" b="1">
                           <a:solidFill>
@@ -12033,7 +13672,9 @@
                     <a:bodyPr/>
                     <a:lstStyle/>
                     <a:p>
-                      <a:pPr algn="l"/>
+                      <a:pPr algn="l">
+                        <a:buNone/>
+                      </a:pPr>
                       <a:r>
                         <a:rPr sz="1500" b="0">
                           <a:solidFill>
@@ -12058,7 +13699,9 @@
                     <a:bodyPr/>
                     <a:lstStyle/>
                     <a:p>
-                      <a:pPr algn="l"/>
+                      <a:pPr algn="l">
+                        <a:buNone/>
+                      </a:pPr>
                       <a:r>
                         <a:rPr sz="1500" b="1">
                           <a:solidFill>
@@ -12085,7 +13728,9 @@
                     <a:bodyPr/>
                     <a:lstStyle/>
                     <a:p>
-                      <a:pPr algn="l"/>
+                      <a:pPr algn="l">
+                        <a:buNone/>
+                      </a:pPr>
                       <a:r>
                         <a:rPr sz="1500" b="1">
                           <a:solidFill>
@@ -12110,7 +13755,9 @@
                     <a:bodyPr/>
                     <a:lstStyle/>
                     <a:p>
-                      <a:pPr algn="l"/>
+                      <a:pPr algn="l">
+                        <a:buNone/>
+                      </a:pPr>
                       <a:r>
                         <a:rPr sz="1500" b="0">
                           <a:solidFill>
@@ -12135,7 +13782,9 @@
                     <a:bodyPr/>
                     <a:lstStyle/>
                     <a:p>
-                      <a:pPr algn="l"/>
+                      <a:pPr algn="l">
+                        <a:buNone/>
+                      </a:pPr>
                       <a:r>
                         <a:rPr sz="1500" b="1">
                           <a:solidFill>
@@ -12162,7 +13811,9 @@
                     <a:bodyPr/>
                     <a:lstStyle/>
                     <a:p>
-                      <a:pPr algn="l"/>
+                      <a:pPr algn="l">
+                        <a:buNone/>
+                      </a:pPr>
                       <a:r>
                         <a:rPr sz="1500" b="1">
                           <a:solidFill>
@@ -12187,7 +13838,9 @@
                     <a:bodyPr/>
                     <a:lstStyle/>
                     <a:p>
-                      <a:pPr algn="l"/>
+                      <a:pPr algn="l">
+                        <a:buNone/>
+                      </a:pPr>
                       <a:r>
                         <a:rPr sz="1500" b="0">
                           <a:solidFill>
@@ -12212,7 +13865,9 @@
                     <a:bodyPr/>
                     <a:lstStyle/>
                     <a:p>
-                      <a:pPr algn="l"/>
+                      <a:pPr algn="l">
+                        <a:buNone/>
+                      </a:pPr>
                       <a:r>
                         <a:rPr sz="1500" b="1">
                           <a:solidFill>
@@ -13093,7 +14748,7 @@
       </p:sp>
       <p:cxnSp>
         <p:nvCxnSpPr>
-          <p:cNvPr id="376" name=""/>
+          <p:cNvPr id="404" name=""/>
           <p:cNvCxnSpPr>
             <a:stCxn xmlns:a="http://schemas.openxmlformats.org/drawingml/2006/main" id="3" idx="3"/>
             <a:endCxn xmlns:a="http://schemas.openxmlformats.org/drawingml/2006/main" id="6" idx="1"/>
@@ -13119,7 +14774,7 @@
       </p:cxnSp>
       <p:cxnSp>
         <p:nvCxnSpPr>
-          <p:cNvPr id="377" name=""/>
+          <p:cNvPr id="405" name=""/>
           <p:cNvCxnSpPr>
             <a:stCxn xmlns:a="http://schemas.openxmlformats.org/drawingml/2006/main" id="6" idx="3"/>
             <a:endCxn xmlns:a="http://schemas.openxmlformats.org/drawingml/2006/main" id="10" idx="1"/>

--- a/decks/12-evaluating-agentic-systems.pptx
+++ b/decks/12-evaluating-agentic-systems.pptx
@@ -2,23 +2,23 @@
 <file path=ppt/presentation.xml><?xml version="1.0" encoding="utf-8"?>
 <p:presentation xmlns:p="http://schemas.openxmlformats.org/presentationml/2006/main">
   <p:sldMasterIdLst>
-    <p:sldMasterId xmlns:r="http://schemas.openxmlformats.org/officeDocument/2006/relationships" id="2147483648" r:id="R8fb68e2787f44e75"/>
+    <p:sldMasterId xmlns:r="http://schemas.openxmlformats.org/officeDocument/2006/relationships" id="2147483648" r:id="Rebbacaeed31c4eed"/>
   </p:sldMasterIdLst>
   <p:notesMasterIdLst>
-    <p:notesMasterId xmlns:r="http://schemas.openxmlformats.org/officeDocument/2006/relationships" r:id="R3c0ef103c639447d"/>
+    <p:notesMasterId xmlns:r="http://schemas.openxmlformats.org/officeDocument/2006/relationships" r:id="Reea06163b1bf43a3"/>
   </p:notesMasterIdLst>
   <p:sldIdLst>
-    <p:sldId xmlns:r="http://schemas.openxmlformats.org/officeDocument/2006/relationships" id="256" r:id="R4939f749eb6b4b99"/>
-    <p:sldId xmlns:r="http://schemas.openxmlformats.org/officeDocument/2006/relationships" id="257" r:id="R8a9ce4ffef1b495b"/>
-    <p:sldId xmlns:r="http://schemas.openxmlformats.org/officeDocument/2006/relationships" id="258" r:id="R147bb70bcf3344d9"/>
-    <p:sldId xmlns:r="http://schemas.openxmlformats.org/officeDocument/2006/relationships" id="259" r:id="R7d39e81fc12f4ca6"/>
-    <p:sldId xmlns:r="http://schemas.openxmlformats.org/officeDocument/2006/relationships" id="260" r:id="R183a3ab8e74a403c"/>
-    <p:sldId xmlns:r="http://schemas.openxmlformats.org/officeDocument/2006/relationships" id="261" r:id="Rbc2d1fc2d2574139"/>
-    <p:sldId xmlns:r="http://schemas.openxmlformats.org/officeDocument/2006/relationships" id="262" r:id="R64fd8d371b1342e3"/>
-    <p:sldId xmlns:r="http://schemas.openxmlformats.org/officeDocument/2006/relationships" id="263" r:id="R4925c574e1034bff"/>
-    <p:sldId xmlns:r="http://schemas.openxmlformats.org/officeDocument/2006/relationships" id="264" r:id="Rc36cb4c9b64e4b49"/>
-    <p:sldId xmlns:r="http://schemas.openxmlformats.org/officeDocument/2006/relationships" id="265" r:id="Rd69b6b2356674aa3"/>
-    <p:sldId xmlns:r="http://schemas.openxmlformats.org/officeDocument/2006/relationships" id="266" r:id="R78f8eddd4b8a48b0"/>
+    <p:sldId xmlns:r="http://schemas.openxmlformats.org/officeDocument/2006/relationships" id="256" r:id="R700cefbde7c84356"/>
+    <p:sldId xmlns:r="http://schemas.openxmlformats.org/officeDocument/2006/relationships" id="257" r:id="Rc6649d33d66543a8"/>
+    <p:sldId xmlns:r="http://schemas.openxmlformats.org/officeDocument/2006/relationships" id="258" r:id="R997998aebbe447b4"/>
+    <p:sldId xmlns:r="http://schemas.openxmlformats.org/officeDocument/2006/relationships" id="259" r:id="Re392c3ff316d49c2"/>
+    <p:sldId xmlns:r="http://schemas.openxmlformats.org/officeDocument/2006/relationships" id="260" r:id="R43d63a2efc6f4547"/>
+    <p:sldId xmlns:r="http://schemas.openxmlformats.org/officeDocument/2006/relationships" id="261" r:id="R4b25f785efbb4c19"/>
+    <p:sldId xmlns:r="http://schemas.openxmlformats.org/officeDocument/2006/relationships" id="262" r:id="Rf7a8bfec493d4805"/>
+    <p:sldId xmlns:r="http://schemas.openxmlformats.org/officeDocument/2006/relationships" id="263" r:id="R3f39182bd7fc4dfe"/>
+    <p:sldId xmlns:r="http://schemas.openxmlformats.org/officeDocument/2006/relationships" id="264" r:id="R3f7f957f32d84a32"/>
+    <p:sldId xmlns:r="http://schemas.openxmlformats.org/officeDocument/2006/relationships" id="265" r:id="Raa0321de2a654c10"/>
+    <p:sldId xmlns:r="http://schemas.openxmlformats.org/officeDocument/2006/relationships" id="266" r:id="R2d93661e8c684a49"/>
   </p:sldIdLst>
   <p:sldSz cx="15240000" cy="8572500"/>
   <p:notesSz cx="6858000" cy="9144000"/>
@@ -452,7 +452,7 @@
           <a:lstStyle xmlns:a="http://schemas.openxmlformats.org/drawingml/2006/main"/>
           <a:p xmlns:a="http://schemas.openxmlformats.org/drawingml/2006/main">
             <a:r>
-              <a:t>Instructor purpose: State the outcome and pacing: evaluate both the public path and the cited answer.</a:t>
+              <a:t>Instructor purpose: Frame the lesson around release evidence: the agent's path, answer, trace, and decision.</a:t>
             </a:r>
           </a:p>
           <a:p xmlns:a="http://schemas.openxmlformats.org/drawingml/2006/main">
@@ -737,7 +737,7 @@
           <a:lstStyle xmlns:a="http://schemas.openxmlformats.org/drawingml/2006/main"/>
           <a:p xmlns:a="http://schemas.openxmlformats.org/drawingml/2006/main">
             <a:r>
-              <a:t>Instructor purpose: Contrast a bounded path with a redundant path that reaches equally plausible copy.</a:t>
+              <a:t>Instructor purpose: Contrast two equally plausible answers whose execution paths carry very different risk.</a:t>
             </a:r>
           </a:p>
           <a:p xmlns:a="http://schemas.openxmlformats.org/drawingml/2006/main">
@@ -758,11 +758,6 @@
           <a:p xmlns:a="http://schemas.openxmlformats.org/drawingml/2006/main">
             <a:r>
               <a:t>https://mlflow.org/docs/latest/genai/tracing/</a:t>
-            </a:r>
-          </a:p>
-          <a:p xmlns:a="http://schemas.openxmlformats.org/drawingml/2006/main">
-            <a:r>
-              <a:t>https://mlflow.org/docs/latest/genai/concepts/scorers/</a:t>
             </a:r>
           </a:p>
           <a:p xmlns:a="http://schemas.openxmlformats.org/drawingml/2006/main">
@@ -837,7 +832,7 @@
           <a:lstStyle xmlns:a="http://schemas.openxmlformats.org/drawingml/2006/main"/>
           <a:p xmlns:a="http://schemas.openxmlformats.org/drawingml/2006/main">
             <a:r>
-              <a:t>Instructor purpose: Separate trajectory correctness and efficiency from answer relevance, completeness, and citation integrity.</a:t>
+              <a:t>Instructor purpose: Separate path correctness and efficiency from answer completeness and citation integrity.</a:t>
             </a:r>
           </a:p>
           <a:p xmlns:a="http://schemas.openxmlformats.org/drawingml/2006/main">
@@ -857,12 +852,17 @@
           </a:p>
           <a:p xmlns:a="http://schemas.openxmlformats.org/drawingml/2006/main">
             <a:r>
-              <a:t>https://mlflow.org/docs/latest/genai/concepts/scorers/</a:t>
-            </a:r>
-          </a:p>
-          <a:p xmlns:a="http://schemas.openxmlformats.org/drawingml/2006/main">
-            <a:r>
-              <a:t>https://mlflow.org/docs/latest/genai/eval-monitor/scorers/custom/</a:t>
+              <a:t>notebooks/12_evaluating_agentic_systems.ipynb</a:t>
+            </a:r>
+          </a:p>
+          <a:p xmlns:a="http://schemas.openxmlformats.org/drawingml/2006/main">
+            <a:r>
+              <a:t>assets/lesson-12/evaluation-contract.png</a:t>
+            </a:r>
+          </a:p>
+          <a:p xmlns:a="http://schemas.openxmlformats.org/drawingml/2006/main">
+            <a:r>
+              <a:t>https://mlflow.org/docs/latest/genai/eval-monitor/scorers/index.html</a:t>
             </a:r>
           </a:p>
           <a:p xmlns:a="http://schemas.openxmlformats.org/drawingml/2006/main">
@@ -937,12 +937,12 @@
           <a:lstStyle xmlns:a="http://schemas.openxmlformats.org/drawingml/2006/main"/>
           <a:p xmlns:a="http://schemas.openxmlformats.org/drawingml/2006/main">
             <a:r>
-              <a:t>Instructor purpose: Explain how one versioned case fixes expectations, dependencies, evidence, status, and budget.</a:t>
-            </a:r>
-          </a:p>
-          <a:p xmlns:a="http://schemas.openxmlformats.org/drawingml/2006/main">
-            <a:r>
-              <a:t>Planned timing: 3:45-5:00</a:t>
+              <a:t>Instructor purpose: Show how a versioned dataset becomes one comparable MLflow run with a trace behind every row.</a:t>
+            </a:r>
+          </a:p>
+          <a:p xmlns:a="http://schemas.openxmlformats.org/drawingml/2006/main">
+            <a:r>
+              <a:t>Planned timing: 3:45-5:15</a:t>
             </a:r>
           </a:p>
           <a:p xmlns:a="http://schemas.openxmlformats.org/drawingml/2006/main">
@@ -957,7 +957,12 @@
           </a:p>
           <a:p xmlns:a="http://schemas.openxmlformats.org/drawingml/2006/main">
             <a:r>
-              <a:t>https://mlflow.org/docs/latest/genai/eval-monitor/quickstart/</a:t>
+              <a:t>https://www.mlflow.org/docs/latest/genai/eval-monitor/running-evaluation/traces/</a:t>
+            </a:r>
+          </a:p>
+          <a:p xmlns:a="http://schemas.openxmlformats.org/drawingml/2006/main">
+            <a:r>
+              <a:t>assets/lesson-12/mlflow-trace-evaluation-overview.png</a:t>
             </a:r>
           </a:p>
           <a:p xmlns:a="http://schemas.openxmlformats.org/drawingml/2006/main">
@@ -1032,12 +1037,12 @@
           <a:lstStyle xmlns:a="http://schemas.openxmlformats.org/drawingml/2006/main"/>
           <a:p xmlns:a="http://schemas.openxmlformats.org/drawingml/2006/main">
             <a:r>
-              <a:t>Instructor purpose: Map one dataset to pure scorers, one MLflow run per configuration, and one root trace per case.</a:t>
-            </a:r>
-          </a:p>
-          <a:p xmlns:a="http://schemas.openxmlformats.org/drawingml/2006/main">
-            <a:r>
-              <a:t>Planned timing: 5:00-6:30</a:t>
+              <a:t>Instructor purpose: Teach the MLflow trace viewer as the debugging surface for spans, tool calls, errors, and assessments.</a:t>
+            </a:r>
+          </a:p>
+          <a:p xmlns:a="http://schemas.openxmlformats.org/drawingml/2006/main">
+            <a:r>
+              <a:t>Planned timing: 5:15-7:00</a:t>
             </a:r>
           </a:p>
           <a:p xmlns:a="http://schemas.openxmlformats.org/drawingml/2006/main">
@@ -1052,12 +1057,12 @@
           </a:p>
           <a:p xmlns:a="http://schemas.openxmlformats.org/drawingml/2006/main">
             <a:r>
-              <a:t>https://mlflow.org/docs/latest/genai/eval-monitor/quickstart/</a:t>
-            </a:r>
-          </a:p>
-          <a:p xmlns:a="http://schemas.openxmlformats.org/drawingml/2006/main">
-            <a:r>
-              <a:t>https://mlflow.org/docs/latest/genai/tracing/</a:t>
+              <a:t>https://mlflow.org/docs/latest/genai/tracing/observe-with-traces/ui</a:t>
+            </a:r>
+          </a:p>
+          <a:p xmlns:a="http://schemas.openxmlformats.org/drawingml/2006/main">
+            <a:r>
+              <a:t>assets/lesson-12/mlflow-trace-detail.png</a:t>
             </a:r>
           </a:p>
           <a:p xmlns:a="http://schemas.openxmlformats.org/drawingml/2006/main">
@@ -1132,12 +1137,12 @@
           <a:lstStyle xmlns:a="http://schemas.openxmlformats.org/drawingml/2006/main"/>
           <a:p xmlns:a="http://schemas.openxmlformats.org/drawingml/2006/main">
             <a:r>
-              <a:t>Instructor purpose: Read the public trace from planning through one typed TOOL error, replanning, the evidence gate, and report.</a:t>
-            </a:r>
-          </a:p>
-          <a:p xmlns:a="http://schemas.openxmlformats.org/drawingml/2006/main">
-            <a:r>
-              <a:t>Planned timing: 6:30-8:00</a:t>
+              <a:t>Instructor purpose: Read the lowest case before trusting a configuration average, then open the matching trace.</a:t>
+            </a:r>
+          </a:p>
+          <a:p xmlns:a="http://schemas.openxmlformats.org/drawingml/2006/main">
+            <a:r>
+              <a:t>Planned timing: 7:00-8:30</a:t>
             </a:r>
           </a:p>
           <a:p xmlns:a="http://schemas.openxmlformats.org/drawingml/2006/main">
@@ -1152,12 +1157,12 @@
           </a:p>
           <a:p xmlns:a="http://schemas.openxmlformats.org/drawingml/2006/main">
             <a:r>
-              <a:t>https://mlflow.org/docs/latest/genai/tracing/</a:t>
-            </a:r>
-          </a:p>
-          <a:p xmlns:a="http://schemas.openxmlformats.org/drawingml/2006/main">
-            <a:r>
-              <a:t>https://mlflow.org/docs/latest/genai/tracing/observe-with-traces/ui</a:t>
+              <a:t>notebooks/12_evaluating_agentic_systems.ipynb</a:t>
+            </a:r>
+          </a:p>
+          <a:p xmlns:a="http://schemas.openxmlformats.org/drawingml/2006/main">
+            <a:r>
+              <a:t>assets/lesson-12/per-case-heatmap.png</a:t>
             </a:r>
           </a:p>
           <a:p xmlns:a="http://schemas.openxmlformats.org/drawingml/2006/main">
@@ -1232,12 +1237,12 @@
           <a:lstStyle xmlns:a="http://schemas.openxmlformats.org/drawingml/2006/main"/>
           <a:p xmlns:a="http://schemas.openxmlformats.org/drawingml/2006/main">
             <a:r>
-              <a:t>Instructor purpose: Keep deterministic finance rules as the release gate and optional semantic judges as explicit context only.</a:t>
-            </a:r>
-          </a:p>
-          <a:p xmlns:a="http://schemas.openxmlformats.org/drawingml/2006/main">
-            <a:r>
-              <a:t>Planned timing: 8:00-9:30</a:t>
+              <a:t>Instructor purpose: Keep deterministic finance rules as release gates and optional semantic judges as context.</a:t>
+            </a:r>
+          </a:p>
+          <a:p xmlns:a="http://schemas.openxmlformats.org/drawingml/2006/main">
+            <a:r>
+              <a:t>Planned timing: 8:30-9:45</a:t>
             </a:r>
           </a:p>
           <a:p xmlns:a="http://schemas.openxmlformats.org/drawingml/2006/main">
@@ -1253,11 +1258,6 @@
           <a:p xmlns:a="http://schemas.openxmlformats.org/drawingml/2006/main">
             <a:r>
               <a:t>https://mlflow.org/docs/latest/genai/eval-monitor/scorers/index.html</a:t>
-            </a:r>
-          </a:p>
-          <a:p xmlns:a="http://schemas.openxmlformats.org/drawingml/2006/main">
-            <a:r>
-              <a:t>https://mlflow.org/docs/latest/genai/eval-monitor/scorers/custom/</a:t>
             </a:r>
           </a:p>
           <a:p xmlns:a="http://schemas.openxmlformats.org/drawingml/2006/main">
@@ -1332,12 +1332,12 @@
           <a:lstStyle xmlns:a="http://schemas.openxmlformats.org/drawingml/2006/main"/>
           <a:p xmlns:a="http://schemas.openxmlformats.org/drawingml/2006/main">
             <a:r>
-              <a:t>Instructor purpose: Assign each score pattern to the earliest public component that can fix it.</a:t>
-            </a:r>
-          </a:p>
-          <a:p xmlns:a="http://schemas.openxmlformats.org/drawingml/2006/main">
-            <a:r>
-              <a:t>Planned timing: 9:30-11:00</a:t>
+              <a:t>Instructor purpose: Map each failed score to the earliest public component that can own and fix it.</a:t>
+            </a:r>
+          </a:p>
+          <a:p xmlns:a="http://schemas.openxmlformats.org/drawingml/2006/main">
+            <a:r>
+              <a:t>Planned timing: 9:45-11:00</a:t>
             </a:r>
           </a:p>
           <a:p xmlns:a="http://schemas.openxmlformats.org/drawingml/2006/main">
@@ -1352,12 +1352,7 @@
           </a:p>
           <a:p xmlns:a="http://schemas.openxmlformats.org/drawingml/2006/main">
             <a:r>
-              <a:t>https://mlflow.org/docs/latest/genai/tracing/</a:t>
-            </a:r>
-          </a:p>
-          <a:p xmlns:a="http://schemas.openxmlformats.org/drawingml/2006/main">
-            <a:r>
-              <a:t>https://mlflow.org/docs/latest/genai/eval-monitor/scorers/index.html</a:t>
+              <a:t>https://mlflow.org/docs/latest/genai/tracing/observe-with-traces/ui</a:t>
             </a:r>
           </a:p>
           <a:p xmlns:a="http://schemas.openxmlformats.org/drawingml/2006/main">
@@ -1432,12 +1427,12 @@
           <a:lstStyle xmlns:a="http://schemas.openxmlformats.org/drawingml/2006/main"/>
           <a:p xmlns:a="http://schemas.openxmlformats.org/drawingml/2006/main">
             <a:r>
-              <a:t>Instructor purpose: Close on citation release, six aligned cases, no forbidden briefing after a stop, and the capstone handoff.</a:t>
-            </a:r>
-          </a:p>
-          <a:p xmlns:a="http://schemas.openxmlformats.org/drawingml/2006/main">
-            <a:r>
-              <a:t>Planned timing: 11:00-12:00</a:t>
+              <a:t>Instructor purpose: Close with a release checklist and use dashboard failures to define the capstone experiment.</a:t>
+            </a:r>
+          </a:p>
+          <a:p xmlns:a="http://schemas.openxmlformats.org/drawingml/2006/main">
+            <a:r>
+              <a:t>Planned timing: 11:00-12:30</a:t>
             </a:r>
           </a:p>
           <a:p xmlns:a="http://schemas.openxmlformats.org/drawingml/2006/main">
@@ -1452,12 +1447,12 @@
           </a:p>
           <a:p xmlns:a="http://schemas.openxmlformats.org/drawingml/2006/main">
             <a:r>
-              <a:t>https://mlflow.org/docs/latest/genai/eval-monitor/quickstart/</a:t>
-            </a:r>
-          </a:p>
-          <a:p xmlns:a="http://schemas.openxmlformats.org/drawingml/2006/main">
-            <a:r>
-              <a:t>https://mlflow.org/docs/latest/genai/eval-monitor/scorers/index.html</a:t>
+              <a:t>https://mlflow.org/docs/latest/genai/tracing/observe-with-traces/dashboard/</a:t>
+            </a:r>
+          </a:p>
+          <a:p xmlns:a="http://schemas.openxmlformats.org/drawingml/2006/main">
+            <a:r>
+              <a:t>assets/lesson-12/mlflow-quality-dashboard.png</a:t>
             </a:r>
           </a:p>
           <a:p xmlns:a="http://schemas.openxmlformats.org/drawingml/2006/main">
@@ -1530,7 +1525,7 @@
   </p:cSld>
   <p:clrMap bg1="lt1" tx1="dk1" bg2="lt2" tx2="dk2" accent1="accent1" accent2="accent2" accent3="accent3" accent4="accent4" accent5="accent5" accent6="accent6" hlink="hlink" folHlink="folHlink"/>
   <p:sldLayoutIdLst>
-    <p:sldLayoutId xmlns:r="http://schemas.openxmlformats.org/officeDocument/2006/relationships" id="2147483649" r:id="Rc3b9a5f5a27543f3"/>
+    <p:sldLayoutId xmlns:r="http://schemas.openxmlformats.org/officeDocument/2006/relationships" id="2147483649" r:id="Rb509a54f4e7a4d66"/>
   </p:sldLayoutIdLst>
   <p:txStyles>
     <p:titleStyle>
@@ -2228,7 +2223,7 @@
                 <a:ea typeface="Calibri"/>
                 <a:cs typeface="Calibri"/>
               </a:rPr>
-              <a:t>Evaluate the path and the answer</a:t>
+              <a:t>Evaluate the agent, not only the answer</a:t>
             </a:r>
           </a:p>
         </p:txBody>
@@ -2352,7 +2347,7 @@
                 <a:ea typeface="Calibri"/>
                 <a:cs typeface="Calibri"/>
               </a:rPr>
-              <a:t>14:30-15:30  ·  12 + 40 + 8 MINUTES</a:t>
+              <a:t>PATH  ·  ANSWER  ·  TRACE  ·  RELEASE</a:t>
             </a:r>
           </a:p>
         </p:txBody>
@@ -2824,6 +2819,7 @@
           <a:lstStyle xmlns:a="http://schemas.openxmlformats.org/drawingml/2006/main"/>
           <a:p xmlns:a="http://schemas.openxmlformats.org/drawingml/2006/main">
             <a:pPr>
+              <a:buNone/>
               <a:defRPr sz="1500" b="1">
                 <a:solidFill>
                   <a:srgbClr val="001B2E"/>
@@ -2874,6 +2870,7 @@
           <a:lstStyle xmlns:a="http://schemas.openxmlformats.org/drawingml/2006/main"/>
           <a:p xmlns:a="http://schemas.openxmlformats.org/drawingml/2006/main">
             <a:pPr>
+              <a:buNone/>
               <a:defRPr sz="1200" b="0">
                 <a:solidFill>
                   <a:srgbClr val="334155"/>
@@ -2924,6 +2921,7 @@
           <a:lstStyle xmlns:a="http://schemas.openxmlformats.org/drawingml/2006/main"/>
           <a:p xmlns:a="http://schemas.openxmlformats.org/drawingml/2006/main">
             <a:pPr>
+              <a:buNone/>
               <a:defRPr sz="1500" b="1">
                 <a:solidFill>
                   <a:srgbClr val="001B2E"/>
@@ -2974,6 +2972,7 @@
           <a:lstStyle xmlns:a="http://schemas.openxmlformats.org/drawingml/2006/main"/>
           <a:p xmlns:a="http://schemas.openxmlformats.org/drawingml/2006/main">
             <a:pPr>
+              <a:buNone/>
               <a:defRPr sz="1200" b="0">
                 <a:solidFill>
                   <a:srgbClr val="334155"/>
@@ -3024,6 +3023,7 @@
           <a:lstStyle xmlns:a="http://schemas.openxmlformats.org/drawingml/2006/main"/>
           <a:p xmlns:a="http://schemas.openxmlformats.org/drawingml/2006/main">
             <a:pPr>
+              <a:buNone/>
               <a:defRPr sz="1500" b="1">
                 <a:solidFill>
                   <a:srgbClr val="001B2E"/>
@@ -3074,6 +3074,7 @@
           <a:lstStyle xmlns:a="http://schemas.openxmlformats.org/drawingml/2006/main"/>
           <a:p xmlns:a="http://schemas.openxmlformats.org/drawingml/2006/main">
             <a:pPr>
+              <a:buNone/>
               <a:defRPr sz="1200" b="0">
                 <a:solidFill>
                   <a:srgbClr val="334155"/>
@@ -3496,6 +3497,7 @@
           <a:lstStyle xmlns:a="http://schemas.openxmlformats.org/drawingml/2006/main"/>
           <a:p xmlns:a="http://schemas.openxmlformats.org/drawingml/2006/main">
             <a:pPr>
+              <a:buNone/>
               <a:defRPr sz="1500" b="1">
                 <a:solidFill>
                   <a:srgbClr val="1F40CB"/>
@@ -3546,6 +3548,7 @@
           <a:lstStyle xmlns:a="http://schemas.openxmlformats.org/drawingml/2006/main"/>
           <a:p xmlns:a="http://schemas.openxmlformats.org/drawingml/2006/main">
             <a:pPr>
+              <a:buNone/>
               <a:defRPr sz="1200" b="0">
                 <a:solidFill>
                   <a:srgbClr val="334155"/>
@@ -3596,6 +3599,7 @@
           <a:lstStyle xmlns:a="http://schemas.openxmlformats.org/drawingml/2006/main"/>
           <a:p xmlns:a="http://schemas.openxmlformats.org/drawingml/2006/main">
             <a:pPr>
+              <a:buNone/>
               <a:defRPr sz="1500" b="1">
                 <a:solidFill>
                   <a:srgbClr val="1F40CB"/>
@@ -3646,6 +3650,7 @@
           <a:lstStyle xmlns:a="http://schemas.openxmlformats.org/drawingml/2006/main"/>
           <a:p xmlns:a="http://schemas.openxmlformats.org/drawingml/2006/main">
             <a:pPr>
+              <a:buNone/>
               <a:defRPr sz="1200" b="0">
                 <a:solidFill>
                   <a:srgbClr val="334155"/>
@@ -3696,6 +3701,7 @@
           <a:lstStyle xmlns:a="http://schemas.openxmlformats.org/drawingml/2006/main"/>
           <a:p xmlns:a="http://schemas.openxmlformats.org/drawingml/2006/main">
             <a:pPr>
+              <a:buNone/>
               <a:defRPr sz="1500" b="1">
                 <a:solidFill>
                   <a:srgbClr val="1F40CB"/>
@@ -3746,6 +3752,7 @@
           <a:lstStyle xmlns:a="http://schemas.openxmlformats.org/drawingml/2006/main"/>
           <a:p xmlns:a="http://schemas.openxmlformats.org/drawingml/2006/main">
             <a:pPr>
+              <a:buNone/>
               <a:defRPr sz="1200" b="0">
                 <a:solidFill>
                   <a:srgbClr val="334155"/>
@@ -3849,7 +3856,7 @@
                 <a:ea typeface="Calibri"/>
                 <a:cs typeface="Calibri"/>
               </a:rPr>
-              <a:t>PATH QUALITY</a:t>
+              <a:t>WHY EVALUATE</a:t>
             </a:r>
           </a:p>
         </p:txBody>
@@ -3911,7 +3918,7 @@
                 <a:ea typeface="Calibri"/>
                 <a:cs typeface="Calibri"/>
               </a:rPr>
-              <a:t>Same answer, different path</a:t>
+              <a:t>A good answer can still come from a bad agent</a:t>
             </a:r>
           </a:p>
         </p:txBody>
@@ -5286,7 +5293,7 @@
                 <a:ea typeface="Calibri"/>
                 <a:cs typeface="Calibri"/>
               </a:rPr>
-              <a:t>A plausible answer does not certify the path.</a:t>
+              <a:t>The final paragraph cannot reveal redundant calls or a failed gate.</a:t>
             </a:r>
           </a:p>
         </p:txBody>
@@ -5629,7 +5636,7 @@
                 <a:ea typeface="Calibri"/>
                 <a:cs typeface="Calibri"/>
               </a:rPr>
-              <a:t>TWO SCORECARDS</a:t>
+              <a:t>EVALUATION CONTRACT</a:t>
             </a:r>
           </a:p>
         </p:txBody>
@@ -5691,7 +5698,7 @@
                 <a:ea typeface="Calibri"/>
                 <a:cs typeface="Calibri"/>
               </a:rPr>
-              <a:t>Trajectory quality and answer quality are separate</a:t>
+              <a:t>Score the answer and the path separately</a:t>
             </a:r>
           </a:p>
         </p:txBody>
@@ -5788,7 +5795,7 @@
                 <a:ea typeface="Calibri"/>
                 <a:cs typeface="Calibri"/>
               </a:rPr>
-              <a:t>Score the public path and the cited answer separately.</a:t>
+              <a:t>The release decision needs both scorecards.</a:t>
             </a:r>
           </a:p>
         </p:txBody>
@@ -5978,7 +5985,7 @@
                 <a:ea typeface="Calibri"/>
                 <a:cs typeface="Calibri"/>
               </a:rPr>
-              <a:t>SCORECARD</a:t>
+              <a:t>SCORE</a:t>
             </a:r>
           </a:p>
         </p:txBody>
@@ -6047,7 +6054,7 @@
       </p:sp>
       <p:graphicFrame>
         <p:nvGraphicFramePr>
-          <p:cNvPr id="46" name=""/>
+          <p:cNvPr id="50" name=""/>
           <p:cNvGraphicFramePr/>
           <p:nvPr/>
         </p:nvGraphicFramePr>
@@ -6432,6 +6439,178 @@
           </a:graphicData>
         </a:graphic>
       </p:graphicFrame>
+      <p:pic>
+        <p:nvPicPr>
+          <p:cNvPr id="51" name=""/>
+          <p:cNvPicPr>
+            <a:picLocks xmlns:a="http://schemas.openxmlformats.org/drawingml/2006/main" noChangeAspect="1"/>
+          </p:cNvPicPr>
+          <p:nvPr/>
+        </p:nvPicPr>
+        <p:blipFill>
+          <a:blip xmlns:r="http://schemas.openxmlformats.org/officeDocument/2006/relationships" xmlns:a="http://schemas.openxmlformats.org/drawingml/2006/main" r:embed="R126ba3253d3c485d"/>
+          <a:stretch xmlns:a="http://schemas.openxmlformats.org/drawingml/2006/main"/>
+        </p:blipFill>
+        <p:spPr>
+          <a:xfrm xmlns:a="http://schemas.openxmlformats.org/drawingml/2006/main">
+            <a:off x="3011632" y="2571750"/>
+            <a:ext cx="9159586" cy="3905250"/>
+          </a:xfrm>
+          <a:prstGeom xmlns:a="http://schemas.openxmlformats.org/drawingml/2006/main" prst="rect">
+            <a:avLst/>
+          </a:prstGeom>
+        </p:spPr>
+      </p:pic>
+      <p:sp>
+        <p:nvSpPr>
+          <p:cNvPr id="38" name="">
+            <a:extLst xmlns:a="http://schemas.openxmlformats.org/drawingml/2006/main">
+              <a:ext uri="{FF2B5EF4-FFF2-40B4-BE49-F238E27FC236}">
+                <a16:creationId xmlns:a16="http://schemas.microsoft.com/office/drawing/2014/main" id="{B8199A3E-47A6-4776-8EC6-EDC809E376B7}"/>
+              </a:ext>
+            </a:extLst>
+          </p:cNvPr>
+          <p:cNvSpPr>
+            <a:spLocks xmlns:a="http://schemas.openxmlformats.org/drawingml/2006/main" noGrp="1"/>
+          </p:cNvSpPr>
+          <p:nvPr/>
+        </p:nvSpPr>
+        <p:spPr>
+          <a:xfrm xmlns:a="http://schemas.openxmlformats.org/drawingml/2006/main">
+            <a:off x="1666875" y="6191250"/>
+            <a:ext cx="2381250" cy="266700"/>
+          </a:xfrm>
+          <a:prstGeom xmlns:a="http://schemas.openxmlformats.org/drawingml/2006/main" prst="rect">
+            <a:avLst/>
+          </a:prstGeom>
+          <a:noFill xmlns:a="http://schemas.openxmlformats.org/drawingml/2006/main"/>
+          <a:ln xmlns:a="http://schemas.openxmlformats.org/drawingml/2006/main" w="0">
+            <a:noFill/>
+            <a:prstDash val="solid"/>
+          </a:ln>
+        </p:spPr>
+        <p:txBody>
+          <a:bodyPr xmlns:a="http://schemas.openxmlformats.org/drawingml/2006/main"/>
+          <a:lstStyle xmlns:a="http://schemas.openxmlformats.org/drawingml/2006/main"/>
+          <a:p xmlns:a="http://schemas.openxmlformats.org/drawingml/2006/main">
+            <a:pPr algn="ctr">
+              <a:defRPr sz="1125" b="1">
+                <a:solidFill>
+                  <a:srgbClr val="2447D8"/>
+                </a:solidFill>
+              </a:defRPr>
+            </a:pPr>
+            <a:r>
+              <a:rPr sz="1125" b="1">
+                <a:solidFill>
+                  <a:srgbClr val="2447D8"/>
+                </a:solidFill>
+              </a:rPr>
+              <a:t>INPUT</a:t>
+            </a:r>
+          </a:p>
+        </p:txBody>
+      </p:sp>
+      <p:sp>
+        <p:nvSpPr>
+          <p:cNvPr id="39" name="">
+            <a:extLst xmlns:a="http://schemas.openxmlformats.org/drawingml/2006/main">
+              <a:ext uri="{FF2B5EF4-FFF2-40B4-BE49-F238E27FC236}">
+                <a16:creationId xmlns:a16="http://schemas.microsoft.com/office/drawing/2014/main" id="{55B17E55-FB74-47B0-9171-8497C009A412}"/>
+              </a:ext>
+            </a:extLst>
+          </p:cNvPr>
+          <p:cNvSpPr>
+            <a:spLocks xmlns:a="http://schemas.openxmlformats.org/drawingml/2006/main" noGrp="1"/>
+          </p:cNvSpPr>
+          <p:nvPr/>
+        </p:nvSpPr>
+        <p:spPr>
+          <a:xfrm xmlns:a="http://schemas.openxmlformats.org/drawingml/2006/main">
+            <a:off x="6438900" y="6191250"/>
+            <a:ext cx="2381250" cy="266700"/>
+          </a:xfrm>
+          <a:prstGeom xmlns:a="http://schemas.openxmlformats.org/drawingml/2006/main" prst="rect">
+            <a:avLst/>
+          </a:prstGeom>
+          <a:noFill xmlns:a="http://schemas.openxmlformats.org/drawingml/2006/main"/>
+          <a:ln xmlns:a="http://schemas.openxmlformats.org/drawingml/2006/main" w="0">
+            <a:noFill/>
+            <a:prstDash val="solid"/>
+          </a:ln>
+        </p:spPr>
+        <p:txBody>
+          <a:bodyPr xmlns:a="http://schemas.openxmlformats.org/drawingml/2006/main"/>
+          <a:lstStyle xmlns:a="http://schemas.openxmlformats.org/drawingml/2006/main"/>
+          <a:p xmlns:a="http://schemas.openxmlformats.org/drawingml/2006/main">
+            <a:pPr algn="ctr">
+              <a:defRPr sz="1125" b="1">
+                <a:solidFill>
+                  <a:srgbClr val="F47C00"/>
+                </a:solidFill>
+              </a:defRPr>
+            </a:pPr>
+            <a:r>
+              <a:rPr sz="1125" b="1">
+                <a:solidFill>
+                  <a:srgbClr val="F47C00"/>
+                </a:solidFill>
+              </a:rPr>
+              <a:t>PUBLIC PATH</a:t>
+            </a:r>
+          </a:p>
+        </p:txBody>
+      </p:sp>
+      <p:sp>
+        <p:nvSpPr>
+          <p:cNvPr id="40" name="">
+            <a:extLst xmlns:a="http://schemas.openxmlformats.org/drawingml/2006/main">
+              <a:ext uri="{FF2B5EF4-FFF2-40B4-BE49-F238E27FC236}">
+                <a16:creationId xmlns:a16="http://schemas.microsoft.com/office/drawing/2014/main" id="{F27E222F-B1EB-4579-BEE0-5EE7EF7E1DFF}"/>
+              </a:ext>
+            </a:extLst>
+          </p:cNvPr>
+          <p:cNvSpPr>
+            <a:spLocks xmlns:a="http://schemas.openxmlformats.org/drawingml/2006/main" noGrp="1"/>
+          </p:cNvSpPr>
+          <p:nvPr/>
+        </p:nvSpPr>
+        <p:spPr>
+          <a:xfrm xmlns:a="http://schemas.openxmlformats.org/drawingml/2006/main">
+            <a:off x="11125200" y="6191250"/>
+            <a:ext cx="2381250" cy="266700"/>
+          </a:xfrm>
+          <a:prstGeom xmlns:a="http://schemas.openxmlformats.org/drawingml/2006/main" prst="rect">
+            <a:avLst/>
+          </a:prstGeom>
+          <a:noFill xmlns:a="http://schemas.openxmlformats.org/drawingml/2006/main"/>
+          <a:ln xmlns:a="http://schemas.openxmlformats.org/drawingml/2006/main" w="0">
+            <a:noFill/>
+            <a:prstDash val="solid"/>
+          </a:ln>
+        </p:spPr>
+        <p:txBody>
+          <a:bodyPr xmlns:a="http://schemas.openxmlformats.org/drawingml/2006/main"/>
+          <a:lstStyle xmlns:a="http://schemas.openxmlformats.org/drawingml/2006/main"/>
+          <a:p xmlns:a="http://schemas.openxmlformats.org/drawingml/2006/main">
+            <a:pPr algn="ctr">
+              <a:defRPr sz="1125" b="1">
+                <a:solidFill>
+                  <a:srgbClr val="2E8B57"/>
+                </a:solidFill>
+              </a:defRPr>
+            </a:pPr>
+            <a:r>
+              <a:rPr sz="1125" b="1">
+                <a:solidFill>
+                  <a:srgbClr val="2E8B57"/>
+                </a:solidFill>
+              </a:rPr>
+              <a:t>CITED ANSWER</a:t>
+            </a:r>
+          </a:p>
+        </p:txBody>
+      </p:sp>
     </p:spTree>
     <p:extLst>
       <p:ext uri="{BB962C8B-B14F-4D97-AF65-F5344CB8AC3E}">
@@ -6518,7 +6697,7 @@
                 <a:ea typeface="Calibri"/>
                 <a:cs typeface="Calibri"/>
               </a:rPr>
-              <a:t>VERSIONED CASE</a:t>
+              <a:t>MLFLOW EVALUATION</a:t>
             </a:r>
           </a:p>
         </p:txBody>
@@ -6580,1288 +6759,10 @@
                 <a:ea typeface="Calibri"/>
                 <a:cs typeface="Calibri"/>
               </a:rPr>
-              <a:t>A versioned case defines the exam</a:t>
-            </a:r>
-          </a:p>
-        </p:txBody>
-      </p:sp>
-      <p:sp>
-        <p:nvSpPr>
-          <p:cNvPr id="3" name="">
-            <a:extLst xmlns:a="http://schemas.openxmlformats.org/drawingml/2006/main">
-              <a:ext uri="{FF2B5EF4-FFF2-40B4-BE49-F238E27FC236}">
-                <a16:creationId xmlns:a16="http://schemas.microsoft.com/office/drawing/2014/main" id="{D7E8B752-5838-4084-A09E-2C38B9D5B30B}"/>
-              </a:ext>
-            </a:extLst>
-          </p:cNvPr>
-          <p:cNvSpPr>
-            <a:spLocks xmlns:a="http://schemas.openxmlformats.org/drawingml/2006/main" noGrp="1"/>
-          </p:cNvSpPr>
-          <p:nvPr/>
-        </p:nvSpPr>
-        <p:spPr>
-          <a:xfrm xmlns:a="http://schemas.openxmlformats.org/drawingml/2006/main">
-            <a:off x="1028700" y="2800350"/>
-            <a:ext cx="2476500" cy="361950"/>
-          </a:xfrm>
-          <a:prstGeom xmlns:a="http://schemas.openxmlformats.org/drawingml/2006/main" prst="rect">
-            <a:avLst/>
-          </a:prstGeom>
-          <a:noFill xmlns:a="http://schemas.openxmlformats.org/drawingml/2006/main"/>
-          <a:ln xmlns:a="http://schemas.openxmlformats.org/drawingml/2006/main" w="0">
-            <a:noFill/>
-            <a:prstDash val="solid"/>
-          </a:ln>
-        </p:spPr>
-        <p:txBody>
-          <a:bodyPr xmlns:a="http://schemas.openxmlformats.org/drawingml/2006/main" wrap="square" lIns="0" tIns="0" rIns="0" bIns="0" anchor="ctr">
-            <a:noAutofit/>
-          </a:bodyPr>
-          <a:lstStyle xmlns:a="http://schemas.openxmlformats.org/drawingml/2006/main"/>
-          <a:p xmlns:a="http://schemas.openxmlformats.org/drawingml/2006/main">
-            <a:pPr algn="l">
-              <a:lnSpc>
-                <a:spcPct val="100000"/>
-              </a:lnSpc>
-              <a:buNone/>
-              <a:defRPr sz="1350" b="1">
-                <a:solidFill>
-                  <a:srgbClr val="F07D00"/>
-                </a:solidFill>
-                <a:latin typeface="Calibri"/>
-                <a:ea typeface="Calibri"/>
-                <a:cs typeface="Calibri"/>
-              </a:defRPr>
-            </a:pPr>
-            <a:r>
-              <a:rPr sz="1800" b="1">
-                <a:solidFill>
-                  <a:srgbClr val="F07D00"/>
-                </a:solidFill>
-                <a:latin typeface="Calibri"/>
-                <a:ea typeface="Calibri"/>
-                <a:cs typeface="Calibri"/>
-              </a:rPr>
-              <a:t>VERSION KEYS</a:t>
-            </a:r>
-          </a:p>
-        </p:txBody>
-      </p:sp>
-      <p:sp>
-        <p:nvSpPr>
-          <p:cNvPr id="4" name="">
-            <a:extLst xmlns:a="http://schemas.openxmlformats.org/drawingml/2006/main">
-              <a:ext uri="{FF2B5EF4-FFF2-40B4-BE49-F238E27FC236}">
-                <a16:creationId xmlns:a16="http://schemas.microsoft.com/office/drawing/2014/main" id="{6CA53B89-6D78-4803-9B7F-A0162294F364}"/>
-              </a:ext>
-            </a:extLst>
-          </p:cNvPr>
-          <p:cNvSpPr>
-            <a:spLocks xmlns:a="http://schemas.openxmlformats.org/drawingml/2006/main" noGrp="1"/>
-          </p:cNvSpPr>
-          <p:nvPr/>
-        </p:nvSpPr>
-        <p:spPr>
-          <a:xfrm xmlns:a="http://schemas.openxmlformats.org/drawingml/2006/main">
-            <a:off x="3714750" y="2743200"/>
-            <a:ext cx="2381250" cy="647700"/>
-          </a:xfrm>
-          <a:prstGeom xmlns:a="http://schemas.openxmlformats.org/drawingml/2006/main" prst="roundRect">
-            <a:avLst>
-              <a:gd name="adj" fmla="val 5882"/>
-            </a:avLst>
-          </a:prstGeom>
-          <a:solidFill xmlns:a="http://schemas.openxmlformats.org/drawingml/2006/main">
-            <a:srgbClr val="1F40CB"/>
-          </a:solidFill>
-          <a:ln xmlns:a="http://schemas.openxmlformats.org/drawingml/2006/main" w="9525">
-            <a:solidFill>
-              <a:srgbClr val="FFFFFF"/>
-            </a:solidFill>
-            <a:prstDash val="solid"/>
-          </a:ln>
-        </p:spPr>
-      </p:sp>
-      <p:sp>
-        <p:nvSpPr>
-          <p:cNvPr id="5" name="">
-            <a:extLst xmlns:a="http://schemas.openxmlformats.org/drawingml/2006/main">
-              <a:ext uri="{FF2B5EF4-FFF2-40B4-BE49-F238E27FC236}">
-                <a16:creationId xmlns:a16="http://schemas.microsoft.com/office/drawing/2014/main" id="{132FC0D2-12CA-4723-B1F4-C8F21C5F174F}"/>
-              </a:ext>
-            </a:extLst>
-          </p:cNvPr>
-          <p:cNvSpPr>
-            <a:spLocks xmlns:a="http://schemas.openxmlformats.org/drawingml/2006/main" noGrp="1"/>
-          </p:cNvSpPr>
-          <p:nvPr/>
-        </p:nvSpPr>
-        <p:spPr>
-          <a:xfrm xmlns:a="http://schemas.openxmlformats.org/drawingml/2006/main">
-            <a:off x="3810000" y="2838450"/>
-            <a:ext cx="2190750" cy="457200"/>
-          </a:xfrm>
-          <a:prstGeom xmlns:a="http://schemas.openxmlformats.org/drawingml/2006/main" prst="rect">
-            <a:avLst/>
-          </a:prstGeom>
-          <a:noFill xmlns:a="http://schemas.openxmlformats.org/drawingml/2006/main"/>
-          <a:ln xmlns:a="http://schemas.openxmlformats.org/drawingml/2006/main" w="0">
-            <a:noFill/>
-            <a:prstDash val="solid"/>
-          </a:ln>
-        </p:spPr>
-        <p:txBody>
-          <a:bodyPr xmlns:a="http://schemas.openxmlformats.org/drawingml/2006/main" wrap="square" lIns="0" tIns="0" rIns="0" bIns="0" anchor="ctr">
-            <a:noAutofit/>
-          </a:bodyPr>
-          <a:lstStyle xmlns:a="http://schemas.openxmlformats.org/drawingml/2006/main"/>
-          <a:p xmlns:a="http://schemas.openxmlformats.org/drawingml/2006/main">
-            <a:pPr algn="ctr">
-              <a:lnSpc>
-                <a:spcPct val="100000"/>
-              </a:lnSpc>
-              <a:buNone/>
-              <a:defRPr sz="1275" b="1">
-                <a:solidFill>
-                  <a:srgbClr val="FFFFFF"/>
-                </a:solidFill>
-                <a:latin typeface="Calibri"/>
-                <a:ea typeface="Calibri"/>
-                <a:cs typeface="Calibri"/>
-              </a:defRPr>
-            </a:pPr>
-            <a:r>
-              <a:rPr sz="1800" b="1">
-                <a:solidFill>
-                  <a:srgbClr val="FFFFFF"/>
-                </a:solidFill>
-                <a:latin typeface="Calibri"/>
-                <a:ea typeface="Calibri"/>
-                <a:cs typeface="Calibri"/>
-              </a:rPr>
-              <a:t>agent-cases-v1</a:t>
-            </a:r>
-          </a:p>
-        </p:txBody>
-      </p:sp>
-      <p:sp>
-        <p:nvSpPr>
-          <p:cNvPr id="6" name="">
-            <a:extLst xmlns:a="http://schemas.openxmlformats.org/drawingml/2006/main">
-              <a:ext uri="{FF2B5EF4-FFF2-40B4-BE49-F238E27FC236}">
-                <a16:creationId xmlns:a16="http://schemas.microsoft.com/office/drawing/2014/main" id="{3E9AAB83-2BB1-4A7A-84F9-1F2BE14A6F81}"/>
-              </a:ext>
-            </a:extLst>
-          </p:cNvPr>
-          <p:cNvSpPr>
-            <a:spLocks xmlns:a="http://schemas.openxmlformats.org/drawingml/2006/main" noGrp="1"/>
-          </p:cNvSpPr>
-          <p:nvPr/>
-        </p:nvSpPr>
-        <p:spPr>
-          <a:xfrm xmlns:a="http://schemas.openxmlformats.org/drawingml/2006/main">
-            <a:off x="6153150" y="2743200"/>
-            <a:ext cx="2000250" cy="647700"/>
-          </a:xfrm>
-          <a:prstGeom xmlns:a="http://schemas.openxmlformats.org/drawingml/2006/main" prst="roundRect">
-            <a:avLst>
-              <a:gd name="adj" fmla="val 5882"/>
-            </a:avLst>
-          </a:prstGeom>
-          <a:solidFill xmlns:a="http://schemas.openxmlformats.org/drawingml/2006/main">
-            <a:srgbClr val="F07D00"/>
-          </a:solidFill>
-          <a:ln xmlns:a="http://schemas.openxmlformats.org/drawingml/2006/main" w="9525">
-            <a:solidFill>
-              <a:srgbClr val="FFFFFF"/>
-            </a:solidFill>
-            <a:prstDash val="solid"/>
-          </a:ln>
-        </p:spPr>
-      </p:sp>
-      <p:sp>
-        <p:nvSpPr>
-          <p:cNvPr id="7" name="">
-            <a:extLst xmlns:a="http://schemas.openxmlformats.org/drawingml/2006/main">
-              <a:ext uri="{FF2B5EF4-FFF2-40B4-BE49-F238E27FC236}">
-                <a16:creationId xmlns:a16="http://schemas.microsoft.com/office/drawing/2014/main" id="{6740ED07-2E49-4E7A-9CBF-23CD3B8CFFB4}"/>
-              </a:ext>
-            </a:extLst>
-          </p:cNvPr>
-          <p:cNvSpPr>
-            <a:spLocks xmlns:a="http://schemas.openxmlformats.org/drawingml/2006/main" noGrp="1"/>
-          </p:cNvSpPr>
-          <p:nvPr/>
-        </p:nvSpPr>
-        <p:spPr>
-          <a:xfrm xmlns:a="http://schemas.openxmlformats.org/drawingml/2006/main">
-            <a:off x="6248400" y="2838450"/>
-            <a:ext cx="1809750" cy="457200"/>
-          </a:xfrm>
-          <a:prstGeom xmlns:a="http://schemas.openxmlformats.org/drawingml/2006/main" prst="rect">
-            <a:avLst/>
-          </a:prstGeom>
-          <a:noFill xmlns:a="http://schemas.openxmlformats.org/drawingml/2006/main"/>
-          <a:ln xmlns:a="http://schemas.openxmlformats.org/drawingml/2006/main" w="0">
-            <a:noFill/>
-            <a:prstDash val="solid"/>
-          </a:ln>
-        </p:spPr>
-        <p:txBody>
-          <a:bodyPr xmlns:a="http://schemas.openxmlformats.org/drawingml/2006/main" wrap="square" lIns="0" tIns="0" rIns="0" bIns="0" anchor="ctr">
-            <a:noAutofit/>
-          </a:bodyPr>
-          <a:lstStyle xmlns:a="http://schemas.openxmlformats.org/drawingml/2006/main"/>
-          <a:p xmlns:a="http://schemas.openxmlformats.org/drawingml/2006/main">
-            <a:pPr algn="ctr">
-              <a:lnSpc>
-                <a:spcPct val="100000"/>
-              </a:lnSpc>
-              <a:buNone/>
-              <a:defRPr sz="1275" b="1">
-                <a:solidFill>
-                  <a:srgbClr val="FFFFFF"/>
-                </a:solidFill>
-                <a:latin typeface="Calibri"/>
-                <a:ea typeface="Calibri"/>
-                <a:cs typeface="Calibri"/>
-              </a:defRPr>
-            </a:pPr>
-            <a:r>
-              <a:rPr sz="1800" b="1">
-                <a:solidFill>
-                  <a:srgbClr val="FFFFFF"/>
-                </a:solidFill>
-                <a:latin typeface="Calibri"/>
-                <a:ea typeface="Calibri"/>
-                <a:cs typeface="Calibri"/>
-              </a:rPr>
-              <a:t>reference case</a:t>
-            </a:r>
-          </a:p>
-        </p:txBody>
-      </p:sp>
-      <p:sp>
-        <p:nvSpPr>
-          <p:cNvPr id="8" name="">
-            <a:extLst xmlns:a="http://schemas.openxmlformats.org/drawingml/2006/main">
-              <a:ext uri="{FF2B5EF4-FFF2-40B4-BE49-F238E27FC236}">
-                <a16:creationId xmlns:a16="http://schemas.microsoft.com/office/drawing/2014/main" id="{E5A5E176-BCBA-4C49-9196-B98EF7C59C62}"/>
-              </a:ext>
-            </a:extLst>
-          </p:cNvPr>
-          <p:cNvSpPr>
-            <a:spLocks xmlns:a="http://schemas.openxmlformats.org/drawingml/2006/main" noGrp="1"/>
-          </p:cNvSpPr>
-          <p:nvPr/>
-        </p:nvSpPr>
-        <p:spPr>
-          <a:xfrm xmlns:a="http://schemas.openxmlformats.org/drawingml/2006/main">
-            <a:off x="8210550" y="2743200"/>
-            <a:ext cx="1676400" cy="647700"/>
-          </a:xfrm>
-          <a:prstGeom xmlns:a="http://schemas.openxmlformats.org/drawingml/2006/main" prst="roundRect">
-            <a:avLst>
-              <a:gd name="adj" fmla="val 5882"/>
-            </a:avLst>
-          </a:prstGeom>
-          <a:solidFill xmlns:a="http://schemas.openxmlformats.org/drawingml/2006/main">
-            <a:srgbClr val="1F40CB"/>
-          </a:solidFill>
-          <a:ln xmlns:a="http://schemas.openxmlformats.org/drawingml/2006/main" w="9525">
-            <a:solidFill>
-              <a:srgbClr val="FFFFFF"/>
-            </a:solidFill>
-            <a:prstDash val="solid"/>
-          </a:ln>
-        </p:spPr>
-      </p:sp>
-      <p:sp>
-        <p:nvSpPr>
-          <p:cNvPr id="9" name="">
-            <a:extLst xmlns:a="http://schemas.openxmlformats.org/drawingml/2006/main">
-              <a:ext uri="{FF2B5EF4-FFF2-40B4-BE49-F238E27FC236}">
-                <a16:creationId xmlns:a16="http://schemas.microsoft.com/office/drawing/2014/main" id="{2D62C752-A7F9-4B50-9D20-A71CEAD8FABF}"/>
-              </a:ext>
-            </a:extLst>
-          </p:cNvPr>
-          <p:cNvSpPr>
-            <a:spLocks xmlns:a="http://schemas.openxmlformats.org/drawingml/2006/main" noGrp="1"/>
-          </p:cNvSpPr>
-          <p:nvPr/>
-        </p:nvSpPr>
-        <p:spPr>
-          <a:xfrm xmlns:a="http://schemas.openxmlformats.org/drawingml/2006/main">
-            <a:off x="8305800" y="2838450"/>
-            <a:ext cx="1485900" cy="457200"/>
-          </a:xfrm>
-          <a:prstGeom xmlns:a="http://schemas.openxmlformats.org/drawingml/2006/main" prst="rect">
-            <a:avLst/>
-          </a:prstGeom>
-          <a:noFill xmlns:a="http://schemas.openxmlformats.org/drawingml/2006/main"/>
-          <a:ln xmlns:a="http://schemas.openxmlformats.org/drawingml/2006/main" w="0">
-            <a:noFill/>
-            <a:prstDash val="solid"/>
-          </a:ln>
-        </p:spPr>
-        <p:txBody>
-          <a:bodyPr xmlns:a="http://schemas.openxmlformats.org/drawingml/2006/main" wrap="square" lIns="0" tIns="0" rIns="0" bIns="0" anchor="ctr">
-            <a:noAutofit/>
-          </a:bodyPr>
-          <a:lstStyle xmlns:a="http://schemas.openxmlformats.org/drawingml/2006/main"/>
-          <a:p xmlns:a="http://schemas.openxmlformats.org/drawingml/2006/main">
-            <a:pPr algn="ctr">
-              <a:lnSpc>
-                <a:spcPct val="100000"/>
-              </a:lnSpc>
-              <a:buNone/>
-              <a:defRPr sz="1275" b="1">
-                <a:solidFill>
-                  <a:srgbClr val="FFFFFF"/>
-                </a:solidFill>
-                <a:latin typeface="Calibri"/>
-                <a:ea typeface="Calibri"/>
-                <a:cs typeface="Calibri"/>
-              </a:defRPr>
-            </a:pPr>
-            <a:r>
-              <a:rPr sz="1800" b="1">
-                <a:solidFill>
-                  <a:srgbClr val="FFFFFF"/>
-                </a:solidFill>
-                <a:latin typeface="Calibri"/>
-                <a:ea typeface="Calibri"/>
-                <a:cs typeface="Calibri"/>
-              </a:rPr>
-              <a:t>status</a:t>
-            </a:r>
-          </a:p>
-        </p:txBody>
-      </p:sp>
-      <p:sp>
-        <p:nvSpPr>
-          <p:cNvPr id="10" name="">
-            <a:extLst xmlns:a="http://schemas.openxmlformats.org/drawingml/2006/main">
-              <a:ext uri="{FF2B5EF4-FFF2-40B4-BE49-F238E27FC236}">
-                <a16:creationId xmlns:a16="http://schemas.microsoft.com/office/drawing/2014/main" id="{F9A9A56C-9DB1-49FF-8E87-2C6B8DB8CE93}"/>
-              </a:ext>
-            </a:extLst>
-          </p:cNvPr>
-          <p:cNvSpPr>
-            <a:spLocks xmlns:a="http://schemas.openxmlformats.org/drawingml/2006/main" noGrp="1"/>
-          </p:cNvSpPr>
-          <p:nvPr/>
-        </p:nvSpPr>
-        <p:spPr>
-          <a:xfrm xmlns:a="http://schemas.openxmlformats.org/drawingml/2006/main">
-            <a:off x="9944100" y="2743200"/>
-            <a:ext cx="1066800" cy="647700"/>
-          </a:xfrm>
-          <a:prstGeom xmlns:a="http://schemas.openxmlformats.org/drawingml/2006/main" prst="roundRect">
-            <a:avLst>
-              <a:gd name="adj" fmla="val 5882"/>
-            </a:avLst>
-          </a:prstGeom>
-          <a:solidFill xmlns:a="http://schemas.openxmlformats.org/drawingml/2006/main">
-            <a:srgbClr val="F07D00"/>
-          </a:solidFill>
-          <a:ln xmlns:a="http://schemas.openxmlformats.org/drawingml/2006/main" w="9525">
-            <a:solidFill>
-              <a:srgbClr val="FFFFFF"/>
-            </a:solidFill>
-            <a:prstDash val="solid"/>
-          </a:ln>
-        </p:spPr>
-      </p:sp>
-      <p:sp>
-        <p:nvSpPr>
-          <p:cNvPr id="11" name="">
-            <a:extLst xmlns:a="http://schemas.openxmlformats.org/drawingml/2006/main">
-              <a:ext uri="{FF2B5EF4-FFF2-40B4-BE49-F238E27FC236}">
-                <a16:creationId xmlns:a16="http://schemas.microsoft.com/office/drawing/2014/main" id="{D9D4F50D-12C3-4331-801A-91C1EC1A4D30}"/>
-              </a:ext>
-            </a:extLst>
-          </p:cNvPr>
-          <p:cNvSpPr>
-            <a:spLocks xmlns:a="http://schemas.openxmlformats.org/drawingml/2006/main" noGrp="1"/>
-          </p:cNvSpPr>
-          <p:nvPr/>
-        </p:nvSpPr>
-        <p:spPr>
-          <a:xfrm xmlns:a="http://schemas.openxmlformats.org/drawingml/2006/main">
-            <a:off x="10039350" y="2838450"/>
-            <a:ext cx="876300" cy="457200"/>
-          </a:xfrm>
-          <a:prstGeom xmlns:a="http://schemas.openxmlformats.org/drawingml/2006/main" prst="rect">
-            <a:avLst/>
-          </a:prstGeom>
-          <a:noFill xmlns:a="http://schemas.openxmlformats.org/drawingml/2006/main"/>
-          <a:ln xmlns:a="http://schemas.openxmlformats.org/drawingml/2006/main" w="0">
-            <a:noFill/>
-            <a:prstDash val="solid"/>
-          </a:ln>
-        </p:spPr>
-        <p:txBody>
-          <a:bodyPr xmlns:a="http://schemas.openxmlformats.org/drawingml/2006/main" wrap="square" lIns="0" tIns="0" rIns="0" bIns="0" anchor="ctr">
-            <a:noAutofit/>
-          </a:bodyPr>
-          <a:lstStyle xmlns:a="http://schemas.openxmlformats.org/drawingml/2006/main"/>
-          <a:p xmlns:a="http://schemas.openxmlformats.org/drawingml/2006/main">
-            <a:pPr algn="ctr">
-              <a:lnSpc>
-                <a:spcPct val="100000"/>
-              </a:lnSpc>
-              <a:buNone/>
-              <a:defRPr sz="1275" b="1">
-                <a:solidFill>
-                  <a:srgbClr val="FFFFFF"/>
-                </a:solidFill>
-                <a:latin typeface="Calibri"/>
-                <a:ea typeface="Calibri"/>
-                <a:cs typeface="Calibri"/>
-              </a:defRPr>
-            </a:pPr>
-            <a:r>
-              <a:rPr sz="1800" b="1">
-                <a:solidFill>
-                  <a:srgbClr val="FFFFFF"/>
-                </a:solidFill>
-                <a:latin typeface="Calibri"/>
-                <a:ea typeface="Calibri"/>
-                <a:cs typeface="Calibri"/>
-              </a:rPr>
-              <a:t>hash</a:t>
-            </a:r>
-          </a:p>
-        </p:txBody>
-      </p:sp>
-      <p:sp>
-        <p:nvSpPr>
-          <p:cNvPr id="12" name="">
-            <a:extLst xmlns:a="http://schemas.openxmlformats.org/drawingml/2006/main">
-              <a:ext uri="{FF2B5EF4-FFF2-40B4-BE49-F238E27FC236}">
-                <a16:creationId xmlns:a16="http://schemas.microsoft.com/office/drawing/2014/main" id="{194D2954-A4C1-482E-AAB1-42DAC0BB1957}"/>
-              </a:ext>
-            </a:extLst>
-          </p:cNvPr>
-          <p:cNvSpPr>
-            <a:spLocks xmlns:a="http://schemas.openxmlformats.org/drawingml/2006/main" noGrp="1"/>
-          </p:cNvSpPr>
-          <p:nvPr/>
-        </p:nvSpPr>
-        <p:spPr>
-          <a:xfrm xmlns:a="http://schemas.openxmlformats.org/drawingml/2006/main">
-            <a:off x="12001500" y="2800350"/>
-            <a:ext cx="2190750" cy="361950"/>
-          </a:xfrm>
-          <a:prstGeom xmlns:a="http://schemas.openxmlformats.org/drawingml/2006/main" prst="rect">
-            <a:avLst/>
-          </a:prstGeom>
-          <a:noFill xmlns:a="http://schemas.openxmlformats.org/drawingml/2006/main"/>
-          <a:ln xmlns:a="http://schemas.openxmlformats.org/drawingml/2006/main" w="0">
-            <a:noFill/>
-            <a:prstDash val="solid"/>
-          </a:ln>
-        </p:spPr>
-        <p:txBody>
-          <a:bodyPr xmlns:a="http://schemas.openxmlformats.org/drawingml/2006/main" wrap="square" lIns="0" tIns="0" rIns="0" bIns="0" anchor="ctr">
-            <a:noAutofit/>
-          </a:bodyPr>
-          <a:lstStyle xmlns:a="http://schemas.openxmlformats.org/drawingml/2006/main"/>
-          <a:p xmlns:a="http://schemas.openxmlformats.org/drawingml/2006/main">
-            <a:pPr algn="r">
-              <a:lnSpc>
-                <a:spcPct val="100000"/>
-              </a:lnSpc>
-              <a:buNone/>
-              <a:defRPr sz="1350" b="1">
-                <a:solidFill>
-                  <a:srgbClr val="F07D00"/>
-                </a:solidFill>
-                <a:latin typeface="Calibri"/>
-                <a:ea typeface="Calibri"/>
-                <a:cs typeface="Calibri"/>
-              </a:defRPr>
-            </a:pPr>
-            <a:r>
-              <a:rPr sz="1800" b="1">
-                <a:solidFill>
-                  <a:srgbClr val="F07D00"/>
-                </a:solidFill>
-                <a:latin typeface="Calibri"/>
-                <a:ea typeface="Calibri"/>
-                <a:cs typeface="Calibri"/>
-              </a:rPr>
-              <a:t>VERSIONED</a:t>
-            </a:r>
-          </a:p>
-        </p:txBody>
-      </p:sp>
-      <p:sp>
-        <p:nvSpPr>
-          <p:cNvPr id="13" name="">
-            <a:extLst xmlns:a="http://schemas.openxmlformats.org/drawingml/2006/main">
-              <a:ext uri="{FF2B5EF4-FFF2-40B4-BE49-F238E27FC236}">
-                <a16:creationId xmlns:a16="http://schemas.microsoft.com/office/drawing/2014/main" id="{B3122776-3C69-478E-8B1D-4E859ACC8602}"/>
-              </a:ext>
-            </a:extLst>
-          </p:cNvPr>
-          <p:cNvSpPr>
-            <a:spLocks xmlns:a="http://schemas.openxmlformats.org/drawingml/2006/main" noGrp="1"/>
-          </p:cNvSpPr>
-          <p:nvPr/>
-        </p:nvSpPr>
-        <p:spPr>
-          <a:xfrm xmlns:a="http://schemas.openxmlformats.org/drawingml/2006/main">
-            <a:off x="1028700" y="4267200"/>
-            <a:ext cx="2476500" cy="361950"/>
-          </a:xfrm>
-          <a:prstGeom xmlns:a="http://schemas.openxmlformats.org/drawingml/2006/main" prst="rect">
-            <a:avLst/>
-          </a:prstGeom>
-          <a:noFill xmlns:a="http://schemas.openxmlformats.org/drawingml/2006/main"/>
-          <a:ln xmlns:a="http://schemas.openxmlformats.org/drawingml/2006/main" w="0">
-            <a:noFill/>
-            <a:prstDash val="solid"/>
-          </a:ln>
-        </p:spPr>
-        <p:txBody>
-          <a:bodyPr xmlns:a="http://schemas.openxmlformats.org/drawingml/2006/main" wrap="square" lIns="0" tIns="0" rIns="0" bIns="0" anchor="ctr">
-            <a:noAutofit/>
-          </a:bodyPr>
-          <a:lstStyle xmlns:a="http://schemas.openxmlformats.org/drawingml/2006/main"/>
-          <a:p xmlns:a="http://schemas.openxmlformats.org/drawingml/2006/main">
-            <a:pPr algn="l">
-              <a:lnSpc>
-                <a:spcPct val="100000"/>
-              </a:lnSpc>
-              <a:buNone/>
-              <a:defRPr sz="1350" b="1">
-                <a:solidFill>
-                  <a:srgbClr val="00A2EB"/>
-                </a:solidFill>
-                <a:latin typeface="Calibri"/>
-                <a:ea typeface="Calibri"/>
-                <a:cs typeface="Calibri"/>
-              </a:defRPr>
-            </a:pPr>
-            <a:r>
-              <a:rPr sz="1800" b="1">
-                <a:solidFill>
-                  <a:srgbClr val="00A2EB"/>
-                </a:solidFill>
-                <a:latin typeface="Calibri"/>
-                <a:ea typeface="Calibri"/>
-                <a:cs typeface="Calibri"/>
-              </a:rPr>
-              <a:t>EXAM</a:t>
-            </a:r>
-          </a:p>
-        </p:txBody>
-      </p:sp>
-      <p:sp>
-        <p:nvSpPr>
-          <p:cNvPr id="14" name="">
-            <a:extLst xmlns:a="http://schemas.openxmlformats.org/drawingml/2006/main">
-              <a:ext uri="{FF2B5EF4-FFF2-40B4-BE49-F238E27FC236}">
-                <a16:creationId xmlns:a16="http://schemas.microsoft.com/office/drawing/2014/main" id="{0020E4D2-1B72-432A-AD48-61D3EF9BCCA8}"/>
-              </a:ext>
-            </a:extLst>
-          </p:cNvPr>
-          <p:cNvSpPr>
-            <a:spLocks xmlns:a="http://schemas.openxmlformats.org/drawingml/2006/main" noGrp="1"/>
-          </p:cNvSpPr>
-          <p:nvPr/>
-        </p:nvSpPr>
-        <p:spPr>
-          <a:xfrm xmlns:a="http://schemas.openxmlformats.org/drawingml/2006/main">
-            <a:off x="3714750" y="4210050"/>
-            <a:ext cx="3143250" cy="647700"/>
-          </a:xfrm>
-          <a:prstGeom xmlns:a="http://schemas.openxmlformats.org/drawingml/2006/main" prst="roundRect">
-            <a:avLst>
-              <a:gd name="adj" fmla="val 5882"/>
-            </a:avLst>
-          </a:prstGeom>
-          <a:solidFill xmlns:a="http://schemas.openxmlformats.org/drawingml/2006/main">
-            <a:srgbClr val="1F40CB"/>
-          </a:solidFill>
-          <a:ln xmlns:a="http://schemas.openxmlformats.org/drawingml/2006/main" w="9525">
-            <a:solidFill>
-              <a:srgbClr val="FFFFFF"/>
-            </a:solidFill>
-            <a:prstDash val="solid"/>
-          </a:ln>
-        </p:spPr>
-      </p:sp>
-      <p:sp>
-        <p:nvSpPr>
-          <p:cNvPr id="15" name="">
-            <a:extLst xmlns:a="http://schemas.openxmlformats.org/drawingml/2006/main">
-              <a:ext uri="{FF2B5EF4-FFF2-40B4-BE49-F238E27FC236}">
-                <a16:creationId xmlns:a16="http://schemas.microsoft.com/office/drawing/2014/main" id="{499905A1-C4D3-46AB-A516-DCFB88A03736}"/>
-              </a:ext>
-            </a:extLst>
-          </p:cNvPr>
-          <p:cNvSpPr>
-            <a:spLocks xmlns:a="http://schemas.openxmlformats.org/drawingml/2006/main" noGrp="1"/>
-          </p:cNvSpPr>
-          <p:nvPr/>
-        </p:nvSpPr>
-        <p:spPr>
-          <a:xfrm xmlns:a="http://schemas.openxmlformats.org/drawingml/2006/main">
-            <a:off x="3810000" y="4305300"/>
-            <a:ext cx="2952750" cy="457200"/>
-          </a:xfrm>
-          <a:prstGeom xmlns:a="http://schemas.openxmlformats.org/drawingml/2006/main" prst="rect">
-            <a:avLst/>
-          </a:prstGeom>
-          <a:noFill xmlns:a="http://schemas.openxmlformats.org/drawingml/2006/main"/>
-          <a:ln xmlns:a="http://schemas.openxmlformats.org/drawingml/2006/main" w="0">
-            <a:noFill/>
-            <a:prstDash val="solid"/>
-          </a:ln>
-        </p:spPr>
-        <p:txBody>
-          <a:bodyPr xmlns:a="http://schemas.openxmlformats.org/drawingml/2006/main" wrap="square" lIns="0" tIns="0" rIns="0" bIns="0" anchor="ctr">
-            <a:noAutofit/>
-          </a:bodyPr>
-          <a:lstStyle xmlns:a="http://schemas.openxmlformats.org/drawingml/2006/main"/>
-          <a:p xmlns:a="http://schemas.openxmlformats.org/drawingml/2006/main">
-            <a:pPr algn="ctr">
-              <a:lnSpc>
-                <a:spcPct val="100000"/>
-              </a:lnSpc>
-              <a:buNone/>
-              <a:defRPr sz="1275" b="1">
-                <a:solidFill>
-                  <a:srgbClr val="FFFFFF"/>
-                </a:solidFill>
-                <a:latin typeface="Calibri"/>
-                <a:ea typeface="Calibri"/>
-                <a:cs typeface="Calibri"/>
-              </a:defRPr>
-            </a:pPr>
-            <a:r>
-              <a:rPr sz="1800" b="1">
-                <a:solidFill>
-                  <a:srgbClr val="FFFFFF"/>
-                </a:solidFill>
-                <a:latin typeface="Calibri"/>
-                <a:ea typeface="Calibri"/>
-                <a:cs typeface="Calibri"/>
-              </a:rPr>
-              <a:t>mission + status</a:t>
-            </a:r>
-          </a:p>
-        </p:txBody>
-      </p:sp>
-      <p:sp>
-        <p:nvSpPr>
-          <p:cNvPr id="16" name="">
-            <a:extLst xmlns:a="http://schemas.openxmlformats.org/drawingml/2006/main">
-              <a:ext uri="{FF2B5EF4-FFF2-40B4-BE49-F238E27FC236}">
-                <a16:creationId xmlns:a16="http://schemas.microsoft.com/office/drawing/2014/main" id="{7C2240E6-0102-4064-B038-AB12EDED68BD}"/>
-              </a:ext>
-            </a:extLst>
-          </p:cNvPr>
-          <p:cNvSpPr>
-            <a:spLocks xmlns:a="http://schemas.openxmlformats.org/drawingml/2006/main" noGrp="1"/>
-          </p:cNvSpPr>
-          <p:nvPr/>
-        </p:nvSpPr>
-        <p:spPr>
-          <a:xfrm xmlns:a="http://schemas.openxmlformats.org/drawingml/2006/main">
-            <a:off x="6915150" y="4210050"/>
-            <a:ext cx="2952750" cy="647700"/>
-          </a:xfrm>
-          <a:prstGeom xmlns:a="http://schemas.openxmlformats.org/drawingml/2006/main" prst="roundRect">
-            <a:avLst>
-              <a:gd name="adj" fmla="val 5882"/>
-            </a:avLst>
-          </a:prstGeom>
-          <a:solidFill xmlns:a="http://schemas.openxmlformats.org/drawingml/2006/main">
-            <a:srgbClr val="00A2EB"/>
-          </a:solidFill>
-          <a:ln xmlns:a="http://schemas.openxmlformats.org/drawingml/2006/main" w="9525">
-            <a:solidFill>
-              <a:srgbClr val="FFFFFF"/>
-            </a:solidFill>
-            <a:prstDash val="solid"/>
-          </a:ln>
-        </p:spPr>
-      </p:sp>
-      <p:sp>
-        <p:nvSpPr>
-          <p:cNvPr id="17" name="">
-            <a:extLst xmlns:a="http://schemas.openxmlformats.org/drawingml/2006/main">
-              <a:ext uri="{FF2B5EF4-FFF2-40B4-BE49-F238E27FC236}">
-                <a16:creationId xmlns:a16="http://schemas.microsoft.com/office/drawing/2014/main" id="{7ECBA82F-0F85-40C1-9BE1-6E7847AE3FF4}"/>
-              </a:ext>
-            </a:extLst>
-          </p:cNvPr>
-          <p:cNvSpPr>
-            <a:spLocks xmlns:a="http://schemas.openxmlformats.org/drawingml/2006/main" noGrp="1"/>
-          </p:cNvSpPr>
-          <p:nvPr/>
-        </p:nvSpPr>
-        <p:spPr>
-          <a:xfrm xmlns:a="http://schemas.openxmlformats.org/drawingml/2006/main">
-            <a:off x="7010400" y="4305300"/>
-            <a:ext cx="2762250" cy="457200"/>
-          </a:xfrm>
-          <a:prstGeom xmlns:a="http://schemas.openxmlformats.org/drawingml/2006/main" prst="rect">
-            <a:avLst/>
-          </a:prstGeom>
-          <a:noFill xmlns:a="http://schemas.openxmlformats.org/drawingml/2006/main"/>
-          <a:ln xmlns:a="http://schemas.openxmlformats.org/drawingml/2006/main" w="0">
-            <a:noFill/>
-            <a:prstDash val="solid"/>
-          </a:ln>
-        </p:spPr>
-        <p:txBody>
-          <a:bodyPr xmlns:a="http://schemas.openxmlformats.org/drawingml/2006/main" wrap="square" lIns="0" tIns="0" rIns="0" bIns="0" anchor="ctr">
-            <a:noAutofit/>
-          </a:bodyPr>
-          <a:lstStyle xmlns:a="http://schemas.openxmlformats.org/drawingml/2006/main"/>
-          <a:p xmlns:a="http://schemas.openxmlformats.org/drawingml/2006/main">
-            <a:pPr algn="ctr">
-              <a:lnSpc>
-                <a:spcPct val="100000"/>
-              </a:lnSpc>
-              <a:buNone/>
-              <a:defRPr sz="1275" b="1">
-                <a:solidFill>
-                  <a:srgbClr val="FFFFFF"/>
-                </a:solidFill>
-                <a:latin typeface="Calibri"/>
-                <a:ea typeface="Calibri"/>
-                <a:cs typeface="Calibri"/>
-              </a:defRPr>
-            </a:pPr>
-            <a:r>
-              <a:rPr sz="1800" b="1">
-                <a:solidFill>
-                  <a:srgbClr val="FFFFFF"/>
-                </a:solidFill>
-                <a:latin typeface="Calibri"/>
-                <a:ea typeface="Calibri"/>
-                <a:cs typeface="Calibri"/>
-              </a:rPr>
-              <a:t>calls + dependencies</a:t>
-            </a:r>
-          </a:p>
-        </p:txBody>
-      </p:sp>
-      <p:sp>
-        <p:nvSpPr>
-          <p:cNvPr id="18" name="">
-            <a:extLst xmlns:a="http://schemas.openxmlformats.org/drawingml/2006/main">
-              <a:ext uri="{FF2B5EF4-FFF2-40B4-BE49-F238E27FC236}">
-                <a16:creationId xmlns:a16="http://schemas.microsoft.com/office/drawing/2014/main" id="{6BD7C7D4-5A09-43DC-B381-56DF305B4223}"/>
-              </a:ext>
-            </a:extLst>
-          </p:cNvPr>
-          <p:cNvSpPr>
-            <a:spLocks xmlns:a="http://schemas.openxmlformats.org/drawingml/2006/main" noGrp="1"/>
-          </p:cNvSpPr>
-          <p:nvPr/>
-        </p:nvSpPr>
-        <p:spPr>
-          <a:xfrm xmlns:a="http://schemas.openxmlformats.org/drawingml/2006/main">
-            <a:off x="9925050" y="4210050"/>
-            <a:ext cx="2000250" cy="647700"/>
-          </a:xfrm>
-          <a:prstGeom xmlns:a="http://schemas.openxmlformats.org/drawingml/2006/main" prst="roundRect">
-            <a:avLst>
-              <a:gd name="adj" fmla="val 5882"/>
-            </a:avLst>
-          </a:prstGeom>
-          <a:solidFill xmlns:a="http://schemas.openxmlformats.org/drawingml/2006/main">
-            <a:srgbClr val="1F40CB"/>
-          </a:solidFill>
-          <a:ln xmlns:a="http://schemas.openxmlformats.org/drawingml/2006/main" w="9525">
-            <a:solidFill>
-              <a:srgbClr val="FFFFFF"/>
-            </a:solidFill>
-            <a:prstDash val="solid"/>
-          </a:ln>
-        </p:spPr>
-      </p:sp>
-      <p:sp>
-        <p:nvSpPr>
-          <p:cNvPr id="19" name="">
-            <a:extLst xmlns:a="http://schemas.openxmlformats.org/drawingml/2006/main">
-              <a:ext uri="{FF2B5EF4-FFF2-40B4-BE49-F238E27FC236}">
-                <a16:creationId xmlns:a16="http://schemas.microsoft.com/office/drawing/2014/main" id="{9A2F20F1-CF35-4789-AC4A-62229AB1DDA9}"/>
-              </a:ext>
-            </a:extLst>
-          </p:cNvPr>
-          <p:cNvSpPr>
-            <a:spLocks xmlns:a="http://schemas.openxmlformats.org/drawingml/2006/main" noGrp="1"/>
-          </p:cNvSpPr>
-          <p:nvPr/>
-        </p:nvSpPr>
-        <p:spPr>
-          <a:xfrm xmlns:a="http://schemas.openxmlformats.org/drawingml/2006/main">
-            <a:off x="10020300" y="4305300"/>
-            <a:ext cx="1809750" cy="457200"/>
-          </a:xfrm>
-          <a:prstGeom xmlns:a="http://schemas.openxmlformats.org/drawingml/2006/main" prst="rect">
-            <a:avLst/>
-          </a:prstGeom>
-          <a:noFill xmlns:a="http://schemas.openxmlformats.org/drawingml/2006/main"/>
-          <a:ln xmlns:a="http://schemas.openxmlformats.org/drawingml/2006/main" w="0">
-            <a:noFill/>
-            <a:prstDash val="solid"/>
-          </a:ln>
-        </p:spPr>
-        <p:txBody>
-          <a:bodyPr xmlns:a="http://schemas.openxmlformats.org/drawingml/2006/main" wrap="square" lIns="0" tIns="0" rIns="0" bIns="0" anchor="ctr">
-            <a:noAutofit/>
-          </a:bodyPr>
-          <a:lstStyle xmlns:a="http://schemas.openxmlformats.org/drawingml/2006/main"/>
-          <a:p xmlns:a="http://schemas.openxmlformats.org/drawingml/2006/main">
-            <a:pPr algn="ctr">
-              <a:lnSpc>
-                <a:spcPct val="100000"/>
-              </a:lnSpc>
-              <a:buNone/>
-              <a:defRPr sz="1275" b="1">
-                <a:solidFill>
-                  <a:srgbClr val="FFFFFF"/>
-                </a:solidFill>
-                <a:latin typeface="Calibri"/>
-                <a:ea typeface="Calibri"/>
-                <a:cs typeface="Calibri"/>
-              </a:defRPr>
-            </a:pPr>
-            <a:r>
-              <a:rPr sz="1800" b="1">
-                <a:solidFill>
-                  <a:srgbClr val="FFFFFF"/>
-                </a:solidFill>
-                <a:latin typeface="Calibri"/>
-                <a:ea typeface="Calibri"/>
-                <a:cs typeface="Calibri"/>
-              </a:rPr>
-              <a:t>evidence</a:t>
-            </a:r>
-          </a:p>
-        </p:txBody>
-      </p:sp>
-      <p:sp>
-        <p:nvSpPr>
-          <p:cNvPr id="20" name="">
-            <a:extLst xmlns:a="http://schemas.openxmlformats.org/drawingml/2006/main">
-              <a:ext uri="{FF2B5EF4-FFF2-40B4-BE49-F238E27FC236}">
-                <a16:creationId xmlns:a16="http://schemas.microsoft.com/office/drawing/2014/main" id="{E58CD3E4-48E0-4421-8A8E-9A03948E1061}"/>
-              </a:ext>
-            </a:extLst>
-          </p:cNvPr>
-          <p:cNvSpPr>
-            <a:spLocks xmlns:a="http://schemas.openxmlformats.org/drawingml/2006/main" noGrp="1"/>
-          </p:cNvSpPr>
-          <p:nvPr/>
-        </p:nvSpPr>
-        <p:spPr>
-          <a:xfrm xmlns:a="http://schemas.openxmlformats.org/drawingml/2006/main">
-            <a:off x="12001500" y="4267200"/>
-            <a:ext cx="2190750" cy="361950"/>
-          </a:xfrm>
-          <a:prstGeom xmlns:a="http://schemas.openxmlformats.org/drawingml/2006/main" prst="rect">
-            <a:avLst/>
-          </a:prstGeom>
-          <a:noFill xmlns:a="http://schemas.openxmlformats.org/drawingml/2006/main"/>
-          <a:ln xmlns:a="http://schemas.openxmlformats.org/drawingml/2006/main" w="0">
-            <a:noFill/>
-            <a:prstDash val="solid"/>
-          </a:ln>
-        </p:spPr>
-        <p:txBody>
-          <a:bodyPr xmlns:a="http://schemas.openxmlformats.org/drawingml/2006/main" wrap="square" lIns="0" tIns="0" rIns="0" bIns="0" anchor="ctr">
-            <a:noAutofit/>
-          </a:bodyPr>
-          <a:lstStyle xmlns:a="http://schemas.openxmlformats.org/drawingml/2006/main"/>
-          <a:p xmlns:a="http://schemas.openxmlformats.org/drawingml/2006/main">
-            <a:pPr algn="r">
-              <a:lnSpc>
-                <a:spcPct val="100000"/>
-              </a:lnSpc>
-              <a:buNone/>
-              <a:defRPr sz="1350" b="1">
-                <a:solidFill>
-                  <a:srgbClr val="00A2EB"/>
-                </a:solidFill>
-                <a:latin typeface="Calibri"/>
-                <a:ea typeface="Calibri"/>
-                <a:cs typeface="Calibri"/>
-              </a:defRPr>
-            </a:pPr>
-            <a:r>
-              <a:rPr sz="1800" b="1">
-                <a:solidFill>
-                  <a:srgbClr val="00A2EB"/>
-                </a:solidFill>
-                <a:latin typeface="Calibri"/>
-                <a:ea typeface="Calibri"/>
-                <a:cs typeface="Calibri"/>
-              </a:rPr>
-              <a:t>EXPLICIT</a:t>
-            </a:r>
-          </a:p>
-        </p:txBody>
-      </p:sp>
-      <p:sp>
-        <p:nvSpPr>
-          <p:cNvPr id="21" name="">
-            <a:extLst xmlns:a="http://schemas.openxmlformats.org/drawingml/2006/main">
-              <a:ext uri="{FF2B5EF4-FFF2-40B4-BE49-F238E27FC236}">
-                <a16:creationId xmlns:a16="http://schemas.microsoft.com/office/drawing/2014/main" id="{DA8DF2BD-542C-4821-AB60-F914C2D7D54D}"/>
-              </a:ext>
-            </a:extLst>
-          </p:cNvPr>
-          <p:cNvSpPr>
-            <a:spLocks xmlns:a="http://schemas.openxmlformats.org/drawingml/2006/main" noGrp="1"/>
-          </p:cNvSpPr>
-          <p:nvPr/>
-        </p:nvSpPr>
-        <p:spPr>
-          <a:xfrm xmlns:a="http://schemas.openxmlformats.org/drawingml/2006/main">
-            <a:off x="1028700" y="5734050"/>
-            <a:ext cx="2476500" cy="361950"/>
-          </a:xfrm>
-          <a:prstGeom xmlns:a="http://schemas.openxmlformats.org/drawingml/2006/main" prst="rect">
-            <a:avLst/>
-          </a:prstGeom>
-          <a:noFill xmlns:a="http://schemas.openxmlformats.org/drawingml/2006/main"/>
-          <a:ln xmlns:a="http://schemas.openxmlformats.org/drawingml/2006/main" w="0">
-            <a:noFill/>
-            <a:prstDash val="solid"/>
-          </a:ln>
-        </p:spPr>
-        <p:txBody>
-          <a:bodyPr xmlns:a="http://schemas.openxmlformats.org/drawingml/2006/main" wrap="square" lIns="0" tIns="0" rIns="0" bIns="0" anchor="ctr">
-            <a:noAutofit/>
-          </a:bodyPr>
-          <a:lstStyle xmlns:a="http://schemas.openxmlformats.org/drawingml/2006/main"/>
-          <a:p xmlns:a="http://schemas.openxmlformats.org/drawingml/2006/main">
-            <a:pPr algn="l">
-              <a:lnSpc>
-                <a:spcPct val="100000"/>
-              </a:lnSpc>
-              <a:buNone/>
-              <a:defRPr sz="1350" b="1">
-                <a:solidFill>
-                  <a:srgbClr val="2E8B57"/>
-                </a:solidFill>
-                <a:latin typeface="Calibri"/>
-                <a:ea typeface="Calibri"/>
-                <a:cs typeface="Calibri"/>
-              </a:defRPr>
-            </a:pPr>
-            <a:r>
-              <a:rPr sz="1800" b="1">
-                <a:solidFill>
-                  <a:srgbClr val="2E8B57"/>
-                </a:solidFill>
-                <a:latin typeface="Calibri"/>
-                <a:ea typeface="Calibri"/>
-                <a:cs typeface="Calibri"/>
-              </a:rPr>
-              <a:t>BUDGET</a:t>
-            </a:r>
-          </a:p>
-        </p:txBody>
-      </p:sp>
-      <p:sp>
-        <p:nvSpPr>
-          <p:cNvPr id="22" name="">
-            <a:extLst xmlns:a="http://schemas.openxmlformats.org/drawingml/2006/main">
-              <a:ext uri="{FF2B5EF4-FFF2-40B4-BE49-F238E27FC236}">
-                <a16:creationId xmlns:a16="http://schemas.microsoft.com/office/drawing/2014/main" id="{80D1C47B-0B67-4AFB-8BDC-2F9D29D00182}"/>
-              </a:ext>
-            </a:extLst>
-          </p:cNvPr>
-          <p:cNvSpPr>
-            <a:spLocks xmlns:a="http://schemas.openxmlformats.org/drawingml/2006/main" noGrp="1"/>
-          </p:cNvSpPr>
-          <p:nvPr/>
-        </p:nvSpPr>
-        <p:spPr>
-          <a:xfrm xmlns:a="http://schemas.openxmlformats.org/drawingml/2006/main">
-            <a:off x="3714750" y="5676900"/>
-            <a:ext cx="3314700" cy="647700"/>
-          </a:xfrm>
-          <a:prstGeom xmlns:a="http://schemas.openxmlformats.org/drawingml/2006/main" prst="roundRect">
-            <a:avLst>
-              <a:gd name="adj" fmla="val 5882"/>
-            </a:avLst>
-          </a:prstGeom>
-          <a:solidFill xmlns:a="http://schemas.openxmlformats.org/drawingml/2006/main">
-            <a:srgbClr val="1F40CB"/>
-          </a:solidFill>
-          <a:ln xmlns:a="http://schemas.openxmlformats.org/drawingml/2006/main" w="9525">
-            <a:solidFill>
-              <a:srgbClr val="FFFFFF"/>
-            </a:solidFill>
-            <a:prstDash val="solid"/>
-          </a:ln>
-        </p:spPr>
-      </p:sp>
-      <p:sp>
-        <p:nvSpPr>
-          <p:cNvPr id="23" name="">
-            <a:extLst xmlns:a="http://schemas.openxmlformats.org/drawingml/2006/main">
-              <a:ext uri="{FF2B5EF4-FFF2-40B4-BE49-F238E27FC236}">
-                <a16:creationId xmlns:a16="http://schemas.microsoft.com/office/drawing/2014/main" id="{0E2F7603-BBFF-4854-9F2D-F8FF1E3B19D5}"/>
-              </a:ext>
-            </a:extLst>
-          </p:cNvPr>
-          <p:cNvSpPr>
-            <a:spLocks xmlns:a="http://schemas.openxmlformats.org/drawingml/2006/main" noGrp="1"/>
-          </p:cNvSpPr>
-          <p:nvPr/>
-        </p:nvSpPr>
-        <p:spPr>
-          <a:xfrm xmlns:a="http://schemas.openxmlformats.org/drawingml/2006/main">
-            <a:off x="3810000" y="5772150"/>
-            <a:ext cx="3124200" cy="457200"/>
-          </a:xfrm>
-          <a:prstGeom xmlns:a="http://schemas.openxmlformats.org/drawingml/2006/main" prst="rect">
-            <a:avLst/>
-          </a:prstGeom>
-          <a:noFill xmlns:a="http://schemas.openxmlformats.org/drawingml/2006/main"/>
-          <a:ln xmlns:a="http://schemas.openxmlformats.org/drawingml/2006/main" w="0">
-            <a:noFill/>
-            <a:prstDash val="solid"/>
-          </a:ln>
-        </p:spPr>
-        <p:txBody>
-          <a:bodyPr xmlns:a="http://schemas.openxmlformats.org/drawingml/2006/main" wrap="square" lIns="0" tIns="0" rIns="0" bIns="0" anchor="ctr">
-            <a:noAutofit/>
-          </a:bodyPr>
-          <a:lstStyle xmlns:a="http://schemas.openxmlformats.org/drawingml/2006/main"/>
-          <a:p xmlns:a="http://schemas.openxmlformats.org/drawingml/2006/main">
-            <a:pPr algn="ctr">
-              <a:lnSpc>
-                <a:spcPct val="100000"/>
-              </a:lnSpc>
-              <a:buNone/>
-              <a:defRPr sz="1275" b="1">
-                <a:solidFill>
-                  <a:srgbClr val="FFFFFF"/>
-                </a:solidFill>
-                <a:latin typeface="Calibri"/>
-                <a:ea typeface="Calibri"/>
-                <a:cs typeface="Calibri"/>
-              </a:defRPr>
-            </a:pPr>
-            <a:r>
-              <a:rPr sz="1800" b="1">
-                <a:solidFill>
-                  <a:srgbClr val="FFFFFF"/>
-                </a:solidFill>
-                <a:latin typeface="Calibri"/>
-                <a:ea typeface="Calibri"/>
-                <a:cs typeface="Calibri"/>
-              </a:rPr>
-              <a:t>max_tool_calls: 5</a:t>
-            </a:r>
-          </a:p>
-        </p:txBody>
-      </p:sp>
-      <p:sp>
-        <p:nvSpPr>
-          <p:cNvPr id="24" name="">
-            <a:extLst xmlns:a="http://schemas.openxmlformats.org/drawingml/2006/main">
-              <a:ext uri="{FF2B5EF4-FFF2-40B4-BE49-F238E27FC236}">
-                <a16:creationId xmlns:a16="http://schemas.microsoft.com/office/drawing/2014/main" id="{518F6C86-F0E1-4812-B3DD-797EA0ED5A4E}"/>
-              </a:ext>
-            </a:extLst>
-          </p:cNvPr>
-          <p:cNvSpPr>
-            <a:spLocks xmlns:a="http://schemas.openxmlformats.org/drawingml/2006/main" noGrp="1"/>
-          </p:cNvSpPr>
-          <p:nvPr/>
-        </p:nvSpPr>
-        <p:spPr>
-          <a:xfrm xmlns:a="http://schemas.openxmlformats.org/drawingml/2006/main">
-            <a:off x="7086600" y="5676900"/>
-            <a:ext cx="4781550" cy="647700"/>
-          </a:xfrm>
-          <a:prstGeom xmlns:a="http://schemas.openxmlformats.org/drawingml/2006/main" prst="roundRect">
-            <a:avLst>
-              <a:gd name="adj" fmla="val 5882"/>
-            </a:avLst>
-          </a:prstGeom>
-          <a:solidFill xmlns:a="http://schemas.openxmlformats.org/drawingml/2006/main">
-            <a:srgbClr val="2E8B57"/>
-          </a:solidFill>
-          <a:ln xmlns:a="http://schemas.openxmlformats.org/drawingml/2006/main" w="9525">
-            <a:solidFill>
-              <a:srgbClr val="FFFFFF"/>
-            </a:solidFill>
-            <a:prstDash val="solid"/>
-          </a:ln>
-        </p:spPr>
-      </p:sp>
-      <p:sp>
-        <p:nvSpPr>
-          <p:cNvPr id="25" name="">
-            <a:extLst xmlns:a="http://schemas.openxmlformats.org/drawingml/2006/main">
-              <a:ext uri="{FF2B5EF4-FFF2-40B4-BE49-F238E27FC236}">
-                <a16:creationId xmlns:a16="http://schemas.microsoft.com/office/drawing/2014/main" id="{B9A6A990-C3AB-4ED0-A029-B6138AA54242}"/>
-              </a:ext>
-            </a:extLst>
-          </p:cNvPr>
-          <p:cNvSpPr>
-            <a:spLocks xmlns:a="http://schemas.openxmlformats.org/drawingml/2006/main" noGrp="1"/>
-          </p:cNvSpPr>
-          <p:nvPr/>
-        </p:nvSpPr>
-        <p:spPr>
-          <a:xfrm xmlns:a="http://schemas.openxmlformats.org/drawingml/2006/main">
-            <a:off x="7181850" y="5772150"/>
-            <a:ext cx="4591050" cy="457200"/>
-          </a:xfrm>
-          <a:prstGeom xmlns:a="http://schemas.openxmlformats.org/drawingml/2006/main" prst="rect">
-            <a:avLst/>
-          </a:prstGeom>
-          <a:noFill xmlns:a="http://schemas.openxmlformats.org/drawingml/2006/main"/>
-          <a:ln xmlns:a="http://schemas.openxmlformats.org/drawingml/2006/main" w="0">
-            <a:noFill/>
-            <a:prstDash val="solid"/>
-          </a:ln>
-        </p:spPr>
-        <p:txBody>
-          <a:bodyPr xmlns:a="http://schemas.openxmlformats.org/drawingml/2006/main" wrap="square" lIns="0" tIns="0" rIns="0" bIns="0" anchor="ctr">
-            <a:noAutofit/>
-          </a:bodyPr>
-          <a:lstStyle xmlns:a="http://schemas.openxmlformats.org/drawingml/2006/main"/>
-          <a:p xmlns:a="http://schemas.openxmlformats.org/drawingml/2006/main">
-            <a:pPr algn="ctr">
-              <a:lnSpc>
-                <a:spcPct val="100000"/>
-              </a:lnSpc>
-              <a:buNone/>
-              <a:defRPr sz="1275" b="1">
-                <a:solidFill>
-                  <a:srgbClr val="FFFFFF"/>
-                </a:solidFill>
-                <a:latin typeface="Calibri"/>
-                <a:ea typeface="Calibri"/>
-                <a:cs typeface="Calibri"/>
-              </a:defRPr>
-            </a:pPr>
-            <a:r>
-              <a:rPr sz="1800" b="1">
-                <a:solidFill>
-                  <a:srgbClr val="FFFFFF"/>
-                </a:solidFill>
-                <a:latin typeface="Calibri"/>
-                <a:ea typeface="Calibri"/>
-                <a:cs typeface="Calibri"/>
-              </a:rPr>
-              <a:t>expected replan: 1</a:t>
-            </a:r>
-          </a:p>
-        </p:txBody>
-      </p:sp>
-      <p:sp>
-        <p:nvSpPr>
-          <p:cNvPr id="26" name="">
-            <a:extLst xmlns:a="http://schemas.openxmlformats.org/drawingml/2006/main">
-              <a:ext uri="{FF2B5EF4-FFF2-40B4-BE49-F238E27FC236}">
-                <a16:creationId xmlns:a16="http://schemas.microsoft.com/office/drawing/2014/main" id="{24845B58-81DD-48AA-9B5B-C9CA27F8A4A0}"/>
-              </a:ext>
-            </a:extLst>
-          </p:cNvPr>
-          <p:cNvSpPr>
-            <a:spLocks xmlns:a="http://schemas.openxmlformats.org/drawingml/2006/main" noGrp="1"/>
-          </p:cNvSpPr>
-          <p:nvPr/>
-        </p:nvSpPr>
-        <p:spPr>
-          <a:xfrm xmlns:a="http://schemas.openxmlformats.org/drawingml/2006/main">
-            <a:off x="12001500" y="5734050"/>
-            <a:ext cx="2190750" cy="361950"/>
-          </a:xfrm>
-          <a:prstGeom xmlns:a="http://schemas.openxmlformats.org/drawingml/2006/main" prst="rect">
-            <a:avLst/>
-          </a:prstGeom>
-          <a:noFill xmlns:a="http://schemas.openxmlformats.org/drawingml/2006/main"/>
-          <a:ln xmlns:a="http://schemas.openxmlformats.org/drawingml/2006/main" w="0">
-            <a:noFill/>
-            <a:prstDash val="solid"/>
-          </a:ln>
-        </p:spPr>
-        <p:txBody>
-          <a:bodyPr xmlns:a="http://schemas.openxmlformats.org/drawingml/2006/main" wrap="square" lIns="0" tIns="0" rIns="0" bIns="0" anchor="ctr">
-            <a:noAutofit/>
-          </a:bodyPr>
-          <a:lstStyle xmlns:a="http://schemas.openxmlformats.org/drawingml/2006/main"/>
-          <a:p xmlns:a="http://schemas.openxmlformats.org/drawingml/2006/main">
-            <a:pPr algn="r">
-              <a:lnSpc>
-                <a:spcPct val="100000"/>
-              </a:lnSpc>
-              <a:buNone/>
-              <a:defRPr sz="1350" b="1">
-                <a:solidFill>
-                  <a:srgbClr val="2E8B57"/>
-                </a:solidFill>
-                <a:latin typeface="Calibri"/>
-                <a:ea typeface="Calibri"/>
-                <a:cs typeface="Calibri"/>
-              </a:defRPr>
-            </a:pPr>
-            <a:r>
-              <a:rPr sz="1800" b="1">
-                <a:solidFill>
-                  <a:srgbClr val="2E8B57"/>
-                </a:solidFill>
-                <a:latin typeface="Calibri"/>
-                <a:ea typeface="Calibri"/>
-                <a:cs typeface="Calibri"/>
-              </a:rPr>
-              <a:t>BOUNDED</a:t>
-            </a:r>
-          </a:p>
-        </p:txBody>
-      </p:sp>
-      <p:sp>
-        <p:nvSpPr>
-          <p:cNvPr id="27" name="">
-            <a:extLst xmlns:a="http://schemas.openxmlformats.org/drawingml/2006/main">
-              <a:ext uri="{FF2B5EF4-FFF2-40B4-BE49-F238E27FC236}">
-                <a16:creationId xmlns:a16="http://schemas.microsoft.com/office/drawing/2014/main" id="{1F021015-2BDE-427C-B7E6-89D40DC755A5}"/>
-              </a:ext>
-            </a:extLst>
-          </p:cNvPr>
-          <p:cNvSpPr>
-            <a:spLocks xmlns:a="http://schemas.openxmlformats.org/drawingml/2006/main" noGrp="1"/>
-          </p:cNvSpPr>
-          <p:nvPr/>
-        </p:nvSpPr>
-        <p:spPr>
-          <a:xfrm xmlns:a="http://schemas.openxmlformats.org/drawingml/2006/main">
-            <a:off x="3714750" y="2819400"/>
-            <a:ext cx="28575" cy="3486150"/>
-          </a:xfrm>
-          <a:prstGeom xmlns:a="http://schemas.openxmlformats.org/drawingml/2006/main" prst="rect">
-            <a:avLst/>
-          </a:prstGeom>
-          <a:solidFill xmlns:a="http://schemas.openxmlformats.org/drawingml/2006/main">
-            <a:srgbClr val="E4E7E9"/>
-          </a:solidFill>
-          <a:ln xmlns:a="http://schemas.openxmlformats.org/drawingml/2006/main" w="0">
-            <a:solidFill>
-              <a:srgbClr val="E4E7E9"/>
-            </a:solidFill>
-            <a:prstDash val="solid"/>
-          </a:ln>
-        </p:spPr>
+              <a:t>MLflow turns every case into inspectable evidence</a:t>
+            </a:r>
+          </a:p>
+        </p:txBody>
       </p:sp>
       <p:sp>
         <p:nvSpPr>
@@ -7955,7 +6856,7 @@
                 <a:ea typeface="Calibri"/>
                 <a:cs typeface="Calibri"/>
               </a:rPr>
-              <a:t>dataset_version: agent-cases-v1  |  case_id: reference_completed  |  max_tool_calls: 5</a:t>
+              <a:t>One run compares cases; each row opens the trace behind the score.</a:t>
             </a:r>
           </a:p>
         </p:txBody>
@@ -8145,7 +7046,7 @@
                 <a:ea typeface="Calibri"/>
                 <a:cs typeface="Calibri"/>
               </a:rPr>
-              <a:t>CASE</a:t>
+              <a:t>RUN</a:t>
             </a:r>
           </a:p>
         </p:txBody>
@@ -8208,6 +7109,790 @@
                 <a:cs typeface="Calibri"/>
               </a:rPr>
               <a:t>04</a:t>
+            </a:r>
+          </a:p>
+        </p:txBody>
+      </p:sp>
+      <p:sp>
+        <p:nvSpPr>
+          <p:cNvPr id="36" name="">
+            <a:extLst xmlns:a="http://schemas.openxmlformats.org/drawingml/2006/main">
+              <a:ext uri="{FF2B5EF4-FFF2-40B4-BE49-F238E27FC236}">
+                <a16:creationId xmlns:a16="http://schemas.microsoft.com/office/drawing/2014/main" id="{905F2E49-D915-4553-8763-11A6CCA55735}"/>
+              </a:ext>
+            </a:extLst>
+          </p:cNvPr>
+          <p:cNvSpPr>
+            <a:spLocks xmlns:a="http://schemas.openxmlformats.org/drawingml/2006/main" noGrp="1"/>
+          </p:cNvSpPr>
+          <p:nvPr/>
+        </p:nvSpPr>
+        <p:spPr>
+          <a:xfrm xmlns:a="http://schemas.openxmlformats.org/drawingml/2006/main">
+            <a:off x="1123950" y="2333625"/>
+            <a:ext cx="2381250" cy="285750"/>
+          </a:xfrm>
+          <a:prstGeom xmlns:a="http://schemas.openxmlformats.org/drawingml/2006/main" prst="rect">
+            <a:avLst/>
+          </a:prstGeom>
+          <a:noFill xmlns:a="http://schemas.openxmlformats.org/drawingml/2006/main"/>
+          <a:ln xmlns:a="http://schemas.openxmlformats.org/drawingml/2006/main" w="0">
+            <a:noFill/>
+            <a:prstDash val="solid"/>
+          </a:ln>
+        </p:spPr>
+        <p:txBody>
+          <a:bodyPr xmlns:a="http://schemas.openxmlformats.org/drawingml/2006/main"/>
+          <a:lstStyle xmlns:a="http://schemas.openxmlformats.org/drawingml/2006/main"/>
+          <a:p xmlns:a="http://schemas.openxmlformats.org/drawingml/2006/main">
+            <a:pPr algn="l">
+              <a:defRPr sz="1200" b="1">
+                <a:solidFill>
+                  <a:srgbClr val="2447D8"/>
+                </a:solidFill>
+              </a:defRPr>
+            </a:pPr>
+            <a:r>
+              <a:rPr sz="1200" b="1">
+                <a:solidFill>
+                  <a:srgbClr val="2447D8"/>
+                </a:solidFill>
+              </a:rPr>
+              <a:t>EVALUATION RUN</a:t>
+            </a:r>
+          </a:p>
+        </p:txBody>
+      </p:sp>
+      <p:pic>
+        <p:nvPicPr>
+          <p:cNvPr id="64" name=""/>
+          <p:cNvPicPr>
+            <a:picLocks xmlns:a="http://schemas.openxmlformats.org/drawingml/2006/main" noChangeAspect="1"/>
+          </p:cNvPicPr>
+          <p:nvPr/>
+        </p:nvPicPr>
+        <p:blipFill>
+          <a:blip xmlns:r="http://schemas.openxmlformats.org/officeDocument/2006/relationships" xmlns:a="http://schemas.openxmlformats.org/drawingml/2006/main" r:embed="R8be7bb86fa424e53"/>
+          <a:stretch xmlns:a="http://schemas.openxmlformats.org/drawingml/2006/main"/>
+        </p:blipFill>
+        <p:spPr>
+          <a:xfrm xmlns:a="http://schemas.openxmlformats.org/drawingml/2006/main">
+            <a:off x="3586436" y="2647950"/>
+            <a:ext cx="8029028" cy="3219450"/>
+          </a:xfrm>
+          <a:prstGeom xmlns:a="http://schemas.openxmlformats.org/drawingml/2006/main" prst="rect">
+            <a:avLst/>
+          </a:prstGeom>
+        </p:spPr>
+      </p:pic>
+      <p:pic>
+        <p:nvPicPr>
+          <p:cNvPr id="65" name=""/>
+          <p:cNvPicPr>
+            <a:picLocks xmlns:a="http://schemas.openxmlformats.org/drawingml/2006/main" noChangeAspect="1"/>
+          </p:cNvPicPr>
+          <p:nvPr/>
+        </p:nvPicPr>
+        <p:blipFill>
+          <a:blip xmlns:r="http://schemas.openxmlformats.org/officeDocument/2006/relationships" xmlns:a="http://schemas.openxmlformats.org/drawingml/2006/main" r:embed="Rfb0860ee43ad454b">
+            <a:extLst>
+              <a:ext uri="{96DAC541-7B7A-43D3-8B79-37D633B846F1}">
+                <asvg:svgBlip xmlns:asvg="http://schemas.microsoft.com/office/drawing/2016/SVG/main" r:embed="R30672179d3da4ec9"/>
+              </a:ext>
+            </a:extLst>
+          </a:blip>
+          <a:stretch xmlns:a="http://schemas.openxmlformats.org/drawingml/2006/main"/>
+        </p:blipFill>
+        <p:spPr>
+          <a:xfrm xmlns:a="http://schemas.openxmlformats.org/drawingml/2006/main">
+            <a:off x="1123950" y="5953125"/>
+            <a:ext cx="323850" cy="323850"/>
+          </a:xfrm>
+          <a:prstGeom xmlns:a="http://schemas.openxmlformats.org/drawingml/2006/main" prst="rect">
+            <a:avLst/>
+          </a:prstGeom>
+        </p:spPr>
+      </p:pic>
+      <p:sp>
+        <p:nvSpPr>
+          <p:cNvPr id="39" name="">
+            <a:extLst xmlns:a="http://schemas.openxmlformats.org/drawingml/2006/main">
+              <a:ext uri="{FF2B5EF4-FFF2-40B4-BE49-F238E27FC236}">
+                <a16:creationId xmlns:a16="http://schemas.microsoft.com/office/drawing/2014/main" id="{473D7FF3-33A3-4840-84EF-D3CBD344C08A}"/>
+              </a:ext>
+            </a:extLst>
+          </p:cNvPr>
+          <p:cNvSpPr>
+            <a:spLocks xmlns:a="http://schemas.openxmlformats.org/drawingml/2006/main" noGrp="1"/>
+          </p:cNvSpPr>
+          <p:nvPr/>
+        </p:nvSpPr>
+        <p:spPr>
+          <a:xfrm xmlns:a="http://schemas.openxmlformats.org/drawingml/2006/main">
+            <a:off x="1123950" y="5991225"/>
+            <a:ext cx="323850" cy="228600"/>
+          </a:xfrm>
+          <a:prstGeom xmlns:a="http://schemas.openxmlformats.org/drawingml/2006/main" prst="rect">
+            <a:avLst/>
+          </a:prstGeom>
+          <a:noFill xmlns:a="http://schemas.openxmlformats.org/drawingml/2006/main"/>
+          <a:ln xmlns:a="http://schemas.openxmlformats.org/drawingml/2006/main" w="0">
+            <a:noFill/>
+            <a:prstDash val="solid"/>
+          </a:ln>
+        </p:spPr>
+        <p:txBody>
+          <a:bodyPr xmlns:a="http://schemas.openxmlformats.org/drawingml/2006/main"/>
+          <a:lstStyle xmlns:a="http://schemas.openxmlformats.org/drawingml/2006/main"/>
+          <a:p xmlns:a="http://schemas.openxmlformats.org/drawingml/2006/main">
+            <a:pPr algn="ctr">
+              <a:defRPr sz="1125" b="1">
+                <a:solidFill>
+                  <a:srgbClr val="FFFFFF"/>
+                </a:solidFill>
+              </a:defRPr>
+            </a:pPr>
+            <a:r>
+              <a:rPr sz="1125" b="1">
+                <a:solidFill>
+                  <a:srgbClr val="FFFFFF"/>
+                </a:solidFill>
+              </a:rPr>
+              <a:t>1</a:t>
+            </a:r>
+          </a:p>
+        </p:txBody>
+      </p:sp>
+      <p:sp>
+        <p:nvSpPr>
+          <p:cNvPr id="40" name="">
+            <a:extLst xmlns:a="http://schemas.openxmlformats.org/drawingml/2006/main">
+              <a:ext uri="{FF2B5EF4-FFF2-40B4-BE49-F238E27FC236}">
+                <a16:creationId xmlns:a16="http://schemas.microsoft.com/office/drawing/2014/main" id="{87FE178F-0328-461E-874B-6AC5711E1749}"/>
+              </a:ext>
+            </a:extLst>
+          </p:cNvPr>
+          <p:cNvSpPr>
+            <a:spLocks xmlns:a="http://schemas.openxmlformats.org/drawingml/2006/main" noGrp="1"/>
+          </p:cNvSpPr>
+          <p:nvPr/>
+        </p:nvSpPr>
+        <p:spPr>
+          <a:xfrm xmlns:a="http://schemas.openxmlformats.org/drawingml/2006/main">
+            <a:off x="1562100" y="5924550"/>
+            <a:ext cx="2476500" cy="266700"/>
+          </a:xfrm>
+          <a:prstGeom xmlns:a="http://schemas.openxmlformats.org/drawingml/2006/main" prst="rect">
+            <a:avLst/>
+          </a:prstGeom>
+          <a:noFill xmlns:a="http://schemas.openxmlformats.org/drawingml/2006/main"/>
+          <a:ln xmlns:a="http://schemas.openxmlformats.org/drawingml/2006/main" w="0">
+            <a:noFill/>
+            <a:prstDash val="solid"/>
+          </a:ln>
+        </p:spPr>
+        <p:txBody>
+          <a:bodyPr xmlns:a="http://schemas.openxmlformats.org/drawingml/2006/main"/>
+          <a:lstStyle xmlns:a="http://schemas.openxmlformats.org/drawingml/2006/main"/>
+          <a:p xmlns:a="http://schemas.openxmlformats.org/drawingml/2006/main">
+            <a:pPr algn="l">
+              <a:defRPr sz="1275" b="1">
+                <a:solidFill>
+                  <a:srgbClr val="051C2A"/>
+                </a:solidFill>
+              </a:defRPr>
+            </a:pPr>
+            <a:r>
+              <a:rPr sz="1275" b="1">
+                <a:solidFill>
+                  <a:srgbClr val="051C2A"/>
+                </a:solidFill>
+              </a:rPr>
+              <a:t>Versioned cases</a:t>
+            </a:r>
+          </a:p>
+        </p:txBody>
+      </p:sp>
+      <p:sp>
+        <p:nvSpPr>
+          <p:cNvPr id="41" name="">
+            <a:extLst xmlns:a="http://schemas.openxmlformats.org/drawingml/2006/main">
+              <a:ext uri="{FF2B5EF4-FFF2-40B4-BE49-F238E27FC236}">
+                <a16:creationId xmlns:a16="http://schemas.microsoft.com/office/drawing/2014/main" id="{8284DD47-2B00-427E-9C18-57F5DD59F3B0}"/>
+              </a:ext>
+            </a:extLst>
+          </p:cNvPr>
+          <p:cNvSpPr>
+            <a:spLocks xmlns:a="http://schemas.openxmlformats.org/drawingml/2006/main" noGrp="1"/>
+          </p:cNvSpPr>
+          <p:nvPr/>
+        </p:nvSpPr>
+        <p:spPr>
+          <a:xfrm xmlns:a="http://schemas.openxmlformats.org/drawingml/2006/main">
+            <a:off x="1562100" y="6191250"/>
+            <a:ext cx="2476500" cy="247650"/>
+          </a:xfrm>
+          <a:prstGeom xmlns:a="http://schemas.openxmlformats.org/drawingml/2006/main" prst="rect">
+            <a:avLst/>
+          </a:prstGeom>
+          <a:noFill xmlns:a="http://schemas.openxmlformats.org/drawingml/2006/main"/>
+          <a:ln xmlns:a="http://schemas.openxmlformats.org/drawingml/2006/main" w="0">
+            <a:noFill/>
+            <a:prstDash val="solid"/>
+          </a:ln>
+        </p:spPr>
+        <p:txBody>
+          <a:bodyPr xmlns:a="http://schemas.openxmlformats.org/drawingml/2006/main"/>
+          <a:lstStyle xmlns:a="http://schemas.openxmlformats.org/drawingml/2006/main"/>
+          <a:p xmlns:a="http://schemas.openxmlformats.org/drawingml/2006/main">
+            <a:pPr algn="l">
+              <a:defRPr sz="1050" b="0">
+                <a:solidFill>
+                  <a:srgbClr val="8291A6"/>
+                </a:solidFill>
+              </a:defRPr>
+            </a:pPr>
+            <a:r>
+              <a:rPr sz="1050" b="0">
+                <a:solidFill>
+                  <a:srgbClr val="8291A6"/>
+                </a:solidFill>
+              </a:rPr>
+              <a:t>Inputs + expectations</a:t>
+            </a:r>
+          </a:p>
+        </p:txBody>
+      </p:sp>
+      <p:pic>
+        <p:nvPicPr>
+          <p:cNvPr id="69" name=""/>
+          <p:cNvPicPr>
+            <a:picLocks xmlns:a="http://schemas.openxmlformats.org/drawingml/2006/main" noChangeAspect="1"/>
+          </p:cNvPicPr>
+          <p:nvPr/>
+        </p:nvPicPr>
+        <p:blipFill>
+          <a:blip xmlns:r="http://schemas.openxmlformats.org/officeDocument/2006/relationships" xmlns:a="http://schemas.openxmlformats.org/drawingml/2006/main" r:embed="R8e8a8ecadeae4b28">
+            <a:extLst>
+              <a:ext uri="{96DAC541-7B7A-43D3-8B79-37D633B846F1}">
+                <asvg:svgBlip xmlns:asvg="http://schemas.microsoft.com/office/drawing/2016/SVG/main" r:embed="R5d208598071b423c"/>
+              </a:ext>
+            </a:extLst>
+          </a:blip>
+          <a:stretch xmlns:a="http://schemas.openxmlformats.org/drawingml/2006/main"/>
+        </p:blipFill>
+        <p:spPr>
+          <a:xfrm xmlns:a="http://schemas.openxmlformats.org/drawingml/2006/main">
+            <a:off x="4457700" y="5953125"/>
+            <a:ext cx="323850" cy="323850"/>
+          </a:xfrm>
+          <a:prstGeom xmlns:a="http://schemas.openxmlformats.org/drawingml/2006/main" prst="rect">
+            <a:avLst/>
+          </a:prstGeom>
+        </p:spPr>
+      </p:pic>
+      <p:sp>
+        <p:nvSpPr>
+          <p:cNvPr id="43" name="">
+            <a:extLst xmlns:a="http://schemas.openxmlformats.org/drawingml/2006/main">
+              <a:ext uri="{FF2B5EF4-FFF2-40B4-BE49-F238E27FC236}">
+                <a16:creationId xmlns:a16="http://schemas.microsoft.com/office/drawing/2014/main" id="{84CD89DA-7D82-4860-90B2-89D67A2B5A61}"/>
+              </a:ext>
+            </a:extLst>
+          </p:cNvPr>
+          <p:cNvSpPr>
+            <a:spLocks xmlns:a="http://schemas.openxmlformats.org/drawingml/2006/main" noGrp="1"/>
+          </p:cNvSpPr>
+          <p:nvPr/>
+        </p:nvSpPr>
+        <p:spPr>
+          <a:xfrm xmlns:a="http://schemas.openxmlformats.org/drawingml/2006/main">
+            <a:off x="4457700" y="5991225"/>
+            <a:ext cx="323850" cy="228600"/>
+          </a:xfrm>
+          <a:prstGeom xmlns:a="http://schemas.openxmlformats.org/drawingml/2006/main" prst="rect">
+            <a:avLst/>
+          </a:prstGeom>
+          <a:noFill xmlns:a="http://schemas.openxmlformats.org/drawingml/2006/main"/>
+          <a:ln xmlns:a="http://schemas.openxmlformats.org/drawingml/2006/main" w="0">
+            <a:noFill/>
+            <a:prstDash val="solid"/>
+          </a:ln>
+        </p:spPr>
+        <p:txBody>
+          <a:bodyPr xmlns:a="http://schemas.openxmlformats.org/drawingml/2006/main"/>
+          <a:lstStyle xmlns:a="http://schemas.openxmlformats.org/drawingml/2006/main"/>
+          <a:p xmlns:a="http://schemas.openxmlformats.org/drawingml/2006/main">
+            <a:pPr algn="ctr">
+              <a:defRPr sz="1125" b="1">
+                <a:solidFill>
+                  <a:srgbClr val="FFFFFF"/>
+                </a:solidFill>
+              </a:defRPr>
+            </a:pPr>
+            <a:r>
+              <a:rPr sz="1125" b="1">
+                <a:solidFill>
+                  <a:srgbClr val="FFFFFF"/>
+                </a:solidFill>
+              </a:rPr>
+              <a:t>2</a:t>
+            </a:r>
+          </a:p>
+        </p:txBody>
+      </p:sp>
+      <p:sp>
+        <p:nvSpPr>
+          <p:cNvPr id="44" name="">
+            <a:extLst xmlns:a="http://schemas.openxmlformats.org/drawingml/2006/main">
+              <a:ext uri="{FF2B5EF4-FFF2-40B4-BE49-F238E27FC236}">
+                <a16:creationId xmlns:a16="http://schemas.microsoft.com/office/drawing/2014/main" id="{182BC7E1-5782-4250-AAD3-4F66838614AC}"/>
+              </a:ext>
+            </a:extLst>
+          </p:cNvPr>
+          <p:cNvSpPr>
+            <a:spLocks xmlns:a="http://schemas.openxmlformats.org/drawingml/2006/main" noGrp="1"/>
+          </p:cNvSpPr>
+          <p:nvPr/>
+        </p:nvSpPr>
+        <p:spPr>
+          <a:xfrm xmlns:a="http://schemas.openxmlformats.org/drawingml/2006/main">
+            <a:off x="4895850" y="5924550"/>
+            <a:ext cx="2476500" cy="266700"/>
+          </a:xfrm>
+          <a:prstGeom xmlns:a="http://schemas.openxmlformats.org/drawingml/2006/main" prst="rect">
+            <a:avLst/>
+          </a:prstGeom>
+          <a:noFill xmlns:a="http://schemas.openxmlformats.org/drawingml/2006/main"/>
+          <a:ln xmlns:a="http://schemas.openxmlformats.org/drawingml/2006/main" w="0">
+            <a:noFill/>
+            <a:prstDash val="solid"/>
+          </a:ln>
+        </p:spPr>
+        <p:txBody>
+          <a:bodyPr xmlns:a="http://schemas.openxmlformats.org/drawingml/2006/main"/>
+          <a:lstStyle xmlns:a="http://schemas.openxmlformats.org/drawingml/2006/main"/>
+          <a:p xmlns:a="http://schemas.openxmlformats.org/drawingml/2006/main">
+            <a:pPr algn="l">
+              <a:defRPr sz="1275" b="1">
+                <a:solidFill>
+                  <a:srgbClr val="051C2A"/>
+                </a:solidFill>
+              </a:defRPr>
+            </a:pPr>
+            <a:r>
+              <a:rPr sz="1275" b="1">
+                <a:solidFill>
+                  <a:srgbClr val="051C2A"/>
+                </a:solidFill>
+              </a:rPr>
+              <a:t>Run the agent</a:t>
+            </a:r>
+          </a:p>
+        </p:txBody>
+      </p:sp>
+      <p:sp>
+        <p:nvSpPr>
+          <p:cNvPr id="45" name="">
+            <a:extLst xmlns:a="http://schemas.openxmlformats.org/drawingml/2006/main">
+              <a:ext uri="{FF2B5EF4-FFF2-40B4-BE49-F238E27FC236}">
+                <a16:creationId xmlns:a16="http://schemas.microsoft.com/office/drawing/2014/main" id="{AD9106C9-6EDC-4767-A928-2F22C3BC70C0}"/>
+              </a:ext>
+            </a:extLst>
+          </p:cNvPr>
+          <p:cNvSpPr>
+            <a:spLocks xmlns:a="http://schemas.openxmlformats.org/drawingml/2006/main" noGrp="1"/>
+          </p:cNvSpPr>
+          <p:nvPr/>
+        </p:nvSpPr>
+        <p:spPr>
+          <a:xfrm xmlns:a="http://schemas.openxmlformats.org/drawingml/2006/main">
+            <a:off x="4895850" y="6191250"/>
+            <a:ext cx="2476500" cy="247650"/>
+          </a:xfrm>
+          <a:prstGeom xmlns:a="http://schemas.openxmlformats.org/drawingml/2006/main" prst="rect">
+            <a:avLst/>
+          </a:prstGeom>
+          <a:noFill xmlns:a="http://schemas.openxmlformats.org/drawingml/2006/main"/>
+          <a:ln xmlns:a="http://schemas.openxmlformats.org/drawingml/2006/main" w="0">
+            <a:noFill/>
+            <a:prstDash val="solid"/>
+          </a:ln>
+        </p:spPr>
+        <p:txBody>
+          <a:bodyPr xmlns:a="http://schemas.openxmlformats.org/drawingml/2006/main"/>
+          <a:lstStyle xmlns:a="http://schemas.openxmlformats.org/drawingml/2006/main"/>
+          <a:p xmlns:a="http://schemas.openxmlformats.org/drawingml/2006/main">
+            <a:pPr algn="l">
+              <a:defRPr sz="1050" b="0">
+                <a:solidFill>
+                  <a:srgbClr val="8291A6"/>
+                </a:solidFill>
+              </a:defRPr>
+            </a:pPr>
+            <a:r>
+              <a:rPr sz="1050" b="0">
+                <a:solidFill>
+                  <a:srgbClr val="8291A6"/>
+                </a:solidFill>
+              </a:rPr>
+              <a:t>One root trace per case</a:t>
+            </a:r>
+          </a:p>
+        </p:txBody>
+      </p:sp>
+      <p:pic>
+        <p:nvPicPr>
+          <p:cNvPr id="73" name=""/>
+          <p:cNvPicPr>
+            <a:picLocks xmlns:a="http://schemas.openxmlformats.org/drawingml/2006/main" noChangeAspect="1"/>
+          </p:cNvPicPr>
+          <p:nvPr/>
+        </p:nvPicPr>
+        <p:blipFill>
+          <a:blip xmlns:r="http://schemas.openxmlformats.org/officeDocument/2006/relationships" xmlns:a="http://schemas.openxmlformats.org/drawingml/2006/main" r:embed="R75a588c72a7f4d91">
+            <a:extLst>
+              <a:ext uri="{96DAC541-7B7A-43D3-8B79-37D633B846F1}">
+                <asvg:svgBlip xmlns:asvg="http://schemas.microsoft.com/office/drawing/2016/SVG/main" r:embed="R8e9e5735d6604705"/>
+              </a:ext>
+            </a:extLst>
+          </a:blip>
+          <a:stretch xmlns:a="http://schemas.openxmlformats.org/drawingml/2006/main"/>
+        </p:blipFill>
+        <p:spPr>
+          <a:xfrm xmlns:a="http://schemas.openxmlformats.org/drawingml/2006/main">
+            <a:off x="7791450" y="5953125"/>
+            <a:ext cx="323850" cy="323850"/>
+          </a:xfrm>
+          <a:prstGeom xmlns:a="http://schemas.openxmlformats.org/drawingml/2006/main" prst="rect">
+            <a:avLst/>
+          </a:prstGeom>
+        </p:spPr>
+      </p:pic>
+      <p:sp>
+        <p:nvSpPr>
+          <p:cNvPr id="47" name="">
+            <a:extLst xmlns:a="http://schemas.openxmlformats.org/drawingml/2006/main">
+              <a:ext uri="{FF2B5EF4-FFF2-40B4-BE49-F238E27FC236}">
+                <a16:creationId xmlns:a16="http://schemas.microsoft.com/office/drawing/2014/main" id="{285D7915-D39D-4F78-AA17-D6003923E593}"/>
+              </a:ext>
+            </a:extLst>
+          </p:cNvPr>
+          <p:cNvSpPr>
+            <a:spLocks xmlns:a="http://schemas.openxmlformats.org/drawingml/2006/main" noGrp="1"/>
+          </p:cNvSpPr>
+          <p:nvPr/>
+        </p:nvSpPr>
+        <p:spPr>
+          <a:xfrm xmlns:a="http://schemas.openxmlformats.org/drawingml/2006/main">
+            <a:off x="7791450" y="5991225"/>
+            <a:ext cx="323850" cy="228600"/>
+          </a:xfrm>
+          <a:prstGeom xmlns:a="http://schemas.openxmlformats.org/drawingml/2006/main" prst="rect">
+            <a:avLst/>
+          </a:prstGeom>
+          <a:noFill xmlns:a="http://schemas.openxmlformats.org/drawingml/2006/main"/>
+          <a:ln xmlns:a="http://schemas.openxmlformats.org/drawingml/2006/main" w="0">
+            <a:noFill/>
+            <a:prstDash val="solid"/>
+          </a:ln>
+        </p:spPr>
+        <p:txBody>
+          <a:bodyPr xmlns:a="http://schemas.openxmlformats.org/drawingml/2006/main"/>
+          <a:lstStyle xmlns:a="http://schemas.openxmlformats.org/drawingml/2006/main"/>
+          <a:p xmlns:a="http://schemas.openxmlformats.org/drawingml/2006/main">
+            <a:pPr algn="ctr">
+              <a:defRPr sz="1125" b="1">
+                <a:solidFill>
+                  <a:srgbClr val="FFFFFF"/>
+                </a:solidFill>
+              </a:defRPr>
+            </a:pPr>
+            <a:r>
+              <a:rPr sz="1125" b="1">
+                <a:solidFill>
+                  <a:srgbClr val="FFFFFF"/>
+                </a:solidFill>
+              </a:rPr>
+              <a:t>3</a:t>
+            </a:r>
+          </a:p>
+        </p:txBody>
+      </p:sp>
+      <p:sp>
+        <p:nvSpPr>
+          <p:cNvPr id="48" name="">
+            <a:extLst xmlns:a="http://schemas.openxmlformats.org/drawingml/2006/main">
+              <a:ext uri="{FF2B5EF4-FFF2-40B4-BE49-F238E27FC236}">
+                <a16:creationId xmlns:a16="http://schemas.microsoft.com/office/drawing/2014/main" id="{41354985-CAE6-4006-8B91-60887936EE91}"/>
+              </a:ext>
+            </a:extLst>
+          </p:cNvPr>
+          <p:cNvSpPr>
+            <a:spLocks xmlns:a="http://schemas.openxmlformats.org/drawingml/2006/main" noGrp="1"/>
+          </p:cNvSpPr>
+          <p:nvPr/>
+        </p:nvSpPr>
+        <p:spPr>
+          <a:xfrm xmlns:a="http://schemas.openxmlformats.org/drawingml/2006/main">
+            <a:off x="8229600" y="5924550"/>
+            <a:ext cx="2476500" cy="266700"/>
+          </a:xfrm>
+          <a:prstGeom xmlns:a="http://schemas.openxmlformats.org/drawingml/2006/main" prst="rect">
+            <a:avLst/>
+          </a:prstGeom>
+          <a:noFill xmlns:a="http://schemas.openxmlformats.org/drawingml/2006/main"/>
+          <a:ln xmlns:a="http://schemas.openxmlformats.org/drawingml/2006/main" w="0">
+            <a:noFill/>
+            <a:prstDash val="solid"/>
+          </a:ln>
+        </p:spPr>
+        <p:txBody>
+          <a:bodyPr xmlns:a="http://schemas.openxmlformats.org/drawingml/2006/main"/>
+          <a:lstStyle xmlns:a="http://schemas.openxmlformats.org/drawingml/2006/main"/>
+          <a:p xmlns:a="http://schemas.openxmlformats.org/drawingml/2006/main">
+            <a:pPr algn="l">
+              <a:defRPr sz="1275" b="1">
+                <a:solidFill>
+                  <a:srgbClr val="051C2A"/>
+                </a:solidFill>
+              </a:defRPr>
+            </a:pPr>
+            <a:r>
+              <a:rPr sz="1275" b="1">
+                <a:solidFill>
+                  <a:srgbClr val="051C2A"/>
+                </a:solidFill>
+              </a:rPr>
+              <a:t>Apply scorers</a:t>
+            </a:r>
+          </a:p>
+        </p:txBody>
+      </p:sp>
+      <p:sp>
+        <p:nvSpPr>
+          <p:cNvPr id="49" name="">
+            <a:extLst xmlns:a="http://schemas.openxmlformats.org/drawingml/2006/main">
+              <a:ext uri="{FF2B5EF4-FFF2-40B4-BE49-F238E27FC236}">
+                <a16:creationId xmlns:a16="http://schemas.microsoft.com/office/drawing/2014/main" id="{44F386C1-3724-4C9A-9333-A1A4DC1AE388}"/>
+              </a:ext>
+            </a:extLst>
+          </p:cNvPr>
+          <p:cNvSpPr>
+            <a:spLocks xmlns:a="http://schemas.openxmlformats.org/drawingml/2006/main" noGrp="1"/>
+          </p:cNvSpPr>
+          <p:nvPr/>
+        </p:nvSpPr>
+        <p:spPr>
+          <a:xfrm xmlns:a="http://schemas.openxmlformats.org/drawingml/2006/main">
+            <a:off x="8229600" y="6191250"/>
+            <a:ext cx="2476500" cy="247650"/>
+          </a:xfrm>
+          <a:prstGeom xmlns:a="http://schemas.openxmlformats.org/drawingml/2006/main" prst="rect">
+            <a:avLst/>
+          </a:prstGeom>
+          <a:noFill xmlns:a="http://schemas.openxmlformats.org/drawingml/2006/main"/>
+          <a:ln xmlns:a="http://schemas.openxmlformats.org/drawingml/2006/main" w="0">
+            <a:noFill/>
+            <a:prstDash val="solid"/>
+          </a:ln>
+        </p:spPr>
+        <p:txBody>
+          <a:bodyPr xmlns:a="http://schemas.openxmlformats.org/drawingml/2006/main"/>
+          <a:lstStyle xmlns:a="http://schemas.openxmlformats.org/drawingml/2006/main"/>
+          <a:p xmlns:a="http://schemas.openxmlformats.org/drawingml/2006/main">
+            <a:pPr algn="l">
+              <a:defRPr sz="1050" b="0">
+                <a:solidFill>
+                  <a:srgbClr val="8291A6"/>
+                </a:solidFill>
+              </a:defRPr>
+            </a:pPr>
+            <a:r>
+              <a:rPr sz="1050" b="0">
+                <a:solidFill>
+                  <a:srgbClr val="8291A6"/>
+                </a:solidFill>
+              </a:rPr>
+              <a:t>Path + answer metrics</a:t>
+            </a:r>
+          </a:p>
+        </p:txBody>
+      </p:sp>
+      <p:pic>
+        <p:nvPicPr>
+          <p:cNvPr id="77" name=""/>
+          <p:cNvPicPr>
+            <a:picLocks xmlns:a="http://schemas.openxmlformats.org/drawingml/2006/main" noChangeAspect="1"/>
+          </p:cNvPicPr>
+          <p:nvPr/>
+        </p:nvPicPr>
+        <p:blipFill>
+          <a:blip xmlns:r="http://schemas.openxmlformats.org/officeDocument/2006/relationships" xmlns:a="http://schemas.openxmlformats.org/drawingml/2006/main" r:embed="R8695c9692e914379">
+            <a:extLst>
+              <a:ext uri="{96DAC541-7B7A-43D3-8B79-37D633B846F1}">
+                <asvg:svgBlip xmlns:asvg="http://schemas.microsoft.com/office/drawing/2016/SVG/main" r:embed="R9aab6e29d1aa4246"/>
+              </a:ext>
+            </a:extLst>
+          </a:blip>
+          <a:stretch xmlns:a="http://schemas.openxmlformats.org/drawingml/2006/main"/>
+        </p:blipFill>
+        <p:spPr>
+          <a:xfrm xmlns:a="http://schemas.openxmlformats.org/drawingml/2006/main">
+            <a:off x="11125200" y="5953125"/>
+            <a:ext cx="323850" cy="323850"/>
+          </a:xfrm>
+          <a:prstGeom xmlns:a="http://schemas.openxmlformats.org/drawingml/2006/main" prst="rect">
+            <a:avLst/>
+          </a:prstGeom>
+        </p:spPr>
+      </p:pic>
+      <p:sp>
+        <p:nvSpPr>
+          <p:cNvPr id="51" name="">
+            <a:extLst xmlns:a="http://schemas.openxmlformats.org/drawingml/2006/main">
+              <a:ext uri="{FF2B5EF4-FFF2-40B4-BE49-F238E27FC236}">
+                <a16:creationId xmlns:a16="http://schemas.microsoft.com/office/drawing/2014/main" id="{FCFAA47F-7AAC-4363-A805-A73B2FBCFE00}"/>
+              </a:ext>
+            </a:extLst>
+          </p:cNvPr>
+          <p:cNvSpPr>
+            <a:spLocks xmlns:a="http://schemas.openxmlformats.org/drawingml/2006/main" noGrp="1"/>
+          </p:cNvSpPr>
+          <p:nvPr/>
+        </p:nvSpPr>
+        <p:spPr>
+          <a:xfrm xmlns:a="http://schemas.openxmlformats.org/drawingml/2006/main">
+            <a:off x="11125200" y="5991225"/>
+            <a:ext cx="323850" cy="228600"/>
+          </a:xfrm>
+          <a:prstGeom xmlns:a="http://schemas.openxmlformats.org/drawingml/2006/main" prst="rect">
+            <a:avLst/>
+          </a:prstGeom>
+          <a:noFill xmlns:a="http://schemas.openxmlformats.org/drawingml/2006/main"/>
+          <a:ln xmlns:a="http://schemas.openxmlformats.org/drawingml/2006/main" w="0">
+            <a:noFill/>
+            <a:prstDash val="solid"/>
+          </a:ln>
+        </p:spPr>
+        <p:txBody>
+          <a:bodyPr xmlns:a="http://schemas.openxmlformats.org/drawingml/2006/main"/>
+          <a:lstStyle xmlns:a="http://schemas.openxmlformats.org/drawingml/2006/main"/>
+          <a:p xmlns:a="http://schemas.openxmlformats.org/drawingml/2006/main">
+            <a:pPr algn="ctr">
+              <a:defRPr sz="1125" b="1">
+                <a:solidFill>
+                  <a:srgbClr val="FFFFFF"/>
+                </a:solidFill>
+              </a:defRPr>
+            </a:pPr>
+            <a:r>
+              <a:rPr sz="1125" b="1">
+                <a:solidFill>
+                  <a:srgbClr val="FFFFFF"/>
+                </a:solidFill>
+              </a:rPr>
+              <a:t>4</a:t>
+            </a:r>
+          </a:p>
+        </p:txBody>
+      </p:sp>
+      <p:sp>
+        <p:nvSpPr>
+          <p:cNvPr id="52" name="">
+            <a:extLst xmlns:a="http://schemas.openxmlformats.org/drawingml/2006/main">
+              <a:ext uri="{FF2B5EF4-FFF2-40B4-BE49-F238E27FC236}">
+                <a16:creationId xmlns:a16="http://schemas.microsoft.com/office/drawing/2014/main" id="{AF39D203-59F4-44CF-AA2C-C474F7902B12}"/>
+              </a:ext>
+            </a:extLst>
+          </p:cNvPr>
+          <p:cNvSpPr>
+            <a:spLocks xmlns:a="http://schemas.openxmlformats.org/drawingml/2006/main" noGrp="1"/>
+          </p:cNvSpPr>
+          <p:nvPr/>
+        </p:nvSpPr>
+        <p:spPr>
+          <a:xfrm xmlns:a="http://schemas.openxmlformats.org/drawingml/2006/main">
+            <a:off x="11563350" y="5924550"/>
+            <a:ext cx="2476500" cy="266700"/>
+          </a:xfrm>
+          <a:prstGeom xmlns:a="http://schemas.openxmlformats.org/drawingml/2006/main" prst="rect">
+            <a:avLst/>
+          </a:prstGeom>
+          <a:noFill xmlns:a="http://schemas.openxmlformats.org/drawingml/2006/main"/>
+          <a:ln xmlns:a="http://schemas.openxmlformats.org/drawingml/2006/main" w="0">
+            <a:noFill/>
+            <a:prstDash val="solid"/>
+          </a:ln>
+        </p:spPr>
+        <p:txBody>
+          <a:bodyPr xmlns:a="http://schemas.openxmlformats.org/drawingml/2006/main"/>
+          <a:lstStyle xmlns:a="http://schemas.openxmlformats.org/drawingml/2006/main"/>
+          <a:p xmlns:a="http://schemas.openxmlformats.org/drawingml/2006/main">
+            <a:pPr algn="l">
+              <a:defRPr sz="1275" b="1">
+                <a:solidFill>
+                  <a:srgbClr val="051C2A"/>
+                </a:solidFill>
+              </a:defRPr>
+            </a:pPr>
+            <a:r>
+              <a:rPr sz="1275" b="1">
+                <a:solidFill>
+                  <a:srgbClr val="051C2A"/>
+                </a:solidFill>
+              </a:rPr>
+              <a:t>Open failures</a:t>
+            </a:r>
+          </a:p>
+        </p:txBody>
+      </p:sp>
+      <p:sp>
+        <p:nvSpPr>
+          <p:cNvPr id="53" name="">
+            <a:extLst xmlns:a="http://schemas.openxmlformats.org/drawingml/2006/main">
+              <a:ext uri="{FF2B5EF4-FFF2-40B4-BE49-F238E27FC236}">
+                <a16:creationId xmlns:a16="http://schemas.microsoft.com/office/drawing/2014/main" id="{CFF861C8-9EF1-4C03-A3A5-1F040EE7EFAB}"/>
+              </a:ext>
+            </a:extLst>
+          </p:cNvPr>
+          <p:cNvSpPr>
+            <a:spLocks xmlns:a="http://schemas.openxmlformats.org/drawingml/2006/main" noGrp="1"/>
+          </p:cNvSpPr>
+          <p:nvPr/>
+        </p:nvSpPr>
+        <p:spPr>
+          <a:xfrm xmlns:a="http://schemas.openxmlformats.org/drawingml/2006/main">
+            <a:off x="11563350" y="6191250"/>
+            <a:ext cx="2476500" cy="247650"/>
+          </a:xfrm>
+          <a:prstGeom xmlns:a="http://schemas.openxmlformats.org/drawingml/2006/main" prst="rect">
+            <a:avLst/>
+          </a:prstGeom>
+          <a:noFill xmlns:a="http://schemas.openxmlformats.org/drawingml/2006/main"/>
+          <a:ln xmlns:a="http://schemas.openxmlformats.org/drawingml/2006/main" w="0">
+            <a:noFill/>
+            <a:prstDash val="solid"/>
+          </a:ln>
+        </p:spPr>
+        <p:txBody>
+          <a:bodyPr xmlns:a="http://schemas.openxmlformats.org/drawingml/2006/main"/>
+          <a:lstStyle xmlns:a="http://schemas.openxmlformats.org/drawingml/2006/main"/>
+          <a:p xmlns:a="http://schemas.openxmlformats.org/drawingml/2006/main">
+            <a:pPr algn="l">
+              <a:defRPr sz="1050" b="0">
+                <a:solidFill>
+                  <a:srgbClr val="8291A6"/>
+                </a:solidFill>
+              </a:defRPr>
+            </a:pPr>
+            <a:r>
+              <a:rPr sz="1050" b="0">
+                <a:solidFill>
+                  <a:srgbClr val="8291A6"/>
+                </a:solidFill>
+              </a:rPr>
+              <a:t>Inspect spans and owners</a:t>
             </a:r>
           </a:p>
         </p:txBody>
@@ -8298,7 +7983,7 @@
                 <a:ea typeface="Calibri"/>
                 <a:cs typeface="Calibri"/>
               </a:rPr>
-              <a:t>MLFLOW EVALUATION</a:t>
+              <a:t>TRACE VIEWER</a:t>
             </a:r>
           </a:p>
         </p:txBody>
@@ -8360,1049 +8045,7 @@
                 <a:ea typeface="Calibri"/>
                 <a:cs typeface="Calibri"/>
               </a:rPr>
-              <a:t>One configuration is one MLflow run</a:t>
-            </a:r>
-          </a:p>
-        </p:txBody>
-      </p:sp>
-      <p:sp>
-        <p:nvSpPr>
-          <p:cNvPr id="3" name="decision-source">
-            <a:extLst xmlns:a="http://schemas.openxmlformats.org/drawingml/2006/main">
-              <a:ext uri="{FF2B5EF4-FFF2-40B4-BE49-F238E27FC236}">
-                <a16:creationId xmlns:a16="http://schemas.microsoft.com/office/drawing/2014/main" id="{F0F1628B-25FC-4A7D-9ACB-11ED41518DD3}"/>
-              </a:ext>
-            </a:extLst>
-          </p:cNvPr>
-          <p:cNvSpPr>
-            <a:spLocks xmlns:a="http://schemas.openxmlformats.org/drawingml/2006/main" noGrp="1"/>
-          </p:cNvSpPr>
-          <p:nvPr/>
-        </p:nvSpPr>
-        <p:spPr>
-          <a:xfrm xmlns:a="http://schemas.openxmlformats.org/drawingml/2006/main">
-            <a:off x="1028700" y="2990850"/>
-            <a:ext cx="2724150" cy="1562100"/>
-          </a:xfrm>
-          <a:prstGeom xmlns:a="http://schemas.openxmlformats.org/drawingml/2006/main" prst="roundRect">
-            <a:avLst>
-              <a:gd name="adj" fmla="val 7317"/>
-            </a:avLst>
-          </a:prstGeom>
-          <a:solidFill xmlns:a="http://schemas.openxmlformats.org/drawingml/2006/main">
-            <a:srgbClr val="FFFFFF"/>
-          </a:solidFill>
-          <a:ln xmlns:a="http://schemas.openxmlformats.org/drawingml/2006/main" w="9525">
-            <a:solidFill>
-              <a:srgbClr val="E4E7E9"/>
-            </a:solidFill>
-            <a:prstDash val="solid"/>
-          </a:ln>
-        </p:spPr>
-      </p:sp>
-      <p:sp>
-        <p:nvSpPr>
-          <p:cNvPr id="4" name="">
-            <a:extLst xmlns:a="http://schemas.openxmlformats.org/drawingml/2006/main">
-              <a:ext uri="{FF2B5EF4-FFF2-40B4-BE49-F238E27FC236}">
-                <a16:creationId xmlns:a16="http://schemas.microsoft.com/office/drawing/2014/main" id="{62CDE4FD-810A-4BB6-A9E2-9D453E2B432E}"/>
-              </a:ext>
-            </a:extLst>
-          </p:cNvPr>
-          <p:cNvSpPr>
-            <a:spLocks xmlns:a="http://schemas.openxmlformats.org/drawingml/2006/main" noGrp="1"/>
-          </p:cNvSpPr>
-          <p:nvPr/>
-        </p:nvSpPr>
-        <p:spPr>
-          <a:xfrm xmlns:a="http://schemas.openxmlformats.org/drawingml/2006/main">
-            <a:off x="1295400" y="3181350"/>
-            <a:ext cx="2190750" cy="323850"/>
-          </a:xfrm>
-          <a:prstGeom xmlns:a="http://schemas.openxmlformats.org/drawingml/2006/main" prst="rect">
-            <a:avLst/>
-          </a:prstGeom>
-          <a:noFill xmlns:a="http://schemas.openxmlformats.org/drawingml/2006/main"/>
-          <a:ln xmlns:a="http://schemas.openxmlformats.org/drawingml/2006/main" w="0">
-            <a:noFill/>
-            <a:prstDash val="solid"/>
-          </a:ln>
-        </p:spPr>
-        <p:txBody>
-          <a:bodyPr xmlns:a="http://schemas.openxmlformats.org/drawingml/2006/main" wrap="square" lIns="0" tIns="0" rIns="0" bIns="0" anchor="ctr">
-            <a:noAutofit/>
-          </a:bodyPr>
-          <a:lstStyle xmlns:a="http://schemas.openxmlformats.org/drawingml/2006/main"/>
-          <a:p xmlns:a="http://schemas.openxmlformats.org/drawingml/2006/main">
-            <a:pPr algn="ctr">
-              <a:lnSpc>
-                <a:spcPct val="100000"/>
-              </a:lnSpc>
-              <a:buNone/>
-              <a:defRPr sz="1350" b="1">
-                <a:solidFill>
-                  <a:srgbClr val="1F40CB"/>
-                </a:solidFill>
-                <a:latin typeface="Calibri"/>
-                <a:ea typeface="Calibri"/>
-                <a:cs typeface="Calibri"/>
-              </a:defRPr>
-            </a:pPr>
-            <a:r>
-              <a:rPr sz="1800" b="1">
-                <a:solidFill>
-                  <a:srgbClr val="1F40CB"/>
-                </a:solidFill>
-                <a:latin typeface="Calibri"/>
-                <a:ea typeface="Calibri"/>
-                <a:cs typeface="Calibri"/>
-              </a:rPr>
-              <a:t>agent-cases-v1</a:t>
-            </a:r>
-          </a:p>
-        </p:txBody>
-      </p:sp>
-      <p:sp>
-        <p:nvSpPr>
-          <p:cNvPr id="5" name="">
-            <a:extLst xmlns:a="http://schemas.openxmlformats.org/drawingml/2006/main">
-              <a:ext uri="{FF2B5EF4-FFF2-40B4-BE49-F238E27FC236}">
-                <a16:creationId xmlns:a16="http://schemas.microsoft.com/office/drawing/2014/main" id="{25AA52CC-262C-4723-8C2E-E43262748B6A}"/>
-              </a:ext>
-            </a:extLst>
-          </p:cNvPr>
-          <p:cNvSpPr>
-            <a:spLocks xmlns:a="http://schemas.openxmlformats.org/drawingml/2006/main" noGrp="1"/>
-          </p:cNvSpPr>
-          <p:nvPr/>
-        </p:nvSpPr>
-        <p:spPr>
-          <a:xfrm xmlns:a="http://schemas.openxmlformats.org/drawingml/2006/main">
-            <a:off x="1295400" y="3657600"/>
-            <a:ext cx="2190750" cy="647700"/>
-          </a:xfrm>
-          <a:prstGeom xmlns:a="http://schemas.openxmlformats.org/drawingml/2006/main" prst="rect">
-            <a:avLst/>
-          </a:prstGeom>
-          <a:noFill xmlns:a="http://schemas.openxmlformats.org/drawingml/2006/main"/>
-          <a:ln xmlns:a="http://schemas.openxmlformats.org/drawingml/2006/main" w="0">
-            <a:noFill/>
-            <a:prstDash val="solid"/>
-          </a:ln>
-        </p:spPr>
-        <p:txBody>
-          <a:bodyPr xmlns:a="http://schemas.openxmlformats.org/drawingml/2006/main" wrap="square" lIns="0" tIns="0" rIns="0" bIns="0" anchor="ctr">
-            <a:normAutofit fontScale="100000"/>
-          </a:bodyPr>
-          <a:lstStyle xmlns:a="http://schemas.openxmlformats.org/drawingml/2006/main"/>
-          <a:p xmlns:a="http://schemas.openxmlformats.org/drawingml/2006/main">
-            <a:pPr algn="ctr">
-              <a:lnSpc>
-                <a:spcPct val="100000"/>
-              </a:lnSpc>
-              <a:buNone/>
-              <a:defRPr sz="1650" b="1">
-                <a:solidFill>
-                  <a:srgbClr val="051C2A"/>
-                </a:solidFill>
-                <a:latin typeface="Calibri"/>
-                <a:ea typeface="Calibri"/>
-                <a:cs typeface="Calibri"/>
-              </a:defRPr>
-            </a:pPr>
-            <a:r>
-              <a:rPr sz="1650" b="1">
-                <a:solidFill>
-                  <a:srgbClr val="051C2A"/>
-                </a:solidFill>
-                <a:latin typeface="Calibri"/>
-                <a:ea typeface="Calibri"/>
-                <a:cs typeface="Calibri"/>
-              </a:rPr>
-              <a:t>six aligned cases</a:t>
-            </a:r>
-          </a:p>
-          <a:p xmlns:a="http://schemas.openxmlformats.org/drawingml/2006/main">
-            <a:pPr algn="ctr">
-              <a:lnSpc>
-                <a:spcPct val="100000"/>
-              </a:lnSpc>
-              <a:buNone/>
-              <a:defRPr sz="1650" b="1">
-                <a:solidFill>
-                  <a:srgbClr val="051C2A"/>
-                </a:solidFill>
-                <a:latin typeface="Calibri"/>
-                <a:ea typeface="Calibri"/>
-                <a:cs typeface="Calibri"/>
-              </a:defRPr>
-            </a:pPr>
-            <a:r>
-              <a:rPr sz="1650" b="1">
-                <a:solidFill>
-                  <a:srgbClr val="051C2A"/>
-                </a:solidFill>
-                <a:latin typeface="Calibri"/>
-                <a:ea typeface="Calibri"/>
-                <a:cs typeface="Calibri"/>
-              </a:rPr>
-              <a:t>same dataset hash</a:t>
-            </a:r>
-          </a:p>
-        </p:txBody>
-      </p:sp>
-      <p:sp>
-        <p:nvSpPr>
-          <p:cNvPr id="6" name="decision-child">
-            <a:extLst xmlns:a="http://schemas.openxmlformats.org/drawingml/2006/main">
-              <a:ext uri="{FF2B5EF4-FFF2-40B4-BE49-F238E27FC236}">
-                <a16:creationId xmlns:a16="http://schemas.microsoft.com/office/drawing/2014/main" id="{E359D7F5-9555-4867-8587-2F8EC5254E07}"/>
-              </a:ext>
-            </a:extLst>
-          </p:cNvPr>
-          <p:cNvSpPr>
-            <a:spLocks xmlns:a="http://schemas.openxmlformats.org/drawingml/2006/main" noGrp="1"/>
-          </p:cNvSpPr>
-          <p:nvPr/>
-        </p:nvSpPr>
-        <p:spPr>
-          <a:xfrm xmlns:a="http://schemas.openxmlformats.org/drawingml/2006/main">
-            <a:off x="5162550" y="2857500"/>
-            <a:ext cx="3257550" cy="1828800"/>
-          </a:xfrm>
-          <a:prstGeom xmlns:a="http://schemas.openxmlformats.org/drawingml/2006/main" prst="roundRect">
-            <a:avLst>
-              <a:gd name="adj" fmla="val 6250"/>
-            </a:avLst>
-          </a:prstGeom>
-          <a:solidFill xmlns:a="http://schemas.openxmlformats.org/drawingml/2006/main">
-            <a:srgbClr val="E8F6FB"/>
-          </a:solidFill>
-          <a:ln xmlns:a="http://schemas.openxmlformats.org/drawingml/2006/main" w="19050">
-            <a:solidFill>
-              <a:srgbClr val="00A2EB"/>
-            </a:solidFill>
-            <a:prstDash val="solid"/>
-          </a:ln>
-        </p:spPr>
-      </p:sp>
-      <p:sp>
-        <p:nvSpPr>
-          <p:cNvPr id="7" name="">
-            <a:extLst xmlns:a="http://schemas.openxmlformats.org/drawingml/2006/main">
-              <a:ext uri="{FF2B5EF4-FFF2-40B4-BE49-F238E27FC236}">
-                <a16:creationId xmlns:a16="http://schemas.microsoft.com/office/drawing/2014/main" id="{14C45E62-2BDC-4F11-8E8E-92ACD6B6E61D}"/>
-              </a:ext>
-            </a:extLst>
-          </p:cNvPr>
-          <p:cNvSpPr>
-            <a:spLocks xmlns:a="http://schemas.openxmlformats.org/drawingml/2006/main" noGrp="1"/>
-          </p:cNvSpPr>
-          <p:nvPr/>
-        </p:nvSpPr>
-        <p:spPr>
-          <a:xfrm xmlns:a="http://schemas.openxmlformats.org/drawingml/2006/main">
-            <a:off x="5467350" y="2914650"/>
-            <a:ext cx="2647950" cy="476250"/>
-          </a:xfrm>
-          <a:prstGeom xmlns:a="http://schemas.openxmlformats.org/drawingml/2006/main" prst="rect">
-            <a:avLst/>
-          </a:prstGeom>
-          <a:noFill xmlns:a="http://schemas.openxmlformats.org/drawingml/2006/main"/>
-          <a:ln xmlns:a="http://schemas.openxmlformats.org/drawingml/2006/main" w="0">
-            <a:noFill/>
-            <a:prstDash val="solid"/>
-          </a:ln>
-        </p:spPr>
-        <p:txBody>
-          <a:bodyPr xmlns:a="http://schemas.openxmlformats.org/drawingml/2006/main" wrap="square" lIns="0" tIns="0" rIns="0" bIns="0" anchor="ctr">
-            <a:noAutofit/>
-          </a:bodyPr>
-          <a:lstStyle xmlns:a="http://schemas.openxmlformats.org/drawingml/2006/main"/>
-          <a:p xmlns:a="http://schemas.openxmlformats.org/drawingml/2006/main">
-            <a:pPr algn="ctr">
-              <a:lnSpc>
-                <a:spcPct val="100000"/>
-              </a:lnSpc>
-              <a:buNone/>
-              <a:defRPr sz="1275" b="1">
-                <a:solidFill>
-                  <a:srgbClr val="00A2EB"/>
-                </a:solidFill>
-                <a:latin typeface="Calibri"/>
-                <a:ea typeface="Calibri"/>
-                <a:cs typeface="Calibri"/>
-              </a:defRPr>
-            </a:pPr>
-            <a:r>
-              <a:rPr sz="1800" b="1">
-                <a:solidFill>
-                  <a:srgbClr val="00A2EB"/>
-                </a:solidFill>
-                <a:latin typeface="Calibri"/>
-                <a:ea typeface="Calibri"/>
-                <a:cs typeface="Calibri"/>
-              </a:rPr>
-              <a:t>MLFLOW</a:t>
-            </a:r>
-          </a:p>
-          <a:p xmlns:a="http://schemas.openxmlformats.org/drawingml/2006/main">
-            <a:pPr algn="ctr">
-              <a:lnSpc>
-                <a:spcPct val="100000"/>
-              </a:lnSpc>
-              <a:buNone/>
-              <a:defRPr sz="1275" b="1">
-                <a:solidFill>
-                  <a:srgbClr val="00A2EB"/>
-                </a:solidFill>
-                <a:latin typeface="Calibri"/>
-                <a:ea typeface="Calibri"/>
-                <a:cs typeface="Calibri"/>
-              </a:defRPr>
-            </a:pPr>
-            <a:r>
-              <a:rPr sz="1800" b="1">
-                <a:solidFill>
-                  <a:srgbClr val="00A2EB"/>
-                </a:solidFill>
-                <a:latin typeface="Calibri"/>
-                <a:ea typeface="Calibri"/>
-                <a:cs typeface="Calibri"/>
-              </a:rPr>
-              <a:t>RUN</a:t>
-            </a:r>
-          </a:p>
-        </p:txBody>
-      </p:sp>
-      <p:sp>
-        <p:nvSpPr>
-          <p:cNvPr id="8" name="">
-            <a:extLst xmlns:a="http://schemas.openxmlformats.org/drawingml/2006/main">
-              <a:ext uri="{FF2B5EF4-FFF2-40B4-BE49-F238E27FC236}">
-                <a16:creationId xmlns:a16="http://schemas.microsoft.com/office/drawing/2014/main" id="{9FF2A998-C21C-458F-BEED-486513923D87}"/>
-              </a:ext>
-            </a:extLst>
-          </p:cNvPr>
-          <p:cNvSpPr>
-            <a:spLocks xmlns:a="http://schemas.openxmlformats.org/drawingml/2006/main" noGrp="1"/>
-          </p:cNvSpPr>
-          <p:nvPr/>
-        </p:nvSpPr>
-        <p:spPr>
-          <a:xfrm xmlns:a="http://schemas.openxmlformats.org/drawingml/2006/main">
-            <a:off x="5467350" y="3390900"/>
-            <a:ext cx="2647950" cy="800100"/>
-          </a:xfrm>
-          <a:prstGeom xmlns:a="http://schemas.openxmlformats.org/drawingml/2006/main" prst="rect">
-            <a:avLst/>
-          </a:prstGeom>
-          <a:noFill xmlns:a="http://schemas.openxmlformats.org/drawingml/2006/main"/>
-          <a:ln xmlns:a="http://schemas.openxmlformats.org/drawingml/2006/main" w="0">
-            <a:noFill/>
-            <a:prstDash val="solid"/>
-          </a:ln>
-        </p:spPr>
-        <p:txBody>
-          <a:bodyPr xmlns:a="http://schemas.openxmlformats.org/drawingml/2006/main" wrap="square" lIns="0" tIns="0" rIns="0" bIns="0" anchor="ctr">
-            <a:noAutofit/>
-          </a:bodyPr>
-          <a:lstStyle xmlns:a="http://schemas.openxmlformats.org/drawingml/2006/main"/>
-          <a:p xmlns:a="http://schemas.openxmlformats.org/drawingml/2006/main">
-            <a:pPr algn="ctr">
-              <a:lnSpc>
-                <a:spcPct val="80000"/>
-              </a:lnSpc>
-              <a:buNone/>
-              <a:defRPr sz="2175" b="1">
-                <a:solidFill>
-                  <a:srgbClr val="051C2A"/>
-                </a:solidFill>
-                <a:latin typeface="Calibri"/>
-                <a:ea typeface="Calibri"/>
-                <a:cs typeface="Calibri"/>
-              </a:defRPr>
-            </a:pPr>
-            <a:r>
-              <a:rPr sz="1800" b="1">
-                <a:solidFill>
-                  <a:srgbClr val="051C2A"/>
-                </a:solidFill>
-                <a:latin typeface="Calibri"/>
-                <a:ea typeface="Calibri"/>
-                <a:cs typeface="Calibri"/>
-              </a:rPr>
-              <a:t>one configuration</a:t>
-            </a:r>
-          </a:p>
-          <a:p xmlns:a="http://schemas.openxmlformats.org/drawingml/2006/main">
-            <a:pPr algn="ctr">
-              <a:lnSpc>
-                <a:spcPct val="80000"/>
-              </a:lnSpc>
-              <a:buNone/>
-              <a:defRPr sz="2175" b="1">
-                <a:solidFill>
-                  <a:srgbClr val="051C2A"/>
-                </a:solidFill>
-                <a:latin typeface="Calibri"/>
-                <a:ea typeface="Calibri"/>
-                <a:cs typeface="Calibri"/>
-              </a:defRPr>
-            </a:pPr>
-            <a:r>
-              <a:rPr sz="1800" b="1">
-                <a:solidFill>
-                  <a:srgbClr val="051C2A"/>
-                </a:solidFill>
-                <a:latin typeface="Calibri"/>
-                <a:ea typeface="Calibri"/>
-                <a:cs typeface="Calibri"/>
-              </a:rPr>
-              <a:t>pure scorers</a:t>
-            </a:r>
-          </a:p>
-          <a:p xmlns:a="http://schemas.openxmlformats.org/drawingml/2006/main">
-            <a:pPr algn="ctr">
-              <a:lnSpc>
-                <a:spcPct val="80000"/>
-              </a:lnSpc>
-              <a:buNone/>
-              <a:defRPr sz="2175" b="1">
-                <a:solidFill>
-                  <a:srgbClr val="051C2A"/>
-                </a:solidFill>
-                <a:latin typeface="Calibri"/>
-                <a:ea typeface="Calibri"/>
-                <a:cs typeface="Calibri"/>
-              </a:defRPr>
-            </a:pPr>
-            <a:r>
-              <a:rPr sz="1800" b="1">
-                <a:solidFill>
-                  <a:srgbClr val="051C2A"/>
-                </a:solidFill>
-                <a:latin typeface="Calibri"/>
-                <a:ea typeface="Calibri"/>
-                <a:cs typeface="Calibri"/>
-              </a:rPr>
-              <a:t>score artifacts</a:t>
-            </a:r>
-          </a:p>
-        </p:txBody>
-      </p:sp>
-      <p:sp>
-        <p:nvSpPr>
-          <p:cNvPr id="9" name="">
-            <a:extLst xmlns:a="http://schemas.openxmlformats.org/drawingml/2006/main">
-              <a:ext uri="{FF2B5EF4-FFF2-40B4-BE49-F238E27FC236}">
-                <a16:creationId xmlns:a16="http://schemas.microsoft.com/office/drawing/2014/main" id="{EE8A313B-A32E-4318-B50D-32C786561C84}"/>
-              </a:ext>
-            </a:extLst>
-          </p:cNvPr>
-          <p:cNvSpPr>
-            <a:spLocks xmlns:a="http://schemas.openxmlformats.org/drawingml/2006/main" noGrp="1"/>
-          </p:cNvSpPr>
-          <p:nvPr/>
-        </p:nvSpPr>
-        <p:spPr>
-          <a:xfrm xmlns:a="http://schemas.openxmlformats.org/drawingml/2006/main">
-            <a:off x="5467350" y="4191000"/>
-            <a:ext cx="2647950" cy="476250"/>
-          </a:xfrm>
-          <a:prstGeom xmlns:a="http://schemas.openxmlformats.org/drawingml/2006/main" prst="rect">
-            <a:avLst/>
-          </a:prstGeom>
-          <a:noFill xmlns:a="http://schemas.openxmlformats.org/drawingml/2006/main"/>
-          <a:ln xmlns:a="http://schemas.openxmlformats.org/drawingml/2006/main" w="0">
-            <a:noFill/>
-            <a:prstDash val="solid"/>
-          </a:ln>
-        </p:spPr>
-        <p:txBody>
-          <a:bodyPr xmlns:a="http://schemas.openxmlformats.org/drawingml/2006/main" wrap="square" lIns="0" tIns="0" rIns="0" bIns="0" anchor="ctr">
-            <a:noAutofit/>
-          </a:bodyPr>
-          <a:lstStyle xmlns:a="http://schemas.openxmlformats.org/drawingml/2006/main"/>
-          <a:p xmlns:a="http://schemas.openxmlformats.org/drawingml/2006/main">
-            <a:pPr algn="ctr">
-              <a:lnSpc>
-                <a:spcPct val="70000"/>
-              </a:lnSpc>
-              <a:buNone/>
-              <a:defRPr sz="1275" b="0">
-                <a:solidFill>
-                  <a:srgbClr val="1F40CB"/>
-                </a:solidFill>
-                <a:latin typeface="Calibri"/>
-                <a:ea typeface="Calibri"/>
-                <a:cs typeface="Calibri"/>
-              </a:defRPr>
-            </a:pPr>
-            <a:r>
-              <a:rPr sz="1800" b="0">
-                <a:solidFill>
-                  <a:srgbClr val="1F40CB"/>
-                </a:solidFill>
-                <a:latin typeface="Calibri"/>
-                <a:ea typeface="Calibri"/>
-                <a:cs typeface="Calibri"/>
-              </a:rPr>
-              <a:t>ROOT TRACE per case</a:t>
-            </a:r>
-          </a:p>
-        </p:txBody>
-      </p:sp>
-      <p:sp>
-        <p:nvSpPr>
-          <p:cNvPr id="10" name="decision-parent">
-            <a:extLst xmlns:a="http://schemas.openxmlformats.org/drawingml/2006/main">
-              <a:ext uri="{FF2B5EF4-FFF2-40B4-BE49-F238E27FC236}">
-                <a16:creationId xmlns:a16="http://schemas.microsoft.com/office/drawing/2014/main" id="{7E8CC043-3F7C-4B5E-B01A-E942C33D8740}"/>
-              </a:ext>
-            </a:extLst>
-          </p:cNvPr>
-          <p:cNvSpPr>
-            <a:spLocks xmlns:a="http://schemas.openxmlformats.org/drawingml/2006/main" noGrp="1"/>
-          </p:cNvSpPr>
-          <p:nvPr/>
-        </p:nvSpPr>
-        <p:spPr>
-          <a:xfrm xmlns:a="http://schemas.openxmlformats.org/drawingml/2006/main">
-            <a:off x="9829800" y="2990850"/>
-            <a:ext cx="3543300" cy="1562100"/>
-          </a:xfrm>
-          <a:prstGeom xmlns:a="http://schemas.openxmlformats.org/drawingml/2006/main" prst="roundRect">
-            <a:avLst>
-              <a:gd name="adj" fmla="val 7317"/>
-            </a:avLst>
-          </a:prstGeom>
-          <a:solidFill xmlns:a="http://schemas.openxmlformats.org/drawingml/2006/main">
-            <a:srgbClr val="062433"/>
-          </a:solidFill>
-          <a:ln xmlns:a="http://schemas.openxmlformats.org/drawingml/2006/main" w="9525">
-            <a:solidFill>
-              <a:srgbClr val="062433"/>
-            </a:solidFill>
-            <a:prstDash val="solid"/>
-          </a:ln>
-        </p:spPr>
-      </p:sp>
-      <p:sp>
-        <p:nvSpPr>
-          <p:cNvPr id="11" name="">
-            <a:extLst xmlns:a="http://schemas.openxmlformats.org/drawingml/2006/main">
-              <a:ext uri="{FF2B5EF4-FFF2-40B4-BE49-F238E27FC236}">
-                <a16:creationId xmlns:a16="http://schemas.microsoft.com/office/drawing/2014/main" id="{0595FD15-7156-4E52-87B2-404D626063B5}"/>
-              </a:ext>
-            </a:extLst>
-          </p:cNvPr>
-          <p:cNvSpPr>
-            <a:spLocks xmlns:a="http://schemas.openxmlformats.org/drawingml/2006/main" noGrp="1"/>
-          </p:cNvSpPr>
-          <p:nvPr/>
-        </p:nvSpPr>
-        <p:spPr>
-          <a:xfrm xmlns:a="http://schemas.openxmlformats.org/drawingml/2006/main">
-            <a:off x="10134600" y="3181350"/>
-            <a:ext cx="2933700" cy="323850"/>
-          </a:xfrm>
-          <a:prstGeom xmlns:a="http://schemas.openxmlformats.org/drawingml/2006/main" prst="rect">
-            <a:avLst/>
-          </a:prstGeom>
-          <a:noFill xmlns:a="http://schemas.openxmlformats.org/drawingml/2006/main"/>
-          <a:ln xmlns:a="http://schemas.openxmlformats.org/drawingml/2006/main" w="0">
-            <a:noFill/>
-            <a:prstDash val="solid"/>
-          </a:ln>
-        </p:spPr>
-        <p:txBody>
-          <a:bodyPr xmlns:a="http://schemas.openxmlformats.org/drawingml/2006/main" wrap="square" lIns="0" tIns="0" rIns="0" bIns="0" anchor="ctr">
-            <a:noAutofit/>
-          </a:bodyPr>
-          <a:lstStyle xmlns:a="http://schemas.openxmlformats.org/drawingml/2006/main"/>
-          <a:p xmlns:a="http://schemas.openxmlformats.org/drawingml/2006/main">
-            <a:pPr algn="ctr">
-              <a:lnSpc>
-                <a:spcPct val="100000"/>
-              </a:lnSpc>
-              <a:buNone/>
-              <a:defRPr sz="1350" b="1">
-                <a:solidFill>
-                  <a:srgbClr val="00A2EB"/>
-                </a:solidFill>
-                <a:latin typeface="Calibri"/>
-                <a:ea typeface="Calibri"/>
-                <a:cs typeface="Calibri"/>
-              </a:defRPr>
-            </a:pPr>
-            <a:r>
-              <a:rPr sz="1800" b="1">
-                <a:solidFill>
-                  <a:srgbClr val="00A2EB"/>
-                </a:solidFill>
-                <a:latin typeface="Calibri"/>
-                <a:ea typeface="Calibri"/>
-                <a:cs typeface="Calibri"/>
-              </a:rPr>
-              <a:t>ROOT TRACES</a:t>
-            </a:r>
-          </a:p>
-        </p:txBody>
-      </p:sp>
-      <p:sp>
-        <p:nvSpPr>
-          <p:cNvPr id="12" name="">
-            <a:extLst xmlns:a="http://schemas.openxmlformats.org/drawingml/2006/main">
-              <a:ext uri="{FF2B5EF4-FFF2-40B4-BE49-F238E27FC236}">
-                <a16:creationId xmlns:a16="http://schemas.microsoft.com/office/drawing/2014/main" id="{39CEFAC4-B99C-4E5B-B744-4D0EEDB15B0B}"/>
-              </a:ext>
-            </a:extLst>
-          </p:cNvPr>
-          <p:cNvSpPr>
-            <a:spLocks xmlns:a="http://schemas.openxmlformats.org/drawingml/2006/main" noGrp="1"/>
-          </p:cNvSpPr>
-          <p:nvPr/>
-        </p:nvSpPr>
-        <p:spPr>
-          <a:xfrm xmlns:a="http://schemas.openxmlformats.org/drawingml/2006/main">
-            <a:off x="10134600" y="3638550"/>
-            <a:ext cx="2933700" cy="685800"/>
-          </a:xfrm>
-          <a:prstGeom xmlns:a="http://schemas.openxmlformats.org/drawingml/2006/main" prst="rect">
-            <a:avLst/>
-          </a:prstGeom>
-          <a:noFill xmlns:a="http://schemas.openxmlformats.org/drawingml/2006/main"/>
-          <a:ln xmlns:a="http://schemas.openxmlformats.org/drawingml/2006/main" w="0">
-            <a:noFill/>
-            <a:prstDash val="solid"/>
-          </a:ln>
-        </p:spPr>
-        <p:txBody>
-          <a:bodyPr xmlns:a="http://schemas.openxmlformats.org/drawingml/2006/main" wrap="square" lIns="0" tIns="0" rIns="0" bIns="0" anchor="ctr">
-            <a:normAutofit fontScale="90330"/>
-          </a:bodyPr>
-          <a:lstStyle xmlns:a="http://schemas.openxmlformats.org/drawingml/2006/main"/>
-          <a:p xmlns:a="http://schemas.openxmlformats.org/drawingml/2006/main">
-            <a:pPr algn="ctr">
-              <a:lnSpc>
-                <a:spcPct val="100000"/>
-              </a:lnSpc>
-              <a:buNone/>
-              <a:defRPr sz="2100" b="1">
-                <a:solidFill>
-                  <a:srgbClr val="FFFFFF"/>
-                </a:solidFill>
-                <a:latin typeface="Calibri"/>
-                <a:ea typeface="Calibri"/>
-                <a:cs typeface="Calibri"/>
-              </a:defRPr>
-            </a:pPr>
-            <a:r>
-              <a:rPr sz="2100" b="1">
-                <a:solidFill>
-                  <a:srgbClr val="FFFFFF"/>
-                </a:solidFill>
-                <a:latin typeface="Calibri"/>
-                <a:ea typeface="Calibri"/>
-                <a:cs typeface="Calibri"/>
-              </a:rPr>
-              <a:t>public steps + TOOL calls</a:t>
-            </a:r>
-          </a:p>
-          <a:p xmlns:a="http://schemas.openxmlformats.org/drawingml/2006/main">
-            <a:pPr algn="ctr">
-              <a:lnSpc>
-                <a:spcPct val="100000"/>
-              </a:lnSpc>
-              <a:buNone/>
-              <a:defRPr sz="2100" b="1">
-                <a:solidFill>
-                  <a:srgbClr val="FFFFFF"/>
-                </a:solidFill>
-                <a:latin typeface="Calibri"/>
-                <a:ea typeface="Calibri"/>
-                <a:cs typeface="Calibri"/>
-              </a:defRPr>
-            </a:pPr>
-            <a:r>
-              <a:rPr sz="2100" b="1">
-                <a:solidFill>
-                  <a:srgbClr val="FFFFFF"/>
-                </a:solidFill>
-                <a:latin typeface="Calibri"/>
-                <a:ea typeface="Calibri"/>
-                <a:cs typeface="Calibri"/>
-              </a:rPr>
-              <a:t>scores + diagnosis</a:t>
-            </a:r>
-          </a:p>
-        </p:txBody>
-      </p:sp>
-      <p:cxnSp>
-        <p:nvCxnSpPr>
-          <p:cNvPr id="404" name=""/>
-          <p:cNvCxnSpPr>
-            <a:stCxn xmlns:a="http://schemas.openxmlformats.org/drawingml/2006/main" id="3" idx="3"/>
-            <a:endCxn xmlns:a="http://schemas.openxmlformats.org/drawingml/2006/main" id="6" idx="1"/>
-          </p:cNvCxnSpPr>
-          <p:nvPr/>
-        </p:nvCxnSpPr>
-        <p:spPr>
-          <a:xfrm xmlns:a="http://schemas.openxmlformats.org/drawingml/2006/main">
-            <a:off x="3752850" y="3771900"/>
-            <a:ext cx="1409700" cy="0"/>
-          </a:xfrm>
-          <a:prstGeom xmlns:a="http://schemas.openxmlformats.org/drawingml/2006/main" prst="straightConnector1">
-            <a:avLst/>
-          </a:prstGeom>
-          <a:ln xmlns:a="http://schemas.openxmlformats.org/drawingml/2006/main" w="28575">
-            <a:solidFill>
-              <a:srgbClr val="F07D00"/>
-            </a:solidFill>
-            <a:prstDash val="solid"/>
-            <a:tailEnd type="triangle" w="med" len="med"/>
-          </a:ln>
-        </p:spPr>
-      </p:cxnSp>
-      <p:cxnSp>
-        <p:nvCxnSpPr>
-          <p:cNvPr id="405" name=""/>
-          <p:cNvCxnSpPr>
-            <a:stCxn xmlns:a="http://schemas.openxmlformats.org/drawingml/2006/main" id="6" idx="3"/>
-            <a:endCxn xmlns:a="http://schemas.openxmlformats.org/drawingml/2006/main" id="10" idx="1"/>
-          </p:cNvCxnSpPr>
-          <p:nvPr/>
-        </p:nvCxnSpPr>
-        <p:spPr>
-          <a:xfrm xmlns:a="http://schemas.openxmlformats.org/drawingml/2006/main" flipV="0">
-            <a:off x="8420100" y="3771900"/>
-            <a:ext cx="1409700" cy="0"/>
-          </a:xfrm>
-          <a:prstGeom xmlns:a="http://schemas.openxmlformats.org/drawingml/2006/main" prst="straightConnector1">
-            <a:avLst/>
-          </a:prstGeom>
-          <a:ln xmlns:a="http://schemas.openxmlformats.org/drawingml/2006/main" w="28575">
-            <a:solidFill>
-              <a:srgbClr val="F07D00"/>
-            </a:solidFill>
-            <a:prstDash val="solid"/>
-            <a:tailEnd type="triangle" w="med" len="med"/>
-          </a:ln>
-        </p:spPr>
-      </p:cxnSp>
-      <p:sp>
-        <p:nvSpPr>
-          <p:cNvPr id="15" name="">
-            <a:extLst xmlns:a="http://schemas.openxmlformats.org/drawingml/2006/main">
-              <a:ext uri="{FF2B5EF4-FFF2-40B4-BE49-F238E27FC236}">
-                <a16:creationId xmlns:a16="http://schemas.microsoft.com/office/drawing/2014/main" id="{FE1BEF3A-6A25-4B3F-8E60-6108148E5582}"/>
-              </a:ext>
-            </a:extLst>
-          </p:cNvPr>
-          <p:cNvSpPr>
-            <a:spLocks xmlns:a="http://schemas.openxmlformats.org/drawingml/2006/main" noGrp="1"/>
-          </p:cNvSpPr>
-          <p:nvPr/>
-        </p:nvSpPr>
-        <p:spPr>
-          <a:xfrm xmlns:a="http://schemas.openxmlformats.org/drawingml/2006/main">
-            <a:off x="1600200" y="5467350"/>
-            <a:ext cx="12039600" cy="1123950"/>
-          </a:xfrm>
-          <a:prstGeom xmlns:a="http://schemas.openxmlformats.org/drawingml/2006/main" prst="roundRect">
-            <a:avLst>
-              <a:gd name="adj" fmla="val 8475"/>
-            </a:avLst>
-          </a:prstGeom>
-          <a:solidFill xmlns:a="http://schemas.openxmlformats.org/drawingml/2006/main">
-            <a:srgbClr val="FFFFFF"/>
-          </a:solidFill>
-          <a:ln xmlns:a="http://schemas.openxmlformats.org/drawingml/2006/main" w="9525">
-            <a:solidFill>
-              <a:srgbClr val="E4E7E9"/>
-            </a:solidFill>
-            <a:prstDash val="solid"/>
-          </a:ln>
-        </p:spPr>
-      </p:sp>
-      <p:sp>
-        <p:nvSpPr>
-          <p:cNvPr id="16" name="">
-            <a:extLst xmlns:a="http://schemas.openxmlformats.org/drawingml/2006/main">
-              <a:ext uri="{FF2B5EF4-FFF2-40B4-BE49-F238E27FC236}">
-                <a16:creationId xmlns:a16="http://schemas.microsoft.com/office/drawing/2014/main" id="{DFE4947E-2E2C-4D5A-B088-DFED206E71BC}"/>
-              </a:ext>
-            </a:extLst>
-          </p:cNvPr>
-          <p:cNvSpPr>
-            <a:spLocks xmlns:a="http://schemas.openxmlformats.org/drawingml/2006/main" noGrp="1"/>
-          </p:cNvSpPr>
-          <p:nvPr/>
-        </p:nvSpPr>
-        <p:spPr>
-          <a:xfrm xmlns:a="http://schemas.openxmlformats.org/drawingml/2006/main">
-            <a:off x="1943100" y="5638800"/>
-            <a:ext cx="2476500" cy="285750"/>
-          </a:xfrm>
-          <a:prstGeom xmlns:a="http://schemas.openxmlformats.org/drawingml/2006/main" prst="rect">
-            <a:avLst/>
-          </a:prstGeom>
-          <a:noFill xmlns:a="http://schemas.openxmlformats.org/drawingml/2006/main"/>
-          <a:ln xmlns:a="http://schemas.openxmlformats.org/drawingml/2006/main" w="0">
-            <a:noFill/>
-            <a:prstDash val="solid"/>
-          </a:ln>
-        </p:spPr>
-        <p:txBody>
-          <a:bodyPr xmlns:a="http://schemas.openxmlformats.org/drawingml/2006/main" wrap="square" lIns="0" tIns="0" rIns="0" bIns="0" anchor="ctr">
-            <a:noAutofit/>
-          </a:bodyPr>
-          <a:lstStyle xmlns:a="http://schemas.openxmlformats.org/drawingml/2006/main"/>
-          <a:p xmlns:a="http://schemas.openxmlformats.org/drawingml/2006/main">
-            <a:pPr algn="l">
-              <a:lnSpc>
-                <a:spcPct val="100000"/>
-              </a:lnSpc>
-              <a:buNone/>
-              <a:defRPr sz="1275" b="1">
-                <a:solidFill>
-                  <a:srgbClr val="F07D00"/>
-                </a:solidFill>
-                <a:latin typeface="Calibri"/>
-                <a:ea typeface="Calibri"/>
-                <a:cs typeface="Calibri"/>
-              </a:defRPr>
-            </a:pPr>
-            <a:r>
-              <a:rPr sz="1800" b="1">
-                <a:solidFill>
-                  <a:srgbClr val="F07D00"/>
-                </a:solidFill>
-                <a:latin typeface="Calibri"/>
-                <a:ea typeface="Calibri"/>
-                <a:cs typeface="Calibri"/>
-              </a:rPr>
-              <a:t>STORE</a:t>
-            </a:r>
-          </a:p>
-        </p:txBody>
-      </p:sp>
-      <p:sp>
-        <p:nvSpPr>
-          <p:cNvPr id="17" name="">
-            <a:extLst xmlns:a="http://schemas.openxmlformats.org/drawingml/2006/main">
-              <a:ext uri="{FF2B5EF4-FFF2-40B4-BE49-F238E27FC236}">
-                <a16:creationId xmlns:a16="http://schemas.microsoft.com/office/drawing/2014/main" id="{DC1A217F-7E45-4462-994A-E1A7947A47FC}"/>
-              </a:ext>
-            </a:extLst>
-          </p:cNvPr>
-          <p:cNvSpPr>
-            <a:spLocks xmlns:a="http://schemas.openxmlformats.org/drawingml/2006/main" noGrp="1"/>
-          </p:cNvSpPr>
-          <p:nvPr/>
-        </p:nvSpPr>
-        <p:spPr>
-          <a:xfrm xmlns:a="http://schemas.openxmlformats.org/drawingml/2006/main">
-            <a:off x="1943100" y="5962650"/>
-            <a:ext cx="4953000" cy="400050"/>
-          </a:xfrm>
-          <a:prstGeom xmlns:a="http://schemas.openxmlformats.org/drawingml/2006/main" prst="rect">
-            <a:avLst/>
-          </a:prstGeom>
-          <a:noFill xmlns:a="http://schemas.openxmlformats.org/drawingml/2006/main"/>
-          <a:ln xmlns:a="http://schemas.openxmlformats.org/drawingml/2006/main" w="0">
-            <a:noFill/>
-            <a:prstDash val="solid"/>
-          </a:ln>
-        </p:spPr>
-        <p:txBody>
-          <a:bodyPr xmlns:a="http://schemas.openxmlformats.org/drawingml/2006/main" wrap="square" lIns="0" tIns="0" rIns="0" bIns="0" anchor="ctr">
-            <a:normAutofit fontScale="100000"/>
-          </a:bodyPr>
-          <a:lstStyle xmlns:a="http://schemas.openxmlformats.org/drawingml/2006/main"/>
-          <a:p xmlns:a="http://schemas.openxmlformats.org/drawingml/2006/main">
-            <a:pPr algn="l">
-              <a:lnSpc>
-                <a:spcPct val="100000"/>
-              </a:lnSpc>
-              <a:buNone/>
-              <a:defRPr sz="1650" b="1">
-                <a:solidFill>
-                  <a:srgbClr val="051C2A"/>
-                </a:solidFill>
-                <a:latin typeface="Calibri"/>
-                <a:ea typeface="Calibri"/>
-                <a:cs typeface="Calibri"/>
-              </a:defRPr>
-            </a:pPr>
-            <a:r>
-              <a:rPr sz="1650" b="1">
-                <a:solidFill>
-                  <a:srgbClr val="051C2A"/>
-                </a:solidFill>
-                <a:latin typeface="Calibri"/>
-                <a:ea typeface="Calibri"/>
-                <a:cs typeface="Calibri"/>
-              </a:rPr>
-              <a:t>one run per configuration</a:t>
-            </a:r>
-          </a:p>
-        </p:txBody>
-      </p:sp>
-      <p:sp>
-        <p:nvSpPr>
-          <p:cNvPr id="18" name="">
-            <a:extLst xmlns:a="http://schemas.openxmlformats.org/drawingml/2006/main">
-              <a:ext uri="{FF2B5EF4-FFF2-40B4-BE49-F238E27FC236}">
-                <a16:creationId xmlns:a16="http://schemas.microsoft.com/office/drawing/2014/main" id="{4B74CAF0-D3F9-408B-B959-2864FA7108BD}"/>
-              </a:ext>
-            </a:extLst>
-          </p:cNvPr>
-          <p:cNvSpPr>
-            <a:spLocks xmlns:a="http://schemas.openxmlformats.org/drawingml/2006/main" noGrp="1"/>
-          </p:cNvSpPr>
-          <p:nvPr/>
-        </p:nvSpPr>
-        <p:spPr>
-          <a:xfrm xmlns:a="http://schemas.openxmlformats.org/drawingml/2006/main">
-            <a:off x="7486650" y="5638800"/>
-            <a:ext cx="28575" cy="742950"/>
-          </a:xfrm>
-          <a:prstGeom xmlns:a="http://schemas.openxmlformats.org/drawingml/2006/main" prst="rect">
-            <a:avLst/>
-          </a:prstGeom>
-          <a:solidFill xmlns:a="http://schemas.openxmlformats.org/drawingml/2006/main">
-            <a:srgbClr val="E4E7E9"/>
-          </a:solidFill>
-          <a:ln xmlns:a="http://schemas.openxmlformats.org/drawingml/2006/main" w="0">
-            <a:solidFill>
-              <a:srgbClr val="E4E7E9"/>
-            </a:solidFill>
-            <a:prstDash val="solid"/>
-          </a:ln>
-        </p:spPr>
-      </p:sp>
-      <p:sp>
-        <p:nvSpPr>
-          <p:cNvPr id="19" name="">
-            <a:extLst xmlns:a="http://schemas.openxmlformats.org/drawingml/2006/main">
-              <a:ext uri="{FF2B5EF4-FFF2-40B4-BE49-F238E27FC236}">
-                <a16:creationId xmlns:a16="http://schemas.microsoft.com/office/drawing/2014/main" id="{F6C058E3-0326-4715-852F-1F8B32F61FB5}"/>
-              </a:ext>
-            </a:extLst>
-          </p:cNvPr>
-          <p:cNvSpPr>
-            <a:spLocks xmlns:a="http://schemas.openxmlformats.org/drawingml/2006/main" noGrp="1"/>
-          </p:cNvSpPr>
-          <p:nvPr/>
-        </p:nvSpPr>
-        <p:spPr>
-          <a:xfrm xmlns:a="http://schemas.openxmlformats.org/drawingml/2006/main">
-            <a:off x="7867650" y="5638800"/>
-            <a:ext cx="3143250" cy="285750"/>
-          </a:xfrm>
-          <a:prstGeom xmlns:a="http://schemas.openxmlformats.org/drawingml/2006/main" prst="rect">
-            <a:avLst/>
-          </a:prstGeom>
-          <a:noFill xmlns:a="http://schemas.openxmlformats.org/drawingml/2006/main"/>
-          <a:ln xmlns:a="http://schemas.openxmlformats.org/drawingml/2006/main" w="0">
-            <a:noFill/>
-            <a:prstDash val="solid"/>
-          </a:ln>
-        </p:spPr>
-        <p:txBody>
-          <a:bodyPr xmlns:a="http://schemas.openxmlformats.org/drawingml/2006/main" wrap="square" lIns="0" tIns="0" rIns="0" bIns="0" anchor="ctr">
-            <a:noAutofit/>
-          </a:bodyPr>
-          <a:lstStyle xmlns:a="http://schemas.openxmlformats.org/drawingml/2006/main"/>
-          <a:p xmlns:a="http://schemas.openxmlformats.org/drawingml/2006/main">
-            <a:pPr algn="l">
-              <a:lnSpc>
-                <a:spcPct val="100000"/>
-              </a:lnSpc>
-              <a:buNone/>
-              <a:defRPr sz="1275" b="1">
-                <a:solidFill>
-                  <a:srgbClr val="00A2EB"/>
-                </a:solidFill>
-                <a:latin typeface="Calibri"/>
-                <a:ea typeface="Calibri"/>
-                <a:cs typeface="Calibri"/>
-              </a:defRPr>
-            </a:pPr>
-            <a:r>
-              <a:rPr sz="1800" b="1">
-                <a:solidFill>
-                  <a:srgbClr val="00A2EB"/>
-                </a:solidFill>
-                <a:latin typeface="Calibri"/>
-                <a:ea typeface="Calibri"/>
-                <a:cs typeface="Calibri"/>
-              </a:rPr>
-              <a:t>COMPARE</a:t>
-            </a:r>
-          </a:p>
-        </p:txBody>
-      </p:sp>
-      <p:sp>
-        <p:nvSpPr>
-          <p:cNvPr id="20" name="">
-            <a:extLst xmlns:a="http://schemas.openxmlformats.org/drawingml/2006/main">
-              <a:ext uri="{FF2B5EF4-FFF2-40B4-BE49-F238E27FC236}">
-                <a16:creationId xmlns:a16="http://schemas.microsoft.com/office/drawing/2014/main" id="{0AA9B25E-ADFB-4067-BF4C-46A5AE9FE838}"/>
-              </a:ext>
-            </a:extLst>
-          </p:cNvPr>
-          <p:cNvSpPr>
-            <a:spLocks xmlns:a="http://schemas.openxmlformats.org/drawingml/2006/main" noGrp="1"/>
-          </p:cNvSpPr>
-          <p:nvPr/>
-        </p:nvSpPr>
-        <p:spPr>
-          <a:xfrm xmlns:a="http://schemas.openxmlformats.org/drawingml/2006/main">
-            <a:off x="7867650" y="5962650"/>
-            <a:ext cx="5143500" cy="400050"/>
-          </a:xfrm>
-          <a:prstGeom xmlns:a="http://schemas.openxmlformats.org/drawingml/2006/main" prst="rect">
-            <a:avLst/>
-          </a:prstGeom>
-          <a:noFill xmlns:a="http://schemas.openxmlformats.org/drawingml/2006/main"/>
-          <a:ln xmlns:a="http://schemas.openxmlformats.org/drawingml/2006/main" w="0">
-            <a:noFill/>
-            <a:prstDash val="solid"/>
-          </a:ln>
-        </p:spPr>
-        <p:txBody>
-          <a:bodyPr xmlns:a="http://schemas.openxmlformats.org/drawingml/2006/main" wrap="square" lIns="0" tIns="0" rIns="0" bIns="0" anchor="ctr">
-            <a:normAutofit fontScale="100000"/>
-          </a:bodyPr>
-          <a:lstStyle xmlns:a="http://schemas.openxmlformats.org/drawingml/2006/main"/>
-          <a:p xmlns:a="http://schemas.openxmlformats.org/drawingml/2006/main">
-            <a:pPr algn="l">
-              <a:lnSpc>
-                <a:spcPct val="100000"/>
-              </a:lnSpc>
-              <a:buNone/>
-              <a:defRPr sz="1650" b="1">
-                <a:solidFill>
-                  <a:srgbClr val="051C2A"/>
-                </a:solidFill>
-                <a:latin typeface="Calibri"/>
-                <a:ea typeface="Calibri"/>
-                <a:cs typeface="Calibri"/>
-              </a:defRPr>
-            </a:pPr>
-            <a:r>
-              <a:rPr sz="1650" b="1">
-                <a:solidFill>
-                  <a:srgbClr val="051C2A"/>
-                </a:solidFill>
-                <a:latin typeface="Calibri"/>
-                <a:ea typeface="Calibri"/>
-                <a:cs typeface="Calibri"/>
-              </a:rPr>
-              <a:t>same cases and five metrics</a:t>
+              <a:t>A trace reveals what the agent actually did</a:t>
             </a:r>
           </a:p>
         </p:txBody>
@@ -9464,7 +8107,7 @@
                 <a:ea typeface="Calibri"/>
                 <a:cs typeface="Calibri"/>
               </a:rPr>
-              <a:t>MLFLOW</a:t>
+              <a:t>TRACE</a:t>
             </a:r>
           </a:p>
         </p:txBody>
@@ -9526,7 +8169,7 @@
                 <a:ea typeface="Calibri"/>
                 <a:cs typeface="Calibri"/>
               </a:rPr>
-              <a:t>Cases flow through pure scorers; MLflow records evidence.</a:t>
+              <a:t>Open a score, follow its span tree, find the earliest public failure.</a:t>
             </a:r>
           </a:p>
         </p:txBody>
@@ -9716,7 +8359,7 @@
                 <a:ea typeface="Calibri"/>
                 <a:cs typeface="Calibri"/>
               </a:rPr>
-              <a:t>RUN</a:t>
+              <a:t>TRACE</a:t>
             </a:r>
           </a:p>
         </p:txBody>
@@ -9779,6 +8422,818 @@
                 <a:cs typeface="Calibri"/>
               </a:rPr>
               <a:t>05</a:t>
+            </a:r>
+          </a:p>
+        </p:txBody>
+      </p:sp>
+      <p:pic>
+        <p:nvPicPr>
+          <p:cNvPr id="57" name=""/>
+          <p:cNvPicPr>
+            <a:picLocks xmlns:a="http://schemas.openxmlformats.org/drawingml/2006/main" noChangeAspect="1"/>
+          </p:cNvPicPr>
+          <p:nvPr/>
+        </p:nvPicPr>
+        <p:blipFill>
+          <a:blip xmlns:r="http://schemas.openxmlformats.org/officeDocument/2006/relationships" xmlns:a="http://schemas.openxmlformats.org/drawingml/2006/main" r:embed="R4be0e4dc5f4f427d"/>
+          <a:stretch xmlns:a="http://schemas.openxmlformats.org/drawingml/2006/main"/>
+        </p:blipFill>
+        <p:spPr>
+          <a:xfrm xmlns:a="http://schemas.openxmlformats.org/drawingml/2006/main">
+            <a:off x="2385514" y="2400300"/>
+            <a:ext cx="7173321" cy="4095750"/>
+          </a:xfrm>
+          <a:prstGeom xmlns:a="http://schemas.openxmlformats.org/drawingml/2006/main" prst="rect">
+            <a:avLst/>
+          </a:prstGeom>
+        </p:spPr>
+      </p:pic>
+      <p:pic>
+        <p:nvPicPr>
+          <p:cNvPr id="58" name=""/>
+          <p:cNvPicPr>
+            <a:picLocks xmlns:a="http://schemas.openxmlformats.org/drawingml/2006/main" noChangeAspect="1"/>
+          </p:cNvPicPr>
+          <p:nvPr/>
+        </p:nvPicPr>
+        <p:blipFill>
+          <a:blip xmlns:r="http://schemas.openxmlformats.org/officeDocument/2006/relationships" xmlns:a="http://schemas.openxmlformats.org/drawingml/2006/main" r:embed="Rc5ba48b4d7a440df">
+            <a:extLst>
+              <a:ext uri="{96DAC541-7B7A-43D3-8B79-37D633B846F1}">
+                <asvg:svgBlip xmlns:asvg="http://schemas.microsoft.com/office/drawing/2016/SVG/main" r:embed="R977b11d50ad84323"/>
+              </a:ext>
+            </a:extLst>
+          </a:blip>
+          <a:stretch xmlns:a="http://schemas.openxmlformats.org/drawingml/2006/main"/>
+        </p:blipFill>
+        <p:spPr>
+          <a:xfrm xmlns:a="http://schemas.openxmlformats.org/drawingml/2006/main">
+            <a:off x="11239500" y="2476500"/>
+            <a:ext cx="2476500" cy="47625"/>
+          </a:xfrm>
+          <a:prstGeom xmlns:a="http://schemas.openxmlformats.org/drawingml/2006/main" prst="rect">
+            <a:avLst/>
+          </a:prstGeom>
+        </p:spPr>
+      </p:pic>
+      <p:sp>
+        <p:nvSpPr>
+          <p:cNvPr id="31" name="">
+            <a:extLst xmlns:a="http://schemas.openxmlformats.org/drawingml/2006/main">
+              <a:ext uri="{FF2B5EF4-FFF2-40B4-BE49-F238E27FC236}">
+                <a16:creationId xmlns:a16="http://schemas.microsoft.com/office/drawing/2014/main" id="{8DD7FDBA-045F-4FFC-B2E3-5269F239D08B}"/>
+              </a:ext>
+            </a:extLst>
+          </p:cNvPr>
+          <p:cNvSpPr>
+            <a:spLocks xmlns:a="http://schemas.openxmlformats.org/drawingml/2006/main" noGrp="1"/>
+          </p:cNvSpPr>
+          <p:nvPr/>
+        </p:nvSpPr>
+        <p:spPr>
+          <a:xfrm xmlns:a="http://schemas.openxmlformats.org/drawingml/2006/main">
+            <a:off x="11239500" y="2667000"/>
+            <a:ext cx="2667000" cy="323850"/>
+          </a:xfrm>
+          <a:prstGeom xmlns:a="http://schemas.openxmlformats.org/drawingml/2006/main" prst="rect">
+            <a:avLst/>
+          </a:prstGeom>
+          <a:noFill xmlns:a="http://schemas.openxmlformats.org/drawingml/2006/main"/>
+          <a:ln xmlns:a="http://schemas.openxmlformats.org/drawingml/2006/main" w="0">
+            <a:noFill/>
+            <a:prstDash val="solid"/>
+          </a:ln>
+        </p:spPr>
+        <p:txBody>
+          <a:bodyPr xmlns:a="http://schemas.openxmlformats.org/drawingml/2006/main"/>
+          <a:lstStyle xmlns:a="http://schemas.openxmlformats.org/drawingml/2006/main"/>
+          <a:p xmlns:a="http://schemas.openxmlformats.org/drawingml/2006/main">
+            <a:pPr algn="l">
+              <a:defRPr sz="1275" b="1">
+                <a:solidFill>
+                  <a:srgbClr val="00A6E8"/>
+                </a:solidFill>
+              </a:defRPr>
+            </a:pPr>
+            <a:r>
+              <a:rPr sz="1275" b="1">
+                <a:solidFill>
+                  <a:srgbClr val="00A6E8"/>
+                </a:solidFill>
+              </a:rPr>
+              <a:t>HOW TO READ IT</a:t>
+            </a:r>
+          </a:p>
+        </p:txBody>
+      </p:sp>
+      <p:pic>
+        <p:nvPicPr>
+          <p:cNvPr id="60" name=""/>
+          <p:cNvPicPr>
+            <a:picLocks xmlns:a="http://schemas.openxmlformats.org/drawingml/2006/main" noChangeAspect="1"/>
+          </p:cNvPicPr>
+          <p:nvPr/>
+        </p:nvPicPr>
+        <p:blipFill>
+          <a:blip xmlns:r="http://schemas.openxmlformats.org/officeDocument/2006/relationships" xmlns:a="http://schemas.openxmlformats.org/drawingml/2006/main" r:embed="R424b29cc17da47f6">
+            <a:extLst>
+              <a:ext uri="{96DAC541-7B7A-43D3-8B79-37D633B846F1}">
+                <asvg:svgBlip xmlns:asvg="http://schemas.microsoft.com/office/drawing/2016/SVG/main" r:embed="R0a59c8d0018d4623"/>
+              </a:ext>
+            </a:extLst>
+          </a:blip>
+          <a:stretch xmlns:a="http://schemas.openxmlformats.org/drawingml/2006/main"/>
+        </p:blipFill>
+        <p:spPr>
+          <a:xfrm xmlns:a="http://schemas.openxmlformats.org/drawingml/2006/main">
+            <a:off x="11239500" y="3143250"/>
+            <a:ext cx="400050" cy="400050"/>
+          </a:xfrm>
+          <a:prstGeom xmlns:a="http://schemas.openxmlformats.org/drawingml/2006/main" prst="rect">
+            <a:avLst/>
+          </a:prstGeom>
+        </p:spPr>
+      </p:pic>
+      <p:sp>
+        <p:nvSpPr>
+          <p:cNvPr id="33" name="">
+            <a:extLst xmlns:a="http://schemas.openxmlformats.org/drawingml/2006/main">
+              <a:ext uri="{FF2B5EF4-FFF2-40B4-BE49-F238E27FC236}">
+                <a16:creationId xmlns:a16="http://schemas.microsoft.com/office/drawing/2014/main" id="{1E38C767-1419-4CB0-9177-B51A50CDF81A}"/>
+              </a:ext>
+            </a:extLst>
+          </p:cNvPr>
+          <p:cNvSpPr>
+            <a:spLocks xmlns:a="http://schemas.openxmlformats.org/drawingml/2006/main" noGrp="1"/>
+          </p:cNvSpPr>
+          <p:nvPr/>
+        </p:nvSpPr>
+        <p:spPr>
+          <a:xfrm xmlns:a="http://schemas.openxmlformats.org/drawingml/2006/main">
+            <a:off x="11239500" y="3190875"/>
+            <a:ext cx="400050" cy="266700"/>
+          </a:xfrm>
+          <a:prstGeom xmlns:a="http://schemas.openxmlformats.org/drawingml/2006/main" prst="rect">
+            <a:avLst/>
+          </a:prstGeom>
+          <a:noFill xmlns:a="http://schemas.openxmlformats.org/drawingml/2006/main"/>
+          <a:ln xmlns:a="http://schemas.openxmlformats.org/drawingml/2006/main" w="0">
+            <a:noFill/>
+            <a:prstDash val="solid"/>
+          </a:ln>
+        </p:spPr>
+        <p:txBody>
+          <a:bodyPr xmlns:a="http://schemas.openxmlformats.org/drawingml/2006/main"/>
+          <a:lstStyle xmlns:a="http://schemas.openxmlformats.org/drawingml/2006/main"/>
+          <a:p xmlns:a="http://schemas.openxmlformats.org/drawingml/2006/main">
+            <a:pPr algn="ctr">
+              <a:defRPr sz="1350" b="1">
+                <a:solidFill>
+                  <a:srgbClr val="FFFFFF"/>
+                </a:solidFill>
+              </a:defRPr>
+            </a:pPr>
+            <a:r>
+              <a:rPr sz="1350" b="1">
+                <a:solidFill>
+                  <a:srgbClr val="FFFFFF"/>
+                </a:solidFill>
+              </a:rPr>
+              <a:t>1</a:t>
+            </a:r>
+          </a:p>
+        </p:txBody>
+      </p:sp>
+      <p:sp>
+        <p:nvSpPr>
+          <p:cNvPr id="34" name="">
+            <a:extLst xmlns:a="http://schemas.openxmlformats.org/drawingml/2006/main">
+              <a:ext uri="{FF2B5EF4-FFF2-40B4-BE49-F238E27FC236}">
+                <a16:creationId xmlns:a16="http://schemas.microsoft.com/office/drawing/2014/main" id="{50CC0764-CC25-459F-B13D-0A030DE7E76F}"/>
+              </a:ext>
+            </a:extLst>
+          </p:cNvPr>
+          <p:cNvSpPr>
+            <a:spLocks xmlns:a="http://schemas.openxmlformats.org/drawingml/2006/main" noGrp="1"/>
+          </p:cNvSpPr>
+          <p:nvPr/>
+        </p:nvSpPr>
+        <p:spPr>
+          <a:xfrm xmlns:a="http://schemas.openxmlformats.org/drawingml/2006/main">
+            <a:off x="11772900" y="3114675"/>
+            <a:ext cx="2381250" cy="266700"/>
+          </a:xfrm>
+          <a:prstGeom xmlns:a="http://schemas.openxmlformats.org/drawingml/2006/main" prst="rect">
+            <a:avLst/>
+          </a:prstGeom>
+          <a:noFill xmlns:a="http://schemas.openxmlformats.org/drawingml/2006/main"/>
+          <a:ln xmlns:a="http://schemas.openxmlformats.org/drawingml/2006/main" w="0">
+            <a:noFill/>
+            <a:prstDash val="solid"/>
+          </a:ln>
+        </p:spPr>
+        <p:txBody>
+          <a:bodyPr xmlns:a="http://schemas.openxmlformats.org/drawingml/2006/main"/>
+          <a:lstStyle xmlns:a="http://schemas.openxmlformats.org/drawingml/2006/main"/>
+          <a:p xmlns:a="http://schemas.openxmlformats.org/drawingml/2006/main">
+            <a:pPr algn="l">
+              <a:defRPr sz="1425" b="1">
+                <a:solidFill>
+                  <a:srgbClr val="051C2A"/>
+                </a:solidFill>
+              </a:defRPr>
+            </a:pPr>
+            <a:r>
+              <a:rPr sz="1425" b="1">
+                <a:solidFill>
+                  <a:srgbClr val="051C2A"/>
+                </a:solidFill>
+              </a:rPr>
+              <a:t>Span tree</a:t>
+            </a:r>
+          </a:p>
+        </p:txBody>
+      </p:sp>
+      <p:sp>
+        <p:nvSpPr>
+          <p:cNvPr id="35" name="">
+            <a:extLst xmlns:a="http://schemas.openxmlformats.org/drawingml/2006/main">
+              <a:ext uri="{FF2B5EF4-FFF2-40B4-BE49-F238E27FC236}">
+                <a16:creationId xmlns:a16="http://schemas.microsoft.com/office/drawing/2014/main" id="{0955B2B4-F46E-4401-BC89-369B3BFE6E46}"/>
+              </a:ext>
+            </a:extLst>
+          </p:cNvPr>
+          <p:cNvSpPr>
+            <a:spLocks xmlns:a="http://schemas.openxmlformats.org/drawingml/2006/main" noGrp="1"/>
+          </p:cNvSpPr>
+          <p:nvPr/>
+        </p:nvSpPr>
+        <p:spPr>
+          <a:xfrm xmlns:a="http://schemas.openxmlformats.org/drawingml/2006/main">
+            <a:off x="11772900" y="3381375"/>
+            <a:ext cx="2381250" cy="400050"/>
+          </a:xfrm>
+          <a:prstGeom xmlns:a="http://schemas.openxmlformats.org/drawingml/2006/main" prst="rect">
+            <a:avLst/>
+          </a:prstGeom>
+          <a:noFill xmlns:a="http://schemas.openxmlformats.org/drawingml/2006/main"/>
+          <a:ln xmlns:a="http://schemas.openxmlformats.org/drawingml/2006/main" w="0">
+            <a:noFill/>
+            <a:prstDash val="solid"/>
+          </a:ln>
+        </p:spPr>
+        <p:txBody>
+          <a:bodyPr xmlns:a="http://schemas.openxmlformats.org/drawingml/2006/main"/>
+          <a:lstStyle xmlns:a="http://schemas.openxmlformats.org/drawingml/2006/main"/>
+          <a:p xmlns:a="http://schemas.openxmlformats.org/drawingml/2006/main">
+            <a:pPr algn="l">
+              <a:defRPr sz="1125" b="0">
+                <a:solidFill>
+                  <a:srgbClr val="8291A6"/>
+                </a:solidFill>
+              </a:defRPr>
+            </a:pPr>
+            <a:r>
+              <a:rPr sz="1125" b="0">
+                <a:solidFill>
+                  <a:srgbClr val="8291A6"/>
+                </a:solidFill>
+              </a:rPr>
+              <a:t>Where time and branching occurred</a:t>
+            </a:r>
+          </a:p>
+        </p:txBody>
+      </p:sp>
+      <p:pic>
+        <p:nvPicPr>
+          <p:cNvPr id="64" name=""/>
+          <p:cNvPicPr>
+            <a:picLocks xmlns:a="http://schemas.openxmlformats.org/drawingml/2006/main" noChangeAspect="1"/>
+          </p:cNvPicPr>
+          <p:nvPr/>
+        </p:nvPicPr>
+        <p:blipFill>
+          <a:blip xmlns:r="http://schemas.openxmlformats.org/officeDocument/2006/relationships" xmlns:a="http://schemas.openxmlformats.org/drawingml/2006/main" r:embed="R7536c4a730f84729">
+            <a:extLst>
+              <a:ext uri="{96DAC541-7B7A-43D3-8B79-37D633B846F1}">
+                <asvg:svgBlip xmlns:asvg="http://schemas.microsoft.com/office/drawing/2016/SVG/main" r:embed="R52c8c595b4f2471e"/>
+              </a:ext>
+            </a:extLst>
+          </a:blip>
+          <a:stretch xmlns:a="http://schemas.openxmlformats.org/drawingml/2006/main"/>
+        </p:blipFill>
+        <p:spPr>
+          <a:xfrm xmlns:a="http://schemas.openxmlformats.org/drawingml/2006/main">
+            <a:off x="11239500" y="3905250"/>
+            <a:ext cx="400050" cy="400050"/>
+          </a:xfrm>
+          <a:prstGeom xmlns:a="http://schemas.openxmlformats.org/drawingml/2006/main" prst="rect">
+            <a:avLst/>
+          </a:prstGeom>
+        </p:spPr>
+      </p:pic>
+      <p:sp>
+        <p:nvSpPr>
+          <p:cNvPr id="37" name="">
+            <a:extLst xmlns:a="http://schemas.openxmlformats.org/drawingml/2006/main">
+              <a:ext uri="{FF2B5EF4-FFF2-40B4-BE49-F238E27FC236}">
+                <a16:creationId xmlns:a16="http://schemas.microsoft.com/office/drawing/2014/main" id="{E3848D35-C30A-45F2-865D-5A1BE06FACA8}"/>
+              </a:ext>
+            </a:extLst>
+          </p:cNvPr>
+          <p:cNvSpPr>
+            <a:spLocks xmlns:a="http://schemas.openxmlformats.org/drawingml/2006/main" noGrp="1"/>
+          </p:cNvSpPr>
+          <p:nvPr/>
+        </p:nvSpPr>
+        <p:spPr>
+          <a:xfrm xmlns:a="http://schemas.openxmlformats.org/drawingml/2006/main">
+            <a:off x="11239500" y="3952875"/>
+            <a:ext cx="400050" cy="266700"/>
+          </a:xfrm>
+          <a:prstGeom xmlns:a="http://schemas.openxmlformats.org/drawingml/2006/main" prst="rect">
+            <a:avLst/>
+          </a:prstGeom>
+          <a:noFill xmlns:a="http://schemas.openxmlformats.org/drawingml/2006/main"/>
+          <a:ln xmlns:a="http://schemas.openxmlformats.org/drawingml/2006/main" w="0">
+            <a:noFill/>
+            <a:prstDash val="solid"/>
+          </a:ln>
+        </p:spPr>
+        <p:txBody>
+          <a:bodyPr xmlns:a="http://schemas.openxmlformats.org/drawingml/2006/main"/>
+          <a:lstStyle xmlns:a="http://schemas.openxmlformats.org/drawingml/2006/main"/>
+          <a:p xmlns:a="http://schemas.openxmlformats.org/drawingml/2006/main">
+            <a:pPr algn="ctr">
+              <a:defRPr sz="1350" b="1">
+                <a:solidFill>
+                  <a:srgbClr val="FFFFFF"/>
+                </a:solidFill>
+              </a:defRPr>
+            </a:pPr>
+            <a:r>
+              <a:rPr sz="1350" b="1">
+                <a:solidFill>
+                  <a:srgbClr val="FFFFFF"/>
+                </a:solidFill>
+              </a:rPr>
+              <a:t>2</a:t>
+            </a:r>
+          </a:p>
+        </p:txBody>
+      </p:sp>
+      <p:sp>
+        <p:nvSpPr>
+          <p:cNvPr id="38" name="">
+            <a:extLst xmlns:a="http://schemas.openxmlformats.org/drawingml/2006/main">
+              <a:ext uri="{FF2B5EF4-FFF2-40B4-BE49-F238E27FC236}">
+                <a16:creationId xmlns:a16="http://schemas.microsoft.com/office/drawing/2014/main" id="{FF5ECE92-9DB2-4989-A632-E08A0B21FECD}"/>
+              </a:ext>
+            </a:extLst>
+          </p:cNvPr>
+          <p:cNvSpPr>
+            <a:spLocks xmlns:a="http://schemas.openxmlformats.org/drawingml/2006/main" noGrp="1"/>
+          </p:cNvSpPr>
+          <p:nvPr/>
+        </p:nvSpPr>
+        <p:spPr>
+          <a:xfrm xmlns:a="http://schemas.openxmlformats.org/drawingml/2006/main">
+            <a:off x="11772900" y="3876675"/>
+            <a:ext cx="2381250" cy="266700"/>
+          </a:xfrm>
+          <a:prstGeom xmlns:a="http://schemas.openxmlformats.org/drawingml/2006/main" prst="rect">
+            <a:avLst/>
+          </a:prstGeom>
+          <a:noFill xmlns:a="http://schemas.openxmlformats.org/drawingml/2006/main"/>
+          <a:ln xmlns:a="http://schemas.openxmlformats.org/drawingml/2006/main" w="0">
+            <a:noFill/>
+            <a:prstDash val="solid"/>
+          </a:ln>
+        </p:spPr>
+        <p:txBody>
+          <a:bodyPr xmlns:a="http://schemas.openxmlformats.org/drawingml/2006/main"/>
+          <a:lstStyle xmlns:a="http://schemas.openxmlformats.org/drawingml/2006/main"/>
+          <a:p xmlns:a="http://schemas.openxmlformats.org/drawingml/2006/main">
+            <a:pPr algn="l">
+              <a:defRPr sz="1425" b="1">
+                <a:solidFill>
+                  <a:srgbClr val="051C2A"/>
+                </a:solidFill>
+              </a:defRPr>
+            </a:pPr>
+            <a:r>
+              <a:rPr sz="1425" b="1">
+                <a:solidFill>
+                  <a:srgbClr val="051C2A"/>
+                </a:solidFill>
+              </a:rPr>
+              <a:t>Inputs / outputs</a:t>
+            </a:r>
+          </a:p>
+        </p:txBody>
+      </p:sp>
+      <p:sp>
+        <p:nvSpPr>
+          <p:cNvPr id="39" name="">
+            <a:extLst xmlns:a="http://schemas.openxmlformats.org/drawingml/2006/main">
+              <a:ext uri="{FF2B5EF4-FFF2-40B4-BE49-F238E27FC236}">
+                <a16:creationId xmlns:a16="http://schemas.microsoft.com/office/drawing/2014/main" id="{B1DE1E2E-32B2-4B55-9976-8A6517070219}"/>
+              </a:ext>
+            </a:extLst>
+          </p:cNvPr>
+          <p:cNvSpPr>
+            <a:spLocks xmlns:a="http://schemas.openxmlformats.org/drawingml/2006/main" noGrp="1"/>
+          </p:cNvSpPr>
+          <p:nvPr/>
+        </p:nvSpPr>
+        <p:spPr>
+          <a:xfrm xmlns:a="http://schemas.openxmlformats.org/drawingml/2006/main">
+            <a:off x="11772900" y="4143375"/>
+            <a:ext cx="2381250" cy="400050"/>
+          </a:xfrm>
+          <a:prstGeom xmlns:a="http://schemas.openxmlformats.org/drawingml/2006/main" prst="rect">
+            <a:avLst/>
+          </a:prstGeom>
+          <a:noFill xmlns:a="http://schemas.openxmlformats.org/drawingml/2006/main"/>
+          <a:ln xmlns:a="http://schemas.openxmlformats.org/drawingml/2006/main" w="0">
+            <a:noFill/>
+            <a:prstDash val="solid"/>
+          </a:ln>
+        </p:spPr>
+        <p:txBody>
+          <a:bodyPr xmlns:a="http://schemas.openxmlformats.org/drawingml/2006/main"/>
+          <a:lstStyle xmlns:a="http://schemas.openxmlformats.org/drawingml/2006/main"/>
+          <a:p xmlns:a="http://schemas.openxmlformats.org/drawingml/2006/main">
+            <a:pPr algn="l">
+              <a:defRPr sz="1125" b="0">
+                <a:solidFill>
+                  <a:srgbClr val="8291A6"/>
+                </a:solidFill>
+              </a:defRPr>
+            </a:pPr>
+            <a:r>
+              <a:rPr sz="1125" b="0">
+                <a:solidFill>
+                  <a:srgbClr val="8291A6"/>
+                </a:solidFill>
+              </a:rPr>
+              <a:t>What entered and left each span</a:t>
+            </a:r>
+          </a:p>
+        </p:txBody>
+      </p:sp>
+      <p:pic>
+        <p:nvPicPr>
+          <p:cNvPr id="68" name=""/>
+          <p:cNvPicPr>
+            <a:picLocks xmlns:a="http://schemas.openxmlformats.org/drawingml/2006/main" noChangeAspect="1"/>
+          </p:cNvPicPr>
+          <p:nvPr/>
+        </p:nvPicPr>
+        <p:blipFill>
+          <a:blip xmlns:r="http://schemas.openxmlformats.org/officeDocument/2006/relationships" xmlns:a="http://schemas.openxmlformats.org/drawingml/2006/main" r:embed="R900eae4e37484930">
+            <a:extLst>
+              <a:ext uri="{96DAC541-7B7A-43D3-8B79-37D633B846F1}">
+                <asvg:svgBlip xmlns:asvg="http://schemas.microsoft.com/office/drawing/2016/SVG/main" r:embed="R73dd57ecd2be4e4b"/>
+              </a:ext>
+            </a:extLst>
+          </a:blip>
+          <a:stretch xmlns:a="http://schemas.openxmlformats.org/drawingml/2006/main"/>
+        </p:blipFill>
+        <p:spPr>
+          <a:xfrm xmlns:a="http://schemas.openxmlformats.org/drawingml/2006/main">
+            <a:off x="11239500" y="4667250"/>
+            <a:ext cx="400050" cy="400050"/>
+          </a:xfrm>
+          <a:prstGeom xmlns:a="http://schemas.openxmlformats.org/drawingml/2006/main" prst="rect">
+            <a:avLst/>
+          </a:prstGeom>
+        </p:spPr>
+      </p:pic>
+      <p:sp>
+        <p:nvSpPr>
+          <p:cNvPr id="41" name="">
+            <a:extLst xmlns:a="http://schemas.openxmlformats.org/drawingml/2006/main">
+              <a:ext uri="{FF2B5EF4-FFF2-40B4-BE49-F238E27FC236}">
+                <a16:creationId xmlns:a16="http://schemas.microsoft.com/office/drawing/2014/main" id="{67643C35-5A8F-49C4-80B6-38E63FB60444}"/>
+              </a:ext>
+            </a:extLst>
+          </p:cNvPr>
+          <p:cNvSpPr>
+            <a:spLocks xmlns:a="http://schemas.openxmlformats.org/drawingml/2006/main" noGrp="1"/>
+          </p:cNvSpPr>
+          <p:nvPr/>
+        </p:nvSpPr>
+        <p:spPr>
+          <a:xfrm xmlns:a="http://schemas.openxmlformats.org/drawingml/2006/main">
+            <a:off x="11239500" y="4714875"/>
+            <a:ext cx="400050" cy="266700"/>
+          </a:xfrm>
+          <a:prstGeom xmlns:a="http://schemas.openxmlformats.org/drawingml/2006/main" prst="rect">
+            <a:avLst/>
+          </a:prstGeom>
+          <a:noFill xmlns:a="http://schemas.openxmlformats.org/drawingml/2006/main"/>
+          <a:ln xmlns:a="http://schemas.openxmlformats.org/drawingml/2006/main" w="0">
+            <a:noFill/>
+            <a:prstDash val="solid"/>
+          </a:ln>
+        </p:spPr>
+        <p:txBody>
+          <a:bodyPr xmlns:a="http://schemas.openxmlformats.org/drawingml/2006/main"/>
+          <a:lstStyle xmlns:a="http://schemas.openxmlformats.org/drawingml/2006/main"/>
+          <a:p xmlns:a="http://schemas.openxmlformats.org/drawingml/2006/main">
+            <a:pPr algn="ctr">
+              <a:defRPr sz="1350" b="1">
+                <a:solidFill>
+                  <a:srgbClr val="FFFFFF"/>
+                </a:solidFill>
+              </a:defRPr>
+            </a:pPr>
+            <a:r>
+              <a:rPr sz="1350" b="1">
+                <a:solidFill>
+                  <a:srgbClr val="FFFFFF"/>
+                </a:solidFill>
+              </a:rPr>
+              <a:t>3</a:t>
+            </a:r>
+          </a:p>
+        </p:txBody>
+      </p:sp>
+      <p:sp>
+        <p:nvSpPr>
+          <p:cNvPr id="42" name="">
+            <a:extLst xmlns:a="http://schemas.openxmlformats.org/drawingml/2006/main">
+              <a:ext uri="{FF2B5EF4-FFF2-40B4-BE49-F238E27FC236}">
+                <a16:creationId xmlns:a16="http://schemas.microsoft.com/office/drawing/2014/main" id="{2E9C5550-CAFD-4321-94B4-DF70078922CE}"/>
+              </a:ext>
+            </a:extLst>
+          </p:cNvPr>
+          <p:cNvSpPr>
+            <a:spLocks xmlns:a="http://schemas.openxmlformats.org/drawingml/2006/main" noGrp="1"/>
+          </p:cNvSpPr>
+          <p:nvPr/>
+        </p:nvSpPr>
+        <p:spPr>
+          <a:xfrm xmlns:a="http://schemas.openxmlformats.org/drawingml/2006/main">
+            <a:off x="11772900" y="4638675"/>
+            <a:ext cx="2381250" cy="266700"/>
+          </a:xfrm>
+          <a:prstGeom xmlns:a="http://schemas.openxmlformats.org/drawingml/2006/main" prst="rect">
+            <a:avLst/>
+          </a:prstGeom>
+          <a:noFill xmlns:a="http://schemas.openxmlformats.org/drawingml/2006/main"/>
+          <a:ln xmlns:a="http://schemas.openxmlformats.org/drawingml/2006/main" w="0">
+            <a:noFill/>
+            <a:prstDash val="solid"/>
+          </a:ln>
+        </p:spPr>
+        <p:txBody>
+          <a:bodyPr xmlns:a="http://schemas.openxmlformats.org/drawingml/2006/main"/>
+          <a:lstStyle xmlns:a="http://schemas.openxmlformats.org/drawingml/2006/main"/>
+          <a:p xmlns:a="http://schemas.openxmlformats.org/drawingml/2006/main">
+            <a:pPr algn="l">
+              <a:defRPr sz="1425" b="1">
+                <a:solidFill>
+                  <a:srgbClr val="051C2A"/>
+                </a:solidFill>
+              </a:defRPr>
+            </a:pPr>
+            <a:r>
+              <a:rPr sz="1425" b="1">
+                <a:solidFill>
+                  <a:srgbClr val="051C2A"/>
+                </a:solidFill>
+              </a:rPr>
+              <a:t>Tools + errors</a:t>
+            </a:r>
+          </a:p>
+        </p:txBody>
+      </p:sp>
+      <p:sp>
+        <p:nvSpPr>
+          <p:cNvPr id="43" name="">
+            <a:extLst xmlns:a="http://schemas.openxmlformats.org/drawingml/2006/main">
+              <a:ext uri="{FF2B5EF4-FFF2-40B4-BE49-F238E27FC236}">
+                <a16:creationId xmlns:a16="http://schemas.microsoft.com/office/drawing/2014/main" id="{EA86778B-E60B-43ED-BC35-0142BEEC5405}"/>
+              </a:ext>
+            </a:extLst>
+          </p:cNvPr>
+          <p:cNvSpPr>
+            <a:spLocks xmlns:a="http://schemas.openxmlformats.org/drawingml/2006/main" noGrp="1"/>
+          </p:cNvSpPr>
+          <p:nvPr/>
+        </p:nvSpPr>
+        <p:spPr>
+          <a:xfrm xmlns:a="http://schemas.openxmlformats.org/drawingml/2006/main">
+            <a:off x="11772900" y="4905375"/>
+            <a:ext cx="2381250" cy="400050"/>
+          </a:xfrm>
+          <a:prstGeom xmlns:a="http://schemas.openxmlformats.org/drawingml/2006/main" prst="rect">
+            <a:avLst/>
+          </a:prstGeom>
+          <a:noFill xmlns:a="http://schemas.openxmlformats.org/drawingml/2006/main"/>
+          <a:ln xmlns:a="http://schemas.openxmlformats.org/drawingml/2006/main" w="0">
+            <a:noFill/>
+            <a:prstDash val="solid"/>
+          </a:ln>
+        </p:spPr>
+        <p:txBody>
+          <a:bodyPr xmlns:a="http://schemas.openxmlformats.org/drawingml/2006/main"/>
+          <a:lstStyle xmlns:a="http://schemas.openxmlformats.org/drawingml/2006/main"/>
+          <a:p xmlns:a="http://schemas.openxmlformats.org/drawingml/2006/main">
+            <a:pPr algn="l">
+              <a:defRPr sz="1125" b="0">
+                <a:solidFill>
+                  <a:srgbClr val="8291A6"/>
+                </a:solidFill>
+              </a:defRPr>
+            </a:pPr>
+            <a:r>
+              <a:rPr sz="1125" b="0">
+                <a:solidFill>
+                  <a:srgbClr val="8291A6"/>
+                </a:solidFill>
+              </a:rPr>
+              <a:t>Calls, arguments and typed failures</a:t>
+            </a:r>
+          </a:p>
+        </p:txBody>
+      </p:sp>
+      <p:pic>
+        <p:nvPicPr>
+          <p:cNvPr id="72" name=""/>
+          <p:cNvPicPr>
+            <a:picLocks xmlns:a="http://schemas.openxmlformats.org/drawingml/2006/main" noChangeAspect="1"/>
+          </p:cNvPicPr>
+          <p:nvPr/>
+        </p:nvPicPr>
+        <p:blipFill>
+          <a:blip xmlns:r="http://schemas.openxmlformats.org/officeDocument/2006/relationships" xmlns:a="http://schemas.openxmlformats.org/drawingml/2006/main" r:embed="R55defa1d2b2442be">
+            <a:extLst>
+              <a:ext uri="{96DAC541-7B7A-43D3-8B79-37D633B846F1}">
+                <asvg:svgBlip xmlns:asvg="http://schemas.microsoft.com/office/drawing/2016/SVG/main" r:embed="Rf8addf2d274141c3"/>
+              </a:ext>
+            </a:extLst>
+          </a:blip>
+          <a:stretch xmlns:a="http://schemas.openxmlformats.org/drawingml/2006/main"/>
+        </p:blipFill>
+        <p:spPr>
+          <a:xfrm xmlns:a="http://schemas.openxmlformats.org/drawingml/2006/main">
+            <a:off x="11239500" y="5429250"/>
+            <a:ext cx="400050" cy="400050"/>
+          </a:xfrm>
+          <a:prstGeom xmlns:a="http://schemas.openxmlformats.org/drawingml/2006/main" prst="rect">
+            <a:avLst/>
+          </a:prstGeom>
+        </p:spPr>
+      </p:pic>
+      <p:sp>
+        <p:nvSpPr>
+          <p:cNvPr id="45" name="">
+            <a:extLst xmlns:a="http://schemas.openxmlformats.org/drawingml/2006/main">
+              <a:ext uri="{FF2B5EF4-FFF2-40B4-BE49-F238E27FC236}">
+                <a16:creationId xmlns:a16="http://schemas.microsoft.com/office/drawing/2014/main" id="{F8251984-8BF4-45DF-B7EB-2A8AD846D07D}"/>
+              </a:ext>
+            </a:extLst>
+          </p:cNvPr>
+          <p:cNvSpPr>
+            <a:spLocks xmlns:a="http://schemas.openxmlformats.org/drawingml/2006/main" noGrp="1"/>
+          </p:cNvSpPr>
+          <p:nvPr/>
+        </p:nvSpPr>
+        <p:spPr>
+          <a:xfrm xmlns:a="http://schemas.openxmlformats.org/drawingml/2006/main">
+            <a:off x="11239500" y="5476875"/>
+            <a:ext cx="400050" cy="266700"/>
+          </a:xfrm>
+          <a:prstGeom xmlns:a="http://schemas.openxmlformats.org/drawingml/2006/main" prst="rect">
+            <a:avLst/>
+          </a:prstGeom>
+          <a:noFill xmlns:a="http://schemas.openxmlformats.org/drawingml/2006/main"/>
+          <a:ln xmlns:a="http://schemas.openxmlformats.org/drawingml/2006/main" w="0">
+            <a:noFill/>
+            <a:prstDash val="solid"/>
+          </a:ln>
+        </p:spPr>
+        <p:txBody>
+          <a:bodyPr xmlns:a="http://schemas.openxmlformats.org/drawingml/2006/main"/>
+          <a:lstStyle xmlns:a="http://schemas.openxmlformats.org/drawingml/2006/main"/>
+          <a:p xmlns:a="http://schemas.openxmlformats.org/drawingml/2006/main">
+            <a:pPr algn="ctr">
+              <a:defRPr sz="1350" b="1">
+                <a:solidFill>
+                  <a:srgbClr val="FFFFFF"/>
+                </a:solidFill>
+              </a:defRPr>
+            </a:pPr>
+            <a:r>
+              <a:rPr sz="1350" b="1">
+                <a:solidFill>
+                  <a:srgbClr val="FFFFFF"/>
+                </a:solidFill>
+              </a:rPr>
+              <a:t>4</a:t>
+            </a:r>
+          </a:p>
+        </p:txBody>
+      </p:sp>
+      <p:sp>
+        <p:nvSpPr>
+          <p:cNvPr id="46" name="">
+            <a:extLst xmlns:a="http://schemas.openxmlformats.org/drawingml/2006/main">
+              <a:ext uri="{FF2B5EF4-FFF2-40B4-BE49-F238E27FC236}">
+                <a16:creationId xmlns:a16="http://schemas.microsoft.com/office/drawing/2014/main" id="{76E13349-121B-464C-8ABE-6F8278DEDC68}"/>
+              </a:ext>
+            </a:extLst>
+          </p:cNvPr>
+          <p:cNvSpPr>
+            <a:spLocks xmlns:a="http://schemas.openxmlformats.org/drawingml/2006/main" noGrp="1"/>
+          </p:cNvSpPr>
+          <p:nvPr/>
+        </p:nvSpPr>
+        <p:spPr>
+          <a:xfrm xmlns:a="http://schemas.openxmlformats.org/drawingml/2006/main">
+            <a:off x="11772900" y="5400675"/>
+            <a:ext cx="2381250" cy="266700"/>
+          </a:xfrm>
+          <a:prstGeom xmlns:a="http://schemas.openxmlformats.org/drawingml/2006/main" prst="rect">
+            <a:avLst/>
+          </a:prstGeom>
+          <a:noFill xmlns:a="http://schemas.openxmlformats.org/drawingml/2006/main"/>
+          <a:ln xmlns:a="http://schemas.openxmlformats.org/drawingml/2006/main" w="0">
+            <a:noFill/>
+            <a:prstDash val="solid"/>
+          </a:ln>
+        </p:spPr>
+        <p:txBody>
+          <a:bodyPr xmlns:a="http://schemas.openxmlformats.org/drawingml/2006/main"/>
+          <a:lstStyle xmlns:a="http://schemas.openxmlformats.org/drawingml/2006/main"/>
+          <a:p xmlns:a="http://schemas.openxmlformats.org/drawingml/2006/main">
+            <a:pPr algn="l">
+              <a:defRPr sz="1425" b="1">
+                <a:solidFill>
+                  <a:srgbClr val="051C2A"/>
+                </a:solidFill>
+              </a:defRPr>
+            </a:pPr>
+            <a:r>
+              <a:rPr sz="1425" b="1">
+                <a:solidFill>
+                  <a:srgbClr val="051C2A"/>
+                </a:solidFill>
+              </a:rPr>
+              <a:t>Assessments</a:t>
+            </a:r>
+          </a:p>
+        </p:txBody>
+      </p:sp>
+      <p:sp>
+        <p:nvSpPr>
+          <p:cNvPr id="47" name="">
+            <a:extLst xmlns:a="http://schemas.openxmlformats.org/drawingml/2006/main">
+              <a:ext uri="{FF2B5EF4-FFF2-40B4-BE49-F238E27FC236}">
+                <a16:creationId xmlns:a16="http://schemas.microsoft.com/office/drawing/2014/main" id="{6ED00E43-2785-46AC-BCB0-A5C48AF53BE6}"/>
+              </a:ext>
+            </a:extLst>
+          </p:cNvPr>
+          <p:cNvSpPr>
+            <a:spLocks xmlns:a="http://schemas.openxmlformats.org/drawingml/2006/main" noGrp="1"/>
+          </p:cNvSpPr>
+          <p:nvPr/>
+        </p:nvSpPr>
+        <p:spPr>
+          <a:xfrm xmlns:a="http://schemas.openxmlformats.org/drawingml/2006/main">
+            <a:off x="11772900" y="5667375"/>
+            <a:ext cx="2381250" cy="400050"/>
+          </a:xfrm>
+          <a:prstGeom xmlns:a="http://schemas.openxmlformats.org/drawingml/2006/main" prst="rect">
+            <a:avLst/>
+          </a:prstGeom>
+          <a:noFill xmlns:a="http://schemas.openxmlformats.org/drawingml/2006/main"/>
+          <a:ln xmlns:a="http://schemas.openxmlformats.org/drawingml/2006/main" w="0">
+            <a:noFill/>
+            <a:prstDash val="solid"/>
+          </a:ln>
+        </p:spPr>
+        <p:txBody>
+          <a:bodyPr xmlns:a="http://schemas.openxmlformats.org/drawingml/2006/main"/>
+          <a:lstStyle xmlns:a="http://schemas.openxmlformats.org/drawingml/2006/main"/>
+          <a:p xmlns:a="http://schemas.openxmlformats.org/drawingml/2006/main">
+            <a:pPr algn="l">
+              <a:defRPr sz="1125" b="0">
+                <a:solidFill>
+                  <a:srgbClr val="8291A6"/>
+                </a:solidFill>
+              </a:defRPr>
+            </a:pPr>
+            <a:r>
+              <a:rPr sz="1125" b="0">
+                <a:solidFill>
+                  <a:srgbClr val="8291A6"/>
+                </a:solidFill>
+              </a:rPr>
+              <a:t>Scores, feedback and expectations</a:t>
             </a:r>
           </a:p>
         </p:txBody>
@@ -9869,7 +9324,7 @@
                 <a:ea typeface="Calibri"/>
                 <a:cs typeface="Calibri"/>
               </a:rPr>
-              <a:t>ROOT TRACE</a:t>
+              <a:t>CASE-LEVEL SCORES</a:t>
             </a:r>
           </a:p>
         </p:txBody>
@@ -9931,193 +9386,7 @@
                 <a:ea typeface="Calibri"/>
                 <a:cs typeface="Calibri"/>
               </a:rPr>
-              <a:t>Read one trace from plan to report</a:t>
-            </a:r>
-          </a:p>
-        </p:txBody>
-      </p:sp>
-      <p:sp>
-        <p:nvSpPr>
-          <p:cNvPr id="27" name="">
-            <a:extLst xmlns:a="http://schemas.openxmlformats.org/drawingml/2006/main">
-              <a:ext uri="{FF2B5EF4-FFF2-40B4-BE49-F238E27FC236}">
-                <a16:creationId xmlns:a16="http://schemas.microsoft.com/office/drawing/2014/main" id="{79128475-820B-447C-A724-7D8A31328FFE}"/>
-              </a:ext>
-            </a:extLst>
-          </p:cNvPr>
-          <p:cNvSpPr>
-            <a:spLocks xmlns:a="http://schemas.openxmlformats.org/drawingml/2006/main" noGrp="1"/>
-          </p:cNvSpPr>
-          <p:nvPr/>
-        </p:nvSpPr>
-        <p:spPr>
-          <a:xfrm xmlns:a="http://schemas.openxmlformats.org/drawingml/2006/main">
-            <a:off x="2381250" y="6210300"/>
-            <a:ext cx="10477500" cy="457200"/>
-          </a:xfrm>
-          <a:prstGeom xmlns:a="http://schemas.openxmlformats.org/drawingml/2006/main" prst="rect">
-            <a:avLst/>
-          </a:prstGeom>
-          <a:noFill xmlns:a="http://schemas.openxmlformats.org/drawingml/2006/main"/>
-          <a:ln xmlns:a="http://schemas.openxmlformats.org/drawingml/2006/main" w="0">
-            <a:noFill/>
-            <a:prstDash val="solid"/>
-          </a:ln>
-        </p:spPr>
-        <p:txBody>
-          <a:bodyPr xmlns:a="http://schemas.openxmlformats.org/drawingml/2006/main" wrap="square" lIns="0" tIns="0" rIns="0" bIns="0" anchor="ctr">
-            <a:normAutofit fontScale="100000"/>
-          </a:bodyPr>
-          <a:lstStyle xmlns:a="http://schemas.openxmlformats.org/drawingml/2006/main"/>
-          <a:p xmlns:a="http://schemas.openxmlformats.org/drawingml/2006/main">
-            <a:pPr algn="ctr">
-              <a:lnSpc>
-                <a:spcPct val="100000"/>
-              </a:lnSpc>
-              <a:buNone/>
-              <a:defRPr sz="2100" b="1">
-                <a:solidFill>
-                  <a:srgbClr val="051C2A"/>
-                </a:solidFill>
-                <a:latin typeface="Calibri"/>
-                <a:ea typeface="Calibri"/>
-                <a:cs typeface="Calibri"/>
-              </a:defRPr>
-            </a:pPr>
-            <a:r>
-              <a:rPr sz="2100" b="1">
-                <a:solidFill>
-                  <a:srgbClr val="051C2A"/>
-                </a:solidFill>
-                <a:latin typeface="Calibri"/>
-                <a:ea typeface="Calibri"/>
-                <a:cs typeface="Calibri"/>
-              </a:rPr>
-              <a:t>Post-error success must clear the evidence gate before report.</a:t>
-            </a:r>
-          </a:p>
-        </p:txBody>
-      </p:sp>
-      <p:sp>
-        <p:nvSpPr>
-          <p:cNvPr id="28" name="">
-            <a:extLst xmlns:a="http://schemas.openxmlformats.org/drawingml/2006/main">
-              <a:ext uri="{FF2B5EF4-FFF2-40B4-BE49-F238E27FC236}">
-                <a16:creationId xmlns:a16="http://schemas.microsoft.com/office/drawing/2014/main" id="{685F2AAD-81FC-436A-88F7-89F49C9F1671}"/>
-              </a:ext>
-            </a:extLst>
-          </p:cNvPr>
-          <p:cNvSpPr>
-            <a:spLocks xmlns:a="http://schemas.openxmlformats.org/drawingml/2006/main" noGrp="1"/>
-          </p:cNvSpPr>
-          <p:nvPr/>
-        </p:nvSpPr>
-        <p:spPr>
-          <a:xfrm xmlns:a="http://schemas.openxmlformats.org/drawingml/2006/main">
-            <a:off x="1885950" y="6838950"/>
-            <a:ext cx="4476750" cy="323850"/>
-          </a:xfrm>
-          <a:prstGeom xmlns:a="http://schemas.openxmlformats.org/drawingml/2006/main" prst="rect">
-            <a:avLst/>
-          </a:prstGeom>
-          <a:noFill xmlns:a="http://schemas.openxmlformats.org/drawingml/2006/main"/>
-          <a:ln xmlns:a="http://schemas.openxmlformats.org/drawingml/2006/main" w="0">
-            <a:noFill/>
-            <a:prstDash val="solid"/>
-          </a:ln>
-        </p:spPr>
-        <p:txBody>
-          <a:bodyPr xmlns:a="http://schemas.openxmlformats.org/drawingml/2006/main" wrap="square" lIns="0" tIns="0" rIns="0" bIns="0" anchor="ctr">
-            <a:normAutofit fontScale="100000"/>
-          </a:bodyPr>
-          <a:lstStyle xmlns:a="http://schemas.openxmlformats.org/drawingml/2006/main"/>
-          <a:p xmlns:a="http://schemas.openxmlformats.org/drawingml/2006/main">
-            <a:pPr algn="ctr">
-              <a:lnSpc>
-                <a:spcPct val="100000"/>
-              </a:lnSpc>
-              <a:buNone/>
-              <a:defRPr sz="1500" b="0">
-                <a:solidFill>
-                  <a:srgbClr val="64748B"/>
-                </a:solidFill>
-                <a:latin typeface="Calibri"/>
-                <a:ea typeface="Calibri"/>
-                <a:cs typeface="Calibri"/>
-              </a:defRPr>
-            </a:pPr>
-            <a:r>
-              <a:rPr sz="1500" b="0">
-                <a:solidFill>
-                  <a:srgbClr val="64748B"/>
-                </a:solidFill>
-                <a:latin typeface="Calibri"/>
-                <a:ea typeface="Calibri"/>
-                <a:cs typeface="Calibri"/>
-              </a:rPr>
-              <a:t>typed error retained</a:t>
-            </a:r>
-          </a:p>
-        </p:txBody>
-      </p:sp>
-      <p:sp>
-        <p:nvSpPr>
-          <p:cNvPr id="29" name="">
-            <a:extLst xmlns:a="http://schemas.openxmlformats.org/drawingml/2006/main">
-              <a:ext uri="{FF2B5EF4-FFF2-40B4-BE49-F238E27FC236}">
-                <a16:creationId xmlns:a16="http://schemas.microsoft.com/office/drawing/2014/main" id="{CDE04AD7-6CBE-4792-B549-765578FB3E1E}"/>
-              </a:ext>
-            </a:extLst>
-          </p:cNvPr>
-          <p:cNvSpPr>
-            <a:spLocks xmlns:a="http://schemas.openxmlformats.org/drawingml/2006/main" noGrp="1"/>
-          </p:cNvSpPr>
-          <p:nvPr/>
-        </p:nvSpPr>
-        <p:spPr>
-          <a:xfrm xmlns:a="http://schemas.openxmlformats.org/drawingml/2006/main">
-            <a:off x="8801100" y="6838950"/>
-            <a:ext cx="4762500" cy="323850"/>
-          </a:xfrm>
-          <a:prstGeom xmlns:a="http://schemas.openxmlformats.org/drawingml/2006/main" prst="rect">
-            <a:avLst/>
-          </a:prstGeom>
-          <a:noFill xmlns:a="http://schemas.openxmlformats.org/drawingml/2006/main"/>
-          <a:ln xmlns:a="http://schemas.openxmlformats.org/drawingml/2006/main" w="0">
-            <a:noFill/>
-            <a:prstDash val="solid"/>
-          </a:ln>
-        </p:spPr>
-        <p:txBody>
-          <a:bodyPr xmlns:a="http://schemas.openxmlformats.org/drawingml/2006/main" wrap="square" lIns="0" tIns="0" rIns="0" bIns="0" anchor="ctr">
-            <a:normAutofit fontScale="100000"/>
-          </a:bodyPr>
-          <a:lstStyle xmlns:a="http://schemas.openxmlformats.org/drawingml/2006/main"/>
-          <a:p xmlns:a="http://schemas.openxmlformats.org/drawingml/2006/main">
-            <a:pPr algn="ctr">
-              <a:lnSpc>
-                <a:spcPct val="100000"/>
-              </a:lnSpc>
-              <a:buNone/>
-              <a:defRPr sz="1500" b="0">
-                <a:solidFill>
-                  <a:srgbClr val="64748B"/>
-                </a:solidFill>
-                <a:latin typeface="Calibri"/>
-                <a:ea typeface="Calibri"/>
-                <a:cs typeface="Calibri"/>
-              </a:defRPr>
-            </a:pPr>
-            <a:r>
-              <a:rPr sz="1500" b="0">
-                <a:solidFill>
-                  <a:srgbClr val="64748B"/>
-                </a:solidFill>
-                <a:latin typeface="Calibri"/>
-                <a:ea typeface="Calibri"/>
-                <a:cs typeface="Calibri"/>
-              </a:rPr>
-              <a:t>bounded recovery succeeds</a:t>
+              <a:t>Per-case failures matter more than averages</a:t>
             </a:r>
           </a:p>
         </p:txBody>
@@ -10307,7 +9576,7 @@
                 <a:ea typeface="Calibri"/>
                 <a:cs typeface="Calibri"/>
               </a:rPr>
-              <a:t>TRACE</a:t>
+              <a:t>CASES</a:t>
             </a:r>
           </a:p>
         </p:txBody>
@@ -10374,57 +9643,74 @@
           </a:p>
         </p:txBody>
       </p:sp>
-      <p:sp>
-        <p:nvSpPr>
-          <p:cNvPr id="36" name="trace-stage-1">
-            <a:extLst xmlns:a="http://schemas.openxmlformats.org/drawingml/2006/main">
-              <a:ext uri="{FF2B5EF4-FFF2-40B4-BE49-F238E27FC236}">
-                <a16:creationId xmlns:a16="http://schemas.microsoft.com/office/drawing/2014/main" id="{EA7513CE-170F-4519-B383-AF1A0926F87F}"/>
-              </a:ext>
-            </a:extLst>
-          </p:cNvPr>
-          <p:cNvSpPr>
-            <a:spLocks xmlns:a="http://schemas.openxmlformats.org/drawingml/2006/main" noGrp="1"/>
-          </p:cNvSpPr>
-          <p:nvPr/>
-        </p:nvSpPr>
-        <p:spPr>
-          <a:xfrm xmlns:a="http://schemas.openxmlformats.org/drawingml/2006/main">
-            <a:off x="990600" y="3048000"/>
-            <a:ext cx="1771650" cy="2286000"/>
-          </a:xfrm>
-          <a:prstGeom xmlns:a="http://schemas.openxmlformats.org/drawingml/2006/main" prst="roundRect">
-            <a:avLst>
-              <a:gd name="adj" fmla="val 6452"/>
-            </a:avLst>
-          </a:prstGeom>
-          <a:noFill xmlns:a="http://schemas.openxmlformats.org/drawingml/2006/main"/>
-          <a:ln xmlns:a="http://schemas.openxmlformats.org/drawingml/2006/main" w="9525">
-            <a:solidFill>
-              <a:srgbClr val="E4E7E9"/>
-            </a:solidFill>
-            <a:prstDash val="solid"/>
-          </a:ln>
-        </p:spPr>
-      </p:sp>
-      <p:sp>
-        <p:nvSpPr>
-          <p:cNvPr id="37" name="trace-stage-1-step">
-            <a:extLst xmlns:a="http://schemas.openxmlformats.org/drawingml/2006/main">
-              <a:ext uri="{FF2B5EF4-FFF2-40B4-BE49-F238E27FC236}">
-                <a16:creationId xmlns:a16="http://schemas.microsoft.com/office/drawing/2014/main" id="{67D7FEA0-BD75-4BAE-803A-210231C3B54C}"/>
-              </a:ext>
-            </a:extLst>
-          </p:cNvPr>
-          <p:cNvSpPr>
-            <a:spLocks xmlns:a="http://schemas.openxmlformats.org/drawingml/2006/main" noGrp="1"/>
-          </p:cNvSpPr>
-          <p:nvPr/>
-        </p:nvSpPr>
-        <p:spPr>
-          <a:xfrm xmlns:a="http://schemas.openxmlformats.org/drawingml/2006/main">
-            <a:off x="1162050" y="3238500"/>
-            <a:ext cx="533400" cy="285750"/>
+      <p:pic>
+        <p:nvPicPr>
+          <p:cNvPr id="59" name=""/>
+          <p:cNvPicPr>
+            <a:picLocks xmlns:a="http://schemas.openxmlformats.org/drawingml/2006/main" noChangeAspect="1"/>
+          </p:cNvPicPr>
+          <p:nvPr/>
+        </p:nvPicPr>
+        <p:blipFill>
+          <a:blip xmlns:r="http://schemas.openxmlformats.org/officeDocument/2006/relationships" xmlns:a="http://schemas.openxmlformats.org/drawingml/2006/main" r:embed="R34dc223289994997"/>
+          <a:stretch xmlns:a="http://schemas.openxmlformats.org/drawingml/2006/main"/>
+        </p:blipFill>
+        <p:spPr>
+          <a:xfrm xmlns:a="http://schemas.openxmlformats.org/drawingml/2006/main">
+            <a:off x="1834044" y="2324100"/>
+            <a:ext cx="7438062" cy="4762500"/>
+          </a:xfrm>
+          <a:prstGeom xmlns:a="http://schemas.openxmlformats.org/drawingml/2006/main" prst="rect">
+            <a:avLst/>
+          </a:prstGeom>
+        </p:spPr>
+      </p:pic>
+      <p:pic>
+        <p:nvPicPr>
+          <p:cNvPr id="60" name=""/>
+          <p:cNvPicPr>
+            <a:picLocks xmlns:a="http://schemas.openxmlformats.org/drawingml/2006/main" noChangeAspect="1"/>
+          </p:cNvPicPr>
+          <p:nvPr/>
+        </p:nvPicPr>
+        <p:blipFill>
+          <a:blip xmlns:r="http://schemas.openxmlformats.org/officeDocument/2006/relationships" xmlns:a="http://schemas.openxmlformats.org/drawingml/2006/main" r:embed="R661d334b3d8d4411">
+            <a:extLst>
+              <a:ext uri="{96DAC541-7B7A-43D3-8B79-37D633B846F1}">
+                <asvg:svgBlip xmlns:asvg="http://schemas.microsoft.com/office/drawing/2016/SVG/main" r:embed="R766266761a0d46f2"/>
+              </a:ext>
+            </a:extLst>
+          </a:blip>
+          <a:stretch xmlns:a="http://schemas.openxmlformats.org/drawingml/2006/main"/>
+        </p:blipFill>
+        <p:spPr>
+          <a:xfrm xmlns:a="http://schemas.openxmlformats.org/drawingml/2006/main">
+            <a:off x="10668000" y="2476500"/>
+            <a:ext cx="2952750" cy="47625"/>
+          </a:xfrm>
+          <a:prstGeom xmlns:a="http://schemas.openxmlformats.org/drawingml/2006/main" prst="rect">
+            <a:avLst/>
+          </a:prstGeom>
+        </p:spPr>
+      </p:pic>
+      <p:sp>
+        <p:nvSpPr>
+          <p:cNvPr id="38" name="">
+            <a:extLst xmlns:a="http://schemas.openxmlformats.org/drawingml/2006/main">
+              <a:ext uri="{FF2B5EF4-FFF2-40B4-BE49-F238E27FC236}">
+                <a16:creationId xmlns:a16="http://schemas.microsoft.com/office/drawing/2014/main" id="{7818A228-B088-4DE6-ABA7-F2188580EB69}"/>
+              </a:ext>
+            </a:extLst>
+          </p:cNvPr>
+          <p:cNvSpPr>
+            <a:spLocks xmlns:a="http://schemas.openxmlformats.org/drawingml/2006/main" noGrp="1"/>
+          </p:cNvSpPr>
+          <p:nvPr/>
+        </p:nvSpPr>
+        <p:spPr>
+          <a:xfrm xmlns:a="http://schemas.openxmlformats.org/drawingml/2006/main">
+            <a:off x="10668000" y="2686050"/>
+            <a:ext cx="3143250" cy="361950"/>
           </a:xfrm>
           <a:prstGeom xmlns:a="http://schemas.openxmlformats.org/drawingml/2006/main" prst="rect">
             <a:avLst/>
@@ -10439,43 +9725,42 @@
           <a:bodyPr xmlns:a="http://schemas.openxmlformats.org/drawingml/2006/main"/>
           <a:lstStyle xmlns:a="http://schemas.openxmlformats.org/drawingml/2006/main"/>
           <a:p xmlns:a="http://schemas.openxmlformats.org/drawingml/2006/main">
-            <a:pPr>
-              <a:buNone/>
-              <a:defRPr sz="1500" b="1">
-                <a:solidFill>
-                  <a:srgbClr val="00A2EB"/>
-                </a:solidFill>
-              </a:defRPr>
-            </a:pPr>
-            <a:r>
-              <a:rPr sz="1500" b="1">
-                <a:solidFill>
-                  <a:srgbClr val="00A2EB"/>
-                </a:solidFill>
-              </a:rPr>
-              <a:t>01</a:t>
-            </a:r>
-          </a:p>
-        </p:txBody>
-      </p:sp>
-      <p:sp>
-        <p:nvSpPr>
-          <p:cNvPr id="38" name="trace-stage-1-title">
-            <a:extLst xmlns:a="http://schemas.openxmlformats.org/drawingml/2006/main">
-              <a:ext uri="{FF2B5EF4-FFF2-40B4-BE49-F238E27FC236}">
-                <a16:creationId xmlns:a16="http://schemas.microsoft.com/office/drawing/2014/main" id="{F46221E3-E20E-4ED8-B523-2716C9BAD7E0}"/>
-              </a:ext>
-            </a:extLst>
-          </p:cNvPr>
-          <p:cNvSpPr>
-            <a:spLocks xmlns:a="http://schemas.openxmlformats.org/drawingml/2006/main" noGrp="1"/>
-          </p:cNvSpPr>
-          <p:nvPr/>
-        </p:nvSpPr>
-        <p:spPr>
-          <a:xfrm xmlns:a="http://schemas.openxmlformats.org/drawingml/2006/main">
-            <a:off x="1104900" y="3733800"/>
-            <a:ext cx="1543050" cy="590550"/>
+            <a:pPr algn="l">
+              <a:defRPr sz="1350" b="1">
+                <a:solidFill>
+                  <a:srgbClr val="F47C00"/>
+                </a:solidFill>
+              </a:defRPr>
+            </a:pPr>
+            <a:r>
+              <a:rPr sz="1350" b="1">
+                <a:solidFill>
+                  <a:srgbClr val="F47C00"/>
+                </a:solidFill>
+              </a:rPr>
+              <a:t>READ ROWS BEFORE MEANS</a:t>
+            </a:r>
+          </a:p>
+        </p:txBody>
+      </p:sp>
+      <p:sp>
+        <p:nvSpPr>
+          <p:cNvPr id="39" name="">
+            <a:extLst xmlns:a="http://schemas.openxmlformats.org/drawingml/2006/main">
+              <a:ext uri="{FF2B5EF4-FFF2-40B4-BE49-F238E27FC236}">
+                <a16:creationId xmlns:a16="http://schemas.microsoft.com/office/drawing/2014/main" id="{F5A4F01D-1C4F-4F61-8D43-EBD58A13E0A2}"/>
+              </a:ext>
+            </a:extLst>
+          </p:cNvPr>
+          <p:cNvSpPr>
+            <a:spLocks xmlns:a="http://schemas.openxmlformats.org/drawingml/2006/main" noGrp="1"/>
+          </p:cNvSpPr>
+          <p:nvPr/>
+        </p:nvSpPr>
+        <p:spPr>
+          <a:xfrm xmlns:a="http://schemas.openxmlformats.org/drawingml/2006/main">
+            <a:off x="10668000" y="3200400"/>
+            <a:ext cx="3143250" cy="781050"/>
           </a:xfrm>
           <a:prstGeom xmlns:a="http://schemas.openxmlformats.org/drawingml/2006/main" prst="rect">
             <a:avLst/>
@@ -10490,43 +9775,120 @@
           <a:bodyPr xmlns:a="http://schemas.openxmlformats.org/drawingml/2006/main"/>
           <a:lstStyle xmlns:a="http://schemas.openxmlformats.org/drawingml/2006/main"/>
           <a:p xmlns:a="http://schemas.openxmlformats.org/drawingml/2006/main">
+            <a:pPr algn="l">
+              <a:defRPr sz="1725" b="1">
+                <a:solidFill>
+                  <a:srgbClr val="051C2A"/>
+                </a:solidFill>
+              </a:defRPr>
+            </a:pPr>
+            <a:r>
+              <a:rPr sz="1725" b="1">
+                <a:solidFill>
+                  <a:srgbClr val="051C2A"/>
+                </a:solidFill>
+              </a:rPr>
+              <a:t>Averages can hide one severe citation or stop-control failure.</a:t>
+            </a:r>
+          </a:p>
+        </p:txBody>
+      </p:sp>
+      <p:pic>
+        <p:nvPicPr>
+          <p:cNvPr id="63" name=""/>
+          <p:cNvPicPr>
+            <a:picLocks xmlns:a="http://schemas.openxmlformats.org/drawingml/2006/main" noChangeAspect="1"/>
+          </p:cNvPicPr>
+          <p:nvPr/>
+        </p:nvPicPr>
+        <p:blipFill>
+          <a:blip xmlns:r="http://schemas.openxmlformats.org/officeDocument/2006/relationships" xmlns:a="http://schemas.openxmlformats.org/drawingml/2006/main" r:embed="Rfd833393d0c94c98">
+            <a:extLst>
+              <a:ext uri="{96DAC541-7B7A-43D3-8B79-37D633B846F1}">
+                <asvg:svgBlip xmlns:asvg="http://schemas.microsoft.com/office/drawing/2016/SVG/main" r:embed="R6e7b63e7790b4f05"/>
+              </a:ext>
+            </a:extLst>
+          </a:blip>
+          <a:stretch xmlns:a="http://schemas.openxmlformats.org/drawingml/2006/main"/>
+        </p:blipFill>
+        <p:spPr>
+          <a:xfrm xmlns:a="http://schemas.openxmlformats.org/drawingml/2006/main">
+            <a:off x="10668000" y="4267200"/>
+            <a:ext cx="342900" cy="342900"/>
+          </a:xfrm>
+          <a:prstGeom xmlns:a="http://schemas.openxmlformats.org/drawingml/2006/main" prst="rect">
+            <a:avLst/>
+          </a:prstGeom>
+        </p:spPr>
+      </p:pic>
+      <p:sp>
+        <p:nvSpPr>
+          <p:cNvPr id="41" name="">
+            <a:extLst xmlns:a="http://schemas.openxmlformats.org/drawingml/2006/main">
+              <a:ext uri="{FF2B5EF4-FFF2-40B4-BE49-F238E27FC236}">
+                <a16:creationId xmlns:a16="http://schemas.microsoft.com/office/drawing/2014/main" id="{DFDDBFD4-5DAE-4730-9E8B-96B4E4EB64B9}"/>
+              </a:ext>
+            </a:extLst>
+          </p:cNvPr>
+          <p:cNvSpPr>
+            <a:spLocks xmlns:a="http://schemas.openxmlformats.org/drawingml/2006/main" noGrp="1"/>
+          </p:cNvSpPr>
+          <p:nvPr/>
+        </p:nvSpPr>
+        <p:spPr>
+          <a:xfrm xmlns:a="http://schemas.openxmlformats.org/drawingml/2006/main">
+            <a:off x="10668000" y="4295775"/>
+            <a:ext cx="342900" cy="247650"/>
+          </a:xfrm>
+          <a:prstGeom xmlns:a="http://schemas.openxmlformats.org/drawingml/2006/main" prst="rect">
+            <a:avLst/>
+          </a:prstGeom>
+          <a:noFill xmlns:a="http://schemas.openxmlformats.org/drawingml/2006/main"/>
+          <a:ln xmlns:a="http://schemas.openxmlformats.org/drawingml/2006/main" w="0">
+            <a:noFill/>
+            <a:prstDash val="solid"/>
+          </a:ln>
+        </p:spPr>
+        <p:txBody>
+          <a:bodyPr xmlns:a="http://schemas.openxmlformats.org/drawingml/2006/main"/>
+          <a:lstStyle xmlns:a="http://schemas.openxmlformats.org/drawingml/2006/main"/>
+          <a:p xmlns:a="http://schemas.openxmlformats.org/drawingml/2006/main">
             <a:pPr algn="ctr">
-              <a:buNone/>
-              <a:defRPr sz="1575" b="1">
-                <a:solidFill>
-                  <a:srgbClr val="0A2030"/>
-                </a:solidFill>
-              </a:defRPr>
-            </a:pPr>
-            <a:r>
-              <a:rPr sz="1575" b="1">
-                <a:solidFill>
-                  <a:srgbClr val="0A2030"/>
-                </a:solidFill>
-              </a:rPr>
-              <a:t>PLAN</a:t>
-            </a:r>
-          </a:p>
-        </p:txBody>
-      </p:sp>
-      <p:sp>
-        <p:nvSpPr>
-          <p:cNvPr id="39" name="trace-stage-1-body">
-            <a:extLst xmlns:a="http://schemas.openxmlformats.org/drawingml/2006/main">
-              <a:ext uri="{FF2B5EF4-FFF2-40B4-BE49-F238E27FC236}">
-                <a16:creationId xmlns:a16="http://schemas.microsoft.com/office/drawing/2014/main" id="{D1B29EEE-C8B0-4827-BFFE-35C898FB7054}"/>
-              </a:ext>
-            </a:extLst>
-          </p:cNvPr>
-          <p:cNvSpPr>
-            <a:spLocks xmlns:a="http://schemas.openxmlformats.org/drawingml/2006/main" noGrp="1"/>
-          </p:cNvSpPr>
-          <p:nvPr/>
-        </p:nvSpPr>
-        <p:spPr>
-          <a:xfrm xmlns:a="http://schemas.openxmlformats.org/drawingml/2006/main">
-            <a:off x="1028700" y="4533900"/>
-            <a:ext cx="1695450" cy="552450"/>
+              <a:defRPr sz="1275" b="1">
+                <a:solidFill>
+                  <a:srgbClr val="FFFFFF"/>
+                </a:solidFill>
+              </a:defRPr>
+            </a:pPr>
+            <a:r>
+              <a:rPr sz="1275" b="1">
+                <a:solidFill>
+                  <a:srgbClr val="FFFFFF"/>
+                </a:solidFill>
+              </a:rPr>
+              <a:t>✓</a:t>
+            </a:r>
+          </a:p>
+        </p:txBody>
+      </p:sp>
+      <p:sp>
+        <p:nvSpPr>
+          <p:cNvPr id="42" name="">
+            <a:extLst xmlns:a="http://schemas.openxmlformats.org/drawingml/2006/main">
+              <a:ext uri="{FF2B5EF4-FFF2-40B4-BE49-F238E27FC236}">
+                <a16:creationId xmlns:a16="http://schemas.microsoft.com/office/drawing/2014/main" id="{7F914DC4-5E87-4660-A772-28B1DF0D747F}"/>
+              </a:ext>
+            </a:extLst>
+          </p:cNvPr>
+          <p:cNvSpPr>
+            <a:spLocks xmlns:a="http://schemas.openxmlformats.org/drawingml/2006/main" noGrp="1"/>
+          </p:cNvSpPr>
+          <p:nvPr/>
+        </p:nvSpPr>
+        <p:spPr>
+          <a:xfrm xmlns:a="http://schemas.openxmlformats.org/drawingml/2006/main">
+            <a:off x="11144250" y="4257675"/>
+            <a:ext cx="2667000" cy="457200"/>
           </a:xfrm>
           <a:prstGeom xmlns:a="http://schemas.openxmlformats.org/drawingml/2006/main" prst="rect">
             <a:avLst/>
@@ -10541,94 +9903,248 @@
           <a:bodyPr xmlns:a="http://schemas.openxmlformats.org/drawingml/2006/main"/>
           <a:lstStyle xmlns:a="http://schemas.openxmlformats.org/drawingml/2006/main"/>
           <a:p xmlns:a="http://schemas.openxmlformats.org/drawingml/2006/main">
+            <a:pPr algn="l">
+              <a:defRPr sz="1350" b="1">
+                <a:solidFill>
+                  <a:srgbClr val="051C2A"/>
+                </a:solidFill>
+              </a:defRPr>
+            </a:pPr>
+            <a:r>
+              <a:rPr sz="1350" b="1">
+                <a:solidFill>
+                  <a:srgbClr val="051C2A"/>
+                </a:solidFill>
+              </a:rPr>
+              <a:t>Find the weakest case</a:t>
+            </a:r>
+          </a:p>
+        </p:txBody>
+      </p:sp>
+      <p:pic>
+        <p:nvPicPr>
+          <p:cNvPr id="66" name=""/>
+          <p:cNvPicPr>
+            <a:picLocks xmlns:a="http://schemas.openxmlformats.org/drawingml/2006/main" noChangeAspect="1"/>
+          </p:cNvPicPr>
+          <p:nvPr/>
+        </p:nvPicPr>
+        <p:blipFill>
+          <a:blip xmlns:r="http://schemas.openxmlformats.org/officeDocument/2006/relationships" xmlns:a="http://schemas.openxmlformats.org/drawingml/2006/main" r:embed="Rcbd4d01655f848e7">
+            <a:extLst>
+              <a:ext uri="{96DAC541-7B7A-43D3-8B79-37D633B846F1}">
+                <asvg:svgBlip xmlns:asvg="http://schemas.microsoft.com/office/drawing/2016/SVG/main" r:embed="R7a5ad0ea001247f3"/>
+              </a:ext>
+            </a:extLst>
+          </a:blip>
+          <a:stretch xmlns:a="http://schemas.openxmlformats.org/drawingml/2006/main"/>
+        </p:blipFill>
+        <p:spPr>
+          <a:xfrm xmlns:a="http://schemas.openxmlformats.org/drawingml/2006/main">
+            <a:off x="10668000" y="4876800"/>
+            <a:ext cx="342900" cy="342900"/>
+          </a:xfrm>
+          <a:prstGeom xmlns:a="http://schemas.openxmlformats.org/drawingml/2006/main" prst="rect">
+            <a:avLst/>
+          </a:prstGeom>
+        </p:spPr>
+      </p:pic>
+      <p:sp>
+        <p:nvSpPr>
+          <p:cNvPr id="44" name="">
+            <a:extLst xmlns:a="http://schemas.openxmlformats.org/drawingml/2006/main">
+              <a:ext uri="{FF2B5EF4-FFF2-40B4-BE49-F238E27FC236}">
+                <a16:creationId xmlns:a16="http://schemas.microsoft.com/office/drawing/2014/main" id="{E74719E8-CC98-472F-A945-A5C8887A1ADB}"/>
+              </a:ext>
+            </a:extLst>
+          </p:cNvPr>
+          <p:cNvSpPr>
+            <a:spLocks xmlns:a="http://schemas.openxmlformats.org/drawingml/2006/main" noGrp="1"/>
+          </p:cNvSpPr>
+          <p:nvPr/>
+        </p:nvSpPr>
+        <p:spPr>
+          <a:xfrm xmlns:a="http://schemas.openxmlformats.org/drawingml/2006/main">
+            <a:off x="10668000" y="4905375"/>
+            <a:ext cx="342900" cy="247650"/>
+          </a:xfrm>
+          <a:prstGeom xmlns:a="http://schemas.openxmlformats.org/drawingml/2006/main" prst="rect">
+            <a:avLst/>
+          </a:prstGeom>
+          <a:noFill xmlns:a="http://schemas.openxmlformats.org/drawingml/2006/main"/>
+          <a:ln xmlns:a="http://schemas.openxmlformats.org/drawingml/2006/main" w="0">
+            <a:noFill/>
+            <a:prstDash val="solid"/>
+          </a:ln>
+        </p:spPr>
+        <p:txBody>
+          <a:bodyPr xmlns:a="http://schemas.openxmlformats.org/drawingml/2006/main"/>
+          <a:lstStyle xmlns:a="http://schemas.openxmlformats.org/drawingml/2006/main"/>
+          <a:p xmlns:a="http://schemas.openxmlformats.org/drawingml/2006/main">
             <a:pPr algn="ctr">
-              <a:buNone/>
-              <a:defRPr sz="1200" b="0">
-                <a:solidFill>
-                  <a:srgbClr val="1F40CB"/>
-                </a:solidFill>
-              </a:defRPr>
-            </a:pPr>
-            <a:r>
-              <a:rPr sz="1200" b="0">
-                <a:solidFill>
-                  <a:srgbClr val="1F40CB"/>
-                </a:solidFill>
-              </a:rPr>
-              <a:t>mission +</a:t>
-            </a:r>
-          </a:p>
+              <a:defRPr sz="1275" b="1">
+                <a:solidFill>
+                  <a:srgbClr val="FFFFFF"/>
+                </a:solidFill>
+              </a:defRPr>
+            </a:pPr>
+            <a:r>
+              <a:rPr sz="1275" b="1">
+                <a:solidFill>
+                  <a:srgbClr val="FFFFFF"/>
+                </a:solidFill>
+              </a:rPr>
+              <a:t>✓</a:t>
+            </a:r>
+          </a:p>
+        </p:txBody>
+      </p:sp>
+      <p:sp>
+        <p:nvSpPr>
+          <p:cNvPr id="45" name="">
+            <a:extLst xmlns:a="http://schemas.openxmlformats.org/drawingml/2006/main">
+              <a:ext uri="{FF2B5EF4-FFF2-40B4-BE49-F238E27FC236}">
+                <a16:creationId xmlns:a16="http://schemas.microsoft.com/office/drawing/2014/main" id="{CB2E7611-4F03-4293-AACF-1DE63C64782F}"/>
+              </a:ext>
+            </a:extLst>
+          </p:cNvPr>
+          <p:cNvSpPr>
+            <a:spLocks xmlns:a="http://schemas.openxmlformats.org/drawingml/2006/main" noGrp="1"/>
+          </p:cNvSpPr>
+          <p:nvPr/>
+        </p:nvSpPr>
+        <p:spPr>
+          <a:xfrm xmlns:a="http://schemas.openxmlformats.org/drawingml/2006/main">
+            <a:off x="11144250" y="4867275"/>
+            <a:ext cx="2667000" cy="457200"/>
+          </a:xfrm>
+          <a:prstGeom xmlns:a="http://schemas.openxmlformats.org/drawingml/2006/main" prst="rect">
+            <a:avLst/>
+          </a:prstGeom>
+          <a:noFill xmlns:a="http://schemas.openxmlformats.org/drawingml/2006/main"/>
+          <a:ln xmlns:a="http://schemas.openxmlformats.org/drawingml/2006/main" w="0">
+            <a:noFill/>
+            <a:prstDash val="solid"/>
+          </a:ln>
+        </p:spPr>
+        <p:txBody>
+          <a:bodyPr xmlns:a="http://schemas.openxmlformats.org/drawingml/2006/main"/>
+          <a:lstStyle xmlns:a="http://schemas.openxmlformats.org/drawingml/2006/main"/>
+          <a:p xmlns:a="http://schemas.openxmlformats.org/drawingml/2006/main">
+            <a:pPr algn="l">
+              <a:defRPr sz="1350" b="1">
+                <a:solidFill>
+                  <a:srgbClr val="051C2A"/>
+                </a:solidFill>
+              </a:defRPr>
+            </a:pPr>
+            <a:r>
+              <a:rPr sz="1350" b="1">
+                <a:solidFill>
+                  <a:srgbClr val="051C2A"/>
+                </a:solidFill>
+              </a:rPr>
+              <a:t>Open its trace</a:t>
+            </a:r>
+          </a:p>
+        </p:txBody>
+      </p:sp>
+      <p:pic>
+        <p:nvPicPr>
+          <p:cNvPr id="69" name=""/>
+          <p:cNvPicPr>
+            <a:picLocks xmlns:a="http://schemas.openxmlformats.org/drawingml/2006/main" noChangeAspect="1"/>
+          </p:cNvPicPr>
+          <p:nvPr/>
+        </p:nvPicPr>
+        <p:blipFill>
+          <a:blip xmlns:r="http://schemas.openxmlformats.org/officeDocument/2006/relationships" xmlns:a="http://schemas.openxmlformats.org/drawingml/2006/main" r:embed="Rad949b6fc6744cd7">
+            <a:extLst>
+              <a:ext uri="{96DAC541-7B7A-43D3-8B79-37D633B846F1}">
+                <asvg:svgBlip xmlns:asvg="http://schemas.microsoft.com/office/drawing/2016/SVG/main" r:embed="Re27178cdaff345f2"/>
+              </a:ext>
+            </a:extLst>
+          </a:blip>
+          <a:stretch xmlns:a="http://schemas.openxmlformats.org/drawingml/2006/main"/>
+        </p:blipFill>
+        <p:spPr>
+          <a:xfrm xmlns:a="http://schemas.openxmlformats.org/drawingml/2006/main">
+            <a:off x="10668000" y="5486400"/>
+            <a:ext cx="342900" cy="342900"/>
+          </a:xfrm>
+          <a:prstGeom xmlns:a="http://schemas.openxmlformats.org/drawingml/2006/main" prst="rect">
+            <a:avLst/>
+          </a:prstGeom>
+        </p:spPr>
+      </p:pic>
+      <p:sp>
+        <p:nvSpPr>
+          <p:cNvPr id="47" name="">
+            <a:extLst xmlns:a="http://schemas.openxmlformats.org/drawingml/2006/main">
+              <a:ext uri="{FF2B5EF4-FFF2-40B4-BE49-F238E27FC236}">
+                <a16:creationId xmlns:a16="http://schemas.microsoft.com/office/drawing/2014/main" id="{3E0F9A69-201B-4F97-BE8D-8F584A8BEF3F}"/>
+              </a:ext>
+            </a:extLst>
+          </p:cNvPr>
+          <p:cNvSpPr>
+            <a:spLocks xmlns:a="http://schemas.openxmlformats.org/drawingml/2006/main" noGrp="1"/>
+          </p:cNvSpPr>
+          <p:nvPr/>
+        </p:nvSpPr>
+        <p:spPr>
+          <a:xfrm xmlns:a="http://schemas.openxmlformats.org/drawingml/2006/main">
+            <a:off x="10668000" y="5514975"/>
+            <a:ext cx="342900" cy="247650"/>
+          </a:xfrm>
+          <a:prstGeom xmlns:a="http://schemas.openxmlformats.org/drawingml/2006/main" prst="rect">
+            <a:avLst/>
+          </a:prstGeom>
+          <a:noFill xmlns:a="http://schemas.openxmlformats.org/drawingml/2006/main"/>
+          <a:ln xmlns:a="http://schemas.openxmlformats.org/drawingml/2006/main" w="0">
+            <a:noFill/>
+            <a:prstDash val="solid"/>
+          </a:ln>
+        </p:spPr>
+        <p:txBody>
+          <a:bodyPr xmlns:a="http://schemas.openxmlformats.org/drawingml/2006/main"/>
+          <a:lstStyle xmlns:a="http://schemas.openxmlformats.org/drawingml/2006/main"/>
           <a:p xmlns:a="http://schemas.openxmlformats.org/drawingml/2006/main">
             <a:pPr algn="ctr">
-              <a:buNone/>
-              <a:defRPr sz="1200" b="0">
-                <a:solidFill>
-                  <a:srgbClr val="1F40CB"/>
-                </a:solidFill>
-              </a:defRPr>
-            </a:pPr>
-            <a:r>
-              <a:rPr sz="1200" b="0">
-                <a:solidFill>
-                  <a:srgbClr val="1F40CB"/>
-                </a:solidFill>
-              </a:rPr>
-              <a:t>typed steps</a:t>
-            </a:r>
-          </a:p>
-        </p:txBody>
-      </p:sp>
-      <p:sp>
-        <p:nvSpPr>
-          <p:cNvPr id="40" name="trace-stage-2">
-            <a:extLst xmlns:a="http://schemas.openxmlformats.org/drawingml/2006/main">
-              <a:ext uri="{FF2B5EF4-FFF2-40B4-BE49-F238E27FC236}">
-                <a16:creationId xmlns:a16="http://schemas.microsoft.com/office/drawing/2014/main" id="{65B12F75-F768-4BE1-9084-C180190E3827}"/>
-              </a:ext>
-            </a:extLst>
-          </p:cNvPr>
-          <p:cNvSpPr>
-            <a:spLocks xmlns:a="http://schemas.openxmlformats.org/drawingml/2006/main" noGrp="1"/>
-          </p:cNvSpPr>
-          <p:nvPr/>
-        </p:nvSpPr>
-        <p:spPr>
-          <a:xfrm xmlns:a="http://schemas.openxmlformats.org/drawingml/2006/main">
-            <a:off x="2943225" y="3048000"/>
-            <a:ext cx="1771650" cy="2286000"/>
-          </a:xfrm>
-          <a:prstGeom xmlns:a="http://schemas.openxmlformats.org/drawingml/2006/main" prst="roundRect">
-            <a:avLst>
-              <a:gd name="adj" fmla="val 6452"/>
-            </a:avLst>
-          </a:prstGeom>
-          <a:noFill xmlns:a="http://schemas.openxmlformats.org/drawingml/2006/main"/>
-          <a:ln xmlns:a="http://schemas.openxmlformats.org/drawingml/2006/main" w="9525">
-            <a:solidFill>
-              <a:srgbClr val="E4E7E9"/>
-            </a:solidFill>
-            <a:prstDash val="solid"/>
-          </a:ln>
-        </p:spPr>
-      </p:sp>
-      <p:sp>
-        <p:nvSpPr>
-          <p:cNvPr id="41" name="trace-stage-2-step">
-            <a:extLst xmlns:a="http://schemas.openxmlformats.org/drawingml/2006/main">
-              <a:ext uri="{FF2B5EF4-FFF2-40B4-BE49-F238E27FC236}">
-                <a16:creationId xmlns:a16="http://schemas.microsoft.com/office/drawing/2014/main" id="{63D6C81A-FC0E-4E18-B82B-7DC9F9B4A594}"/>
-              </a:ext>
-            </a:extLst>
-          </p:cNvPr>
-          <p:cNvSpPr>
-            <a:spLocks xmlns:a="http://schemas.openxmlformats.org/drawingml/2006/main" noGrp="1"/>
-          </p:cNvSpPr>
-          <p:nvPr/>
-        </p:nvSpPr>
-        <p:spPr>
-          <a:xfrm xmlns:a="http://schemas.openxmlformats.org/drawingml/2006/main">
-            <a:off x="3114675" y="3238500"/>
-            <a:ext cx="533400" cy="285750"/>
+              <a:defRPr sz="1275" b="1">
+                <a:solidFill>
+                  <a:srgbClr val="FFFFFF"/>
+                </a:solidFill>
+              </a:defRPr>
+            </a:pPr>
+            <a:r>
+              <a:rPr sz="1275" b="1">
+                <a:solidFill>
+                  <a:srgbClr val="FFFFFF"/>
+                </a:solidFill>
+              </a:rPr>
+              <a:t>✓</a:t>
+            </a:r>
+          </a:p>
+        </p:txBody>
+      </p:sp>
+      <p:sp>
+        <p:nvSpPr>
+          <p:cNvPr id="48" name="">
+            <a:extLst xmlns:a="http://schemas.openxmlformats.org/drawingml/2006/main">
+              <a:ext uri="{FF2B5EF4-FFF2-40B4-BE49-F238E27FC236}">
+                <a16:creationId xmlns:a16="http://schemas.microsoft.com/office/drawing/2014/main" id="{B6590097-164D-48B3-B9D4-A1A0EDA04C3F}"/>
+              </a:ext>
+            </a:extLst>
+          </p:cNvPr>
+          <p:cNvSpPr>
+            <a:spLocks xmlns:a="http://schemas.openxmlformats.org/drawingml/2006/main" noGrp="1"/>
+          </p:cNvSpPr>
+          <p:nvPr/>
+        </p:nvSpPr>
+        <p:spPr>
+          <a:xfrm xmlns:a="http://schemas.openxmlformats.org/drawingml/2006/main">
+            <a:off x="11144250" y="5476875"/>
+            <a:ext cx="2667000" cy="457200"/>
           </a:xfrm>
           <a:prstGeom xmlns:a="http://schemas.openxmlformats.org/drawingml/2006/main" prst="rect">
             <a:avLst/>
@@ -10643,43 +10159,70 @@
           <a:bodyPr xmlns:a="http://schemas.openxmlformats.org/drawingml/2006/main"/>
           <a:lstStyle xmlns:a="http://schemas.openxmlformats.org/drawingml/2006/main"/>
           <a:p xmlns:a="http://schemas.openxmlformats.org/drawingml/2006/main">
-            <a:pPr>
-              <a:buNone/>
-              <a:defRPr sz="1500" b="1">
-                <a:solidFill>
-                  <a:srgbClr val="00A2EB"/>
-                </a:solidFill>
-              </a:defRPr>
-            </a:pPr>
-            <a:r>
-              <a:rPr sz="1500" b="1">
-                <a:solidFill>
-                  <a:srgbClr val="00A2EB"/>
-                </a:solidFill>
-              </a:rPr>
-              <a:t>02</a:t>
-            </a:r>
-          </a:p>
-        </p:txBody>
-      </p:sp>
-      <p:sp>
-        <p:nvSpPr>
-          <p:cNvPr id="42" name="trace-stage-2-title">
-            <a:extLst xmlns:a="http://schemas.openxmlformats.org/drawingml/2006/main">
-              <a:ext uri="{FF2B5EF4-FFF2-40B4-BE49-F238E27FC236}">
-                <a16:creationId xmlns:a16="http://schemas.microsoft.com/office/drawing/2014/main" id="{07FF58E4-B114-4034-B0EF-B2F909BB2F23}"/>
-              </a:ext>
-            </a:extLst>
-          </p:cNvPr>
-          <p:cNvSpPr>
-            <a:spLocks xmlns:a="http://schemas.openxmlformats.org/drawingml/2006/main" noGrp="1"/>
-          </p:cNvSpPr>
-          <p:nvPr/>
-        </p:nvSpPr>
-        <p:spPr>
-          <a:xfrm xmlns:a="http://schemas.openxmlformats.org/drawingml/2006/main">
-            <a:off x="3057525" y="3733800"/>
-            <a:ext cx="1543050" cy="590550"/>
+            <a:pPr algn="l">
+              <a:defRPr sz="1350" b="1">
+                <a:solidFill>
+                  <a:srgbClr val="051C2A"/>
+                </a:solidFill>
+              </a:defRPr>
+            </a:pPr>
+            <a:r>
+              <a:rPr sz="1350" b="1">
+                <a:solidFill>
+                  <a:srgbClr val="051C2A"/>
+                </a:solidFill>
+              </a:rPr>
+              <a:t>Locate the first failed span</a:t>
+            </a:r>
+          </a:p>
+        </p:txBody>
+      </p:sp>
+      <p:pic>
+        <p:nvPicPr>
+          <p:cNvPr id="72" name=""/>
+          <p:cNvPicPr>
+            <a:picLocks xmlns:a="http://schemas.openxmlformats.org/drawingml/2006/main" noChangeAspect="1"/>
+          </p:cNvPicPr>
+          <p:nvPr/>
+        </p:nvPicPr>
+        <p:blipFill>
+          <a:blip xmlns:r="http://schemas.openxmlformats.org/officeDocument/2006/relationships" xmlns:a="http://schemas.openxmlformats.org/drawingml/2006/main" r:embed="Raa5c3beacd2b41e7">
+            <a:extLst>
+              <a:ext uri="{96DAC541-7B7A-43D3-8B79-37D633B846F1}">
+                <asvg:svgBlip xmlns:asvg="http://schemas.microsoft.com/office/drawing/2016/SVG/main" r:embed="Re6956568d38e42b7"/>
+              </a:ext>
+            </a:extLst>
+          </a:blip>
+          <a:stretch xmlns:a="http://schemas.openxmlformats.org/drawingml/2006/main"/>
+        </p:blipFill>
+        <p:spPr>
+          <a:xfrm xmlns:a="http://schemas.openxmlformats.org/drawingml/2006/main">
+            <a:off x="10668000" y="6096000"/>
+            <a:ext cx="342900" cy="342900"/>
+          </a:xfrm>
+          <a:prstGeom xmlns:a="http://schemas.openxmlformats.org/drawingml/2006/main" prst="rect">
+            <a:avLst/>
+          </a:prstGeom>
+        </p:spPr>
+      </p:pic>
+      <p:sp>
+        <p:nvSpPr>
+          <p:cNvPr id="50" name="">
+            <a:extLst xmlns:a="http://schemas.openxmlformats.org/drawingml/2006/main">
+              <a:ext uri="{FF2B5EF4-FFF2-40B4-BE49-F238E27FC236}">
+                <a16:creationId xmlns:a16="http://schemas.microsoft.com/office/drawing/2014/main" id="{16184986-9730-4442-8733-E7D001D3F39D}"/>
+              </a:ext>
+            </a:extLst>
+          </p:cNvPr>
+          <p:cNvSpPr>
+            <a:spLocks xmlns:a="http://schemas.openxmlformats.org/drawingml/2006/main" noGrp="1"/>
+          </p:cNvSpPr>
+          <p:nvPr/>
+        </p:nvSpPr>
+        <p:spPr>
+          <a:xfrm xmlns:a="http://schemas.openxmlformats.org/drawingml/2006/main">
+            <a:off x="10668000" y="6124575"/>
+            <a:ext cx="342900" cy="247650"/>
           </a:xfrm>
           <a:prstGeom xmlns:a="http://schemas.openxmlformats.org/drawingml/2006/main" prst="rect">
             <a:avLst/>
@@ -10695,42 +10238,41 @@
           <a:lstStyle xmlns:a="http://schemas.openxmlformats.org/drawingml/2006/main"/>
           <a:p xmlns:a="http://schemas.openxmlformats.org/drawingml/2006/main">
             <a:pPr algn="ctr">
-              <a:buNone/>
-              <a:defRPr sz="1575" b="1">
-                <a:solidFill>
-                  <a:srgbClr val="0A2030"/>
-                </a:solidFill>
-              </a:defRPr>
-            </a:pPr>
-            <a:r>
-              <a:rPr sz="1575" b="1">
-                <a:solidFill>
-                  <a:srgbClr val="0A2030"/>
-                </a:solidFill>
-              </a:rPr>
-              <a:t>PLAN GATE</a:t>
-            </a:r>
-          </a:p>
-        </p:txBody>
-      </p:sp>
-      <p:sp>
-        <p:nvSpPr>
-          <p:cNvPr id="43" name="trace-stage-2-body">
-            <a:extLst xmlns:a="http://schemas.openxmlformats.org/drawingml/2006/main">
-              <a:ext uri="{FF2B5EF4-FFF2-40B4-BE49-F238E27FC236}">
-                <a16:creationId xmlns:a16="http://schemas.microsoft.com/office/drawing/2014/main" id="{F8D56BB3-49F3-4446-BF77-B669E57FBBCA}"/>
-              </a:ext>
-            </a:extLst>
-          </p:cNvPr>
-          <p:cNvSpPr>
-            <a:spLocks xmlns:a="http://schemas.openxmlformats.org/drawingml/2006/main" noGrp="1"/>
-          </p:cNvSpPr>
-          <p:nvPr/>
-        </p:nvSpPr>
-        <p:spPr>
-          <a:xfrm xmlns:a="http://schemas.openxmlformats.org/drawingml/2006/main">
-            <a:off x="2981325" y="4533900"/>
-            <a:ext cx="1695450" cy="552450"/>
+              <a:defRPr sz="1275" b="1">
+                <a:solidFill>
+                  <a:srgbClr val="FFFFFF"/>
+                </a:solidFill>
+              </a:defRPr>
+            </a:pPr>
+            <a:r>
+              <a:rPr sz="1275" b="1">
+                <a:solidFill>
+                  <a:srgbClr val="FFFFFF"/>
+                </a:solidFill>
+              </a:rPr>
+              <a:t>✓</a:t>
+            </a:r>
+          </a:p>
+        </p:txBody>
+      </p:sp>
+      <p:sp>
+        <p:nvSpPr>
+          <p:cNvPr id="51" name="">
+            <a:extLst xmlns:a="http://schemas.openxmlformats.org/drawingml/2006/main">
+              <a:ext uri="{FF2B5EF4-FFF2-40B4-BE49-F238E27FC236}">
+                <a16:creationId xmlns:a16="http://schemas.microsoft.com/office/drawing/2014/main" id="{653E3999-2CDE-4FCF-95B9-523193F2DB9D}"/>
+              </a:ext>
+            </a:extLst>
+          </p:cNvPr>
+          <p:cNvSpPr>
+            <a:spLocks xmlns:a="http://schemas.openxmlformats.org/drawingml/2006/main" noGrp="1"/>
+          </p:cNvSpPr>
+          <p:nvPr/>
+        </p:nvSpPr>
+        <p:spPr>
+          <a:xfrm xmlns:a="http://schemas.openxmlformats.org/drawingml/2006/main">
+            <a:off x="11144250" y="6086475"/>
+            <a:ext cx="2667000" cy="457200"/>
           </a:xfrm>
           <a:prstGeom xmlns:a="http://schemas.openxmlformats.org/drawingml/2006/main" prst="rect">
             <a:avLst/>
@@ -10745,1273 +10287,24 @@
           <a:bodyPr xmlns:a="http://schemas.openxmlformats.org/drawingml/2006/main"/>
           <a:lstStyle xmlns:a="http://schemas.openxmlformats.org/drawingml/2006/main"/>
           <a:p xmlns:a="http://schemas.openxmlformats.org/drawingml/2006/main">
-            <a:pPr algn="ctr">
-              <a:buNone/>
-              <a:defRPr sz="1200" b="0">
-                <a:solidFill>
-                  <a:srgbClr val="1F40CB"/>
-                </a:solidFill>
-              </a:defRPr>
-            </a:pPr>
-            <a:r>
-              <a:rPr sz="1200" b="0">
-                <a:solidFill>
-                  <a:srgbClr val="1F40CB"/>
-                </a:solidFill>
-              </a:rPr>
-              <a:t>schema +</a:t>
-            </a:r>
-          </a:p>
-          <a:p xmlns:a="http://schemas.openxmlformats.org/drawingml/2006/main">
-            <a:pPr algn="ctr">
-              <a:buNone/>
-              <a:defRPr sz="1200" b="0">
-                <a:solidFill>
-                  <a:srgbClr val="1F40CB"/>
-                </a:solidFill>
-              </a:defRPr>
-            </a:pPr>
-            <a:r>
-              <a:rPr sz="1200" b="0">
-                <a:solidFill>
-                  <a:srgbClr val="1F40CB"/>
-                </a:solidFill>
-              </a:rPr>
-              <a:t>budget</a:t>
-            </a:r>
-          </a:p>
-        </p:txBody>
-      </p:sp>
-      <p:sp>
-        <p:nvSpPr>
-          <p:cNvPr id="44" name="trace-stage-3">
-            <a:extLst xmlns:a="http://schemas.openxmlformats.org/drawingml/2006/main">
-              <a:ext uri="{FF2B5EF4-FFF2-40B4-BE49-F238E27FC236}">
-                <a16:creationId xmlns:a16="http://schemas.microsoft.com/office/drawing/2014/main" id="{338B1008-D419-4DB3-9570-40EC9F703C4E}"/>
-              </a:ext>
-            </a:extLst>
-          </p:cNvPr>
-          <p:cNvSpPr>
-            <a:spLocks xmlns:a="http://schemas.openxmlformats.org/drawingml/2006/main" noGrp="1"/>
-          </p:cNvSpPr>
-          <p:nvPr/>
-        </p:nvSpPr>
-        <p:spPr>
-          <a:xfrm xmlns:a="http://schemas.openxmlformats.org/drawingml/2006/main">
-            <a:off x="4895850" y="3048000"/>
-            <a:ext cx="1771650" cy="2286000"/>
-          </a:xfrm>
-          <a:prstGeom xmlns:a="http://schemas.openxmlformats.org/drawingml/2006/main" prst="roundRect">
-            <a:avLst>
-              <a:gd name="adj" fmla="val 6452"/>
-            </a:avLst>
-          </a:prstGeom>
-          <a:noFill xmlns:a="http://schemas.openxmlformats.org/drawingml/2006/main"/>
-          <a:ln xmlns:a="http://schemas.openxmlformats.org/drawingml/2006/main" w="19050">
-            <a:solidFill>
-              <a:srgbClr val="051C2A"/>
-            </a:solidFill>
-            <a:prstDash val="solid"/>
-          </a:ln>
-        </p:spPr>
-      </p:sp>
-      <p:sp>
-        <p:nvSpPr>
-          <p:cNvPr id="45" name="trace-stage-3-step">
-            <a:extLst xmlns:a="http://schemas.openxmlformats.org/drawingml/2006/main">
-              <a:ext uri="{FF2B5EF4-FFF2-40B4-BE49-F238E27FC236}">
-                <a16:creationId xmlns:a16="http://schemas.microsoft.com/office/drawing/2014/main" id="{900A3379-3E75-4D8E-A6DE-9540E7365D2F}"/>
-              </a:ext>
-            </a:extLst>
-          </p:cNvPr>
-          <p:cNvSpPr>
-            <a:spLocks xmlns:a="http://schemas.openxmlformats.org/drawingml/2006/main" noGrp="1"/>
-          </p:cNvSpPr>
-          <p:nvPr/>
-        </p:nvSpPr>
-        <p:spPr>
-          <a:xfrm xmlns:a="http://schemas.openxmlformats.org/drawingml/2006/main">
-            <a:off x="5067300" y="3238500"/>
-            <a:ext cx="533400" cy="285750"/>
-          </a:xfrm>
-          <a:prstGeom xmlns:a="http://schemas.openxmlformats.org/drawingml/2006/main" prst="rect">
-            <a:avLst/>
-          </a:prstGeom>
-          <a:noFill xmlns:a="http://schemas.openxmlformats.org/drawingml/2006/main"/>
-          <a:ln xmlns:a="http://schemas.openxmlformats.org/drawingml/2006/main" w="0">
-            <a:noFill/>
-            <a:prstDash val="solid"/>
-          </a:ln>
-        </p:spPr>
-        <p:txBody>
-          <a:bodyPr xmlns:a="http://schemas.openxmlformats.org/drawingml/2006/main"/>
-          <a:lstStyle xmlns:a="http://schemas.openxmlformats.org/drawingml/2006/main"/>
-          <a:p xmlns:a="http://schemas.openxmlformats.org/drawingml/2006/main">
-            <a:pPr>
-              <a:buNone/>
-              <a:defRPr sz="1500" b="1">
-                <a:solidFill>
-                  <a:srgbClr val="00A2EB"/>
-                </a:solidFill>
-              </a:defRPr>
-            </a:pPr>
-            <a:r>
-              <a:rPr sz="1500" b="1">
-                <a:solidFill>
-                  <a:srgbClr val="00A2EB"/>
-                </a:solidFill>
-              </a:rPr>
-              <a:t>03</a:t>
-            </a:r>
-          </a:p>
-        </p:txBody>
-      </p:sp>
-      <p:sp>
-        <p:nvSpPr>
-          <p:cNvPr id="46" name="trace-stage-3-title">
-            <a:extLst xmlns:a="http://schemas.openxmlformats.org/drawingml/2006/main">
-              <a:ext uri="{FF2B5EF4-FFF2-40B4-BE49-F238E27FC236}">
-                <a16:creationId xmlns:a16="http://schemas.microsoft.com/office/drawing/2014/main" id="{E9F01598-46EE-4682-BBA2-2356503767C7}"/>
-              </a:ext>
-            </a:extLst>
-          </p:cNvPr>
-          <p:cNvSpPr>
-            <a:spLocks xmlns:a="http://schemas.openxmlformats.org/drawingml/2006/main" noGrp="1"/>
-          </p:cNvSpPr>
-          <p:nvPr/>
-        </p:nvSpPr>
-        <p:spPr>
-          <a:xfrm xmlns:a="http://schemas.openxmlformats.org/drawingml/2006/main">
-            <a:off x="5010150" y="3733800"/>
-            <a:ext cx="1543050" cy="590550"/>
-          </a:xfrm>
-          <a:prstGeom xmlns:a="http://schemas.openxmlformats.org/drawingml/2006/main" prst="rect">
-            <a:avLst/>
-          </a:prstGeom>
-          <a:noFill xmlns:a="http://schemas.openxmlformats.org/drawingml/2006/main"/>
-          <a:ln xmlns:a="http://schemas.openxmlformats.org/drawingml/2006/main" w="0">
-            <a:noFill/>
-            <a:prstDash val="solid"/>
-          </a:ln>
-        </p:spPr>
-        <p:txBody>
-          <a:bodyPr xmlns:a="http://schemas.openxmlformats.org/drawingml/2006/main"/>
-          <a:lstStyle xmlns:a="http://schemas.openxmlformats.org/drawingml/2006/main"/>
-          <a:p xmlns:a="http://schemas.openxmlformats.org/drawingml/2006/main">
-            <a:pPr algn="ctr">
-              <a:buNone/>
-              <a:defRPr sz="1575" b="1">
-                <a:solidFill>
-                  <a:srgbClr val="0A2030"/>
-                </a:solidFill>
-              </a:defRPr>
-            </a:pPr>
-            <a:r>
-              <a:rPr sz="1575" b="1">
-                <a:solidFill>
-                  <a:srgbClr val="0A2030"/>
-                </a:solidFill>
-              </a:rPr>
-              <a:t>TOOL</a:t>
-            </a:r>
-          </a:p>
-          <a:p xmlns:a="http://schemas.openxmlformats.org/drawingml/2006/main">
-            <a:pPr algn="ctr">
-              <a:buNone/>
-              <a:defRPr sz="1575" b="1">
-                <a:solidFill>
-                  <a:srgbClr val="0A2030"/>
-                </a:solidFill>
-              </a:defRPr>
-            </a:pPr>
-            <a:r>
-              <a:rPr sz="1575" b="1">
-                <a:solidFill>
-                  <a:srgbClr val="0A2030"/>
-                </a:solidFill>
-              </a:rPr>
-              <a:t>ATTEMPTS</a:t>
-            </a:r>
-          </a:p>
-        </p:txBody>
-      </p:sp>
-      <p:sp>
-        <p:nvSpPr>
-          <p:cNvPr id="47" name="trace-stage-3-body">
-            <a:extLst xmlns:a="http://schemas.openxmlformats.org/drawingml/2006/main">
-              <a:ext uri="{FF2B5EF4-FFF2-40B4-BE49-F238E27FC236}">
-                <a16:creationId xmlns:a16="http://schemas.microsoft.com/office/drawing/2014/main" id="{0563448A-43C5-4965-BC67-DFCE3D58FA23}"/>
-              </a:ext>
-            </a:extLst>
-          </p:cNvPr>
-          <p:cNvSpPr>
-            <a:spLocks xmlns:a="http://schemas.openxmlformats.org/drawingml/2006/main" noGrp="1"/>
-          </p:cNvSpPr>
-          <p:nvPr/>
-        </p:nvSpPr>
-        <p:spPr>
-          <a:xfrm xmlns:a="http://schemas.openxmlformats.org/drawingml/2006/main">
-            <a:off x="4933950" y="4533900"/>
-            <a:ext cx="1695450" cy="552450"/>
-          </a:xfrm>
-          <a:prstGeom xmlns:a="http://schemas.openxmlformats.org/drawingml/2006/main" prst="rect">
-            <a:avLst/>
-          </a:prstGeom>
-          <a:noFill xmlns:a="http://schemas.openxmlformats.org/drawingml/2006/main"/>
-          <a:ln xmlns:a="http://schemas.openxmlformats.org/drawingml/2006/main" w="0">
-            <a:noFill/>
-            <a:prstDash val="solid"/>
-          </a:ln>
-        </p:spPr>
-        <p:txBody>
-          <a:bodyPr xmlns:a="http://schemas.openxmlformats.org/drawingml/2006/main"/>
-          <a:lstStyle xmlns:a="http://schemas.openxmlformats.org/drawingml/2006/main"/>
-          <a:p xmlns:a="http://schemas.openxmlformats.org/drawingml/2006/main">
-            <a:pPr algn="ctr">
-              <a:buNone/>
-              <a:defRPr sz="1200" b="0">
-                <a:solidFill>
-                  <a:srgbClr val="F07D00"/>
-                </a:solidFill>
-              </a:defRPr>
-            </a:pPr>
-            <a:r>
-              <a:rPr sz="1200" b="0">
-                <a:solidFill>
-                  <a:srgbClr val="F07D00"/>
-                </a:solidFill>
-              </a:rPr>
-              <a:t>attempts 1-3</a:t>
-            </a:r>
-          </a:p>
-          <a:p xmlns:a="http://schemas.openxmlformats.org/drawingml/2006/main">
-            <a:pPr algn="ctr">
-              <a:buNone/>
-              <a:defRPr sz="1200" b="0">
-                <a:solidFill>
-                  <a:srgbClr val="F07D00"/>
-                </a:solidFill>
-              </a:defRPr>
-            </a:pPr>
-            <a:r>
-              <a:rPr sz="1200" b="0">
-                <a:solidFill>
-                  <a:srgbClr val="F07D00"/>
-                </a:solidFill>
-              </a:rPr>
-              <a:t>unsupported_metric</a:t>
-            </a:r>
-          </a:p>
-        </p:txBody>
-      </p:sp>
-      <p:sp>
-        <p:nvSpPr>
-          <p:cNvPr id="48" name="trace-stage-4">
-            <a:extLst xmlns:a="http://schemas.openxmlformats.org/drawingml/2006/main">
-              <a:ext uri="{FF2B5EF4-FFF2-40B4-BE49-F238E27FC236}">
-                <a16:creationId xmlns:a16="http://schemas.microsoft.com/office/drawing/2014/main" id="{C3B10C6A-E59F-4187-A6D6-6A05FE851838}"/>
-              </a:ext>
-            </a:extLst>
-          </p:cNvPr>
-          <p:cNvSpPr>
-            <a:spLocks xmlns:a="http://schemas.openxmlformats.org/drawingml/2006/main" noGrp="1"/>
-          </p:cNvSpPr>
-          <p:nvPr/>
-        </p:nvSpPr>
-        <p:spPr>
-          <a:xfrm xmlns:a="http://schemas.openxmlformats.org/drawingml/2006/main">
-            <a:off x="6848475" y="3048000"/>
-            <a:ext cx="1771650" cy="2286000"/>
-          </a:xfrm>
-          <a:prstGeom xmlns:a="http://schemas.openxmlformats.org/drawingml/2006/main" prst="roundRect">
-            <a:avLst>
-              <a:gd name="adj" fmla="val 6452"/>
-            </a:avLst>
-          </a:prstGeom>
-          <a:noFill xmlns:a="http://schemas.openxmlformats.org/drawingml/2006/main"/>
-          <a:ln xmlns:a="http://schemas.openxmlformats.org/drawingml/2006/main" w="19050">
-            <a:solidFill>
-              <a:srgbClr val="F07D00"/>
-            </a:solidFill>
-            <a:prstDash val="solid"/>
-          </a:ln>
-        </p:spPr>
-      </p:sp>
-      <p:sp>
-        <p:nvSpPr>
-          <p:cNvPr id="49" name="trace-stage-4-step">
-            <a:extLst xmlns:a="http://schemas.openxmlformats.org/drawingml/2006/main">
-              <a:ext uri="{FF2B5EF4-FFF2-40B4-BE49-F238E27FC236}">
-                <a16:creationId xmlns:a16="http://schemas.microsoft.com/office/drawing/2014/main" id="{8BF90EA8-2443-4E4C-B53A-B022E697EBFE}"/>
-              </a:ext>
-            </a:extLst>
-          </p:cNvPr>
-          <p:cNvSpPr>
-            <a:spLocks xmlns:a="http://schemas.openxmlformats.org/drawingml/2006/main" noGrp="1"/>
-          </p:cNvSpPr>
-          <p:nvPr/>
-        </p:nvSpPr>
-        <p:spPr>
-          <a:xfrm xmlns:a="http://schemas.openxmlformats.org/drawingml/2006/main">
-            <a:off x="7019925" y="3238500"/>
-            <a:ext cx="533400" cy="285750"/>
-          </a:xfrm>
-          <a:prstGeom xmlns:a="http://schemas.openxmlformats.org/drawingml/2006/main" prst="rect">
-            <a:avLst/>
-          </a:prstGeom>
-          <a:noFill xmlns:a="http://schemas.openxmlformats.org/drawingml/2006/main"/>
-          <a:ln xmlns:a="http://schemas.openxmlformats.org/drawingml/2006/main" w="0">
-            <a:noFill/>
-            <a:prstDash val="solid"/>
-          </a:ln>
-        </p:spPr>
-        <p:txBody>
-          <a:bodyPr xmlns:a="http://schemas.openxmlformats.org/drawingml/2006/main"/>
-          <a:lstStyle xmlns:a="http://schemas.openxmlformats.org/drawingml/2006/main"/>
-          <a:p xmlns:a="http://schemas.openxmlformats.org/drawingml/2006/main">
-            <a:pPr>
-              <a:buNone/>
-              <a:defRPr sz="1500" b="1">
-                <a:solidFill>
-                  <a:srgbClr val="00A2EB"/>
-                </a:solidFill>
-              </a:defRPr>
-            </a:pPr>
-            <a:r>
-              <a:rPr sz="1500" b="1">
-                <a:solidFill>
-                  <a:srgbClr val="00A2EB"/>
-                </a:solidFill>
-              </a:rPr>
-              <a:t>04</a:t>
-            </a:r>
-          </a:p>
-        </p:txBody>
-      </p:sp>
-      <p:sp>
-        <p:nvSpPr>
-          <p:cNvPr id="50" name="trace-stage-4-title">
-            <a:extLst xmlns:a="http://schemas.openxmlformats.org/drawingml/2006/main">
-              <a:ext uri="{FF2B5EF4-FFF2-40B4-BE49-F238E27FC236}">
-                <a16:creationId xmlns:a16="http://schemas.microsoft.com/office/drawing/2014/main" id="{20E81F41-414E-46F1-9017-282A4CDFF8DF}"/>
-              </a:ext>
-            </a:extLst>
-          </p:cNvPr>
-          <p:cNvSpPr>
-            <a:spLocks xmlns:a="http://schemas.openxmlformats.org/drawingml/2006/main" noGrp="1"/>
-          </p:cNvSpPr>
-          <p:nvPr/>
-        </p:nvSpPr>
-        <p:spPr>
-          <a:xfrm xmlns:a="http://schemas.openxmlformats.org/drawingml/2006/main">
-            <a:off x="6962775" y="3733800"/>
-            <a:ext cx="1543050" cy="590550"/>
-          </a:xfrm>
-          <a:prstGeom xmlns:a="http://schemas.openxmlformats.org/drawingml/2006/main" prst="rect">
-            <a:avLst/>
-          </a:prstGeom>
-          <a:noFill xmlns:a="http://schemas.openxmlformats.org/drawingml/2006/main"/>
-          <a:ln xmlns:a="http://schemas.openxmlformats.org/drawingml/2006/main" w="0">
-            <a:noFill/>
-            <a:prstDash val="solid"/>
-          </a:ln>
-        </p:spPr>
-        <p:txBody>
-          <a:bodyPr xmlns:a="http://schemas.openxmlformats.org/drawingml/2006/main"/>
-          <a:lstStyle xmlns:a="http://schemas.openxmlformats.org/drawingml/2006/main"/>
-          <a:p xmlns:a="http://schemas.openxmlformats.org/drawingml/2006/main">
-            <a:pPr algn="ctr">
-              <a:buNone/>
-              <a:defRPr sz="1575" b="1">
-                <a:solidFill>
-                  <a:srgbClr val="F07D00"/>
-                </a:solidFill>
-              </a:defRPr>
-            </a:pPr>
-            <a:r>
-              <a:rPr sz="1575" b="1">
-                <a:solidFill>
-                  <a:srgbClr val="F07D00"/>
-                </a:solidFill>
-              </a:rPr>
-              <a:t>REPLAN</a:t>
-            </a:r>
-          </a:p>
-        </p:txBody>
-      </p:sp>
-      <p:sp>
-        <p:nvSpPr>
-          <p:cNvPr id="51" name="trace-stage-4-body">
-            <a:extLst xmlns:a="http://schemas.openxmlformats.org/drawingml/2006/main">
-              <a:ext uri="{FF2B5EF4-FFF2-40B4-BE49-F238E27FC236}">
-                <a16:creationId xmlns:a16="http://schemas.microsoft.com/office/drawing/2014/main" id="{531F0166-3794-4A33-BF4C-0500EE6B1413}"/>
-              </a:ext>
-            </a:extLst>
-          </p:cNvPr>
-          <p:cNvSpPr>
-            <a:spLocks xmlns:a="http://schemas.openxmlformats.org/drawingml/2006/main" noGrp="1"/>
-          </p:cNvSpPr>
-          <p:nvPr/>
-        </p:nvSpPr>
-        <p:spPr>
-          <a:xfrm xmlns:a="http://schemas.openxmlformats.org/drawingml/2006/main">
-            <a:off x="6886575" y="4533900"/>
-            <a:ext cx="1695450" cy="552450"/>
-          </a:xfrm>
-          <a:prstGeom xmlns:a="http://schemas.openxmlformats.org/drawingml/2006/main" prst="rect">
-            <a:avLst/>
-          </a:prstGeom>
-          <a:noFill xmlns:a="http://schemas.openxmlformats.org/drawingml/2006/main"/>
-          <a:ln xmlns:a="http://schemas.openxmlformats.org/drawingml/2006/main" w="0">
-            <a:noFill/>
-            <a:prstDash val="solid"/>
-          </a:ln>
-        </p:spPr>
-        <p:txBody>
-          <a:bodyPr xmlns:a="http://schemas.openxmlformats.org/drawingml/2006/main"/>
-          <a:lstStyle xmlns:a="http://schemas.openxmlformats.org/drawingml/2006/main"/>
-          <a:p xmlns:a="http://schemas.openxmlformats.org/drawingml/2006/main">
-            <a:pPr algn="ctr">
-              <a:buNone/>
-              <a:defRPr sz="1200" b="0">
-                <a:solidFill>
-                  <a:srgbClr val="F07D00"/>
-                </a:solidFill>
-              </a:defRPr>
-            </a:pPr>
-            <a:r>
-              <a:rPr sz="1200" b="0">
-                <a:solidFill>
-                  <a:srgbClr val="F07D00"/>
-                </a:solidFill>
-              </a:rPr>
-              <a:t>revision 1</a:t>
-            </a:r>
-          </a:p>
-          <a:p xmlns:a="http://schemas.openxmlformats.org/drawingml/2006/main">
-            <a:pPr algn="ctr">
-              <a:buNone/>
-              <a:defRPr sz="1200" b="0">
-                <a:solidFill>
-                  <a:srgbClr val="F07D00"/>
-                </a:solidFill>
-              </a:defRPr>
-            </a:pPr>
-            <a:r>
-              <a:rPr sz="1200" b="0">
-                <a:solidFill>
-                  <a:srgbClr val="F07D00"/>
-                </a:solidFill>
-              </a:rPr>
-              <a:t>bounded recovery</a:t>
-            </a:r>
-          </a:p>
-        </p:txBody>
-      </p:sp>
-      <p:sp>
-        <p:nvSpPr>
-          <p:cNvPr id="52" name="trace-stage-5">
-            <a:extLst xmlns:a="http://schemas.openxmlformats.org/drawingml/2006/main">
-              <a:ext uri="{FF2B5EF4-FFF2-40B4-BE49-F238E27FC236}">
-                <a16:creationId xmlns:a16="http://schemas.microsoft.com/office/drawing/2014/main" id="{A66F224A-79FC-4433-8EE4-B0B6F50595F9}"/>
-              </a:ext>
-            </a:extLst>
-          </p:cNvPr>
-          <p:cNvSpPr>
-            <a:spLocks xmlns:a="http://schemas.openxmlformats.org/drawingml/2006/main" noGrp="1"/>
-          </p:cNvSpPr>
-          <p:nvPr/>
-        </p:nvSpPr>
-        <p:spPr>
-          <a:xfrm xmlns:a="http://schemas.openxmlformats.org/drawingml/2006/main">
-            <a:off x="8801100" y="3048000"/>
-            <a:ext cx="1771650" cy="2286000"/>
-          </a:xfrm>
-          <a:prstGeom xmlns:a="http://schemas.openxmlformats.org/drawingml/2006/main" prst="roundRect">
-            <a:avLst>
-              <a:gd name="adj" fmla="val 6452"/>
-            </a:avLst>
-          </a:prstGeom>
-          <a:noFill xmlns:a="http://schemas.openxmlformats.org/drawingml/2006/main"/>
-          <a:ln xmlns:a="http://schemas.openxmlformats.org/drawingml/2006/main" w="19050">
-            <a:solidFill>
-              <a:srgbClr val="2E8B57"/>
-            </a:solidFill>
-            <a:prstDash val="solid"/>
-          </a:ln>
-        </p:spPr>
-      </p:sp>
-      <p:sp>
-        <p:nvSpPr>
-          <p:cNvPr id="53" name="trace-stage-5-step">
-            <a:extLst xmlns:a="http://schemas.openxmlformats.org/drawingml/2006/main">
-              <a:ext uri="{FF2B5EF4-FFF2-40B4-BE49-F238E27FC236}">
-                <a16:creationId xmlns:a16="http://schemas.microsoft.com/office/drawing/2014/main" id="{4DA94BE3-B8A6-4A10-A2F0-A3EBFAD6D738}"/>
-              </a:ext>
-            </a:extLst>
-          </p:cNvPr>
-          <p:cNvSpPr>
-            <a:spLocks xmlns:a="http://schemas.openxmlformats.org/drawingml/2006/main" noGrp="1"/>
-          </p:cNvSpPr>
-          <p:nvPr/>
-        </p:nvSpPr>
-        <p:spPr>
-          <a:xfrm xmlns:a="http://schemas.openxmlformats.org/drawingml/2006/main">
-            <a:off x="8972550" y="3238500"/>
-            <a:ext cx="533400" cy="285750"/>
-          </a:xfrm>
-          <a:prstGeom xmlns:a="http://schemas.openxmlformats.org/drawingml/2006/main" prst="rect">
-            <a:avLst/>
-          </a:prstGeom>
-          <a:noFill xmlns:a="http://schemas.openxmlformats.org/drawingml/2006/main"/>
-          <a:ln xmlns:a="http://schemas.openxmlformats.org/drawingml/2006/main" w="0">
-            <a:noFill/>
-            <a:prstDash val="solid"/>
-          </a:ln>
-        </p:spPr>
-        <p:txBody>
-          <a:bodyPr xmlns:a="http://schemas.openxmlformats.org/drawingml/2006/main"/>
-          <a:lstStyle xmlns:a="http://schemas.openxmlformats.org/drawingml/2006/main"/>
-          <a:p xmlns:a="http://schemas.openxmlformats.org/drawingml/2006/main">
-            <a:pPr>
-              <a:buNone/>
-              <a:defRPr sz="1500" b="1">
-                <a:solidFill>
-                  <a:srgbClr val="00A2EB"/>
-                </a:solidFill>
-              </a:defRPr>
-            </a:pPr>
-            <a:r>
-              <a:rPr sz="1500" b="1">
-                <a:solidFill>
-                  <a:srgbClr val="00A2EB"/>
-                </a:solidFill>
-              </a:rPr>
-              <a:t>05</a:t>
-            </a:r>
-          </a:p>
-        </p:txBody>
-      </p:sp>
-      <p:sp>
-        <p:nvSpPr>
-          <p:cNvPr id="54" name="trace-stage-5-title">
-            <a:extLst xmlns:a="http://schemas.openxmlformats.org/drawingml/2006/main">
-              <a:ext uri="{FF2B5EF4-FFF2-40B4-BE49-F238E27FC236}">
-                <a16:creationId xmlns:a16="http://schemas.microsoft.com/office/drawing/2014/main" id="{3EAA3FDE-42E0-4587-80FC-4DC6EE8A6310}"/>
-              </a:ext>
-            </a:extLst>
-          </p:cNvPr>
-          <p:cNvSpPr>
-            <a:spLocks xmlns:a="http://schemas.openxmlformats.org/drawingml/2006/main" noGrp="1"/>
-          </p:cNvSpPr>
-          <p:nvPr/>
-        </p:nvSpPr>
-        <p:spPr>
-          <a:xfrm xmlns:a="http://schemas.openxmlformats.org/drawingml/2006/main">
-            <a:off x="8915400" y="3733800"/>
-            <a:ext cx="1543050" cy="590550"/>
-          </a:xfrm>
-          <a:prstGeom xmlns:a="http://schemas.openxmlformats.org/drawingml/2006/main" prst="rect">
-            <a:avLst/>
-          </a:prstGeom>
-          <a:noFill xmlns:a="http://schemas.openxmlformats.org/drawingml/2006/main"/>
-          <a:ln xmlns:a="http://schemas.openxmlformats.org/drawingml/2006/main" w="0">
-            <a:noFill/>
-            <a:prstDash val="solid"/>
-          </a:ln>
-        </p:spPr>
-        <p:txBody>
-          <a:bodyPr xmlns:a="http://schemas.openxmlformats.org/drawingml/2006/main"/>
-          <a:lstStyle xmlns:a="http://schemas.openxmlformats.org/drawingml/2006/main"/>
-          <a:p xmlns:a="http://schemas.openxmlformats.org/drawingml/2006/main">
-            <a:pPr algn="ctr">
-              <a:buNone/>
-              <a:defRPr sz="1575" b="1">
-                <a:solidFill>
-                  <a:srgbClr val="2E8B57"/>
-                </a:solidFill>
-              </a:defRPr>
-            </a:pPr>
-            <a:r>
-              <a:rPr sz="1575" b="1">
-                <a:solidFill>
-                  <a:srgbClr val="2E8B57"/>
-                </a:solidFill>
-              </a:rPr>
-              <a:t>TOOL</a:t>
-            </a:r>
-          </a:p>
-          <a:p xmlns:a="http://schemas.openxmlformats.org/drawingml/2006/main">
-            <a:pPr algn="ctr">
-              <a:buNone/>
-              <a:defRPr sz="1575" b="1">
-                <a:solidFill>
-                  <a:srgbClr val="2E8B57"/>
-                </a:solidFill>
-              </a:defRPr>
-            </a:pPr>
-            <a:r>
-              <a:rPr sz="1575" b="1">
-                <a:solidFill>
-                  <a:srgbClr val="2E8B57"/>
-                </a:solidFill>
-              </a:rPr>
-              <a:t>ATTEMPTS</a:t>
-            </a:r>
-          </a:p>
-        </p:txBody>
-      </p:sp>
-      <p:sp>
-        <p:nvSpPr>
-          <p:cNvPr id="55" name="trace-stage-5-body">
-            <a:extLst xmlns:a="http://schemas.openxmlformats.org/drawingml/2006/main">
-              <a:ext uri="{FF2B5EF4-FFF2-40B4-BE49-F238E27FC236}">
-                <a16:creationId xmlns:a16="http://schemas.microsoft.com/office/drawing/2014/main" id="{39A5C400-4A30-4B6E-AF84-568ECB1189D0}"/>
-              </a:ext>
-            </a:extLst>
-          </p:cNvPr>
-          <p:cNvSpPr>
-            <a:spLocks xmlns:a="http://schemas.openxmlformats.org/drawingml/2006/main" noGrp="1"/>
-          </p:cNvSpPr>
-          <p:nvPr/>
-        </p:nvSpPr>
-        <p:spPr>
-          <a:xfrm xmlns:a="http://schemas.openxmlformats.org/drawingml/2006/main">
-            <a:off x="8839200" y="4533900"/>
-            <a:ext cx="1695450" cy="552450"/>
-          </a:xfrm>
-          <a:prstGeom xmlns:a="http://schemas.openxmlformats.org/drawingml/2006/main" prst="rect">
-            <a:avLst/>
-          </a:prstGeom>
-          <a:noFill xmlns:a="http://schemas.openxmlformats.org/drawingml/2006/main"/>
-          <a:ln xmlns:a="http://schemas.openxmlformats.org/drawingml/2006/main" w="0">
-            <a:noFill/>
-            <a:prstDash val="solid"/>
-          </a:ln>
-        </p:spPr>
-        <p:txBody>
-          <a:bodyPr xmlns:a="http://schemas.openxmlformats.org/drawingml/2006/main"/>
-          <a:lstStyle xmlns:a="http://schemas.openxmlformats.org/drawingml/2006/main"/>
-          <a:p xmlns:a="http://schemas.openxmlformats.org/drawingml/2006/main">
-            <a:pPr algn="ctr">
-              <a:buNone/>
-              <a:defRPr sz="1200" b="0">
-                <a:solidFill>
-                  <a:srgbClr val="2E8B57"/>
-                </a:solidFill>
-              </a:defRPr>
-            </a:pPr>
-            <a:r>
-              <a:rPr sz="1200" b="0">
-                <a:solidFill>
-                  <a:srgbClr val="2E8B57"/>
-                </a:solidFill>
-              </a:rPr>
-              <a:t>attempts 4-5</a:t>
-            </a:r>
-          </a:p>
-          <a:p xmlns:a="http://schemas.openxmlformats.org/drawingml/2006/main">
-            <a:pPr algn="ctr">
-              <a:buNone/>
-              <a:defRPr sz="1200" b="0">
-                <a:solidFill>
-                  <a:srgbClr val="2E8B57"/>
-                </a:solidFill>
-              </a:defRPr>
-            </a:pPr>
-            <a:r>
-              <a:rPr sz="1200" b="0">
-                <a:solidFill>
-                  <a:srgbClr val="2E8B57"/>
-                </a:solidFill>
-              </a:rPr>
-              <a:t>post-error success</a:t>
-            </a:r>
-          </a:p>
-        </p:txBody>
-      </p:sp>
-      <p:sp>
-        <p:nvSpPr>
-          <p:cNvPr id="56" name="trace-stage-6">
-            <a:extLst xmlns:a="http://schemas.openxmlformats.org/drawingml/2006/main">
-              <a:ext uri="{FF2B5EF4-FFF2-40B4-BE49-F238E27FC236}">
-                <a16:creationId xmlns:a16="http://schemas.microsoft.com/office/drawing/2014/main" id="{B297F765-A263-4428-8584-AF2E5E9D86C2}"/>
-              </a:ext>
-            </a:extLst>
-          </p:cNvPr>
-          <p:cNvSpPr>
-            <a:spLocks xmlns:a="http://schemas.openxmlformats.org/drawingml/2006/main" noGrp="1"/>
-          </p:cNvSpPr>
-          <p:nvPr/>
-        </p:nvSpPr>
-        <p:spPr>
-          <a:xfrm xmlns:a="http://schemas.openxmlformats.org/drawingml/2006/main">
-            <a:off x="10753725" y="3048000"/>
-            <a:ext cx="1771650" cy="2286000"/>
-          </a:xfrm>
-          <a:prstGeom xmlns:a="http://schemas.openxmlformats.org/drawingml/2006/main" prst="roundRect">
-            <a:avLst>
-              <a:gd name="adj" fmla="val 6452"/>
-            </a:avLst>
-          </a:prstGeom>
-          <a:noFill xmlns:a="http://schemas.openxmlformats.org/drawingml/2006/main"/>
-          <a:ln xmlns:a="http://schemas.openxmlformats.org/drawingml/2006/main" w="19050">
-            <a:solidFill>
-              <a:srgbClr val="00A2EB"/>
-            </a:solidFill>
-            <a:prstDash val="solid"/>
-          </a:ln>
-        </p:spPr>
-      </p:sp>
-      <p:sp>
-        <p:nvSpPr>
-          <p:cNvPr id="57" name="trace-stage-6-step">
-            <a:extLst xmlns:a="http://schemas.openxmlformats.org/drawingml/2006/main">
-              <a:ext uri="{FF2B5EF4-FFF2-40B4-BE49-F238E27FC236}">
-                <a16:creationId xmlns:a16="http://schemas.microsoft.com/office/drawing/2014/main" id="{65F3307D-E778-4B53-B738-B05D39356852}"/>
-              </a:ext>
-            </a:extLst>
-          </p:cNvPr>
-          <p:cNvSpPr>
-            <a:spLocks xmlns:a="http://schemas.openxmlformats.org/drawingml/2006/main" noGrp="1"/>
-          </p:cNvSpPr>
-          <p:nvPr/>
-        </p:nvSpPr>
-        <p:spPr>
-          <a:xfrm xmlns:a="http://schemas.openxmlformats.org/drawingml/2006/main">
-            <a:off x="10925175" y="3238500"/>
-            <a:ext cx="533400" cy="285750"/>
-          </a:xfrm>
-          <a:prstGeom xmlns:a="http://schemas.openxmlformats.org/drawingml/2006/main" prst="rect">
-            <a:avLst/>
-          </a:prstGeom>
-          <a:noFill xmlns:a="http://schemas.openxmlformats.org/drawingml/2006/main"/>
-          <a:ln xmlns:a="http://schemas.openxmlformats.org/drawingml/2006/main" w="0">
-            <a:noFill/>
-            <a:prstDash val="solid"/>
-          </a:ln>
-        </p:spPr>
-        <p:txBody>
-          <a:bodyPr xmlns:a="http://schemas.openxmlformats.org/drawingml/2006/main"/>
-          <a:lstStyle xmlns:a="http://schemas.openxmlformats.org/drawingml/2006/main"/>
-          <a:p xmlns:a="http://schemas.openxmlformats.org/drawingml/2006/main">
-            <a:pPr>
-              <a:buNone/>
-              <a:defRPr sz="1500" b="1">
-                <a:solidFill>
-                  <a:srgbClr val="00A2EB"/>
-                </a:solidFill>
-              </a:defRPr>
-            </a:pPr>
-            <a:r>
-              <a:rPr sz="1500" b="1">
-                <a:solidFill>
-                  <a:srgbClr val="00A2EB"/>
-                </a:solidFill>
-              </a:rPr>
-              <a:t>06</a:t>
-            </a:r>
-          </a:p>
-        </p:txBody>
-      </p:sp>
-      <p:sp>
-        <p:nvSpPr>
-          <p:cNvPr id="58" name="trace-stage-6-title">
-            <a:extLst xmlns:a="http://schemas.openxmlformats.org/drawingml/2006/main">
-              <a:ext uri="{FF2B5EF4-FFF2-40B4-BE49-F238E27FC236}">
-                <a16:creationId xmlns:a16="http://schemas.microsoft.com/office/drawing/2014/main" id="{3BF74CAD-5A15-45AB-841B-C80336555CEB}"/>
-              </a:ext>
-            </a:extLst>
-          </p:cNvPr>
-          <p:cNvSpPr>
-            <a:spLocks xmlns:a="http://schemas.openxmlformats.org/drawingml/2006/main" noGrp="1"/>
-          </p:cNvSpPr>
-          <p:nvPr/>
-        </p:nvSpPr>
-        <p:spPr>
-          <a:xfrm xmlns:a="http://schemas.openxmlformats.org/drawingml/2006/main">
-            <a:off x="10868025" y="3733800"/>
-            <a:ext cx="1543050" cy="590550"/>
-          </a:xfrm>
-          <a:prstGeom xmlns:a="http://schemas.openxmlformats.org/drawingml/2006/main" prst="rect">
-            <a:avLst/>
-          </a:prstGeom>
-          <a:noFill xmlns:a="http://schemas.openxmlformats.org/drawingml/2006/main"/>
-          <a:ln xmlns:a="http://schemas.openxmlformats.org/drawingml/2006/main" w="0">
-            <a:noFill/>
-            <a:prstDash val="solid"/>
-          </a:ln>
-        </p:spPr>
-        <p:txBody>
-          <a:bodyPr xmlns:a="http://schemas.openxmlformats.org/drawingml/2006/main"/>
-          <a:lstStyle xmlns:a="http://schemas.openxmlformats.org/drawingml/2006/main"/>
-          <a:p xmlns:a="http://schemas.openxmlformats.org/drawingml/2006/main">
-            <a:pPr algn="ctr">
-              <a:buNone/>
-              <a:defRPr sz="1575" b="1">
-                <a:solidFill>
-                  <a:srgbClr val="0A2030"/>
-                </a:solidFill>
-              </a:defRPr>
-            </a:pPr>
-            <a:r>
-              <a:rPr sz="1575" b="1">
-                <a:solidFill>
-                  <a:srgbClr val="0A2030"/>
-                </a:solidFill>
-              </a:rPr>
-              <a:t>EVIDENCE</a:t>
-            </a:r>
-          </a:p>
-          <a:p xmlns:a="http://schemas.openxmlformats.org/drawingml/2006/main">
-            <a:pPr algn="ctr">
-              <a:buNone/>
-              <a:defRPr sz="1575" b="1">
-                <a:solidFill>
-                  <a:srgbClr val="0A2030"/>
-                </a:solidFill>
-              </a:defRPr>
-            </a:pPr>
-            <a:r>
-              <a:rPr sz="1575" b="1">
-                <a:solidFill>
-                  <a:srgbClr val="0A2030"/>
-                </a:solidFill>
-              </a:rPr>
-              <a:t>GATE</a:t>
-            </a:r>
-          </a:p>
-        </p:txBody>
-      </p:sp>
-      <p:sp>
-        <p:nvSpPr>
-          <p:cNvPr id="59" name="trace-stage-6-body">
-            <a:extLst xmlns:a="http://schemas.openxmlformats.org/drawingml/2006/main">
-              <a:ext uri="{FF2B5EF4-FFF2-40B4-BE49-F238E27FC236}">
-                <a16:creationId xmlns:a16="http://schemas.microsoft.com/office/drawing/2014/main" id="{412B9B49-9498-4CE7-8DBE-3D133DD25CA8}"/>
-              </a:ext>
-            </a:extLst>
-          </p:cNvPr>
-          <p:cNvSpPr>
-            <a:spLocks xmlns:a="http://schemas.openxmlformats.org/drawingml/2006/main" noGrp="1"/>
-          </p:cNvSpPr>
-          <p:nvPr/>
-        </p:nvSpPr>
-        <p:spPr>
-          <a:xfrm xmlns:a="http://schemas.openxmlformats.org/drawingml/2006/main">
-            <a:off x="10791825" y="4533900"/>
-            <a:ext cx="1695450" cy="552450"/>
-          </a:xfrm>
-          <a:prstGeom xmlns:a="http://schemas.openxmlformats.org/drawingml/2006/main" prst="rect">
-            <a:avLst/>
-          </a:prstGeom>
-          <a:noFill xmlns:a="http://schemas.openxmlformats.org/drawingml/2006/main"/>
-          <a:ln xmlns:a="http://schemas.openxmlformats.org/drawingml/2006/main" w="0">
-            <a:noFill/>
-            <a:prstDash val="solid"/>
-          </a:ln>
-        </p:spPr>
-        <p:txBody>
-          <a:bodyPr xmlns:a="http://schemas.openxmlformats.org/drawingml/2006/main"/>
-          <a:lstStyle xmlns:a="http://schemas.openxmlformats.org/drawingml/2006/main"/>
-          <a:p xmlns:a="http://schemas.openxmlformats.org/drawingml/2006/main">
-            <a:pPr algn="ctr">
-              <a:buNone/>
-              <a:defRPr sz="1200" b="0">
-                <a:solidFill>
-                  <a:srgbClr val="1F40CB"/>
-                </a:solidFill>
-              </a:defRPr>
-            </a:pPr>
-            <a:r>
-              <a:rPr sz="1200" b="0">
-                <a:solidFill>
-                  <a:srgbClr val="1F40CB"/>
-                </a:solidFill>
-              </a:rPr>
-              <a:t>source +</a:t>
-            </a:r>
-          </a:p>
-          <a:p xmlns:a="http://schemas.openxmlformats.org/drawingml/2006/main">
-            <a:pPr algn="ctr">
-              <a:buNone/>
-              <a:defRPr sz="1200" b="0">
-                <a:solidFill>
-                  <a:srgbClr val="1F40CB"/>
-                </a:solidFill>
-              </a:defRPr>
-            </a:pPr>
-            <a:r>
-              <a:rPr sz="1200" b="0">
-                <a:solidFill>
-                  <a:srgbClr val="1F40CB"/>
-                </a:solidFill>
-              </a:rPr>
-              <a:t>evidence pairs</a:t>
-            </a:r>
-          </a:p>
-        </p:txBody>
-      </p:sp>
-      <p:sp>
-        <p:nvSpPr>
-          <p:cNvPr id="60" name="trace-stage-7">
-            <a:extLst xmlns:a="http://schemas.openxmlformats.org/drawingml/2006/main">
-              <a:ext uri="{FF2B5EF4-FFF2-40B4-BE49-F238E27FC236}">
-                <a16:creationId xmlns:a16="http://schemas.microsoft.com/office/drawing/2014/main" id="{487E1049-C402-43E7-8FAA-D5C8D8652380}"/>
-              </a:ext>
-            </a:extLst>
-          </p:cNvPr>
-          <p:cNvSpPr>
-            <a:spLocks xmlns:a="http://schemas.openxmlformats.org/drawingml/2006/main" noGrp="1"/>
-          </p:cNvSpPr>
-          <p:nvPr/>
-        </p:nvSpPr>
-        <p:spPr>
-          <a:xfrm xmlns:a="http://schemas.openxmlformats.org/drawingml/2006/main">
-            <a:off x="12706350" y="3048000"/>
-            <a:ext cx="1771650" cy="2286000"/>
-          </a:xfrm>
-          <a:prstGeom xmlns:a="http://schemas.openxmlformats.org/drawingml/2006/main" prst="roundRect">
-            <a:avLst>
-              <a:gd name="adj" fmla="val 6452"/>
-            </a:avLst>
-          </a:prstGeom>
-          <a:noFill xmlns:a="http://schemas.openxmlformats.org/drawingml/2006/main"/>
-          <a:ln xmlns:a="http://schemas.openxmlformats.org/drawingml/2006/main" w="19050">
-            <a:solidFill>
-              <a:srgbClr val="F07D00"/>
-            </a:solidFill>
-            <a:prstDash val="solid"/>
-          </a:ln>
-        </p:spPr>
-      </p:sp>
-      <p:sp>
-        <p:nvSpPr>
-          <p:cNvPr id="61" name="trace-stage-7-step">
-            <a:extLst xmlns:a="http://schemas.openxmlformats.org/drawingml/2006/main">
-              <a:ext uri="{FF2B5EF4-FFF2-40B4-BE49-F238E27FC236}">
-                <a16:creationId xmlns:a16="http://schemas.microsoft.com/office/drawing/2014/main" id="{D99BA43C-AC15-45F4-B8C4-2287BBF4ECAA}"/>
-              </a:ext>
-            </a:extLst>
-          </p:cNvPr>
-          <p:cNvSpPr>
-            <a:spLocks xmlns:a="http://schemas.openxmlformats.org/drawingml/2006/main" noGrp="1"/>
-          </p:cNvSpPr>
-          <p:nvPr/>
-        </p:nvSpPr>
-        <p:spPr>
-          <a:xfrm xmlns:a="http://schemas.openxmlformats.org/drawingml/2006/main">
-            <a:off x="12877800" y="3238500"/>
-            <a:ext cx="533400" cy="285750"/>
-          </a:xfrm>
-          <a:prstGeom xmlns:a="http://schemas.openxmlformats.org/drawingml/2006/main" prst="rect">
-            <a:avLst/>
-          </a:prstGeom>
-          <a:noFill xmlns:a="http://schemas.openxmlformats.org/drawingml/2006/main"/>
-          <a:ln xmlns:a="http://schemas.openxmlformats.org/drawingml/2006/main" w="0">
-            <a:noFill/>
-            <a:prstDash val="solid"/>
-          </a:ln>
-        </p:spPr>
-        <p:txBody>
-          <a:bodyPr xmlns:a="http://schemas.openxmlformats.org/drawingml/2006/main"/>
-          <a:lstStyle xmlns:a="http://schemas.openxmlformats.org/drawingml/2006/main"/>
-          <a:p xmlns:a="http://schemas.openxmlformats.org/drawingml/2006/main">
-            <a:pPr>
-              <a:buNone/>
-              <a:defRPr sz="1500" b="1">
-                <a:solidFill>
-                  <a:srgbClr val="00A2EB"/>
-                </a:solidFill>
-              </a:defRPr>
-            </a:pPr>
-            <a:r>
-              <a:rPr sz="1500" b="1">
-                <a:solidFill>
-                  <a:srgbClr val="00A2EB"/>
-                </a:solidFill>
-              </a:rPr>
-              <a:t>07</a:t>
-            </a:r>
-          </a:p>
-        </p:txBody>
-      </p:sp>
-      <p:sp>
-        <p:nvSpPr>
-          <p:cNvPr id="62" name="trace-stage-7-title">
-            <a:extLst xmlns:a="http://schemas.openxmlformats.org/drawingml/2006/main">
-              <a:ext uri="{FF2B5EF4-FFF2-40B4-BE49-F238E27FC236}">
-                <a16:creationId xmlns:a16="http://schemas.microsoft.com/office/drawing/2014/main" id="{8BC7260B-022A-40C5-8C21-61EB65C48DC6}"/>
-              </a:ext>
-            </a:extLst>
-          </p:cNvPr>
-          <p:cNvSpPr>
-            <a:spLocks xmlns:a="http://schemas.openxmlformats.org/drawingml/2006/main" noGrp="1"/>
-          </p:cNvSpPr>
-          <p:nvPr/>
-        </p:nvSpPr>
-        <p:spPr>
-          <a:xfrm xmlns:a="http://schemas.openxmlformats.org/drawingml/2006/main">
-            <a:off x="12820650" y="3733800"/>
-            <a:ext cx="1543050" cy="590550"/>
-          </a:xfrm>
-          <a:prstGeom xmlns:a="http://schemas.openxmlformats.org/drawingml/2006/main" prst="rect">
-            <a:avLst/>
-          </a:prstGeom>
-          <a:noFill xmlns:a="http://schemas.openxmlformats.org/drawingml/2006/main"/>
-          <a:ln xmlns:a="http://schemas.openxmlformats.org/drawingml/2006/main" w="0">
-            <a:noFill/>
-            <a:prstDash val="solid"/>
-          </a:ln>
-        </p:spPr>
-        <p:txBody>
-          <a:bodyPr xmlns:a="http://schemas.openxmlformats.org/drawingml/2006/main"/>
-          <a:lstStyle xmlns:a="http://schemas.openxmlformats.org/drawingml/2006/main"/>
-          <a:p xmlns:a="http://schemas.openxmlformats.org/drawingml/2006/main">
-            <a:pPr algn="ctr">
-              <a:buNone/>
-              <a:defRPr sz="1575" b="1">
-                <a:solidFill>
-                  <a:srgbClr val="0A2030"/>
-                </a:solidFill>
-              </a:defRPr>
-            </a:pPr>
-            <a:r>
-              <a:rPr sz="1575" b="1">
-                <a:solidFill>
-                  <a:srgbClr val="0A2030"/>
-                </a:solidFill>
-              </a:rPr>
-              <a:t>REPORT</a:t>
-            </a:r>
-          </a:p>
-        </p:txBody>
-      </p:sp>
-      <p:sp>
-        <p:nvSpPr>
-          <p:cNvPr id="63" name="trace-stage-7-body">
-            <a:extLst xmlns:a="http://schemas.openxmlformats.org/drawingml/2006/main">
-              <a:ext uri="{FF2B5EF4-FFF2-40B4-BE49-F238E27FC236}">
-                <a16:creationId xmlns:a16="http://schemas.microsoft.com/office/drawing/2014/main" id="{68E3277F-1E35-4D00-AB85-4AC545C9F5AD}"/>
-              </a:ext>
-            </a:extLst>
-          </p:cNvPr>
-          <p:cNvSpPr>
-            <a:spLocks xmlns:a="http://schemas.openxmlformats.org/drawingml/2006/main" noGrp="1"/>
-          </p:cNvSpPr>
-          <p:nvPr/>
-        </p:nvSpPr>
-        <p:spPr>
-          <a:xfrm xmlns:a="http://schemas.openxmlformats.org/drawingml/2006/main">
-            <a:off x="12744450" y="4533900"/>
-            <a:ext cx="1695450" cy="552450"/>
-          </a:xfrm>
-          <a:prstGeom xmlns:a="http://schemas.openxmlformats.org/drawingml/2006/main" prst="rect">
-            <a:avLst/>
-          </a:prstGeom>
-          <a:noFill xmlns:a="http://schemas.openxmlformats.org/drawingml/2006/main"/>
-          <a:ln xmlns:a="http://schemas.openxmlformats.org/drawingml/2006/main" w="0">
-            <a:noFill/>
-            <a:prstDash val="solid"/>
-          </a:ln>
-        </p:spPr>
-        <p:txBody>
-          <a:bodyPr xmlns:a="http://schemas.openxmlformats.org/drawingml/2006/main"/>
-          <a:lstStyle xmlns:a="http://schemas.openxmlformats.org/drawingml/2006/main"/>
-          <a:p xmlns:a="http://schemas.openxmlformats.org/drawingml/2006/main">
-            <a:pPr algn="ctr">
-              <a:buNone/>
-              <a:defRPr sz="1200" b="0">
-                <a:solidFill>
-                  <a:srgbClr val="1F40CB"/>
-                </a:solidFill>
-              </a:defRPr>
-            </a:pPr>
-            <a:r>
-              <a:rPr sz="1200" b="0">
-                <a:solidFill>
-                  <a:srgbClr val="1F40CB"/>
-                </a:solidFill>
-              </a:rPr>
-              <a:t>briefing +</a:t>
-            </a:r>
-          </a:p>
-          <a:p xmlns:a="http://schemas.openxmlformats.org/drawingml/2006/main">
-            <a:pPr algn="ctr">
-              <a:buNone/>
-              <a:defRPr sz="1200" b="0">
-                <a:solidFill>
-                  <a:srgbClr val="1F40CB"/>
-                </a:solidFill>
-              </a:defRPr>
-            </a:pPr>
-            <a:r>
-              <a:rPr sz="1200" b="0">
-                <a:solidFill>
-                  <a:srgbClr val="1F40CB"/>
-                </a:solidFill>
-              </a:rPr>
-              <a:t>citations</a:t>
-            </a:r>
-          </a:p>
-        </p:txBody>
-      </p:sp>
-      <p:cxnSp>
-        <p:nvCxnSpPr>
-          <p:cNvPr id="196" name=""/>
-          <p:cNvCxnSpPr>
-            <a:stCxn xmlns:a="http://schemas.openxmlformats.org/drawingml/2006/main" id="36" idx="3"/>
-            <a:endCxn xmlns:a="http://schemas.openxmlformats.org/drawingml/2006/main" id="40" idx="1"/>
-          </p:cNvCxnSpPr>
-          <p:nvPr/>
-        </p:nvCxnSpPr>
-        <p:spPr>
-          <a:xfrm xmlns:a="http://schemas.openxmlformats.org/drawingml/2006/main">
-            <a:off x="2762250" y="4191000"/>
-            <a:ext cx="180975" cy="0"/>
-          </a:xfrm>
-          <a:prstGeom xmlns:a="http://schemas.openxmlformats.org/drawingml/2006/main" prst="straightConnector1">
-            <a:avLst/>
-          </a:prstGeom>
-          <a:ln xmlns:a="http://schemas.openxmlformats.org/drawingml/2006/main" w="19050">
-            <a:solidFill>
-              <a:srgbClr val="9A9A9F"/>
-            </a:solidFill>
-            <a:prstDash val="solid"/>
-            <a:tailEnd type="triangle" w="sm" len="sm"/>
-          </a:ln>
-        </p:spPr>
-      </p:cxnSp>
-      <p:cxnSp>
-        <p:nvCxnSpPr>
-          <p:cNvPr id="197" name=""/>
-          <p:cNvCxnSpPr>
-            <a:stCxn xmlns:a="http://schemas.openxmlformats.org/drawingml/2006/main" id="40" idx="3"/>
-            <a:endCxn xmlns:a="http://schemas.openxmlformats.org/drawingml/2006/main" id="44" idx="1"/>
-          </p:cNvCxnSpPr>
-          <p:nvPr/>
-        </p:nvCxnSpPr>
-        <p:spPr>
-          <a:xfrm xmlns:a="http://schemas.openxmlformats.org/drawingml/2006/main">
-            <a:off x="4714875" y="4191000"/>
-            <a:ext cx="180975" cy="0"/>
-          </a:xfrm>
-          <a:prstGeom xmlns:a="http://schemas.openxmlformats.org/drawingml/2006/main" prst="straightConnector1">
-            <a:avLst/>
-          </a:prstGeom>
-          <a:ln xmlns:a="http://schemas.openxmlformats.org/drawingml/2006/main" w="19050">
-            <a:solidFill>
-              <a:srgbClr val="9A9A9F"/>
-            </a:solidFill>
-            <a:prstDash val="solid"/>
-            <a:tailEnd type="triangle" w="sm" len="sm"/>
-          </a:ln>
-        </p:spPr>
-      </p:cxnSp>
-      <p:cxnSp>
-        <p:nvCxnSpPr>
-          <p:cNvPr id="198" name=""/>
-          <p:cNvCxnSpPr>
-            <a:stCxn xmlns:a="http://schemas.openxmlformats.org/drawingml/2006/main" id="44" idx="3"/>
-            <a:endCxn xmlns:a="http://schemas.openxmlformats.org/drawingml/2006/main" id="48" idx="1"/>
-          </p:cNvCxnSpPr>
-          <p:nvPr/>
-        </p:nvCxnSpPr>
-        <p:spPr>
-          <a:xfrm xmlns:a="http://schemas.openxmlformats.org/drawingml/2006/main">
-            <a:off x="6667500" y="4191000"/>
-            <a:ext cx="180975" cy="0"/>
-          </a:xfrm>
-          <a:prstGeom xmlns:a="http://schemas.openxmlformats.org/drawingml/2006/main" prst="straightConnector1">
-            <a:avLst/>
-          </a:prstGeom>
-          <a:ln xmlns:a="http://schemas.openxmlformats.org/drawingml/2006/main" w="19050">
-            <a:solidFill>
-              <a:srgbClr val="9A9A9F"/>
-            </a:solidFill>
-            <a:prstDash val="solid"/>
-            <a:tailEnd type="triangle" w="sm" len="sm"/>
-          </a:ln>
-        </p:spPr>
-      </p:cxnSp>
-      <p:cxnSp>
-        <p:nvCxnSpPr>
-          <p:cNvPr id="199" name=""/>
-          <p:cNvCxnSpPr>
-            <a:stCxn xmlns:a="http://schemas.openxmlformats.org/drawingml/2006/main" id="48" idx="3"/>
-            <a:endCxn xmlns:a="http://schemas.openxmlformats.org/drawingml/2006/main" id="52" idx="1"/>
-          </p:cNvCxnSpPr>
-          <p:nvPr/>
-        </p:nvCxnSpPr>
-        <p:spPr>
-          <a:xfrm xmlns:a="http://schemas.openxmlformats.org/drawingml/2006/main">
-            <a:off x="8620125" y="4191000"/>
-            <a:ext cx="180975" cy="0"/>
-          </a:xfrm>
-          <a:prstGeom xmlns:a="http://schemas.openxmlformats.org/drawingml/2006/main" prst="straightConnector1">
-            <a:avLst/>
-          </a:prstGeom>
-          <a:ln xmlns:a="http://schemas.openxmlformats.org/drawingml/2006/main" w="19050">
-            <a:solidFill>
-              <a:srgbClr val="9A9A9F"/>
-            </a:solidFill>
-            <a:prstDash val="solid"/>
-            <a:tailEnd type="triangle" w="sm" len="sm"/>
-          </a:ln>
-        </p:spPr>
-      </p:cxnSp>
-      <p:cxnSp>
-        <p:nvCxnSpPr>
-          <p:cNvPr id="200" name=""/>
-          <p:cNvCxnSpPr>
-            <a:stCxn xmlns:a="http://schemas.openxmlformats.org/drawingml/2006/main" id="52" idx="3"/>
-            <a:endCxn xmlns:a="http://schemas.openxmlformats.org/drawingml/2006/main" id="56" idx="1"/>
-          </p:cNvCxnSpPr>
-          <p:nvPr/>
-        </p:nvCxnSpPr>
-        <p:spPr>
-          <a:xfrm xmlns:a="http://schemas.openxmlformats.org/drawingml/2006/main">
-            <a:off x="10572750" y="4191000"/>
-            <a:ext cx="180975" cy="0"/>
-          </a:xfrm>
-          <a:prstGeom xmlns:a="http://schemas.openxmlformats.org/drawingml/2006/main" prst="straightConnector1">
-            <a:avLst/>
-          </a:prstGeom>
-          <a:ln xmlns:a="http://schemas.openxmlformats.org/drawingml/2006/main" w="19050">
-            <a:solidFill>
-              <a:srgbClr val="9A9A9F"/>
-            </a:solidFill>
-            <a:prstDash val="solid"/>
-            <a:tailEnd type="triangle" w="sm" len="sm"/>
-          </a:ln>
-        </p:spPr>
-      </p:cxnSp>
-      <p:cxnSp>
-        <p:nvCxnSpPr>
-          <p:cNvPr id="201" name=""/>
-          <p:cNvCxnSpPr>
-            <a:stCxn xmlns:a="http://schemas.openxmlformats.org/drawingml/2006/main" id="56" idx="3"/>
-            <a:endCxn xmlns:a="http://schemas.openxmlformats.org/drawingml/2006/main" id="60" idx="1"/>
-          </p:cNvCxnSpPr>
-          <p:nvPr/>
-        </p:nvCxnSpPr>
-        <p:spPr>
-          <a:xfrm xmlns:a="http://schemas.openxmlformats.org/drawingml/2006/main">
-            <a:off x="12525375" y="4191000"/>
-            <a:ext cx="180975" cy="0"/>
-          </a:xfrm>
-          <a:prstGeom xmlns:a="http://schemas.openxmlformats.org/drawingml/2006/main" prst="straightConnector1">
-            <a:avLst/>
-          </a:prstGeom>
-          <a:ln xmlns:a="http://schemas.openxmlformats.org/drawingml/2006/main" w="19050">
-            <a:solidFill>
-              <a:srgbClr val="9A9A9F"/>
-            </a:solidFill>
-            <a:prstDash val="solid"/>
-            <a:tailEnd type="triangle" w="sm" len="sm"/>
-          </a:ln>
-        </p:spPr>
-      </p:cxnSp>
+            <a:pPr algn="l">
+              <a:defRPr sz="1350" b="1">
+                <a:solidFill>
+                  <a:srgbClr val="051C2A"/>
+                </a:solidFill>
+              </a:defRPr>
+            </a:pPr>
+            <a:r>
+              <a:rPr sz="1350" b="1">
+                <a:solidFill>
+                  <a:srgbClr val="051C2A"/>
+                </a:solidFill>
+              </a:rPr>
+              <a:t>Assign the fix to its owner</a:t>
+            </a:r>
+          </a:p>
+        </p:txBody>
+      </p:sp>
     </p:spTree>
     <p:extLst>
       <p:ext uri="{BB962C8B-B14F-4D97-AF65-F5344CB8AC3E}">
@@ -12098,7 +10391,7 @@
                 <a:ea typeface="Calibri"/>
                 <a:cs typeface="Calibri"/>
               </a:rPr>
-              <a:t>RELEASE LOGIC</a:t>
+              <a:t>RELEASE GATES</a:t>
             </a:r>
           </a:p>
         </p:txBody>
@@ -12160,7 +10453,7 @@
                 <a:ea typeface="Calibri"/>
                 <a:cs typeface="Calibri"/>
               </a:rPr>
-              <a:t>Deterministic rules decide release</a:t>
+              <a:t>Code gates release; judges add context</a:t>
             </a:r>
           </a:p>
         </p:txBody>
@@ -12257,7 +10550,7 @@
                 <a:ea typeface="Calibri"/>
                 <a:cs typeface="Calibri"/>
               </a:rPr>
-              <a:t>Code decides finance release. A judge adds context only when run.</a:t>
+              <a:t>Deterministic checks decide release. Optional judges never override the gate.</a:t>
             </a:r>
           </a:p>
         </p:txBody>
@@ -13100,7 +11393,7 @@
                 <a:ea typeface="Calibri"/>
                 <a:cs typeface="Calibri"/>
               </a:rPr>
-              <a:t>Score patterns assign failure ownership</a:t>
+              <a:t>Fix the earliest public owner</a:t>
             </a:r>
           </a:p>
         </p:txBody>
@@ -13197,7 +11490,7 @@
                 <a:ea typeface="Calibri"/>
                 <a:cs typeface="Calibri"/>
               </a:rPr>
-              <a:t>Diagnose the earliest public stage, then fix that boundary.</a:t>
+              <a:t>A trace turns a low score into an actionable owner and next step.</a:t>
             </a:r>
           </a:p>
         </p:txBody>
@@ -13387,7 +11680,7 @@
                 <a:ea typeface="Calibri"/>
                 <a:cs typeface="Calibri"/>
               </a:rPr>
-              <a:t>DIAGNOSE</a:t>
+              <a:t>OWNER</a:t>
             </a:r>
           </a:p>
         </p:txBody>
@@ -13978,7 +12271,7 @@
                 <a:ea typeface="Calibri"/>
                 <a:cs typeface="Calibri"/>
               </a:rPr>
-              <a:t>RELEASE + CAPSTONE</a:t>
+              <a:t>RELEASE DECISION</a:t>
             </a:r>
           </a:p>
         </p:txBody>
@@ -14040,1076 +12333,7 @@
                 <a:ea typeface="Calibri"/>
                 <a:cs typeface="Calibri"/>
               </a:rPr>
-              <a:t>Release the evidence, then design the capstone</a:t>
-            </a:r>
-          </a:p>
-        </p:txBody>
-      </p:sp>
-      <p:sp>
-        <p:nvSpPr>
-          <p:cNvPr id="3" name="decision-source">
-            <a:extLst xmlns:a="http://schemas.openxmlformats.org/drawingml/2006/main">
-              <a:ext uri="{FF2B5EF4-FFF2-40B4-BE49-F238E27FC236}">
-                <a16:creationId xmlns:a16="http://schemas.microsoft.com/office/drawing/2014/main" id="{F0F1628B-25FC-4A7D-9ACB-11ED41518DD3}"/>
-              </a:ext>
-            </a:extLst>
-          </p:cNvPr>
-          <p:cNvSpPr>
-            <a:spLocks xmlns:a="http://schemas.openxmlformats.org/drawingml/2006/main" noGrp="1"/>
-          </p:cNvSpPr>
-          <p:nvPr/>
-        </p:nvSpPr>
-        <p:spPr>
-          <a:xfrm xmlns:a="http://schemas.openxmlformats.org/drawingml/2006/main">
-            <a:off x="1028700" y="2990850"/>
-            <a:ext cx="2724150" cy="1562100"/>
-          </a:xfrm>
-          <a:prstGeom xmlns:a="http://schemas.openxmlformats.org/drawingml/2006/main" prst="roundRect">
-            <a:avLst>
-              <a:gd name="adj" fmla="val 7317"/>
-            </a:avLst>
-          </a:prstGeom>
-          <a:solidFill xmlns:a="http://schemas.openxmlformats.org/drawingml/2006/main">
-            <a:srgbClr val="FFFFFF"/>
-          </a:solidFill>
-          <a:ln xmlns:a="http://schemas.openxmlformats.org/drawingml/2006/main" w="9525">
-            <a:solidFill>
-              <a:srgbClr val="E4E7E9"/>
-            </a:solidFill>
-            <a:prstDash val="solid"/>
-          </a:ln>
-        </p:spPr>
-      </p:sp>
-      <p:sp>
-        <p:nvSpPr>
-          <p:cNvPr id="4" name="">
-            <a:extLst xmlns:a="http://schemas.openxmlformats.org/drawingml/2006/main">
-              <a:ext uri="{FF2B5EF4-FFF2-40B4-BE49-F238E27FC236}">
-                <a16:creationId xmlns:a16="http://schemas.microsoft.com/office/drawing/2014/main" id="{62CDE4FD-810A-4BB6-A9E2-9D453E2B432E}"/>
-              </a:ext>
-            </a:extLst>
-          </p:cNvPr>
-          <p:cNvSpPr>
-            <a:spLocks xmlns:a="http://schemas.openxmlformats.org/drawingml/2006/main" noGrp="1"/>
-          </p:cNvSpPr>
-          <p:nvPr/>
-        </p:nvSpPr>
-        <p:spPr>
-          <a:xfrm xmlns:a="http://schemas.openxmlformats.org/drawingml/2006/main">
-            <a:off x="1295400" y="3181350"/>
-            <a:ext cx="2190750" cy="323850"/>
-          </a:xfrm>
-          <a:prstGeom xmlns:a="http://schemas.openxmlformats.org/drawingml/2006/main" prst="rect">
-            <a:avLst/>
-          </a:prstGeom>
-          <a:noFill xmlns:a="http://schemas.openxmlformats.org/drawingml/2006/main"/>
-          <a:ln xmlns:a="http://schemas.openxmlformats.org/drawingml/2006/main" w="0">
-            <a:noFill/>
-            <a:prstDash val="solid"/>
-          </a:ln>
-        </p:spPr>
-        <p:txBody>
-          <a:bodyPr xmlns:a="http://schemas.openxmlformats.org/drawingml/2006/main" wrap="square" lIns="0" tIns="0" rIns="0" bIns="0" anchor="ctr">
-            <a:noAutofit/>
-          </a:bodyPr>
-          <a:lstStyle xmlns:a="http://schemas.openxmlformats.org/drawingml/2006/main"/>
-          <a:p xmlns:a="http://schemas.openxmlformats.org/drawingml/2006/main">
-            <a:pPr algn="ctr">
-              <a:lnSpc>
-                <a:spcPct val="100000"/>
-              </a:lnSpc>
-              <a:buNone/>
-              <a:defRPr sz="1350" b="1">
-                <a:solidFill>
-                  <a:srgbClr val="1F40CB"/>
-                </a:solidFill>
-                <a:latin typeface="Calibri"/>
-                <a:ea typeface="Calibri"/>
-                <a:cs typeface="Calibri"/>
-              </a:defRPr>
-            </a:pPr>
-            <a:r>
-              <a:rPr sz="1800" b="1">
-                <a:solidFill>
-                  <a:srgbClr val="1F40CB"/>
-                </a:solidFill>
-                <a:latin typeface="Calibri"/>
-                <a:ea typeface="Calibri"/>
-                <a:cs typeface="Calibri"/>
-              </a:rPr>
-              <a:t>CITATION INTEGRITY</a:t>
-            </a:r>
-          </a:p>
-        </p:txBody>
-      </p:sp>
-      <p:sp>
-        <p:nvSpPr>
-          <p:cNvPr id="5" name="">
-            <a:extLst xmlns:a="http://schemas.openxmlformats.org/drawingml/2006/main">
-              <a:ext uri="{FF2B5EF4-FFF2-40B4-BE49-F238E27FC236}">
-                <a16:creationId xmlns:a16="http://schemas.microsoft.com/office/drawing/2014/main" id="{25AA52CC-262C-4723-8C2E-E43262748B6A}"/>
-              </a:ext>
-            </a:extLst>
-          </p:cNvPr>
-          <p:cNvSpPr>
-            <a:spLocks xmlns:a="http://schemas.openxmlformats.org/drawingml/2006/main" noGrp="1"/>
-          </p:cNvSpPr>
-          <p:nvPr/>
-        </p:nvSpPr>
-        <p:spPr>
-          <a:xfrm xmlns:a="http://schemas.openxmlformats.org/drawingml/2006/main">
-            <a:off x="1295400" y="3657600"/>
-            <a:ext cx="2190750" cy="647700"/>
-          </a:xfrm>
-          <a:prstGeom xmlns:a="http://schemas.openxmlformats.org/drawingml/2006/main" prst="rect">
-            <a:avLst/>
-          </a:prstGeom>
-          <a:noFill xmlns:a="http://schemas.openxmlformats.org/drawingml/2006/main"/>
-          <a:ln xmlns:a="http://schemas.openxmlformats.org/drawingml/2006/main" w="0">
-            <a:noFill/>
-            <a:prstDash val="solid"/>
-          </a:ln>
-        </p:spPr>
-        <p:txBody>
-          <a:bodyPr xmlns:a="http://schemas.openxmlformats.org/drawingml/2006/main" wrap="square" lIns="0" tIns="0" rIns="0" bIns="0" anchor="ctr">
-            <a:normAutofit fontScale="85859"/>
-          </a:bodyPr>
-          <a:lstStyle xmlns:a="http://schemas.openxmlformats.org/drawingml/2006/main"/>
-          <a:p xmlns:a="http://schemas.openxmlformats.org/drawingml/2006/main">
-            <a:pPr algn="ctr">
-              <a:lnSpc>
-                <a:spcPct val="100000"/>
-              </a:lnSpc>
-              <a:buNone/>
-              <a:defRPr sz="1650" b="1">
-                <a:solidFill>
-                  <a:srgbClr val="051C2A"/>
-                </a:solidFill>
-                <a:latin typeface="Calibri"/>
-                <a:ea typeface="Calibri"/>
-                <a:cs typeface="Calibri"/>
-              </a:defRPr>
-            </a:pPr>
-            <a:r>
-              <a:rPr sz="1650" b="1">
-                <a:solidFill>
-                  <a:srgbClr val="051C2A"/>
-                </a:solidFill>
-                <a:latin typeface="Calibri"/>
-                <a:ea typeface="Calibri"/>
-                <a:cs typeface="Calibri"/>
-              </a:rPr>
-              <a:t>exact source + evidence pair</a:t>
-            </a:r>
-          </a:p>
-          <a:p xmlns:a="http://schemas.openxmlformats.org/drawingml/2006/main">
-            <a:pPr algn="ctr">
-              <a:lnSpc>
-                <a:spcPct val="100000"/>
-              </a:lnSpc>
-              <a:buNone/>
-              <a:defRPr sz="1650" b="1">
-                <a:solidFill>
-                  <a:srgbClr val="051C2A"/>
-                </a:solidFill>
-                <a:latin typeface="Calibri"/>
-                <a:ea typeface="Calibri"/>
-                <a:cs typeface="Calibri"/>
-              </a:defRPr>
-            </a:pPr>
-            <a:r>
-              <a:rPr sz="1650" b="1">
-                <a:solidFill>
-                  <a:srgbClr val="051C2A"/>
-                </a:solidFill>
-                <a:latin typeface="Calibri"/>
-                <a:ea typeface="Calibri"/>
-                <a:cs typeface="Calibri"/>
-              </a:rPr>
-              <a:t>all cases pass</a:t>
-            </a:r>
-          </a:p>
-        </p:txBody>
-      </p:sp>
-      <p:sp>
-        <p:nvSpPr>
-          <p:cNvPr id="6" name="decision-child">
-            <a:extLst xmlns:a="http://schemas.openxmlformats.org/drawingml/2006/main">
-              <a:ext uri="{FF2B5EF4-FFF2-40B4-BE49-F238E27FC236}">
-                <a16:creationId xmlns:a16="http://schemas.microsoft.com/office/drawing/2014/main" id="{E359D7F5-9555-4867-8587-2F8EC5254E07}"/>
-              </a:ext>
-            </a:extLst>
-          </p:cNvPr>
-          <p:cNvSpPr>
-            <a:spLocks xmlns:a="http://schemas.openxmlformats.org/drawingml/2006/main" noGrp="1"/>
-          </p:cNvSpPr>
-          <p:nvPr/>
-        </p:nvSpPr>
-        <p:spPr>
-          <a:xfrm xmlns:a="http://schemas.openxmlformats.org/drawingml/2006/main">
-            <a:off x="5162550" y="2857500"/>
-            <a:ext cx="3257550" cy="1828800"/>
-          </a:xfrm>
-          <a:prstGeom xmlns:a="http://schemas.openxmlformats.org/drawingml/2006/main" prst="roundRect">
-            <a:avLst>
-              <a:gd name="adj" fmla="val 6250"/>
-            </a:avLst>
-          </a:prstGeom>
-          <a:solidFill xmlns:a="http://schemas.openxmlformats.org/drawingml/2006/main">
-            <a:srgbClr val="E8F6FB"/>
-          </a:solidFill>
-          <a:ln xmlns:a="http://schemas.openxmlformats.org/drawingml/2006/main" w="19050">
-            <a:solidFill>
-              <a:srgbClr val="00A2EB"/>
-            </a:solidFill>
-            <a:prstDash val="solid"/>
-          </a:ln>
-        </p:spPr>
-      </p:sp>
-      <p:sp>
-        <p:nvSpPr>
-          <p:cNvPr id="7" name="">
-            <a:extLst xmlns:a="http://schemas.openxmlformats.org/drawingml/2006/main">
-              <a:ext uri="{FF2B5EF4-FFF2-40B4-BE49-F238E27FC236}">
-                <a16:creationId xmlns:a16="http://schemas.microsoft.com/office/drawing/2014/main" id="{14C45E62-2BDC-4F11-8E8E-92ACD6B6E61D}"/>
-              </a:ext>
-            </a:extLst>
-          </p:cNvPr>
-          <p:cNvSpPr>
-            <a:spLocks xmlns:a="http://schemas.openxmlformats.org/drawingml/2006/main" noGrp="1"/>
-          </p:cNvSpPr>
-          <p:nvPr/>
-        </p:nvSpPr>
-        <p:spPr>
-          <a:xfrm xmlns:a="http://schemas.openxmlformats.org/drawingml/2006/main">
-            <a:off x="5467350" y="2914650"/>
-            <a:ext cx="2647950" cy="476250"/>
-          </a:xfrm>
-          <a:prstGeom xmlns:a="http://schemas.openxmlformats.org/drawingml/2006/main" prst="rect">
-            <a:avLst/>
-          </a:prstGeom>
-          <a:noFill xmlns:a="http://schemas.openxmlformats.org/drawingml/2006/main"/>
-          <a:ln xmlns:a="http://schemas.openxmlformats.org/drawingml/2006/main" w="0">
-            <a:noFill/>
-            <a:prstDash val="solid"/>
-          </a:ln>
-        </p:spPr>
-        <p:txBody>
-          <a:bodyPr xmlns:a="http://schemas.openxmlformats.org/drawingml/2006/main" wrap="square" lIns="0" tIns="0" rIns="0" bIns="0" anchor="ctr">
-            <a:noAutofit/>
-          </a:bodyPr>
-          <a:lstStyle xmlns:a="http://schemas.openxmlformats.org/drawingml/2006/main"/>
-          <a:p xmlns:a="http://schemas.openxmlformats.org/drawingml/2006/main">
-            <a:pPr algn="ctr">
-              <a:lnSpc>
-                <a:spcPct val="100000"/>
-              </a:lnSpc>
-              <a:buNone/>
-              <a:defRPr sz="1275" b="1">
-                <a:solidFill>
-                  <a:srgbClr val="00A2EB"/>
-                </a:solidFill>
-                <a:latin typeface="Calibri"/>
-                <a:ea typeface="Calibri"/>
-                <a:cs typeface="Calibri"/>
-              </a:defRPr>
-            </a:pPr>
-            <a:r>
-              <a:rPr sz="1800" b="1">
-                <a:solidFill>
-                  <a:srgbClr val="00A2EB"/>
-                </a:solidFill>
-                <a:latin typeface="Calibri"/>
-                <a:ea typeface="Calibri"/>
-                <a:cs typeface="Calibri"/>
-              </a:rPr>
-              <a:t>RELEASE</a:t>
-            </a:r>
-          </a:p>
-          <a:p xmlns:a="http://schemas.openxmlformats.org/drawingml/2006/main">
-            <a:pPr algn="ctr">
-              <a:lnSpc>
-                <a:spcPct val="100000"/>
-              </a:lnSpc>
-              <a:buNone/>
-              <a:defRPr sz="1275" b="1">
-                <a:solidFill>
-                  <a:srgbClr val="00A2EB"/>
-                </a:solidFill>
-                <a:latin typeface="Calibri"/>
-                <a:ea typeface="Calibri"/>
-                <a:cs typeface="Calibri"/>
-              </a:defRPr>
-            </a:pPr>
-            <a:r>
-              <a:rPr sz="1800" b="1">
-                <a:solidFill>
-                  <a:srgbClr val="00A2EB"/>
-                </a:solidFill>
-                <a:latin typeface="Calibri"/>
-                <a:ea typeface="Calibri"/>
-                <a:cs typeface="Calibri"/>
-              </a:rPr>
-              <a:t>PROOF</a:t>
-            </a:r>
-          </a:p>
-        </p:txBody>
-      </p:sp>
-      <p:sp>
-        <p:nvSpPr>
-          <p:cNvPr id="8" name="">
-            <a:extLst xmlns:a="http://schemas.openxmlformats.org/drawingml/2006/main">
-              <a:ext uri="{FF2B5EF4-FFF2-40B4-BE49-F238E27FC236}">
-                <a16:creationId xmlns:a16="http://schemas.microsoft.com/office/drawing/2014/main" id="{9FF2A998-C21C-458F-BEED-486513923D87}"/>
-              </a:ext>
-            </a:extLst>
-          </p:cNvPr>
-          <p:cNvSpPr>
-            <a:spLocks xmlns:a="http://schemas.openxmlformats.org/drawingml/2006/main" noGrp="1"/>
-          </p:cNvSpPr>
-          <p:nvPr/>
-        </p:nvSpPr>
-        <p:spPr>
-          <a:xfrm xmlns:a="http://schemas.openxmlformats.org/drawingml/2006/main">
-            <a:off x="5467350" y="3390900"/>
-            <a:ext cx="2647950" cy="800100"/>
-          </a:xfrm>
-          <a:prstGeom xmlns:a="http://schemas.openxmlformats.org/drawingml/2006/main" prst="rect">
-            <a:avLst/>
-          </a:prstGeom>
-          <a:noFill xmlns:a="http://schemas.openxmlformats.org/drawingml/2006/main"/>
-          <a:ln xmlns:a="http://schemas.openxmlformats.org/drawingml/2006/main" w="0">
-            <a:noFill/>
-            <a:prstDash val="solid"/>
-          </a:ln>
-        </p:spPr>
-        <p:txBody>
-          <a:bodyPr xmlns:a="http://schemas.openxmlformats.org/drawingml/2006/main" wrap="square" lIns="0" tIns="0" rIns="0" bIns="0" anchor="ctr">
-            <a:noAutofit/>
-          </a:bodyPr>
-          <a:lstStyle xmlns:a="http://schemas.openxmlformats.org/drawingml/2006/main"/>
-          <a:p xmlns:a="http://schemas.openxmlformats.org/drawingml/2006/main">
-            <a:pPr algn="ctr">
-              <a:lnSpc>
-                <a:spcPct val="80000"/>
-              </a:lnSpc>
-              <a:buNone/>
-              <a:defRPr sz="2175" b="1">
-                <a:solidFill>
-                  <a:srgbClr val="051C2A"/>
-                </a:solidFill>
-                <a:latin typeface="Calibri"/>
-                <a:ea typeface="Calibri"/>
-                <a:cs typeface="Calibri"/>
-              </a:defRPr>
-            </a:pPr>
-            <a:r>
-              <a:rPr sz="1800" b="1">
-                <a:solidFill>
-                  <a:srgbClr val="051C2A"/>
-                </a:solidFill>
-                <a:latin typeface="Calibri"/>
-                <a:ea typeface="Calibri"/>
-                <a:cs typeface="Calibri"/>
-              </a:rPr>
-              <a:t>six aligned cases</a:t>
-            </a:r>
-          </a:p>
-          <a:p xmlns:a="http://schemas.openxmlformats.org/drawingml/2006/main">
-            <a:pPr algn="ctr">
-              <a:lnSpc>
-                <a:spcPct val="80000"/>
-              </a:lnSpc>
-              <a:buNone/>
-              <a:defRPr sz="2175" b="1">
-                <a:solidFill>
-                  <a:srgbClr val="051C2A"/>
-                </a:solidFill>
-                <a:latin typeface="Calibri"/>
-                <a:ea typeface="Calibri"/>
-                <a:cs typeface="Calibri"/>
-              </a:defRPr>
-            </a:pPr>
-            <a:r>
-              <a:rPr sz="1800" b="1">
-                <a:solidFill>
-                  <a:srgbClr val="051C2A"/>
-                </a:solidFill>
-                <a:latin typeface="Calibri"/>
-                <a:ea typeface="Calibri"/>
-                <a:cs typeface="Calibri"/>
-              </a:rPr>
-              <a:t>no forbidden briefing</a:t>
-            </a:r>
-          </a:p>
-          <a:p xmlns:a="http://schemas.openxmlformats.org/drawingml/2006/main">
-            <a:pPr algn="ctr">
-              <a:lnSpc>
-                <a:spcPct val="80000"/>
-              </a:lnSpc>
-              <a:buNone/>
-              <a:defRPr sz="2175" b="1">
-                <a:solidFill>
-                  <a:srgbClr val="051C2A"/>
-                </a:solidFill>
-                <a:latin typeface="Calibri"/>
-                <a:ea typeface="Calibri"/>
-                <a:cs typeface="Calibri"/>
-              </a:defRPr>
-            </a:pPr>
-            <a:r>
-              <a:rPr sz="1800" b="1">
-                <a:solidFill>
-                  <a:srgbClr val="051C2A"/>
-                </a:solidFill>
-                <a:latin typeface="Calibri"/>
-                <a:ea typeface="Calibri"/>
-                <a:cs typeface="Calibri"/>
-              </a:rPr>
-              <a:t>same dataset hash</a:t>
-            </a:r>
-          </a:p>
-        </p:txBody>
-      </p:sp>
-      <p:sp>
-        <p:nvSpPr>
-          <p:cNvPr id="9" name="">
-            <a:extLst xmlns:a="http://schemas.openxmlformats.org/drawingml/2006/main">
-              <a:ext uri="{FF2B5EF4-FFF2-40B4-BE49-F238E27FC236}">
-                <a16:creationId xmlns:a16="http://schemas.microsoft.com/office/drawing/2014/main" id="{EE8A313B-A32E-4318-B50D-32C786561C84}"/>
-              </a:ext>
-            </a:extLst>
-          </p:cNvPr>
-          <p:cNvSpPr>
-            <a:spLocks xmlns:a="http://schemas.openxmlformats.org/drawingml/2006/main" noGrp="1"/>
-          </p:cNvSpPr>
-          <p:nvPr/>
-        </p:nvSpPr>
-        <p:spPr>
-          <a:xfrm xmlns:a="http://schemas.openxmlformats.org/drawingml/2006/main">
-            <a:off x="5467350" y="4191000"/>
-            <a:ext cx="2647950" cy="476250"/>
-          </a:xfrm>
-          <a:prstGeom xmlns:a="http://schemas.openxmlformats.org/drawingml/2006/main" prst="rect">
-            <a:avLst/>
-          </a:prstGeom>
-          <a:noFill xmlns:a="http://schemas.openxmlformats.org/drawingml/2006/main"/>
-          <a:ln xmlns:a="http://schemas.openxmlformats.org/drawingml/2006/main" w="0">
-            <a:noFill/>
-            <a:prstDash val="solid"/>
-          </a:ln>
-        </p:spPr>
-        <p:txBody>
-          <a:bodyPr xmlns:a="http://schemas.openxmlformats.org/drawingml/2006/main" wrap="square" lIns="0" tIns="0" rIns="0" bIns="0" anchor="ctr">
-            <a:noAutofit/>
-          </a:bodyPr>
-          <a:lstStyle xmlns:a="http://schemas.openxmlformats.org/drawingml/2006/main"/>
-          <a:p xmlns:a="http://schemas.openxmlformats.org/drawingml/2006/main">
-            <a:pPr algn="ctr">
-              <a:lnSpc>
-                <a:spcPct val="70000"/>
-              </a:lnSpc>
-              <a:buNone/>
-              <a:defRPr sz="1275" b="0">
-                <a:solidFill>
-                  <a:srgbClr val="1F40CB"/>
-                </a:solidFill>
-                <a:latin typeface="Calibri"/>
-                <a:ea typeface="Calibri"/>
-                <a:cs typeface="Calibri"/>
-              </a:defRPr>
-            </a:pPr>
-            <a:r>
-              <a:rPr sz="1800" b="0">
-                <a:solidFill>
-                  <a:srgbClr val="1F40CB"/>
-                </a:solidFill>
-                <a:latin typeface="Calibri"/>
-                <a:ea typeface="Calibri"/>
-                <a:cs typeface="Calibri"/>
-              </a:rPr>
-              <a:t>DETERMINISTIC RELEASE GATE</a:t>
-            </a:r>
-          </a:p>
-        </p:txBody>
-      </p:sp>
-      <p:sp>
-        <p:nvSpPr>
-          <p:cNvPr id="10" name="decision-parent">
-            <a:extLst xmlns:a="http://schemas.openxmlformats.org/drawingml/2006/main">
-              <a:ext uri="{FF2B5EF4-FFF2-40B4-BE49-F238E27FC236}">
-                <a16:creationId xmlns:a16="http://schemas.microsoft.com/office/drawing/2014/main" id="{7E8CC043-3F7C-4B5E-B01A-E942C33D8740}"/>
-              </a:ext>
-            </a:extLst>
-          </p:cNvPr>
-          <p:cNvSpPr>
-            <a:spLocks xmlns:a="http://schemas.openxmlformats.org/drawingml/2006/main" noGrp="1"/>
-          </p:cNvSpPr>
-          <p:nvPr/>
-        </p:nvSpPr>
-        <p:spPr>
-          <a:xfrm xmlns:a="http://schemas.openxmlformats.org/drawingml/2006/main">
-            <a:off x="9829800" y="2990850"/>
-            <a:ext cx="3543300" cy="1562100"/>
-          </a:xfrm>
-          <a:prstGeom xmlns:a="http://schemas.openxmlformats.org/drawingml/2006/main" prst="roundRect">
-            <a:avLst>
-              <a:gd name="adj" fmla="val 7317"/>
-            </a:avLst>
-          </a:prstGeom>
-          <a:solidFill xmlns:a="http://schemas.openxmlformats.org/drawingml/2006/main">
-            <a:srgbClr val="062433"/>
-          </a:solidFill>
-          <a:ln xmlns:a="http://schemas.openxmlformats.org/drawingml/2006/main" w="9525">
-            <a:solidFill>
-              <a:srgbClr val="062433"/>
-            </a:solidFill>
-            <a:prstDash val="solid"/>
-          </a:ln>
-        </p:spPr>
-      </p:sp>
-      <p:sp>
-        <p:nvSpPr>
-          <p:cNvPr id="11" name="">
-            <a:extLst xmlns:a="http://schemas.openxmlformats.org/drawingml/2006/main">
-              <a:ext uri="{FF2B5EF4-FFF2-40B4-BE49-F238E27FC236}">
-                <a16:creationId xmlns:a16="http://schemas.microsoft.com/office/drawing/2014/main" id="{0595FD15-7156-4E52-87B2-404D626063B5}"/>
-              </a:ext>
-            </a:extLst>
-          </p:cNvPr>
-          <p:cNvSpPr>
-            <a:spLocks xmlns:a="http://schemas.openxmlformats.org/drawingml/2006/main" noGrp="1"/>
-          </p:cNvSpPr>
-          <p:nvPr/>
-        </p:nvSpPr>
-        <p:spPr>
-          <a:xfrm xmlns:a="http://schemas.openxmlformats.org/drawingml/2006/main">
-            <a:off x="10134600" y="3181350"/>
-            <a:ext cx="2933700" cy="323850"/>
-          </a:xfrm>
-          <a:prstGeom xmlns:a="http://schemas.openxmlformats.org/drawingml/2006/main" prst="rect">
-            <a:avLst/>
-          </a:prstGeom>
-          <a:noFill xmlns:a="http://schemas.openxmlformats.org/drawingml/2006/main"/>
-          <a:ln xmlns:a="http://schemas.openxmlformats.org/drawingml/2006/main" w="0">
-            <a:noFill/>
-            <a:prstDash val="solid"/>
-          </a:ln>
-        </p:spPr>
-        <p:txBody>
-          <a:bodyPr xmlns:a="http://schemas.openxmlformats.org/drawingml/2006/main" wrap="square" lIns="0" tIns="0" rIns="0" bIns="0" anchor="ctr">
-            <a:noAutofit/>
-          </a:bodyPr>
-          <a:lstStyle xmlns:a="http://schemas.openxmlformats.org/drawingml/2006/main"/>
-          <a:p xmlns:a="http://schemas.openxmlformats.org/drawingml/2006/main">
-            <a:pPr algn="ctr">
-              <a:lnSpc>
-                <a:spcPct val="100000"/>
-              </a:lnSpc>
-              <a:buNone/>
-              <a:defRPr sz="1350" b="1">
-                <a:solidFill>
-                  <a:srgbClr val="00A2EB"/>
-                </a:solidFill>
-                <a:latin typeface="Calibri"/>
-                <a:ea typeface="Calibri"/>
-                <a:cs typeface="Calibri"/>
-              </a:defRPr>
-            </a:pPr>
-            <a:r>
-              <a:rPr sz="1800" b="1">
-                <a:solidFill>
-                  <a:srgbClr val="00A2EB"/>
-                </a:solidFill>
-                <a:latin typeface="Calibri"/>
-                <a:ea typeface="Calibri"/>
-                <a:cs typeface="Calibri"/>
-              </a:rPr>
-              <a:t>CAPSTONE</a:t>
-            </a:r>
-          </a:p>
-        </p:txBody>
-      </p:sp>
-      <p:sp>
-        <p:nvSpPr>
-          <p:cNvPr id="12" name="">
-            <a:extLst xmlns:a="http://schemas.openxmlformats.org/drawingml/2006/main">
-              <a:ext uri="{FF2B5EF4-FFF2-40B4-BE49-F238E27FC236}">
-                <a16:creationId xmlns:a16="http://schemas.microsoft.com/office/drawing/2014/main" id="{39CEFAC4-B99C-4E5B-B744-4D0EEDB15B0B}"/>
-              </a:ext>
-            </a:extLst>
-          </p:cNvPr>
-          <p:cNvSpPr>
-            <a:spLocks xmlns:a="http://schemas.openxmlformats.org/drawingml/2006/main" noGrp="1"/>
-          </p:cNvSpPr>
-          <p:nvPr/>
-        </p:nvSpPr>
-        <p:spPr>
-          <a:xfrm xmlns:a="http://schemas.openxmlformats.org/drawingml/2006/main">
-            <a:off x="10134600" y="3638550"/>
-            <a:ext cx="2933700" cy="685800"/>
-          </a:xfrm>
-          <a:prstGeom xmlns:a="http://schemas.openxmlformats.org/drawingml/2006/main" prst="rect">
-            <a:avLst/>
-          </a:prstGeom>
-          <a:noFill xmlns:a="http://schemas.openxmlformats.org/drawingml/2006/main"/>
-          <a:ln xmlns:a="http://schemas.openxmlformats.org/drawingml/2006/main" w="0">
-            <a:noFill/>
-            <a:prstDash val="solid"/>
-          </a:ln>
-        </p:spPr>
-        <p:txBody>
-          <a:bodyPr xmlns:a="http://schemas.openxmlformats.org/drawingml/2006/main" wrap="square" lIns="0" tIns="0" rIns="0" bIns="0" anchor="ctr">
-            <a:normAutofit fontScale="71429"/>
-          </a:bodyPr>
-          <a:lstStyle xmlns:a="http://schemas.openxmlformats.org/drawingml/2006/main"/>
-          <a:p xmlns:a="http://schemas.openxmlformats.org/drawingml/2006/main">
-            <a:pPr algn="ctr">
-              <a:lnSpc>
-                <a:spcPct val="100000"/>
-              </a:lnSpc>
-              <a:buNone/>
-              <a:defRPr sz="2100" b="1">
-                <a:solidFill>
-                  <a:srgbClr val="FFFFFF"/>
-                </a:solidFill>
-                <a:latin typeface="Calibri"/>
-                <a:ea typeface="Calibri"/>
-                <a:cs typeface="Calibri"/>
-              </a:defRPr>
-            </a:pPr>
-            <a:r>
-              <a:rPr sz="2100" b="1">
-                <a:solidFill>
-                  <a:srgbClr val="FFFFFF"/>
-                </a:solidFill>
-                <a:latin typeface="Calibri"/>
-                <a:ea typeface="Calibri"/>
-                <a:cs typeface="Calibri"/>
-              </a:rPr>
-              <a:t>choose mission</a:t>
-            </a:r>
-          </a:p>
-          <a:p xmlns:a="http://schemas.openxmlformats.org/drawingml/2006/main">
-            <a:pPr algn="ctr">
-              <a:lnSpc>
-                <a:spcPct val="100000"/>
-              </a:lnSpc>
-              <a:buNone/>
-              <a:defRPr sz="2100" b="1">
-                <a:solidFill>
-                  <a:srgbClr val="FFFFFF"/>
-                </a:solidFill>
-                <a:latin typeface="Calibri"/>
-                <a:ea typeface="Calibri"/>
-                <a:cs typeface="Calibri"/>
-              </a:defRPr>
-            </a:pPr>
-            <a:r>
-              <a:rPr sz="2100" b="1">
-                <a:solidFill>
-                  <a:srgbClr val="FFFFFF"/>
-                </a:solidFill>
-                <a:latin typeface="Calibri"/>
-                <a:ea typeface="Calibri"/>
-                <a:cs typeface="Calibri"/>
-              </a:rPr>
-              <a:t>controls + evidence</a:t>
-            </a:r>
-          </a:p>
-          <a:p xmlns:a="http://schemas.openxmlformats.org/drawingml/2006/main">
-            <a:pPr algn="ctr">
-              <a:lnSpc>
-                <a:spcPct val="100000"/>
-              </a:lnSpc>
-              <a:buNone/>
-              <a:defRPr sz="2100" b="1">
-                <a:solidFill>
-                  <a:srgbClr val="FFFFFF"/>
-                </a:solidFill>
-                <a:latin typeface="Calibri"/>
-                <a:ea typeface="Calibri"/>
-                <a:cs typeface="Calibri"/>
-              </a:defRPr>
-            </a:pPr>
-            <a:r>
-              <a:rPr sz="2100" b="1">
-                <a:solidFill>
-                  <a:srgbClr val="FFFFFF"/>
-                </a:solidFill>
-                <a:latin typeface="Calibri"/>
-                <a:ea typeface="Calibri"/>
-                <a:cs typeface="Calibri"/>
-              </a:rPr>
-              <a:t>release rubric</a:t>
-            </a:r>
-          </a:p>
-        </p:txBody>
-      </p:sp>
-      <p:cxnSp>
-        <p:nvCxnSpPr>
-          <p:cNvPr id="404" name=""/>
-          <p:cNvCxnSpPr>
-            <a:stCxn xmlns:a="http://schemas.openxmlformats.org/drawingml/2006/main" id="3" idx="3"/>
-            <a:endCxn xmlns:a="http://schemas.openxmlformats.org/drawingml/2006/main" id="6" idx="1"/>
-          </p:cNvCxnSpPr>
-          <p:nvPr/>
-        </p:nvCxnSpPr>
-        <p:spPr>
-          <a:xfrm xmlns:a="http://schemas.openxmlformats.org/drawingml/2006/main">
-            <a:off x="3752850" y="3771900"/>
-            <a:ext cx="1409700" cy="0"/>
-          </a:xfrm>
-          <a:prstGeom xmlns:a="http://schemas.openxmlformats.org/drawingml/2006/main" prst="straightConnector1">
-            <a:avLst/>
-          </a:prstGeom>
-          <a:ln xmlns:a="http://schemas.openxmlformats.org/drawingml/2006/main" w="28575">
-            <a:solidFill>
-              <a:srgbClr val="F07D00"/>
-            </a:solidFill>
-            <a:prstDash val="solid"/>
-            <a:tailEnd type="triangle" w="med" len="med"/>
-          </a:ln>
-        </p:spPr>
-      </p:cxnSp>
-      <p:cxnSp>
-        <p:nvCxnSpPr>
-          <p:cNvPr id="405" name=""/>
-          <p:cNvCxnSpPr>
-            <a:stCxn xmlns:a="http://schemas.openxmlformats.org/drawingml/2006/main" id="6" idx="3"/>
-            <a:endCxn xmlns:a="http://schemas.openxmlformats.org/drawingml/2006/main" id="10" idx="1"/>
-          </p:cNvCxnSpPr>
-          <p:nvPr/>
-        </p:nvCxnSpPr>
-        <p:spPr>
-          <a:xfrm xmlns:a="http://schemas.openxmlformats.org/drawingml/2006/main" flipV="0">
-            <a:off x="8420100" y="3771900"/>
-            <a:ext cx="1409700" cy="0"/>
-          </a:xfrm>
-          <a:prstGeom xmlns:a="http://schemas.openxmlformats.org/drawingml/2006/main" prst="straightConnector1">
-            <a:avLst/>
-          </a:prstGeom>
-          <a:ln xmlns:a="http://schemas.openxmlformats.org/drawingml/2006/main" w="28575">
-            <a:solidFill>
-              <a:srgbClr val="F07D00"/>
-            </a:solidFill>
-            <a:prstDash val="solid"/>
-            <a:tailEnd type="triangle" w="med" len="med"/>
-          </a:ln>
-        </p:spPr>
-      </p:cxnSp>
-      <p:sp>
-        <p:nvSpPr>
-          <p:cNvPr id="15" name="">
-            <a:extLst xmlns:a="http://schemas.openxmlformats.org/drawingml/2006/main">
-              <a:ext uri="{FF2B5EF4-FFF2-40B4-BE49-F238E27FC236}">
-                <a16:creationId xmlns:a16="http://schemas.microsoft.com/office/drawing/2014/main" id="{FE1BEF3A-6A25-4B3F-8E60-6108148E5582}"/>
-              </a:ext>
-            </a:extLst>
-          </p:cNvPr>
-          <p:cNvSpPr>
-            <a:spLocks xmlns:a="http://schemas.openxmlformats.org/drawingml/2006/main" noGrp="1"/>
-          </p:cNvSpPr>
-          <p:nvPr/>
-        </p:nvSpPr>
-        <p:spPr>
-          <a:xfrm xmlns:a="http://schemas.openxmlformats.org/drawingml/2006/main">
-            <a:off x="1600200" y="5467350"/>
-            <a:ext cx="12039600" cy="1123950"/>
-          </a:xfrm>
-          <a:prstGeom xmlns:a="http://schemas.openxmlformats.org/drawingml/2006/main" prst="roundRect">
-            <a:avLst>
-              <a:gd name="adj" fmla="val 8475"/>
-            </a:avLst>
-          </a:prstGeom>
-          <a:solidFill xmlns:a="http://schemas.openxmlformats.org/drawingml/2006/main">
-            <a:srgbClr val="FFFFFF"/>
-          </a:solidFill>
-          <a:ln xmlns:a="http://schemas.openxmlformats.org/drawingml/2006/main" w="9525">
-            <a:solidFill>
-              <a:srgbClr val="E4E7E9"/>
-            </a:solidFill>
-            <a:prstDash val="solid"/>
-          </a:ln>
-        </p:spPr>
-      </p:sp>
-      <p:sp>
-        <p:nvSpPr>
-          <p:cNvPr id="16" name="">
-            <a:extLst xmlns:a="http://schemas.openxmlformats.org/drawingml/2006/main">
-              <a:ext uri="{FF2B5EF4-FFF2-40B4-BE49-F238E27FC236}">
-                <a16:creationId xmlns:a16="http://schemas.microsoft.com/office/drawing/2014/main" id="{DFE4947E-2E2C-4D5A-B088-DFED206E71BC}"/>
-              </a:ext>
-            </a:extLst>
-          </p:cNvPr>
-          <p:cNvSpPr>
-            <a:spLocks xmlns:a="http://schemas.openxmlformats.org/drawingml/2006/main" noGrp="1"/>
-          </p:cNvSpPr>
-          <p:nvPr/>
-        </p:nvSpPr>
-        <p:spPr>
-          <a:xfrm xmlns:a="http://schemas.openxmlformats.org/drawingml/2006/main">
-            <a:off x="1943100" y="5638800"/>
-            <a:ext cx="2476500" cy="285750"/>
-          </a:xfrm>
-          <a:prstGeom xmlns:a="http://schemas.openxmlformats.org/drawingml/2006/main" prst="rect">
-            <a:avLst/>
-          </a:prstGeom>
-          <a:noFill xmlns:a="http://schemas.openxmlformats.org/drawingml/2006/main"/>
-          <a:ln xmlns:a="http://schemas.openxmlformats.org/drawingml/2006/main" w="0">
-            <a:noFill/>
-            <a:prstDash val="solid"/>
-          </a:ln>
-        </p:spPr>
-        <p:txBody>
-          <a:bodyPr xmlns:a="http://schemas.openxmlformats.org/drawingml/2006/main" wrap="square" lIns="0" tIns="0" rIns="0" bIns="0" anchor="ctr">
-            <a:noAutofit/>
-          </a:bodyPr>
-          <a:lstStyle xmlns:a="http://schemas.openxmlformats.org/drawingml/2006/main"/>
-          <a:p xmlns:a="http://schemas.openxmlformats.org/drawingml/2006/main">
-            <a:pPr algn="l">
-              <a:lnSpc>
-                <a:spcPct val="100000"/>
-              </a:lnSpc>
-              <a:buNone/>
-              <a:defRPr sz="1275" b="1">
-                <a:solidFill>
-                  <a:srgbClr val="F07D00"/>
-                </a:solidFill>
-                <a:latin typeface="Calibri"/>
-                <a:ea typeface="Calibri"/>
-                <a:cs typeface="Calibri"/>
-              </a:defRPr>
-            </a:pPr>
-            <a:r>
-              <a:rPr sz="1800" b="1">
-                <a:solidFill>
-                  <a:srgbClr val="F07D00"/>
-                </a:solidFill>
-                <a:latin typeface="Calibri"/>
-                <a:ea typeface="Calibri"/>
-                <a:cs typeface="Calibri"/>
-              </a:rPr>
-              <a:t>KEEP</a:t>
-            </a:r>
-          </a:p>
-        </p:txBody>
-      </p:sp>
-      <p:sp>
-        <p:nvSpPr>
-          <p:cNvPr id="17" name="">
-            <a:extLst xmlns:a="http://schemas.openxmlformats.org/drawingml/2006/main">
-              <a:ext uri="{FF2B5EF4-FFF2-40B4-BE49-F238E27FC236}">
-                <a16:creationId xmlns:a16="http://schemas.microsoft.com/office/drawing/2014/main" id="{DC1A217F-7E45-4462-994A-E1A7947A47FC}"/>
-              </a:ext>
-            </a:extLst>
-          </p:cNvPr>
-          <p:cNvSpPr>
-            <a:spLocks xmlns:a="http://schemas.openxmlformats.org/drawingml/2006/main" noGrp="1"/>
-          </p:cNvSpPr>
-          <p:nvPr/>
-        </p:nvSpPr>
-        <p:spPr>
-          <a:xfrm xmlns:a="http://schemas.openxmlformats.org/drawingml/2006/main">
-            <a:off x="1943100" y="5962650"/>
-            <a:ext cx="4953000" cy="400050"/>
-          </a:xfrm>
-          <a:prstGeom xmlns:a="http://schemas.openxmlformats.org/drawingml/2006/main" prst="rect">
-            <a:avLst/>
-          </a:prstGeom>
-          <a:noFill xmlns:a="http://schemas.openxmlformats.org/drawingml/2006/main"/>
-          <a:ln xmlns:a="http://schemas.openxmlformats.org/drawingml/2006/main" w="0">
-            <a:noFill/>
-            <a:prstDash val="solid"/>
-          </a:ln>
-        </p:spPr>
-        <p:txBody>
-          <a:bodyPr xmlns:a="http://schemas.openxmlformats.org/drawingml/2006/main" wrap="square" lIns="0" tIns="0" rIns="0" bIns="0" anchor="ctr">
-            <a:normAutofit fontScale="100000"/>
-          </a:bodyPr>
-          <a:lstStyle xmlns:a="http://schemas.openxmlformats.org/drawingml/2006/main"/>
-          <a:p xmlns:a="http://schemas.openxmlformats.org/drawingml/2006/main">
-            <a:pPr algn="l">
-              <a:lnSpc>
-                <a:spcPct val="100000"/>
-              </a:lnSpc>
-              <a:buNone/>
-              <a:defRPr sz="1650" b="1">
-                <a:solidFill>
-                  <a:srgbClr val="051C2A"/>
-                </a:solidFill>
-                <a:latin typeface="Calibri"/>
-                <a:ea typeface="Calibri"/>
-                <a:cs typeface="Calibri"/>
-              </a:defRPr>
-            </a:pPr>
-            <a:r>
-              <a:rPr sz="1650" b="1">
-                <a:solidFill>
-                  <a:srgbClr val="051C2A"/>
-                </a:solidFill>
-                <a:latin typeface="Calibri"/>
-                <a:ea typeface="Calibri"/>
-                <a:cs typeface="Calibri"/>
-              </a:rPr>
-              <a:t>traces · score rows · source pairs</a:t>
-            </a:r>
-          </a:p>
-        </p:txBody>
-      </p:sp>
-      <p:sp>
-        <p:nvSpPr>
-          <p:cNvPr id="18" name="">
-            <a:extLst xmlns:a="http://schemas.openxmlformats.org/drawingml/2006/main">
-              <a:ext uri="{FF2B5EF4-FFF2-40B4-BE49-F238E27FC236}">
-                <a16:creationId xmlns:a16="http://schemas.microsoft.com/office/drawing/2014/main" id="{4B74CAF0-D3F9-408B-B959-2864FA7108BD}"/>
-              </a:ext>
-            </a:extLst>
-          </p:cNvPr>
-          <p:cNvSpPr>
-            <a:spLocks xmlns:a="http://schemas.openxmlformats.org/drawingml/2006/main" noGrp="1"/>
-          </p:cNvSpPr>
-          <p:nvPr/>
-        </p:nvSpPr>
-        <p:spPr>
-          <a:xfrm xmlns:a="http://schemas.openxmlformats.org/drawingml/2006/main">
-            <a:off x="7486650" y="5638800"/>
-            <a:ext cx="28575" cy="742950"/>
-          </a:xfrm>
-          <a:prstGeom xmlns:a="http://schemas.openxmlformats.org/drawingml/2006/main" prst="rect">
-            <a:avLst/>
-          </a:prstGeom>
-          <a:solidFill xmlns:a="http://schemas.openxmlformats.org/drawingml/2006/main">
-            <a:srgbClr val="E4E7E9"/>
-          </a:solidFill>
-          <a:ln xmlns:a="http://schemas.openxmlformats.org/drawingml/2006/main" w="0">
-            <a:solidFill>
-              <a:srgbClr val="E4E7E9"/>
-            </a:solidFill>
-            <a:prstDash val="solid"/>
-          </a:ln>
-        </p:spPr>
-      </p:sp>
-      <p:sp>
-        <p:nvSpPr>
-          <p:cNvPr id="19" name="">
-            <a:extLst xmlns:a="http://schemas.openxmlformats.org/drawingml/2006/main">
-              <a:ext uri="{FF2B5EF4-FFF2-40B4-BE49-F238E27FC236}">
-                <a16:creationId xmlns:a16="http://schemas.microsoft.com/office/drawing/2014/main" id="{F6C058E3-0326-4715-852F-1F8B32F61FB5}"/>
-              </a:ext>
-            </a:extLst>
-          </p:cNvPr>
-          <p:cNvSpPr>
-            <a:spLocks xmlns:a="http://schemas.openxmlformats.org/drawingml/2006/main" noGrp="1"/>
-          </p:cNvSpPr>
-          <p:nvPr/>
-        </p:nvSpPr>
-        <p:spPr>
-          <a:xfrm xmlns:a="http://schemas.openxmlformats.org/drawingml/2006/main">
-            <a:off x="7867650" y="5638800"/>
-            <a:ext cx="3143250" cy="285750"/>
-          </a:xfrm>
-          <a:prstGeom xmlns:a="http://schemas.openxmlformats.org/drawingml/2006/main" prst="rect">
-            <a:avLst/>
-          </a:prstGeom>
-          <a:noFill xmlns:a="http://schemas.openxmlformats.org/drawingml/2006/main"/>
-          <a:ln xmlns:a="http://schemas.openxmlformats.org/drawingml/2006/main" w="0">
-            <a:noFill/>
-            <a:prstDash val="solid"/>
-          </a:ln>
-        </p:spPr>
-        <p:txBody>
-          <a:bodyPr xmlns:a="http://schemas.openxmlformats.org/drawingml/2006/main" wrap="square" lIns="0" tIns="0" rIns="0" bIns="0" anchor="ctr">
-            <a:noAutofit/>
-          </a:bodyPr>
-          <a:lstStyle xmlns:a="http://schemas.openxmlformats.org/drawingml/2006/main"/>
-          <a:p xmlns:a="http://schemas.openxmlformats.org/drawingml/2006/main">
-            <a:pPr algn="l">
-              <a:lnSpc>
-                <a:spcPct val="100000"/>
-              </a:lnSpc>
-              <a:buNone/>
-              <a:defRPr sz="1275" b="1">
-                <a:solidFill>
-                  <a:srgbClr val="00A2EB"/>
-                </a:solidFill>
-                <a:latin typeface="Calibri"/>
-                <a:ea typeface="Calibri"/>
-                <a:cs typeface="Calibri"/>
-              </a:defRPr>
-            </a:pPr>
-            <a:r>
-              <a:rPr sz="1800" b="1">
-                <a:solidFill>
-                  <a:srgbClr val="00A2EB"/>
-                </a:solidFill>
-                <a:latin typeface="Calibri"/>
-                <a:ea typeface="Calibri"/>
-                <a:cs typeface="Calibri"/>
-              </a:rPr>
-              <a:t>HANDOFF</a:t>
-            </a:r>
-          </a:p>
-        </p:txBody>
-      </p:sp>
-      <p:sp>
-        <p:nvSpPr>
-          <p:cNvPr id="20" name="">
-            <a:extLst xmlns:a="http://schemas.openxmlformats.org/drawingml/2006/main">
-              <a:ext uri="{FF2B5EF4-FFF2-40B4-BE49-F238E27FC236}">
-                <a16:creationId xmlns:a16="http://schemas.microsoft.com/office/drawing/2014/main" id="{0AA9B25E-ADFB-4067-BF4C-46A5AE9FE838}"/>
-              </a:ext>
-            </a:extLst>
-          </p:cNvPr>
-          <p:cNvSpPr>
-            <a:spLocks xmlns:a="http://schemas.openxmlformats.org/drawingml/2006/main" noGrp="1"/>
-          </p:cNvSpPr>
-          <p:nvPr/>
-        </p:nvSpPr>
-        <p:spPr>
-          <a:xfrm xmlns:a="http://schemas.openxmlformats.org/drawingml/2006/main">
-            <a:off x="7867650" y="5962650"/>
-            <a:ext cx="5143500" cy="400050"/>
-          </a:xfrm>
-          <a:prstGeom xmlns:a="http://schemas.openxmlformats.org/drawingml/2006/main" prst="rect">
-            <a:avLst/>
-          </a:prstGeom>
-          <a:noFill xmlns:a="http://schemas.openxmlformats.org/drawingml/2006/main"/>
-          <a:ln xmlns:a="http://schemas.openxmlformats.org/drawingml/2006/main" w="0">
-            <a:noFill/>
-            <a:prstDash val="solid"/>
-          </a:ln>
-        </p:spPr>
-        <p:txBody>
-          <a:bodyPr xmlns:a="http://schemas.openxmlformats.org/drawingml/2006/main" wrap="square" lIns="0" tIns="0" rIns="0" bIns="0" anchor="ctr">
-            <a:normAutofit fontScale="100000"/>
-          </a:bodyPr>
-          <a:lstStyle xmlns:a="http://schemas.openxmlformats.org/drawingml/2006/main"/>
-          <a:p xmlns:a="http://schemas.openxmlformats.org/drawingml/2006/main">
-            <a:pPr algn="l">
-              <a:lnSpc>
-                <a:spcPct val="100000"/>
-              </a:lnSpc>
-              <a:buNone/>
-              <a:defRPr sz="1650" b="1">
-                <a:solidFill>
-                  <a:srgbClr val="051C2A"/>
-                </a:solidFill>
-                <a:latin typeface="Calibri"/>
-                <a:ea typeface="Calibri"/>
-                <a:cs typeface="Calibri"/>
-              </a:defRPr>
-            </a:pPr>
-            <a:r>
-              <a:rPr sz="1650" b="1">
-                <a:solidFill>
-                  <a:srgbClr val="051C2A"/>
-                </a:solidFill>
-                <a:latin typeface="Calibri"/>
-                <a:ea typeface="Calibri"/>
-                <a:cs typeface="Calibri"/>
-              </a:rPr>
-              <a:t>capstone architecture remains a design choice</a:t>
+              <a:t>Release only when path, answer, and citations pass</a:t>
             </a:r>
           </a:p>
         </p:txBody>
@@ -15233,7 +12457,7 @@
                 <a:ea typeface="Calibri"/>
                 <a:cs typeface="Calibri"/>
               </a:rPr>
-              <a:t>Release the evidence. Use failures to design the capstone.</a:t>
+              <a:t>Use the failures to design the capstone, not to hide them.</a:t>
             </a:r>
           </a:p>
         </p:txBody>
@@ -15486,6 +12710,696 @@
                 <a:cs typeface="Calibri"/>
               </a:rPr>
               <a:t>09</a:t>
+            </a:r>
+          </a:p>
+        </p:txBody>
+      </p:sp>
+      <p:pic>
+        <p:nvPicPr>
+          <p:cNvPr id="55" name=""/>
+          <p:cNvPicPr>
+            <a:picLocks xmlns:a="http://schemas.openxmlformats.org/drawingml/2006/main" noChangeAspect="1"/>
+          </p:cNvPicPr>
+          <p:nvPr/>
+        </p:nvPicPr>
+        <p:blipFill>
+          <a:blip xmlns:r="http://schemas.openxmlformats.org/officeDocument/2006/relationships" xmlns:a="http://schemas.openxmlformats.org/drawingml/2006/main" r:embed="R0e0ea5681cf14743"/>
+          <a:stretch xmlns:a="http://schemas.openxmlformats.org/drawingml/2006/main"/>
+        </p:blipFill>
+        <p:spPr>
+          <a:xfrm xmlns:a="http://schemas.openxmlformats.org/drawingml/2006/main">
+            <a:off x="1979478" y="2400300"/>
+            <a:ext cx="6994793" cy="3905250"/>
+          </a:xfrm>
+          <a:prstGeom xmlns:a="http://schemas.openxmlformats.org/drawingml/2006/main" prst="rect">
+            <a:avLst/>
+          </a:prstGeom>
+        </p:spPr>
+      </p:pic>
+      <p:pic>
+        <p:nvPicPr>
+          <p:cNvPr id="56" name=""/>
+          <p:cNvPicPr>
+            <a:picLocks xmlns:a="http://schemas.openxmlformats.org/drawingml/2006/main" noChangeAspect="1"/>
+          </p:cNvPicPr>
+          <p:nvPr/>
+        </p:nvPicPr>
+        <p:blipFill>
+          <a:blip xmlns:r="http://schemas.openxmlformats.org/officeDocument/2006/relationships" xmlns:a="http://schemas.openxmlformats.org/drawingml/2006/main" r:embed="R575f429ee0be4d53">
+            <a:extLst>
+              <a:ext uri="{96DAC541-7B7A-43D3-8B79-37D633B846F1}">
+                <asvg:svgBlip xmlns:asvg="http://schemas.microsoft.com/office/drawing/2016/SVG/main" r:embed="R4328d43af3be4aa9"/>
+              </a:ext>
+            </a:extLst>
+          </a:blip>
+          <a:stretch xmlns:a="http://schemas.openxmlformats.org/drawingml/2006/main"/>
+        </p:blipFill>
+        <p:spPr>
+          <a:xfrm xmlns:a="http://schemas.openxmlformats.org/drawingml/2006/main">
+            <a:off x="10382250" y="2400300"/>
+            <a:ext cx="3714750" cy="4095750"/>
+          </a:xfrm>
+          <a:prstGeom xmlns:a="http://schemas.openxmlformats.org/drawingml/2006/main" prst="rect">
+            <a:avLst/>
+          </a:prstGeom>
+        </p:spPr>
+      </p:pic>
+      <p:sp>
+        <p:nvSpPr>
+          <p:cNvPr id="31" name="">
+            <a:extLst xmlns:a="http://schemas.openxmlformats.org/drawingml/2006/main">
+              <a:ext uri="{FF2B5EF4-FFF2-40B4-BE49-F238E27FC236}">
+                <a16:creationId xmlns:a16="http://schemas.microsoft.com/office/drawing/2014/main" id="{7D87E278-575A-4E0E-A177-ADFF0EFF80D8}"/>
+              </a:ext>
+            </a:extLst>
+          </p:cNvPr>
+          <p:cNvSpPr>
+            <a:spLocks xmlns:a="http://schemas.openxmlformats.org/drawingml/2006/main" noGrp="1"/>
+          </p:cNvSpPr>
+          <p:nvPr/>
+        </p:nvSpPr>
+        <p:spPr>
+          <a:xfrm xmlns:a="http://schemas.openxmlformats.org/drawingml/2006/main">
+            <a:off x="10763250" y="2724150"/>
+            <a:ext cx="2952750" cy="361950"/>
+          </a:xfrm>
+          <a:prstGeom xmlns:a="http://schemas.openxmlformats.org/drawingml/2006/main" prst="rect">
+            <a:avLst/>
+          </a:prstGeom>
+          <a:noFill xmlns:a="http://schemas.openxmlformats.org/drawingml/2006/main"/>
+          <a:ln xmlns:a="http://schemas.openxmlformats.org/drawingml/2006/main" w="0">
+            <a:noFill/>
+            <a:prstDash val="solid"/>
+          </a:ln>
+        </p:spPr>
+        <p:txBody>
+          <a:bodyPr xmlns:a="http://schemas.openxmlformats.org/drawingml/2006/main"/>
+          <a:lstStyle xmlns:a="http://schemas.openxmlformats.org/drawingml/2006/main"/>
+          <a:p xmlns:a="http://schemas.openxmlformats.org/drawingml/2006/main">
+            <a:pPr algn="ctr">
+              <a:defRPr sz="1425" b="1">
+                <a:solidFill>
+                  <a:srgbClr val="00A6E8"/>
+                </a:solidFill>
+              </a:defRPr>
+            </a:pPr>
+            <a:r>
+              <a:rPr sz="1425" b="1">
+                <a:solidFill>
+                  <a:srgbClr val="00A6E8"/>
+                </a:solidFill>
+              </a:rPr>
+              <a:t>RELEASE ONLY IF</a:t>
+            </a:r>
+          </a:p>
+        </p:txBody>
+      </p:sp>
+      <p:pic>
+        <p:nvPicPr>
+          <p:cNvPr id="58" name=""/>
+          <p:cNvPicPr>
+            <a:picLocks xmlns:a="http://schemas.openxmlformats.org/drawingml/2006/main" noChangeAspect="1"/>
+          </p:cNvPicPr>
+          <p:nvPr/>
+        </p:nvPicPr>
+        <p:blipFill>
+          <a:blip xmlns:r="http://schemas.openxmlformats.org/officeDocument/2006/relationships" xmlns:a="http://schemas.openxmlformats.org/drawingml/2006/main" r:embed="R47850bbc586447af">
+            <a:extLst>
+              <a:ext uri="{96DAC541-7B7A-43D3-8B79-37D633B846F1}">
+                <asvg:svgBlip xmlns:asvg="http://schemas.microsoft.com/office/drawing/2016/SVG/main" r:embed="Ra94101b539554668"/>
+              </a:ext>
+            </a:extLst>
+          </a:blip>
+          <a:stretch xmlns:a="http://schemas.openxmlformats.org/drawingml/2006/main"/>
+        </p:blipFill>
+        <p:spPr>
+          <a:xfrm xmlns:a="http://schemas.openxmlformats.org/drawingml/2006/main">
+            <a:off x="10763250" y="3429000"/>
+            <a:ext cx="342900" cy="342900"/>
+          </a:xfrm>
+          <a:prstGeom xmlns:a="http://schemas.openxmlformats.org/drawingml/2006/main" prst="rect">
+            <a:avLst/>
+          </a:prstGeom>
+        </p:spPr>
+      </p:pic>
+      <p:sp>
+        <p:nvSpPr>
+          <p:cNvPr id="33" name="">
+            <a:extLst xmlns:a="http://schemas.openxmlformats.org/drawingml/2006/main">
+              <a:ext uri="{FF2B5EF4-FFF2-40B4-BE49-F238E27FC236}">
+                <a16:creationId xmlns:a16="http://schemas.microsoft.com/office/drawing/2014/main" id="{066C634F-CE99-48C1-9D3F-C09337C3C9F5}"/>
+              </a:ext>
+            </a:extLst>
+          </p:cNvPr>
+          <p:cNvSpPr>
+            <a:spLocks xmlns:a="http://schemas.openxmlformats.org/drawingml/2006/main" noGrp="1"/>
+          </p:cNvSpPr>
+          <p:nvPr/>
+        </p:nvSpPr>
+        <p:spPr>
+          <a:xfrm xmlns:a="http://schemas.openxmlformats.org/drawingml/2006/main">
+            <a:off x="10763250" y="3457575"/>
+            <a:ext cx="342900" cy="247650"/>
+          </a:xfrm>
+          <a:prstGeom xmlns:a="http://schemas.openxmlformats.org/drawingml/2006/main" prst="rect">
+            <a:avLst/>
+          </a:prstGeom>
+          <a:noFill xmlns:a="http://schemas.openxmlformats.org/drawingml/2006/main"/>
+          <a:ln xmlns:a="http://schemas.openxmlformats.org/drawingml/2006/main" w="0">
+            <a:noFill/>
+            <a:prstDash val="solid"/>
+          </a:ln>
+        </p:spPr>
+        <p:txBody>
+          <a:bodyPr xmlns:a="http://schemas.openxmlformats.org/drawingml/2006/main"/>
+          <a:lstStyle xmlns:a="http://schemas.openxmlformats.org/drawingml/2006/main"/>
+          <a:p xmlns:a="http://schemas.openxmlformats.org/drawingml/2006/main">
+            <a:pPr algn="ctr">
+              <a:defRPr sz="1275" b="1">
+                <a:solidFill>
+                  <a:srgbClr val="FFFFFF"/>
+                </a:solidFill>
+              </a:defRPr>
+            </a:pPr>
+            <a:r>
+              <a:rPr sz="1275" b="1">
+                <a:solidFill>
+                  <a:srgbClr val="FFFFFF"/>
+                </a:solidFill>
+              </a:rPr>
+              <a:t>✓</a:t>
+            </a:r>
+          </a:p>
+        </p:txBody>
+      </p:sp>
+      <p:sp>
+        <p:nvSpPr>
+          <p:cNvPr id="34" name="">
+            <a:extLst xmlns:a="http://schemas.openxmlformats.org/drawingml/2006/main">
+              <a:ext uri="{FF2B5EF4-FFF2-40B4-BE49-F238E27FC236}">
+                <a16:creationId xmlns:a16="http://schemas.microsoft.com/office/drawing/2014/main" id="{CA0ECF6F-C91C-4EE9-BBEE-12209DA1060B}"/>
+              </a:ext>
+            </a:extLst>
+          </p:cNvPr>
+          <p:cNvSpPr>
+            <a:spLocks xmlns:a="http://schemas.openxmlformats.org/drawingml/2006/main" noGrp="1"/>
+          </p:cNvSpPr>
+          <p:nvPr/>
+        </p:nvSpPr>
+        <p:spPr>
+          <a:xfrm xmlns:a="http://schemas.openxmlformats.org/drawingml/2006/main">
+            <a:off x="11239500" y="3419475"/>
+            <a:ext cx="2476500" cy="457200"/>
+          </a:xfrm>
+          <a:prstGeom xmlns:a="http://schemas.openxmlformats.org/drawingml/2006/main" prst="rect">
+            <a:avLst/>
+          </a:prstGeom>
+          <a:noFill xmlns:a="http://schemas.openxmlformats.org/drawingml/2006/main"/>
+          <a:ln xmlns:a="http://schemas.openxmlformats.org/drawingml/2006/main" w="0">
+            <a:noFill/>
+            <a:prstDash val="solid"/>
+          </a:ln>
+        </p:spPr>
+        <p:txBody>
+          <a:bodyPr xmlns:a="http://schemas.openxmlformats.org/drawingml/2006/main"/>
+          <a:lstStyle xmlns:a="http://schemas.openxmlformats.org/drawingml/2006/main"/>
+          <a:p xmlns:a="http://schemas.openxmlformats.org/drawingml/2006/main">
+            <a:pPr algn="l">
+              <a:defRPr sz="1350" b="1">
+                <a:solidFill>
+                  <a:srgbClr val="FFFFFF"/>
+                </a:solidFill>
+              </a:defRPr>
+            </a:pPr>
+            <a:r>
+              <a:rPr sz="1350" b="1">
+                <a:solidFill>
+                  <a:srgbClr val="FFFFFF"/>
+                </a:solidFill>
+              </a:rPr>
+              <a:t>Public path passes</a:t>
+            </a:r>
+          </a:p>
+        </p:txBody>
+      </p:sp>
+      <p:pic>
+        <p:nvPicPr>
+          <p:cNvPr id="61" name=""/>
+          <p:cNvPicPr>
+            <a:picLocks xmlns:a="http://schemas.openxmlformats.org/drawingml/2006/main" noChangeAspect="1"/>
+          </p:cNvPicPr>
+          <p:nvPr/>
+        </p:nvPicPr>
+        <p:blipFill>
+          <a:blip xmlns:r="http://schemas.openxmlformats.org/officeDocument/2006/relationships" xmlns:a="http://schemas.openxmlformats.org/drawingml/2006/main" r:embed="R73e7f943f2464720">
+            <a:extLst>
+              <a:ext uri="{96DAC541-7B7A-43D3-8B79-37D633B846F1}">
+                <asvg:svgBlip xmlns:asvg="http://schemas.microsoft.com/office/drawing/2016/SVG/main" r:embed="R65b408e12d3942cb"/>
+              </a:ext>
+            </a:extLst>
+          </a:blip>
+          <a:stretch xmlns:a="http://schemas.openxmlformats.org/drawingml/2006/main"/>
+        </p:blipFill>
+        <p:spPr>
+          <a:xfrm xmlns:a="http://schemas.openxmlformats.org/drawingml/2006/main">
+            <a:off x="10763250" y="4057650"/>
+            <a:ext cx="342900" cy="342900"/>
+          </a:xfrm>
+          <a:prstGeom xmlns:a="http://schemas.openxmlformats.org/drawingml/2006/main" prst="rect">
+            <a:avLst/>
+          </a:prstGeom>
+        </p:spPr>
+      </p:pic>
+      <p:sp>
+        <p:nvSpPr>
+          <p:cNvPr id="36" name="">
+            <a:extLst xmlns:a="http://schemas.openxmlformats.org/drawingml/2006/main">
+              <a:ext uri="{FF2B5EF4-FFF2-40B4-BE49-F238E27FC236}">
+                <a16:creationId xmlns:a16="http://schemas.microsoft.com/office/drawing/2014/main" id="{33D98E0E-0549-4F98-AC8E-8EA65DA7D744}"/>
+              </a:ext>
+            </a:extLst>
+          </p:cNvPr>
+          <p:cNvSpPr>
+            <a:spLocks xmlns:a="http://schemas.openxmlformats.org/drawingml/2006/main" noGrp="1"/>
+          </p:cNvSpPr>
+          <p:nvPr/>
+        </p:nvSpPr>
+        <p:spPr>
+          <a:xfrm xmlns:a="http://schemas.openxmlformats.org/drawingml/2006/main">
+            <a:off x="10763250" y="4086225"/>
+            <a:ext cx="342900" cy="247650"/>
+          </a:xfrm>
+          <a:prstGeom xmlns:a="http://schemas.openxmlformats.org/drawingml/2006/main" prst="rect">
+            <a:avLst/>
+          </a:prstGeom>
+          <a:noFill xmlns:a="http://schemas.openxmlformats.org/drawingml/2006/main"/>
+          <a:ln xmlns:a="http://schemas.openxmlformats.org/drawingml/2006/main" w="0">
+            <a:noFill/>
+            <a:prstDash val="solid"/>
+          </a:ln>
+        </p:spPr>
+        <p:txBody>
+          <a:bodyPr xmlns:a="http://schemas.openxmlformats.org/drawingml/2006/main"/>
+          <a:lstStyle xmlns:a="http://schemas.openxmlformats.org/drawingml/2006/main"/>
+          <a:p xmlns:a="http://schemas.openxmlformats.org/drawingml/2006/main">
+            <a:pPr algn="ctr">
+              <a:defRPr sz="1275" b="1">
+                <a:solidFill>
+                  <a:srgbClr val="FFFFFF"/>
+                </a:solidFill>
+              </a:defRPr>
+            </a:pPr>
+            <a:r>
+              <a:rPr sz="1275" b="1">
+                <a:solidFill>
+                  <a:srgbClr val="FFFFFF"/>
+                </a:solidFill>
+              </a:rPr>
+              <a:t>✓</a:t>
+            </a:r>
+          </a:p>
+        </p:txBody>
+      </p:sp>
+      <p:sp>
+        <p:nvSpPr>
+          <p:cNvPr id="37" name="">
+            <a:extLst xmlns:a="http://schemas.openxmlformats.org/drawingml/2006/main">
+              <a:ext uri="{FF2B5EF4-FFF2-40B4-BE49-F238E27FC236}">
+                <a16:creationId xmlns:a16="http://schemas.microsoft.com/office/drawing/2014/main" id="{7580A011-26BF-403A-BD2A-261AC4FF8351}"/>
+              </a:ext>
+            </a:extLst>
+          </p:cNvPr>
+          <p:cNvSpPr>
+            <a:spLocks xmlns:a="http://schemas.openxmlformats.org/drawingml/2006/main" noGrp="1"/>
+          </p:cNvSpPr>
+          <p:nvPr/>
+        </p:nvSpPr>
+        <p:spPr>
+          <a:xfrm xmlns:a="http://schemas.openxmlformats.org/drawingml/2006/main">
+            <a:off x="11239500" y="4048125"/>
+            <a:ext cx="2476500" cy="457200"/>
+          </a:xfrm>
+          <a:prstGeom xmlns:a="http://schemas.openxmlformats.org/drawingml/2006/main" prst="rect">
+            <a:avLst/>
+          </a:prstGeom>
+          <a:noFill xmlns:a="http://schemas.openxmlformats.org/drawingml/2006/main"/>
+          <a:ln xmlns:a="http://schemas.openxmlformats.org/drawingml/2006/main" w="0">
+            <a:noFill/>
+            <a:prstDash val="solid"/>
+          </a:ln>
+        </p:spPr>
+        <p:txBody>
+          <a:bodyPr xmlns:a="http://schemas.openxmlformats.org/drawingml/2006/main"/>
+          <a:lstStyle xmlns:a="http://schemas.openxmlformats.org/drawingml/2006/main"/>
+          <a:p xmlns:a="http://schemas.openxmlformats.org/drawingml/2006/main">
+            <a:pPr algn="l">
+              <a:defRPr sz="1350" b="1">
+                <a:solidFill>
+                  <a:srgbClr val="FFFFFF"/>
+                </a:solidFill>
+              </a:defRPr>
+            </a:pPr>
+            <a:r>
+              <a:rPr sz="1350" b="1">
+                <a:solidFill>
+                  <a:srgbClr val="FFFFFF"/>
+                </a:solidFill>
+              </a:rPr>
+              <a:t>Answer passes</a:t>
+            </a:r>
+          </a:p>
+        </p:txBody>
+      </p:sp>
+      <p:pic>
+        <p:nvPicPr>
+          <p:cNvPr id="64" name=""/>
+          <p:cNvPicPr>
+            <a:picLocks xmlns:a="http://schemas.openxmlformats.org/drawingml/2006/main" noChangeAspect="1"/>
+          </p:cNvPicPr>
+          <p:nvPr/>
+        </p:nvPicPr>
+        <p:blipFill>
+          <a:blip xmlns:r="http://schemas.openxmlformats.org/officeDocument/2006/relationships" xmlns:a="http://schemas.openxmlformats.org/drawingml/2006/main" r:embed="R0d52fa22e71b4a7b">
+            <a:extLst>
+              <a:ext uri="{96DAC541-7B7A-43D3-8B79-37D633B846F1}">
+                <asvg:svgBlip xmlns:asvg="http://schemas.microsoft.com/office/drawing/2016/SVG/main" r:embed="R295be9ca3d7547c8"/>
+              </a:ext>
+            </a:extLst>
+          </a:blip>
+          <a:stretch xmlns:a="http://schemas.openxmlformats.org/drawingml/2006/main"/>
+        </p:blipFill>
+        <p:spPr>
+          <a:xfrm xmlns:a="http://schemas.openxmlformats.org/drawingml/2006/main">
+            <a:off x="10763250" y="4686300"/>
+            <a:ext cx="342900" cy="342900"/>
+          </a:xfrm>
+          <a:prstGeom xmlns:a="http://schemas.openxmlformats.org/drawingml/2006/main" prst="rect">
+            <a:avLst/>
+          </a:prstGeom>
+        </p:spPr>
+      </p:pic>
+      <p:sp>
+        <p:nvSpPr>
+          <p:cNvPr id="39" name="">
+            <a:extLst xmlns:a="http://schemas.openxmlformats.org/drawingml/2006/main">
+              <a:ext uri="{FF2B5EF4-FFF2-40B4-BE49-F238E27FC236}">
+                <a16:creationId xmlns:a16="http://schemas.microsoft.com/office/drawing/2014/main" id="{38ADFBD7-C4F4-40FB-94EE-4EF5C8AAE713}"/>
+              </a:ext>
+            </a:extLst>
+          </p:cNvPr>
+          <p:cNvSpPr>
+            <a:spLocks xmlns:a="http://schemas.openxmlformats.org/drawingml/2006/main" noGrp="1"/>
+          </p:cNvSpPr>
+          <p:nvPr/>
+        </p:nvSpPr>
+        <p:spPr>
+          <a:xfrm xmlns:a="http://schemas.openxmlformats.org/drawingml/2006/main">
+            <a:off x="10763250" y="4714875"/>
+            <a:ext cx="342900" cy="247650"/>
+          </a:xfrm>
+          <a:prstGeom xmlns:a="http://schemas.openxmlformats.org/drawingml/2006/main" prst="rect">
+            <a:avLst/>
+          </a:prstGeom>
+          <a:noFill xmlns:a="http://schemas.openxmlformats.org/drawingml/2006/main"/>
+          <a:ln xmlns:a="http://schemas.openxmlformats.org/drawingml/2006/main" w="0">
+            <a:noFill/>
+            <a:prstDash val="solid"/>
+          </a:ln>
+        </p:spPr>
+        <p:txBody>
+          <a:bodyPr xmlns:a="http://schemas.openxmlformats.org/drawingml/2006/main"/>
+          <a:lstStyle xmlns:a="http://schemas.openxmlformats.org/drawingml/2006/main"/>
+          <a:p xmlns:a="http://schemas.openxmlformats.org/drawingml/2006/main">
+            <a:pPr algn="ctr">
+              <a:defRPr sz="1275" b="1">
+                <a:solidFill>
+                  <a:srgbClr val="FFFFFF"/>
+                </a:solidFill>
+              </a:defRPr>
+            </a:pPr>
+            <a:r>
+              <a:rPr sz="1275" b="1">
+                <a:solidFill>
+                  <a:srgbClr val="FFFFFF"/>
+                </a:solidFill>
+              </a:rPr>
+              <a:t>✓</a:t>
+            </a:r>
+          </a:p>
+        </p:txBody>
+      </p:sp>
+      <p:sp>
+        <p:nvSpPr>
+          <p:cNvPr id="40" name="">
+            <a:extLst xmlns:a="http://schemas.openxmlformats.org/drawingml/2006/main">
+              <a:ext uri="{FF2B5EF4-FFF2-40B4-BE49-F238E27FC236}">
+                <a16:creationId xmlns:a16="http://schemas.microsoft.com/office/drawing/2014/main" id="{C613D285-A6CF-4AB4-BF80-F740873609A7}"/>
+              </a:ext>
+            </a:extLst>
+          </p:cNvPr>
+          <p:cNvSpPr>
+            <a:spLocks xmlns:a="http://schemas.openxmlformats.org/drawingml/2006/main" noGrp="1"/>
+          </p:cNvSpPr>
+          <p:nvPr/>
+        </p:nvSpPr>
+        <p:spPr>
+          <a:xfrm xmlns:a="http://schemas.openxmlformats.org/drawingml/2006/main">
+            <a:off x="11239500" y="4676775"/>
+            <a:ext cx="2476500" cy="457200"/>
+          </a:xfrm>
+          <a:prstGeom xmlns:a="http://schemas.openxmlformats.org/drawingml/2006/main" prst="rect">
+            <a:avLst/>
+          </a:prstGeom>
+          <a:noFill xmlns:a="http://schemas.openxmlformats.org/drawingml/2006/main"/>
+          <a:ln xmlns:a="http://schemas.openxmlformats.org/drawingml/2006/main" w="0">
+            <a:noFill/>
+            <a:prstDash val="solid"/>
+          </a:ln>
+        </p:spPr>
+        <p:txBody>
+          <a:bodyPr xmlns:a="http://schemas.openxmlformats.org/drawingml/2006/main"/>
+          <a:lstStyle xmlns:a="http://schemas.openxmlformats.org/drawingml/2006/main"/>
+          <a:p xmlns:a="http://schemas.openxmlformats.org/drawingml/2006/main">
+            <a:pPr algn="l">
+              <a:defRPr sz="1350" b="1">
+                <a:solidFill>
+                  <a:srgbClr val="FFFFFF"/>
+                </a:solidFill>
+              </a:defRPr>
+            </a:pPr>
+            <a:r>
+              <a:rPr sz="1350" b="1">
+                <a:solidFill>
+                  <a:srgbClr val="FFFFFF"/>
+                </a:solidFill>
+              </a:rPr>
+              <a:t>Citations resolve</a:t>
+            </a:r>
+          </a:p>
+        </p:txBody>
+      </p:sp>
+      <p:pic>
+        <p:nvPicPr>
+          <p:cNvPr id="67" name=""/>
+          <p:cNvPicPr>
+            <a:picLocks xmlns:a="http://schemas.openxmlformats.org/drawingml/2006/main" noChangeAspect="1"/>
+          </p:cNvPicPr>
+          <p:nvPr/>
+        </p:nvPicPr>
+        <p:blipFill>
+          <a:blip xmlns:r="http://schemas.openxmlformats.org/officeDocument/2006/relationships" xmlns:a="http://schemas.openxmlformats.org/drawingml/2006/main" r:embed="R0b34580ffbdb487e">
+            <a:extLst>
+              <a:ext uri="{96DAC541-7B7A-43D3-8B79-37D633B846F1}">
+                <asvg:svgBlip xmlns:asvg="http://schemas.microsoft.com/office/drawing/2016/SVG/main" r:embed="R9b04c7581c4b41dd"/>
+              </a:ext>
+            </a:extLst>
+          </a:blip>
+          <a:stretch xmlns:a="http://schemas.openxmlformats.org/drawingml/2006/main"/>
+        </p:blipFill>
+        <p:spPr>
+          <a:xfrm xmlns:a="http://schemas.openxmlformats.org/drawingml/2006/main">
+            <a:off x="10763250" y="5314950"/>
+            <a:ext cx="342900" cy="342900"/>
+          </a:xfrm>
+          <a:prstGeom xmlns:a="http://schemas.openxmlformats.org/drawingml/2006/main" prst="rect">
+            <a:avLst/>
+          </a:prstGeom>
+        </p:spPr>
+      </p:pic>
+      <p:sp>
+        <p:nvSpPr>
+          <p:cNvPr id="42" name="">
+            <a:extLst xmlns:a="http://schemas.openxmlformats.org/drawingml/2006/main">
+              <a:ext uri="{FF2B5EF4-FFF2-40B4-BE49-F238E27FC236}">
+                <a16:creationId xmlns:a16="http://schemas.microsoft.com/office/drawing/2014/main" id="{F0B7A36E-7DB5-4F66-8FB4-840E0213D9BA}"/>
+              </a:ext>
+            </a:extLst>
+          </p:cNvPr>
+          <p:cNvSpPr>
+            <a:spLocks xmlns:a="http://schemas.openxmlformats.org/drawingml/2006/main" noGrp="1"/>
+          </p:cNvSpPr>
+          <p:nvPr/>
+        </p:nvSpPr>
+        <p:spPr>
+          <a:xfrm xmlns:a="http://schemas.openxmlformats.org/drawingml/2006/main">
+            <a:off x="10763250" y="5343525"/>
+            <a:ext cx="342900" cy="247650"/>
+          </a:xfrm>
+          <a:prstGeom xmlns:a="http://schemas.openxmlformats.org/drawingml/2006/main" prst="rect">
+            <a:avLst/>
+          </a:prstGeom>
+          <a:noFill xmlns:a="http://schemas.openxmlformats.org/drawingml/2006/main"/>
+          <a:ln xmlns:a="http://schemas.openxmlformats.org/drawingml/2006/main" w="0">
+            <a:noFill/>
+            <a:prstDash val="solid"/>
+          </a:ln>
+        </p:spPr>
+        <p:txBody>
+          <a:bodyPr xmlns:a="http://schemas.openxmlformats.org/drawingml/2006/main"/>
+          <a:lstStyle xmlns:a="http://schemas.openxmlformats.org/drawingml/2006/main"/>
+          <a:p xmlns:a="http://schemas.openxmlformats.org/drawingml/2006/main">
+            <a:pPr algn="ctr">
+              <a:defRPr sz="1275" b="1">
+                <a:solidFill>
+                  <a:srgbClr val="FFFFFF"/>
+                </a:solidFill>
+              </a:defRPr>
+            </a:pPr>
+            <a:r>
+              <a:rPr sz="1275" b="1">
+                <a:solidFill>
+                  <a:srgbClr val="FFFFFF"/>
+                </a:solidFill>
+              </a:rPr>
+              <a:t>✓</a:t>
+            </a:r>
+          </a:p>
+        </p:txBody>
+      </p:sp>
+      <p:sp>
+        <p:nvSpPr>
+          <p:cNvPr id="43" name="">
+            <a:extLst xmlns:a="http://schemas.openxmlformats.org/drawingml/2006/main">
+              <a:ext uri="{FF2B5EF4-FFF2-40B4-BE49-F238E27FC236}">
+                <a16:creationId xmlns:a16="http://schemas.microsoft.com/office/drawing/2014/main" id="{486974E2-C994-4D73-9EE4-BE0FB7ACD888}"/>
+              </a:ext>
+            </a:extLst>
+          </p:cNvPr>
+          <p:cNvSpPr>
+            <a:spLocks xmlns:a="http://schemas.openxmlformats.org/drawingml/2006/main" noGrp="1"/>
+          </p:cNvSpPr>
+          <p:nvPr/>
+        </p:nvSpPr>
+        <p:spPr>
+          <a:xfrm xmlns:a="http://schemas.openxmlformats.org/drawingml/2006/main">
+            <a:off x="11239500" y="5305425"/>
+            <a:ext cx="2476500" cy="457200"/>
+          </a:xfrm>
+          <a:prstGeom xmlns:a="http://schemas.openxmlformats.org/drawingml/2006/main" prst="rect">
+            <a:avLst/>
+          </a:prstGeom>
+          <a:noFill xmlns:a="http://schemas.openxmlformats.org/drawingml/2006/main"/>
+          <a:ln xmlns:a="http://schemas.openxmlformats.org/drawingml/2006/main" w="0">
+            <a:noFill/>
+            <a:prstDash val="solid"/>
+          </a:ln>
+        </p:spPr>
+        <p:txBody>
+          <a:bodyPr xmlns:a="http://schemas.openxmlformats.org/drawingml/2006/main"/>
+          <a:lstStyle xmlns:a="http://schemas.openxmlformats.org/drawingml/2006/main"/>
+          <a:p xmlns:a="http://schemas.openxmlformats.org/drawingml/2006/main">
+            <a:pPr algn="l">
+              <a:defRPr sz="1350" b="1">
+                <a:solidFill>
+                  <a:srgbClr val="FFFFFF"/>
+                </a:solidFill>
+              </a:defRPr>
+            </a:pPr>
+            <a:r>
+              <a:rPr sz="1350" b="1">
+                <a:solidFill>
+                  <a:srgbClr val="FFFFFF"/>
+                </a:solidFill>
+              </a:rPr>
+              <a:t>No forbidden stop behavior</a:t>
+            </a:r>
+          </a:p>
+        </p:txBody>
+      </p:sp>
+      <p:pic>
+        <p:nvPicPr>
+          <p:cNvPr id="70" name=""/>
+          <p:cNvPicPr>
+            <a:picLocks xmlns:a="http://schemas.openxmlformats.org/drawingml/2006/main" noChangeAspect="1"/>
+          </p:cNvPicPr>
+          <p:nvPr/>
+        </p:nvPicPr>
+        <p:blipFill>
+          <a:blip xmlns:r="http://schemas.openxmlformats.org/officeDocument/2006/relationships" xmlns:a="http://schemas.openxmlformats.org/drawingml/2006/main" r:embed="Rb871dcaeea844f80">
+            <a:extLst>
+              <a:ext uri="{96DAC541-7B7A-43D3-8B79-37D633B846F1}">
+                <asvg:svgBlip xmlns:asvg="http://schemas.microsoft.com/office/drawing/2016/SVG/main" r:embed="Rc9e5b05384b14a4f"/>
+              </a:ext>
+            </a:extLst>
+          </a:blip>
+          <a:stretch xmlns:a="http://schemas.openxmlformats.org/drawingml/2006/main"/>
+        </p:blipFill>
+        <p:spPr>
+          <a:xfrm xmlns:a="http://schemas.openxmlformats.org/drawingml/2006/main">
+            <a:off x="10763250" y="5810250"/>
+            <a:ext cx="2952750" cy="38100"/>
+          </a:xfrm>
+          <a:prstGeom xmlns:a="http://schemas.openxmlformats.org/drawingml/2006/main" prst="rect">
+            <a:avLst/>
+          </a:prstGeom>
+        </p:spPr>
+      </p:pic>
+      <p:sp>
+        <p:nvSpPr>
+          <p:cNvPr id="45" name="">
+            <a:extLst xmlns:a="http://schemas.openxmlformats.org/drawingml/2006/main">
+              <a:ext uri="{FF2B5EF4-FFF2-40B4-BE49-F238E27FC236}">
+                <a16:creationId xmlns:a16="http://schemas.microsoft.com/office/drawing/2014/main" id="{2BA78383-7712-4353-AEC5-E57525AAE239}"/>
+              </a:ext>
+            </a:extLst>
+          </p:cNvPr>
+          <p:cNvSpPr>
+            <a:spLocks xmlns:a="http://schemas.openxmlformats.org/drawingml/2006/main" noGrp="1"/>
+          </p:cNvSpPr>
+          <p:nvPr/>
+        </p:nvSpPr>
+        <p:spPr>
+          <a:xfrm xmlns:a="http://schemas.openxmlformats.org/drawingml/2006/main">
+            <a:off x="10763250" y="5915025"/>
+            <a:ext cx="2952750" cy="457200"/>
+          </a:xfrm>
+          <a:prstGeom xmlns:a="http://schemas.openxmlformats.org/drawingml/2006/main" prst="rect">
+            <a:avLst/>
+          </a:prstGeom>
+          <a:noFill xmlns:a="http://schemas.openxmlformats.org/drawingml/2006/main"/>
+          <a:ln xmlns:a="http://schemas.openxmlformats.org/drawingml/2006/main" w="0">
+            <a:noFill/>
+            <a:prstDash val="solid"/>
+          </a:ln>
+        </p:spPr>
+        <p:txBody>
+          <a:bodyPr xmlns:a="http://schemas.openxmlformats.org/drawingml/2006/main"/>
+          <a:lstStyle xmlns:a="http://schemas.openxmlformats.org/drawingml/2006/main"/>
+          <a:p xmlns:a="http://schemas.openxmlformats.org/drawingml/2006/main">
+            <a:pPr algn="ctr">
+              <a:defRPr sz="1050" b="1">
+                <a:solidFill>
+                  <a:srgbClr val="FFFFFF"/>
+                </a:solidFill>
+              </a:defRPr>
+            </a:pPr>
+            <a:r>
+              <a:rPr sz="1050" b="1">
+                <a:solidFill>
+                  <a:srgbClr val="FFFFFF"/>
+                </a:solidFill>
+              </a:rPr>
+              <a:t>Any failure blocks release and becomes the next experiment.</a:t>
             </a:r>
           </a:p>
         </p:txBody>
